--- a/presentation/Final_Review_S_K_Sricharan_25MML1010.pptx
+++ b/presentation/Final_Review_S_K_Sricharan_25MML1010.pptx
@@ -11053,7 +11053,7 @@
         </p:nvGraphicFramePr>
         <p:xfrm>
           <a:off x="6583680" y="2148840"/>
-          <a:ext cx="5760720" cy="2011680"/>
+          <a:ext cx="5760720" cy="2240280"/>
         </p:xfrm>
         <a:graphic>
           <a:graphicData uri="http://schemas.openxmlformats.org/drawingml/2006/table">
@@ -11066,7 +11066,7 @@
                 <a:gridCol w="1188720"/>
                 <a:gridCol w="1280160"/>
               </a:tblGrid>
-              <a:tr h="502920">
+              <a:tr h="448056">
                 <a:tc>
                   <a:txBody>
                     <a:bodyPr wrap="square"/>
@@ -11158,7 +11158,7 @@
                   </a:tcPr>
                 </a:tc>
               </a:tr>
-              <a:tr h="502920">
+              <a:tr h="448056">
                 <a:tc>
                   <a:txBody>
                     <a:bodyPr wrap="square"/>
@@ -11250,7 +11250,7 @@
                   </a:tcPr>
                 </a:tc>
               </a:tr>
-              <a:tr h="502920">
+              <a:tr h="448056">
                 <a:tc>
                   <a:txBody>
                     <a:bodyPr wrap="square"/>
@@ -11271,7 +11271,7 @@
                           <a:cs typeface="Times New Roman"/>
                           <a:ea typeface="Times New Roman"/>
                         </a:rPr>
-                        <a:t>Corrected, generated signal timing</a:t>
+                        <a:t>2014 count, generated signal timing</a:t>
                       </a:r>
                     </a:p>
                   </a:txBody>
@@ -11342,7 +11342,7 @@
                   </a:tcPr>
                 </a:tc>
               </a:tr>
-              <a:tr h="502920">
+              <a:tr h="448056">
                 <a:tc>
                   <a:txBody>
                     <a:bodyPr wrap="square"/>
@@ -11363,7 +11363,7 @@
                           <a:cs typeface="Times New Roman"/>
                           <a:ea typeface="Times New Roman"/>
                         </a:rPr>
-                        <a:t>Corrected, Webster re-timed signals</a:t>
+                        <a:t>2014 count, Webster re-timed signals</a:t>
                       </a:r>
                     </a:p>
                   </a:txBody>
@@ -11434,6 +11434,98 @@
                   </a:tcPr>
                 </a:tc>
               </a:tr>
+              <a:tr h="448056">
+                <a:tc>
+                  <a:txBody>
+                    <a:bodyPr wrap="square"/>
+                    <a:lstStyle/>
+                    <a:p>
+                      <a:pPr algn="l" marL="0" indent="0">
+                        <a:spcAft>
+                          <a:spcPts val="0"/>
+                        </a:spcAft>
+                        <a:buNone/>
+                      </a:pPr>
+                      <a:r>
+                        <a:rPr sz="1400" b="0" i="0">
+                          <a:solidFill>
+                            <a:srgbClr val="1A1A1A"/>
+                          </a:solidFill>
+                          <a:latin typeface="Times New Roman"/>
+                          <a:cs typeface="Times New Roman"/>
+                          <a:ea typeface="Times New Roman"/>
+                        </a:rPr>
+                        <a:t>2025 counts, Webster, no turn-lane limits</a:t>
+                      </a:r>
+                    </a:p>
+                  </a:txBody>
+                  <a:tcPr anchor="ctr">
+                    <a:solidFill>
+                      <a:srgbClr val="FFFFFF"/>
+                    </a:solidFill>
+                  </a:tcPr>
+                </a:tc>
+                <a:tc>
+                  <a:txBody>
+                    <a:bodyPr wrap="square"/>
+                    <a:lstStyle/>
+                    <a:p>
+                      <a:pPr algn="ctr" marL="0" indent="0">
+                        <a:spcAft>
+                          <a:spcPts val="0"/>
+                        </a:spcAft>
+                        <a:buNone/>
+                      </a:pPr>
+                      <a:r>
+                        <a:rPr sz="1400" b="0" i="0">
+                          <a:solidFill>
+                            <a:srgbClr val="1A1A1A"/>
+                          </a:solidFill>
+                          <a:latin typeface="Times New Roman"/>
+                          <a:cs typeface="Times New Roman"/>
+                          <a:ea typeface="Times New Roman"/>
+                        </a:rPr>
+                        <a:t>10.1 %</a:t>
+                      </a:r>
+                    </a:p>
+                  </a:txBody>
+                  <a:tcPr anchor="ctr">
+                    <a:solidFill>
+                      <a:srgbClr val="FFFFFF"/>
+                    </a:solidFill>
+                  </a:tcPr>
+                </a:tc>
+                <a:tc>
+                  <a:txBody>
+                    <a:bodyPr wrap="square"/>
+                    <a:lstStyle/>
+                    <a:p>
+                      <a:pPr algn="ctr" marL="0" indent="0">
+                        <a:spcAft>
+                          <a:spcPts val="0"/>
+                        </a:spcAft>
+                        <a:buNone/>
+                      </a:pPr>
+                      <a:r>
+                        <a:rPr sz="1400" b="1" i="0">
+                          <a:solidFill>
+                            <a:srgbClr val="B02A22"/>
+                          </a:solidFill>
+                          <a:latin typeface="Times New Roman"/>
+                          <a:cs typeface="Times New Roman"/>
+                          <a:ea typeface="Times New Roman"/>
+                        </a:rPr>
+                        <a:t>Fails test</a:t>
+                      </a:r>
+                    </a:p>
+                  </a:txBody>
+                  <a:tcPr anchor="ctr">
+                    <a:solidFill>
+                      <a:srgbClr val="FFFFFF"/>
+                    </a:solidFill>
+                  </a:tcPr>
+                </a:tc>
+              </a:tr>
             </a:tbl>
           </a:graphicData>
         </a:graphic>
@@ -11446,8 +11538,8 @@
         </p:nvSpPr>
         <p:spPr>
           <a:xfrm>
-            <a:off x="6583680" y="4297680"/>
-            <a:ext cx="5760720" cy="2377440"/>
+            <a:off x="6583680" y="4480560"/>
+            <a:ext cx="5760720" cy="2240280"/>
           </a:xfrm>
           <a:prstGeom prst="rect">
             <a:avLst/>
@@ -11460,7 +11552,7 @@
           <a:p>
             <a:pPr algn="l" marL="0" indent="0">
               <a:spcAft>
-                <a:spcPts val="600"/>
+                <a:spcPts val="500"/>
               </a:spcAft>
               <a:buNone/>
             </a:pPr>
@@ -11473,18 +11565,18 @@
                 <a:cs typeface="Times New Roman"/>
                 <a:ea typeface="Times New Roman"/>
               </a:rPr>
-              <a:t>* Share of vehicles not finishing with no side-street traffic; the preregistered test allows at most 1 % and no stuck vehicles.</a:t>
+              <a:t>* Vehicles not finishing with no side-street traffic; the preregistered test allows at most 1 % and no stuck vehicles.</a:t>
             </a:r>
           </a:p>
           <a:p>
             <a:pPr algn="l" marL="0" indent="0">
               <a:spcAft>
-                <a:spcPts val="600"/>
-              </a:spcAft>
-              <a:buNone/>
-            </a:pPr>
-            <a:r>
-              <a:rPr sz="1400" b="0" i="0">
+                <a:spcPts val="500"/>
+              </a:spcAft>
+              <a:buNone/>
+            </a:pPr>
+            <a:r>
+              <a:rPr sz="1300" b="0" i="0">
                 <a:solidFill>
                   <a:srgbClr val="1A1A1A"/>
                 </a:solidFill>
@@ -11498,12 +11590,12 @@
           <a:p>
             <a:pPr algn="l" marL="0" indent="0">
               <a:spcAft>
-                <a:spcPts val="600"/>
-              </a:spcAft>
-              <a:buNone/>
-            </a:pPr>
-            <a:r>
-              <a:rPr sz="1400" b="0" i="0">
+                <a:spcPts val="500"/>
+              </a:spcAft>
+              <a:buNone/>
+            </a:pPr>
+            <a:r>
+              <a:rPr sz="1300" b="0" i="0">
                 <a:solidFill>
                   <a:srgbClr val="1A1A1A"/>
                 </a:solidFill>
@@ -11511,18 +11603,18 @@
                 <a:cs typeface="Times New Roman"/>
                 <a:ea typeface="Times New Roman"/>
               </a:rPr>
-              <a:t>After re-timing, northbound traffic flows (all 1,389 trips finish), but southbound vehicles still lose about 17 minutes each; the cause is not yet identified.</a:t>
+              <a:t>With real 2025 counts (2,510 NB / 2,444 SB veh/h) the modelled link runs at 5.8 mph; the real street runs at 10.95 mph in the PM peak.</a:t>
             </a:r>
           </a:p>
           <a:p>
             <a:pPr algn="l" marL="0" indent="0">
               <a:spcAft>
-                <a:spcPts val="600"/>
-              </a:spcAft>
-              <a:buNone/>
-            </a:pPr>
-            <a:r>
-              <a:rPr sz="1400" b="1" i="0">
+                <a:spcPts val="500"/>
+              </a:spcAft>
+              <a:buNone/>
+            </a:pPr>
+            <a:r>
+              <a:rPr sz="1300" b="1" i="0">
                 <a:solidFill>
                   <a:srgbClr val="1A1A1A"/>
                 </a:solidFill>
@@ -11530,7 +11622,7 @@
                 <a:cs typeface="Times New Roman"/>
                 <a:ea typeface="Times New Roman"/>
               </a:rPr>
-              <a:t>The test was not relaxed, so the controller comparison is reported as not run.</a:t>
+              <a:t>The test was not relaxed: the comparison is reported as not run, and 10.95 mph is now the calibration target.</a:t>
             </a:r>
           </a:p>
         </p:txBody>
@@ -13754,7 +13846,7 @@
                 <a:cs typeface="Arial"/>
                 <a:ea typeface="Arial"/>
               </a:rPr>
-              <a:t>Bars: planned window (project specification). Colour: actual status, 19–21 Oct 2026 (repository history). Next milestones: reviewed West St signal timing plans → controller comparison; multi-seed training; paper submission.</a:t>
+              <a:t>Bars: planned window (project specification). Colour: actual status, 19–21 Oct 2026 (repository history). Next milestones: calibrate West St signal timing to the observed 10.95 mph (or obtain DOT timing plans) → controller comparison; multi-seed training; paper submission.</a:t>
             </a:r>
           </a:p>
         </p:txBody>

--- a/presentation/Final_Review_S_K_Sricharan_25MML1010.pptx
+++ b/presentation/Final_Review_S_K_Sricharan_25MML1010.pptx
@@ -7375,7 +7375,7 @@
                 <a:cs typeface="Times New Roman"/>
                 <a:ea typeface="Times New Roman"/>
               </a:rPr>
-              <a:t>66 automated tests: unit, leakage, safety, integration, end-to-end</a:t>
+              <a:t>73 automated tests: unit, leakage, safety, integration, end-to-end</a:t>
             </a:r>
           </a:p>
         </p:txBody>
@@ -19692,7 +19692,7 @@
                 <a:cs typeface="Arial"/>
                 <a:ea typeface="Arial"/>
               </a:rPr>
-              <a:t>66</a:t>
+              <a:t>73</a:t>
             </a:r>
           </a:p>
           <a:p>
@@ -19711,7 +19711,7 @@
                 <a:cs typeface="Arial"/>
                 <a:ea typeface="Arial"/>
               </a:rPr>
-              <a:t>automated tests passing</a:t>
+              <a:t>automated tests (all suites)</a:t>
             </a:r>
           </a:p>
         </p:txBody>

--- a/presentation/Final_Review_S_K_Sricharan_25MML1010.pptx
+++ b/presentation/Final_Review_S_K_Sricharan_25MML1010.pptx
@@ -10463,7 +10463,7 @@
                 <a:cs typeface="Times New Roman"/>
                 <a:ea typeface="Times New Roman"/>
               </a:rPr>
-              <a:t>The proposed model beats persistence by 7–16 % and both tree models, but stays within 0.01–0.05 mph of the GRU and temporal Transformer with one seed, so no superiority is claimed.</a:t>
+              <a:t>The proposed model beats persistence by 7–16 % and both tree models, but stays within 0.01–0.06 mph of the GRU and temporal Transformer with one seed, so no superiority is claimed.</a:t>
             </a:r>
           </a:p>
           <a:p>

--- a/presentation/Final_Review_S_K_Sricharan_25MML1010.pptx
+++ b/presentation/Final_Review_S_K_Sricharan_25MML1010.pptx
@@ -9591,7 +9591,7 @@
                 <a:gridCol w="914400"/>
                 <a:gridCol w="914400"/>
               </a:tblGrid>
-              <a:tr h="502920">
+              <a:tr h="431074">
                 <a:tc>
                   <a:txBody>
                     <a:bodyPr wrap="square"/>
@@ -9713,7 +9713,7 @@
                   </a:tcPr>
                 </a:tc>
               </a:tr>
-              <a:tr h="502920">
+              <a:tr h="431074">
                 <a:tc>
                   <a:txBody>
                     <a:bodyPr wrap="square"/>
@@ -9835,7 +9835,7 @@
                   </a:tcPr>
                 </a:tc>
               </a:tr>
-              <a:tr h="502920">
+              <a:tr h="431074">
                 <a:tc>
                   <a:txBody>
                     <a:bodyPr wrap="square"/>
@@ -9856,7 +9856,7 @@
                           <a:cs typeface="Times New Roman"/>
                           <a:ea typeface="Times New Roman"/>
                         </a:rPr>
-                        <a:t>Persistence MAE (mph)</a:t>
+                        <a:t>Proposed, mean of 3 seeds (mph)</a:t>
                       </a:r>
                     </a:p>
                   </a:txBody>
@@ -9886,7 +9886,7 @@
                           <a:cs typeface="Times New Roman"/>
                           <a:ea typeface="Times New Roman"/>
                         </a:rPr>
-                        <a:t>5.14</a:t>
+                        <a:t>4.69</a:t>
                       </a:r>
                     </a:p>
                   </a:txBody>
@@ -9916,7 +9916,7 @@
                           <a:cs typeface="Times New Roman"/>
                           <a:ea typeface="Times New Roman"/>
                         </a:rPr>
-                        <a:t>6.06</a:t>
+                        <a:t>5.34</a:t>
                       </a:r>
                     </a:p>
                   </a:txBody>
@@ -9946,7 +9946,7 @@
                           <a:cs typeface="Times New Roman"/>
                           <a:ea typeface="Times New Roman"/>
                         </a:rPr>
-                        <a:t>7.29</a:t>
+                        <a:t>6.15</a:t>
                       </a:r>
                     </a:p>
                   </a:txBody>
@@ -9957,7 +9957,7 @@
                   </a:tcPr>
                 </a:tc>
               </a:tr>
-              <a:tr h="502920">
+              <a:tr h="431074">
                 <a:tc>
                   <a:txBody>
                     <a:bodyPr wrap="square"/>
@@ -9978,7 +9978,7 @@
                           <a:cs typeface="Times New Roman"/>
                           <a:ea typeface="Times New Roman"/>
                         </a:rPr>
-                        <a:t>90 % interval coverage</a:t>
+                        <a:t>Persistence MAE (mph)</a:t>
                       </a:r>
                     </a:p>
                   </a:txBody>
@@ -10008,7 +10008,7 @@
                           <a:cs typeface="Times New Roman"/>
                           <a:ea typeface="Times New Roman"/>
                         </a:rPr>
-                        <a:t>0.909</a:t>
+                        <a:t>5.14</a:t>
                       </a:r>
                     </a:p>
                   </a:txBody>
@@ -10038,7 +10038,7 @@
                           <a:cs typeface="Times New Roman"/>
                           <a:ea typeface="Times New Roman"/>
                         </a:rPr>
-                        <a:t>0.907</a:t>
+                        <a:t>6.06</a:t>
                       </a:r>
                     </a:p>
                   </a:txBody>
@@ -10068,7 +10068,7 @@
                           <a:cs typeface="Times New Roman"/>
                           <a:ea typeface="Times New Roman"/>
                         </a:rPr>
-                        <a:t>0.903</a:t>
+                        <a:t>7.29</a:t>
                       </a:r>
                     </a:p>
                   </a:txBody>
@@ -10079,7 +10079,7 @@
                   </a:tcPr>
                 </a:tc>
               </a:tr>
-              <a:tr h="502920">
+              <a:tr h="431074">
                 <a:tc>
                   <a:txBody>
                     <a:bodyPr wrap="square"/>
@@ -10100,7 +10100,7 @@
                           <a:cs typeface="Times New Roman"/>
                           <a:ea typeface="Times New Roman"/>
                         </a:rPr>
-                        <a:t>Coverage under congestion</a:t>
+                        <a:t>90 % interval coverage</a:t>
                       </a:r>
                     </a:p>
                   </a:txBody>
@@ -10130,7 +10130,7 @@
                           <a:cs typeface="Times New Roman"/>
                           <a:ea typeface="Times New Roman"/>
                         </a:rPr>
-                        <a:t>0.798</a:t>
+                        <a:t>0.909</a:t>
                       </a:r>
                     </a:p>
                   </a:txBody>
@@ -10160,7 +10160,7 @@
                           <a:cs typeface="Times New Roman"/>
                           <a:ea typeface="Times New Roman"/>
                         </a:rPr>
-                        <a:t>0.794</a:t>
+                        <a:t>0.907</a:t>
                       </a:r>
                     </a:p>
                   </a:txBody>
@@ -10190,7 +10190,7 @@
                           <a:cs typeface="Times New Roman"/>
                           <a:ea typeface="Times New Roman"/>
                         </a:rPr>
-                        <a:t>0.757</a:t>
+                        <a:t>0.903</a:t>
                       </a:r>
                     </a:p>
                   </a:txBody>
@@ -10201,7 +10201,7 @@
                   </a:tcPr>
                 </a:tc>
               </a:tr>
-              <a:tr h="502920">
+              <a:tr h="431074">
                 <a:tc>
                   <a:txBody>
                     <a:bodyPr wrap="square"/>
@@ -10222,7 +10222,7 @@
                           <a:cs typeface="Times New Roman"/>
                           <a:ea typeface="Times New Roman"/>
                         </a:rPr>
-                        <a:t>MAE kept after gate (≈26 % deferred)</a:t>
+                        <a:t>Coverage under congestion</a:t>
                       </a:r>
                     </a:p>
                   </a:txBody>
@@ -10252,7 +10252,7 @@
                           <a:cs typeface="Times New Roman"/>
                           <a:ea typeface="Times New Roman"/>
                         </a:rPr>
-                        <a:t>3.72</a:t>
+                        <a:t>0.798</a:t>
                       </a:r>
                     </a:p>
                   </a:txBody>
@@ -10282,7 +10282,7 @@
                           <a:cs typeface="Times New Roman"/>
                           <a:ea typeface="Times New Roman"/>
                         </a:rPr>
-                        <a:t>4.38</a:t>
+                        <a:t>0.794</a:t>
                       </a:r>
                     </a:p>
                   </a:txBody>
@@ -10312,13 +10312,135 @@
                           <a:cs typeface="Times New Roman"/>
                           <a:ea typeface="Times New Roman"/>
                         </a:rPr>
+                        <a:t>0.757</a:t>
+                      </a:r>
+                    </a:p>
+                  </a:txBody>
+                  <a:tcPr anchor="ctr">
+                    <a:solidFill>
+                      <a:srgbClr val="E4ECF7"/>
+                    </a:solidFill>
+                  </a:tcPr>
+                </a:tc>
+              </a:tr>
+              <a:tr h="431076">
+                <a:tc>
+                  <a:txBody>
+                    <a:bodyPr wrap="square"/>
+                    <a:lstStyle/>
+                    <a:p>
+                      <a:pPr algn="l" marL="0" indent="0">
+                        <a:spcAft>
+                          <a:spcPts val="0"/>
+                        </a:spcAft>
+                        <a:buNone/>
+                      </a:pPr>
+                      <a:r>
+                        <a:rPr sz="1500" b="0" i="0">
+                          <a:solidFill>
+                            <a:srgbClr val="1A1A1A"/>
+                          </a:solidFill>
+                          <a:latin typeface="Times New Roman"/>
+                          <a:cs typeface="Times New Roman"/>
+                          <a:ea typeface="Times New Roman"/>
+                        </a:rPr>
+                        <a:t>MAE kept after gate (≈26 % deferred)</a:t>
+                      </a:r>
+                    </a:p>
+                  </a:txBody>
+                  <a:tcPr anchor="ctr">
+                    <a:solidFill>
+                      <a:srgbClr val="FFFFFF"/>
+                    </a:solidFill>
+                  </a:tcPr>
+                </a:tc>
+                <a:tc>
+                  <a:txBody>
+                    <a:bodyPr wrap="square"/>
+                    <a:lstStyle/>
+                    <a:p>
+                      <a:pPr algn="r" marL="0" indent="0">
+                        <a:spcAft>
+                          <a:spcPts val="0"/>
+                        </a:spcAft>
+                        <a:buNone/>
+                      </a:pPr>
+                      <a:r>
+                        <a:rPr sz="1500" b="0" i="0">
+                          <a:solidFill>
+                            <a:srgbClr val="1A1A1A"/>
+                          </a:solidFill>
+                          <a:latin typeface="Times New Roman"/>
+                          <a:cs typeface="Times New Roman"/>
+                          <a:ea typeface="Times New Roman"/>
+                        </a:rPr>
+                        <a:t>3.72</a:t>
+                      </a:r>
+                    </a:p>
+                  </a:txBody>
+                  <a:tcPr anchor="ctr">
+                    <a:solidFill>
+                      <a:srgbClr val="FFFFFF"/>
+                    </a:solidFill>
+                  </a:tcPr>
+                </a:tc>
+                <a:tc>
+                  <a:txBody>
+                    <a:bodyPr wrap="square"/>
+                    <a:lstStyle/>
+                    <a:p>
+                      <a:pPr algn="r" marL="0" indent="0">
+                        <a:spcAft>
+                          <a:spcPts val="0"/>
+                        </a:spcAft>
+                        <a:buNone/>
+                      </a:pPr>
+                      <a:r>
+                        <a:rPr sz="1500" b="0" i="0">
+                          <a:solidFill>
+                            <a:srgbClr val="1A1A1A"/>
+                          </a:solidFill>
+                          <a:latin typeface="Times New Roman"/>
+                          <a:cs typeface="Times New Roman"/>
+                          <a:ea typeface="Times New Roman"/>
+                        </a:rPr>
+                        <a:t>4.38</a:t>
+                      </a:r>
+                    </a:p>
+                  </a:txBody>
+                  <a:tcPr anchor="ctr">
+                    <a:solidFill>
+                      <a:srgbClr val="FFFFFF"/>
+                    </a:solidFill>
+                  </a:tcPr>
+                </a:tc>
+                <a:tc>
+                  <a:txBody>
+                    <a:bodyPr wrap="square"/>
+                    <a:lstStyle/>
+                    <a:p>
+                      <a:pPr algn="r" marL="0" indent="0">
+                        <a:spcAft>
+                          <a:spcPts val="0"/>
+                        </a:spcAft>
+                        <a:buNone/>
+                      </a:pPr>
+                      <a:r>
+                        <a:rPr sz="1500" b="0" i="0">
+                          <a:solidFill>
+                            <a:srgbClr val="1A1A1A"/>
+                          </a:solidFill>
+                          <a:latin typeface="Times New Roman"/>
+                          <a:cs typeface="Times New Roman"/>
+                          <a:ea typeface="Times New Roman"/>
+                        </a:rPr>
                         <a:t>5.25</a:t>
                       </a:r>
                     </a:p>
                   </a:txBody>
                   <a:tcPr anchor="ctr">
                     <a:solidFill>
-                      <a:srgbClr val="E4ECF7"/>
+                      <a:srgbClr val="FFFFFF"/>
                     </a:solidFill>
                   </a:tcPr>
                 </a:tc>
@@ -10463,7 +10585,7 @@
                 <a:cs typeface="Times New Roman"/>
                 <a:ea typeface="Times New Roman"/>
               </a:rPr>
-              <a:t>The proposed model beats persistence by 7–16 % and both tree models, but stays within 0.01–0.05 mph of the GRU and temporal Transformer with one seed, so no superiority is claimed.</a:t>
+              <a:t>The proposed model beats persistence by 7–16 % and both tree models. Over three seeds it is 0.03–0.08 mph below the temporal Transformer at every horizon and the GRU at 30/60 min; the GRU is better at 15 min. Small, not decisive.</a:t>
             </a:r>
           </a:p>
           <a:p>
@@ -13846,7 +13968,7 @@
                 <a:cs typeface="Arial"/>
                 <a:ea typeface="Arial"/>
               </a:rPr>
-              <a:t>Bars: planned window (project specification). Colour: actual status, 19–21 Oct 2026 (repository history). Next milestones: calibrate West St signal timing to the observed 10.95 mph (or obtain DOT timing plans) → controller comparison; multi-seed training; paper submission.</a:t>
+              <a:t>Bars: planned window (project specification). Colour: actual status, 19–21 Oct 2026 (repository history). Next milestones: calibrate West St signal timing to the observed 10.95 mph (or obtain DOT timing plans) → controller comparison; more seeds without the compute budget; paper submission.</a:t>
             </a:r>
           </a:p>
         </p:txBody>

--- a/presentation/Final_Review_S_K_Sricharan_25MML1010.pptx
+++ b/presentation/Final_Review_S_K_Sricharan_25MML1010.pptx
@@ -24,7 +24,12 @@
     <p:sldId id="332" r:id="rId14"/>
     <p:sldId id="331" r:id="rId15"/>
     <p:sldId id="337" r:id="rId24"/>
+    <p:sldId id="339" r:id="rId26"/>
+    <p:sldId id="340" r:id="rId27"/>
+    <p:sldId id="341" r:id="rId28"/>
+    <p:sldId id="342" r:id="rId29"/>
     <p:sldId id="327" r:id="rId16"/>
+    <p:sldId id="343" r:id="rId30"/>
     <p:sldId id="338" r:id="rId25"/>
     <p:sldId id="321" r:id="rId17"/>
   </p:sldIdLst>
@@ -4462,7 +4467,7 @@
           <a:p>
             <a:fld id="{C02A2637-A5A3-49FA-B214-6E67543099EF}" type="slidenum">
               <a:rPr lang="en-US" smtClean="0"/>
-              <a:t>9</a:t>
+              <a:t>10</a:t>
             </a:fld>
             <a:endParaRPr lang="en-US"/>
           </a:p>
@@ -5525,7 +5530,7 @@
           <a:p>
             <a:fld id="{C02A2637-A5A3-49FA-B214-6E67543099EF}" type="slidenum">
               <a:rPr lang="en-US" smtClean="0"/>
-              <a:t>10</a:t>
+              <a:t>11</a:t>
             </a:fld>
             <a:endParaRPr lang="en-US"/>
           </a:p>
@@ -7117,7 +7122,7 @@
           <a:p>
             <a:fld id="{C02A2637-A5A3-49FA-B214-6E67543099EF}" type="slidenum">
               <a:rPr lang="en-US" smtClean="0"/>
-              <a:t>11</a:t>
+              <a:t>12</a:t>
             </a:fld>
             <a:endParaRPr lang="en-US"/>
           </a:p>
@@ -8092,7 +8097,7 @@
           <a:p>
             <a:fld id="{C02A2637-A5A3-49FA-B214-6E67543099EF}" type="slidenum">
               <a:rPr lang="en-US" smtClean="0"/>
-              <a:t>12</a:t>
+              <a:t>13</a:t>
             </a:fld>
             <a:endParaRPr lang="en-US"/>
           </a:p>
@@ -9521,7 +9526,7 @@
           <a:p>
             <a:fld id="{C02A2637-A5A3-49FA-B214-6E67543099EF}" type="slidenum">
               <a:rPr lang="en-US" smtClean="0"/>
-              <a:t>13</a:t>
+              <a:t>14</a:t>
             </a:fld>
             <a:endParaRPr lang="en-US"/>
           </a:p>
@@ -10773,7 +10778,7 @@
           <a:p>
             <a:fld id="{C02A2637-A5A3-49FA-B214-6E67543099EF}" type="slidenum">
               <a:rPr lang="en-US" smtClean="0"/>
-              <a:t>14</a:t>
+              <a:t>15</a:t>
             </a:fld>
             <a:endParaRPr lang="en-US"/>
           </a:p>
@@ -11061,7 +11066,7 @@
           <a:p>
             <a:fld id="{C02A2637-A5A3-49FA-B214-6E67543099EF}" type="slidenum">
               <a:rPr lang="en-US" smtClean="0"/>
-              <a:t>14</a:t>
+              <a:t>16</a:t>
             </a:fld>
             <a:endParaRPr lang="en-US"/>
           </a:p>
@@ -11767,7 +11772,13 @@
   <p:cSld>
     <p:spTree>
       <p:nvGrpSpPr>
-        <p:cNvPr id="1" name=""/>
+        <p:cNvPr id="1" name="">
+          <a:extLst>
+            <a:ext uri="{FF2B5EF4-FFF2-40B4-BE49-F238E27FC236}">
+              <a16:creationId xmlns:a16="http://schemas.microsoft.com/office/drawing/2014/main" id="{D0E88BB3-2A5B-34AC-B39B-BAE5C65E68D6}"/>
+            </a:ext>
+          </a:extLst>
+        </p:cNvPr>
         <p:cNvGrpSpPr/>
         <p:nvPr/>
       </p:nvGrpSpPr>
@@ -11781,7 +11792,13 @@
       </p:grpSpPr>
       <p:sp>
         <p:nvSpPr>
-          <p:cNvPr id="2" name="Title 1"/>
+          <p:cNvPr id="2" name="Title 1">
+            <a:extLst>
+              <a:ext uri="{FF2B5EF4-FFF2-40B4-BE49-F238E27FC236}">
+                <a16:creationId xmlns:a16="http://schemas.microsoft.com/office/drawing/2014/main" id="{4BD448EB-8A1A-C9A3-3C48-4830472042E6}"/>
+              </a:ext>
+            </a:extLst>
+          </p:cNvPr>
           <p:cNvSpPr>
             <a:spLocks noGrp="1"/>
           </p:cNvSpPr>
@@ -11812,14 +11829,20 @@
                 <a:latin typeface="Arial" panose="020B0604020202020204" pitchFamily="34" charset="0"/>
                 <a:cs typeface="Arial" panose="020B0604020202020204" pitchFamily="34" charset="0"/>
               </a:rPr>
-              <a:t>9. TIMELINE / GANTT CHART</a:t>
-            </a:r>
-          </a:p>
-        </p:txBody>
-      </p:sp>
-      <p:sp>
-        <p:nvSpPr>
-          <p:cNvPr id="4" name="Slide Number Placeholder 3"/>
+              <a:t>8. OUTCOME: WORKING DASHBOARD (1/4)</a:t>
+            </a:r>
+          </a:p>
+        </p:txBody>
+      </p:sp>
+      <p:sp>
+        <p:nvSpPr>
+          <p:cNvPr id="4" name="Slide Number Placeholder 3">
+            <a:extLst>
+              <a:ext uri="{FF2B5EF4-FFF2-40B4-BE49-F238E27FC236}">
+                <a16:creationId xmlns:a16="http://schemas.microsoft.com/office/drawing/2014/main" id="{3C63C818-3FBA-7FB8-3369-BCE4AC4BD8EF}"/>
+              </a:ext>
+            </a:extLst>
+          </p:cNvPr>
           <p:cNvSpPr>
             <a:spLocks noGrp="1"/>
           </p:cNvSpPr>
@@ -11834,7 +11857,7 @@
           <a:p>
             <a:fld id="{C02A2637-A5A3-49FA-B214-6E67543099EF}" type="slidenum">
               <a:rPr lang="en-US" smtClean="0"/>
-              <a:t>15</a:t>
+              <a:t>17</a:t>
             </a:fld>
             <a:endParaRPr lang="en-US"/>
           </a:p>
@@ -11848,8 +11871,8 @@
         </p:nvSpPr>
         <p:spPr>
           <a:xfrm>
-            <a:off x="457200" y="1691640"/>
-            <a:ext cx="3840480" cy="320040"/>
+            <a:off x="502920" y="1600200"/>
+            <a:ext cx="5715000" cy="329184"/>
           </a:xfrm>
           <a:prstGeom prst="rect">
             <a:avLst/>
@@ -11857,7 +11880,7 @@
           <a:noFill/>
         </p:spPr>
         <p:txBody>
-          <a:bodyPr wrap="square" lIns="18288" rIns="18288" tIns="18288" bIns="18288" anchor="t"/>
+          <a:bodyPr wrap="square" lIns="18288" rIns="18288" tIns="18288" bIns="18288" anchor="b"/>
           <a:lstStyle/>
           <a:p>
             <a:pPr algn="l" marL="0" indent="0">
@@ -11867,7 +11890,7 @@
               <a:buNone/>
             </a:pPr>
             <a:r>
-              <a:rPr sz="1200" b="1" i="0">
+              <a:rPr sz="1400" b="1" i="0">
                 <a:solidFill>
                   <a:srgbClr val="1F497D"/>
                 </a:solidFill>
@@ -11875,21 +11898,61 @@
                 <a:cs typeface="Arial"/>
                 <a:ea typeface="Arial"/>
               </a:rPr>
-              <a:t>Phase (planned hours in the 24-hour plan)</a:t>
-            </a:r>
-          </a:p>
-        </p:txBody>
-      </p:sp>
-      <p:sp>
-        <p:nvSpPr>
-          <p:cNvPr id="6" name="TextBox 5"/>
+              <a:t>Overview &amp; status</a:t>
+            </a:r>
+            <a:r>
+              <a:rPr sz="1200" b="0" i="0">
+                <a:solidFill>
+                  <a:srgbClr val="555F6B"/>
+                </a:solidFill>
+                <a:latin typeface="Arial"/>
+                <a:cs typeface="Arial"/>
+                <a:ea typeface="Arial"/>
+              </a:rPr>
+              <a:t>   (status page, no mode label)</a:t>
+            </a:r>
+          </a:p>
+        </p:txBody>
+      </p:sp>
+      <p:pic>
+        <p:nvPicPr>
+          <p:cNvPr id="6" name="Dashboard: Overview &amp; status" descr="overview.png"/>
+          <p:cNvPicPr>
+            <a:picLocks noChangeAspect="1"/>
+          </p:cNvPicPr>
+          <p:nvPr/>
+        </p:nvPicPr>
+        <p:blipFill>
+          <a:blip r:embed="rId2"/>
+          <a:stretch>
+            <a:fillRect/>
+          </a:stretch>
+        </p:blipFill>
+        <p:spPr>
+          <a:xfrm>
+            <a:off x="502920" y="1984248"/>
+            <a:ext cx="5715000" cy="4366516"/>
+          </a:xfrm>
+          <a:prstGeom prst="rect">
+            <a:avLst/>
+          </a:prstGeom>
+          <a:ln w="12700">
+            <a:solidFill>
+              <a:srgbClr val="C9D3E0"/>
+            </a:solidFill>
+          </a:ln>
+        </p:spPr>
+      </p:pic>
+      <p:sp>
+        <p:nvSpPr>
+          <p:cNvPr id="7" name="TextBox 6"/>
           <p:cNvSpPr txBox="1"/>
           <p:nvPr/>
         </p:nvSpPr>
         <p:spPr>
           <a:xfrm>
-            <a:off x="10927080" y="1691640"/>
-            <a:ext cx="1463040" cy="320040"/>
+            <a:off x="6583680" y="1600200"/>
+            <a:ext cx="5715000" cy="329184"/>
           </a:xfrm>
           <a:prstGeom prst="rect">
             <a:avLst/>
@@ -11897,7 +11960,7 @@
           <a:noFill/>
         </p:spPr>
         <p:txBody>
-          <a:bodyPr wrap="square" lIns="18288" rIns="18288" tIns="18288" bIns="18288" anchor="t"/>
+          <a:bodyPr wrap="square" lIns="18288" rIns="18288" tIns="18288" bIns="18288" anchor="b"/>
           <a:lstStyle/>
           <a:p>
             <a:pPr algn="l" marL="0" indent="0">
@@ -11907,7 +11970,7 @@
               <a:buNone/>
             </a:pPr>
             <a:r>
-              <a:rPr sz="1200" b="1" i="0">
+              <a:rPr sz="1400" b="1" i="0">
                 <a:solidFill>
                   <a:srgbClr val="1F497D"/>
                 </a:solidFill>
@@ -11915,21 +11978,72 @@
                 <a:cs typeface="Arial"/>
                 <a:ea typeface="Arial"/>
               </a:rPr>
-              <a:t>Status</a:t>
-            </a:r>
-          </a:p>
-        </p:txBody>
-      </p:sp>
-      <p:sp>
-        <p:nvSpPr>
-          <p:cNvPr id="7" name="TextBox 6"/>
+              <a:t>Data audit &amp; provenance</a:t>
+            </a:r>
+            <a:r>
+              <a:rPr sz="1200" b="0" i="0">
+                <a:solidFill>
+                  <a:srgbClr val="555F6B"/>
+                </a:solidFill>
+                <a:latin typeface="Arial"/>
+                <a:cs typeface="Arial"/>
+                <a:ea typeface="Arial"/>
+              </a:rPr>
+              <a:t>   Mode shown: </a:t>
+            </a:r>
+            <a:r>
+              <a:rPr sz="1200" b="1" i="0">
+                <a:solidFill>
+                  <a:srgbClr val="C25E00"/>
+                </a:solidFill>
+                <a:latin typeface="Arial"/>
+                <a:cs typeface="Arial"/>
+                <a:ea typeface="Arial"/>
+              </a:rPr>
+              <a:t>REPLAY</a:t>
+            </a:r>
+          </a:p>
+        </p:txBody>
+      </p:sp>
+      <p:pic>
+        <p:nvPicPr>
+          <p:cNvPr id="8" name="Dashboard: Data audit &amp; provenance" descr="data_audit.png"/>
+          <p:cNvPicPr>
+            <a:picLocks noChangeAspect="1"/>
+          </p:cNvPicPr>
+          <p:nvPr/>
+        </p:nvPicPr>
+        <p:blipFill>
+          <a:blip r:embed="rId3"/>
+          <a:stretch>
+            <a:fillRect/>
+          </a:stretch>
+        </p:blipFill>
+        <p:spPr>
+          <a:xfrm>
+            <a:off x="6583680" y="1984248"/>
+            <a:ext cx="5715000" cy="4366516"/>
+          </a:xfrm>
+          <a:prstGeom prst="rect">
+            <a:avLst/>
+          </a:prstGeom>
+          <a:ln w="12700">
+            <a:solidFill>
+              <a:srgbClr val="C9D3E0"/>
+            </a:solidFill>
+          </a:ln>
+        </p:spPr>
+      </p:pic>
+      <p:sp>
+        <p:nvSpPr>
+          <p:cNvPr id="9" name="TextBox 8"/>
           <p:cNvSpPr txBox="1"/>
           <p:nvPr/>
         </p:nvSpPr>
         <p:spPr>
           <a:xfrm>
-            <a:off x="4114800" y="1691640"/>
-            <a:ext cx="457200" cy="320040"/>
+            <a:off x="502920" y="6423916"/>
+            <a:ext cx="11795760" cy="457200"/>
           </a:xfrm>
           <a:prstGeom prst="rect">
             <a:avLst/>
@@ -11937,2038 +12051,25 @@
           <a:noFill/>
         </p:spPr>
         <p:txBody>
-          <a:bodyPr wrap="square" lIns="0" rIns="0" tIns="0" bIns="0" anchor="t"/>
+          <a:bodyPr wrap="square" lIns="18288" rIns="18288" tIns="18288" bIns="18288" anchor="t"/>
           <a:lstStyle/>
           <a:p>
-            <a:pPr algn="ctr" marL="0" indent="0">
+            <a:pPr algn="l" marL="0" indent="0">
               <a:spcAft>
                 <a:spcPts val="0"/>
               </a:spcAft>
               <a:buNone/>
             </a:pPr>
             <a:r>
-              <a:rPr sz="1100" b="1" i="0">
-                <a:solidFill>
-                  <a:srgbClr val="1F497D"/>
+              <a:rPr sz="1100" b="0" i="0">
+                <a:solidFill>
+                  <a:srgbClr val="555F6B"/>
                 </a:solidFill>
                 <a:latin typeface="Arial"/>
                 <a:cs typeface="Arial"/>
                 <a:ea typeface="Arial"/>
               </a:rPr>
-              <a:t>0 h</a:t>
-            </a:r>
-          </a:p>
-        </p:txBody>
-      </p:sp>
-      <p:cxnSp>
-        <p:nvCxnSpPr>
-          <p:cNvPr id="8" name="Connector 7"/>
-          <p:cNvCxnSpPr/>
-          <p:nvPr/>
-        </p:nvCxnSpPr>
-        <p:spPr>
-          <a:xfrm>
-            <a:off x="4343400" y="2029968"/>
-            <a:ext cx="0" cy="4233672"/>
-          </a:xfrm>
-          <a:prstGeom prst="line">
-            <a:avLst/>
-          </a:prstGeom>
-          <a:ln w="9525">
-            <a:solidFill>
-              <a:srgbClr val="D5DDE8"/>
-            </a:solidFill>
-          </a:ln>
-        </p:spPr>
-        <p:style>
-          <a:lnRef idx="2">
-            <a:schemeClr val="accent1"/>
-          </a:lnRef>
-          <a:fillRef idx="0">
-            <a:schemeClr val="accent1"/>
-          </a:fillRef>
-          <a:effectRef idx="1">
-            <a:schemeClr val="accent1"/>
-          </a:effectRef>
-          <a:fontRef idx="minor">
-            <a:schemeClr val="tx1"/>
-          </a:fontRef>
-        </p:style>
-      </p:cxnSp>
-      <p:sp>
-        <p:nvSpPr>
-          <p:cNvPr id="9" name="TextBox 8"/>
-          <p:cNvSpPr txBox="1"/>
-          <p:nvPr/>
-        </p:nvSpPr>
-        <p:spPr>
-          <a:xfrm>
-            <a:off x="5181600" y="1691640"/>
-            <a:ext cx="457200" cy="320040"/>
-          </a:xfrm>
-          <a:prstGeom prst="rect">
-            <a:avLst/>
-          </a:prstGeom>
-          <a:noFill/>
-        </p:spPr>
-        <p:txBody>
-          <a:bodyPr wrap="square" lIns="0" rIns="0" tIns="0" bIns="0" anchor="t"/>
-          <a:lstStyle/>
-          <a:p>
-            <a:pPr algn="ctr" marL="0" indent="0">
-              <a:spcAft>
-                <a:spcPts val="0"/>
-              </a:spcAft>
-              <a:buNone/>
-            </a:pPr>
-            <a:r>
-              <a:rPr sz="1100" b="1" i="0">
-                <a:solidFill>
-                  <a:srgbClr val="1F497D"/>
-                </a:solidFill>
-                <a:latin typeface="Arial"/>
-                <a:cs typeface="Arial"/>
-                <a:ea typeface="Arial"/>
-              </a:rPr>
-              <a:t>4 h</a:t>
-            </a:r>
-          </a:p>
-        </p:txBody>
-      </p:sp>
-      <p:cxnSp>
-        <p:nvCxnSpPr>
-          <p:cNvPr id="10" name="Connector 9"/>
-          <p:cNvCxnSpPr/>
-          <p:nvPr/>
-        </p:nvCxnSpPr>
-        <p:spPr>
-          <a:xfrm>
-            <a:off x="5410200" y="2029968"/>
-            <a:ext cx="0" cy="4233672"/>
-          </a:xfrm>
-          <a:prstGeom prst="line">
-            <a:avLst/>
-          </a:prstGeom>
-          <a:ln w="9525">
-            <a:solidFill>
-              <a:srgbClr val="D5DDE8"/>
-            </a:solidFill>
-          </a:ln>
-        </p:spPr>
-        <p:style>
-          <a:lnRef idx="2">
-            <a:schemeClr val="accent1"/>
-          </a:lnRef>
-          <a:fillRef idx="0">
-            <a:schemeClr val="accent1"/>
-          </a:fillRef>
-          <a:effectRef idx="1">
-            <a:schemeClr val="accent1"/>
-          </a:effectRef>
-          <a:fontRef idx="minor">
-            <a:schemeClr val="tx1"/>
-          </a:fontRef>
-        </p:style>
-      </p:cxnSp>
-      <p:sp>
-        <p:nvSpPr>
-          <p:cNvPr id="11" name="TextBox 10"/>
-          <p:cNvSpPr txBox="1"/>
-          <p:nvPr/>
-        </p:nvSpPr>
-        <p:spPr>
-          <a:xfrm>
-            <a:off x="6248400" y="1691640"/>
-            <a:ext cx="457200" cy="320040"/>
-          </a:xfrm>
-          <a:prstGeom prst="rect">
-            <a:avLst/>
-          </a:prstGeom>
-          <a:noFill/>
-        </p:spPr>
-        <p:txBody>
-          <a:bodyPr wrap="square" lIns="0" rIns="0" tIns="0" bIns="0" anchor="t"/>
-          <a:lstStyle/>
-          <a:p>
-            <a:pPr algn="ctr" marL="0" indent="0">
-              <a:spcAft>
-                <a:spcPts val="0"/>
-              </a:spcAft>
-              <a:buNone/>
-            </a:pPr>
-            <a:r>
-              <a:rPr sz="1100" b="1" i="0">
-                <a:solidFill>
-                  <a:srgbClr val="1F497D"/>
-                </a:solidFill>
-                <a:latin typeface="Arial"/>
-                <a:cs typeface="Arial"/>
-                <a:ea typeface="Arial"/>
-              </a:rPr>
-              <a:t>8 h</a:t>
-            </a:r>
-          </a:p>
-        </p:txBody>
-      </p:sp>
-      <p:cxnSp>
-        <p:nvCxnSpPr>
-          <p:cNvPr id="12" name="Connector 11"/>
-          <p:cNvCxnSpPr/>
-          <p:nvPr/>
-        </p:nvCxnSpPr>
-        <p:spPr>
-          <a:xfrm>
-            <a:off x="6477000" y="2029968"/>
-            <a:ext cx="0" cy="4233672"/>
-          </a:xfrm>
-          <a:prstGeom prst="line">
-            <a:avLst/>
-          </a:prstGeom>
-          <a:ln w="9525">
-            <a:solidFill>
-              <a:srgbClr val="D5DDE8"/>
-            </a:solidFill>
-          </a:ln>
-        </p:spPr>
-        <p:style>
-          <a:lnRef idx="2">
-            <a:schemeClr val="accent1"/>
-          </a:lnRef>
-          <a:fillRef idx="0">
-            <a:schemeClr val="accent1"/>
-          </a:fillRef>
-          <a:effectRef idx="1">
-            <a:schemeClr val="accent1"/>
-          </a:effectRef>
-          <a:fontRef idx="minor">
-            <a:schemeClr val="tx1"/>
-          </a:fontRef>
-        </p:style>
-      </p:cxnSp>
-      <p:sp>
-        <p:nvSpPr>
-          <p:cNvPr id="13" name="TextBox 12"/>
-          <p:cNvSpPr txBox="1"/>
-          <p:nvPr/>
-        </p:nvSpPr>
-        <p:spPr>
-          <a:xfrm>
-            <a:off x="7315200" y="1691640"/>
-            <a:ext cx="457200" cy="320040"/>
-          </a:xfrm>
-          <a:prstGeom prst="rect">
-            <a:avLst/>
-          </a:prstGeom>
-          <a:noFill/>
-        </p:spPr>
-        <p:txBody>
-          <a:bodyPr wrap="square" lIns="0" rIns="0" tIns="0" bIns="0" anchor="t"/>
-          <a:lstStyle/>
-          <a:p>
-            <a:pPr algn="ctr" marL="0" indent="0">
-              <a:spcAft>
-                <a:spcPts val="0"/>
-              </a:spcAft>
-              <a:buNone/>
-            </a:pPr>
-            <a:r>
-              <a:rPr sz="1100" b="1" i="0">
-                <a:solidFill>
-                  <a:srgbClr val="1F497D"/>
-                </a:solidFill>
-                <a:latin typeface="Arial"/>
-                <a:cs typeface="Arial"/>
-                <a:ea typeface="Arial"/>
-              </a:rPr>
-              <a:t>12 h</a:t>
-            </a:r>
-          </a:p>
-        </p:txBody>
-      </p:sp>
-      <p:cxnSp>
-        <p:nvCxnSpPr>
-          <p:cNvPr id="14" name="Connector 13"/>
-          <p:cNvCxnSpPr/>
-          <p:nvPr/>
-        </p:nvCxnSpPr>
-        <p:spPr>
-          <a:xfrm>
-            <a:off x="7543800" y="2029968"/>
-            <a:ext cx="0" cy="4233672"/>
-          </a:xfrm>
-          <a:prstGeom prst="line">
-            <a:avLst/>
-          </a:prstGeom>
-          <a:ln w="9525">
-            <a:solidFill>
-              <a:srgbClr val="D5DDE8"/>
-            </a:solidFill>
-          </a:ln>
-        </p:spPr>
-        <p:style>
-          <a:lnRef idx="2">
-            <a:schemeClr val="accent1"/>
-          </a:lnRef>
-          <a:fillRef idx="0">
-            <a:schemeClr val="accent1"/>
-          </a:fillRef>
-          <a:effectRef idx="1">
-            <a:schemeClr val="accent1"/>
-          </a:effectRef>
-          <a:fontRef idx="minor">
-            <a:schemeClr val="tx1"/>
-          </a:fontRef>
-        </p:style>
-      </p:cxnSp>
-      <p:sp>
-        <p:nvSpPr>
-          <p:cNvPr id="15" name="TextBox 14"/>
-          <p:cNvSpPr txBox="1"/>
-          <p:nvPr/>
-        </p:nvSpPr>
-        <p:spPr>
-          <a:xfrm>
-            <a:off x="8382000" y="1691640"/>
-            <a:ext cx="457200" cy="320040"/>
-          </a:xfrm>
-          <a:prstGeom prst="rect">
-            <a:avLst/>
-          </a:prstGeom>
-          <a:noFill/>
-        </p:spPr>
-        <p:txBody>
-          <a:bodyPr wrap="square" lIns="0" rIns="0" tIns="0" bIns="0" anchor="t"/>
-          <a:lstStyle/>
-          <a:p>
-            <a:pPr algn="ctr" marL="0" indent="0">
-              <a:spcAft>
-                <a:spcPts val="0"/>
-              </a:spcAft>
-              <a:buNone/>
-            </a:pPr>
-            <a:r>
-              <a:rPr sz="1100" b="1" i="0">
-                <a:solidFill>
-                  <a:srgbClr val="1F497D"/>
-                </a:solidFill>
-                <a:latin typeface="Arial"/>
-                <a:cs typeface="Arial"/>
-                <a:ea typeface="Arial"/>
-              </a:rPr>
-              <a:t>16 h</a:t>
-            </a:r>
-          </a:p>
-        </p:txBody>
-      </p:sp>
-      <p:cxnSp>
-        <p:nvCxnSpPr>
-          <p:cNvPr id="16" name="Connector 15"/>
-          <p:cNvCxnSpPr/>
-          <p:nvPr/>
-        </p:nvCxnSpPr>
-        <p:spPr>
-          <a:xfrm>
-            <a:off x="8610600" y="2029968"/>
-            <a:ext cx="0" cy="4233672"/>
-          </a:xfrm>
-          <a:prstGeom prst="line">
-            <a:avLst/>
-          </a:prstGeom>
-          <a:ln w="9525">
-            <a:solidFill>
-              <a:srgbClr val="D5DDE8"/>
-            </a:solidFill>
-          </a:ln>
-        </p:spPr>
-        <p:style>
-          <a:lnRef idx="2">
-            <a:schemeClr val="accent1"/>
-          </a:lnRef>
-          <a:fillRef idx="0">
-            <a:schemeClr val="accent1"/>
-          </a:fillRef>
-          <a:effectRef idx="1">
-            <a:schemeClr val="accent1"/>
-          </a:effectRef>
-          <a:fontRef idx="minor">
-            <a:schemeClr val="tx1"/>
-          </a:fontRef>
-        </p:style>
-      </p:cxnSp>
-      <p:sp>
-        <p:nvSpPr>
-          <p:cNvPr id="17" name="TextBox 16"/>
-          <p:cNvSpPr txBox="1"/>
-          <p:nvPr/>
-        </p:nvSpPr>
-        <p:spPr>
-          <a:xfrm>
-            <a:off x="9448800" y="1691640"/>
-            <a:ext cx="457200" cy="320040"/>
-          </a:xfrm>
-          <a:prstGeom prst="rect">
-            <a:avLst/>
-          </a:prstGeom>
-          <a:noFill/>
-        </p:spPr>
-        <p:txBody>
-          <a:bodyPr wrap="square" lIns="0" rIns="0" tIns="0" bIns="0" anchor="t"/>
-          <a:lstStyle/>
-          <a:p>
-            <a:pPr algn="ctr" marL="0" indent="0">
-              <a:spcAft>
-                <a:spcPts val="0"/>
-              </a:spcAft>
-              <a:buNone/>
-            </a:pPr>
-            <a:r>
-              <a:rPr sz="1100" b="1" i="0">
-                <a:solidFill>
-                  <a:srgbClr val="1F497D"/>
-                </a:solidFill>
-                <a:latin typeface="Arial"/>
-                <a:cs typeface="Arial"/>
-                <a:ea typeface="Arial"/>
-              </a:rPr>
-              <a:t>20 h</a:t>
-            </a:r>
-          </a:p>
-        </p:txBody>
-      </p:sp>
-      <p:cxnSp>
-        <p:nvCxnSpPr>
-          <p:cNvPr id="18" name="Connector 17"/>
-          <p:cNvCxnSpPr/>
-          <p:nvPr/>
-        </p:nvCxnSpPr>
-        <p:spPr>
-          <a:xfrm>
-            <a:off x="9677400" y="2029968"/>
-            <a:ext cx="0" cy="4233672"/>
-          </a:xfrm>
-          <a:prstGeom prst="line">
-            <a:avLst/>
-          </a:prstGeom>
-          <a:ln w="9525">
-            <a:solidFill>
-              <a:srgbClr val="D5DDE8"/>
-            </a:solidFill>
-          </a:ln>
-        </p:spPr>
-        <p:style>
-          <a:lnRef idx="2">
-            <a:schemeClr val="accent1"/>
-          </a:lnRef>
-          <a:fillRef idx="0">
-            <a:schemeClr val="accent1"/>
-          </a:fillRef>
-          <a:effectRef idx="1">
-            <a:schemeClr val="accent1"/>
-          </a:effectRef>
-          <a:fontRef idx="minor">
-            <a:schemeClr val="tx1"/>
-          </a:fontRef>
-        </p:style>
-      </p:cxnSp>
-      <p:sp>
-        <p:nvSpPr>
-          <p:cNvPr id="19" name="TextBox 18"/>
-          <p:cNvSpPr txBox="1"/>
-          <p:nvPr/>
-        </p:nvSpPr>
-        <p:spPr>
-          <a:xfrm>
-            <a:off x="10515600" y="1691640"/>
-            <a:ext cx="457200" cy="320040"/>
-          </a:xfrm>
-          <a:prstGeom prst="rect">
-            <a:avLst/>
-          </a:prstGeom>
-          <a:noFill/>
-        </p:spPr>
-        <p:txBody>
-          <a:bodyPr wrap="square" lIns="0" rIns="0" tIns="0" bIns="0" anchor="t"/>
-          <a:lstStyle/>
-          <a:p>
-            <a:pPr algn="ctr" marL="0" indent="0">
-              <a:spcAft>
-                <a:spcPts val="0"/>
-              </a:spcAft>
-              <a:buNone/>
-            </a:pPr>
-            <a:r>
-              <a:rPr sz="1100" b="1" i="0">
-                <a:solidFill>
-                  <a:srgbClr val="1F497D"/>
-                </a:solidFill>
-                <a:latin typeface="Arial"/>
-                <a:cs typeface="Arial"/>
-                <a:ea typeface="Arial"/>
-              </a:rPr>
-              <a:t>24 h</a:t>
-            </a:r>
-          </a:p>
-        </p:txBody>
-      </p:sp>
-      <p:cxnSp>
-        <p:nvCxnSpPr>
-          <p:cNvPr id="20" name="Connector 19"/>
-          <p:cNvCxnSpPr/>
-          <p:nvPr/>
-        </p:nvCxnSpPr>
-        <p:spPr>
-          <a:xfrm>
-            <a:off x="10744200" y="2029968"/>
-            <a:ext cx="0" cy="4233672"/>
-          </a:xfrm>
-          <a:prstGeom prst="line">
-            <a:avLst/>
-          </a:prstGeom>
-          <a:ln w="9525">
-            <a:solidFill>
-              <a:srgbClr val="D5DDE8"/>
-            </a:solidFill>
-          </a:ln>
-        </p:spPr>
-        <p:style>
-          <a:lnRef idx="2">
-            <a:schemeClr val="accent1"/>
-          </a:lnRef>
-          <a:fillRef idx="0">
-            <a:schemeClr val="accent1"/>
-          </a:fillRef>
-          <a:effectRef idx="1">
-            <a:schemeClr val="accent1"/>
-          </a:effectRef>
-          <a:fontRef idx="minor">
-            <a:schemeClr val="tx1"/>
-          </a:fontRef>
-        </p:style>
-      </p:cxnSp>
-      <p:sp>
-        <p:nvSpPr>
-          <p:cNvPr id="21" name="TextBox 20"/>
-          <p:cNvSpPr txBox="1"/>
-          <p:nvPr/>
-        </p:nvSpPr>
-        <p:spPr>
-          <a:xfrm>
-            <a:off x="457200" y="2075688"/>
-            <a:ext cx="3840480" cy="301752"/>
-          </a:xfrm>
-          <a:prstGeom prst="rect">
-            <a:avLst/>
-          </a:prstGeom>
-          <a:noFill/>
-        </p:spPr>
-        <p:txBody>
-          <a:bodyPr wrap="square" lIns="18288" rIns="18288" tIns="18288" bIns="18288" anchor="ctr"/>
-          <a:lstStyle/>
-          <a:p>
-            <a:pPr algn="l" marL="0" indent="0">
-              <a:spcAft>
-                <a:spcPts val="0"/>
-              </a:spcAft>
-              <a:buNone/>
-            </a:pPr>
-            <a:r>
-              <a:rPr sz="1200" b="0" i="0">
-                <a:solidFill>
-                  <a:srgbClr val="1A1A1A"/>
-                </a:solidFill>
-                <a:latin typeface="Arial"/>
-                <a:cs typeface="Arial"/>
-                <a:ea typeface="Arial"/>
-              </a:rPr>
-              <a:t>Hardware audit, repository, source checks</a:t>
-            </a:r>
-          </a:p>
-        </p:txBody>
-      </p:sp>
-      <p:sp>
-        <p:nvSpPr>
-          <p:cNvPr id="22" name="Planned Hardware audit, repository, source checks"/>
-          <p:cNvSpPr/>
-          <p:nvPr/>
-        </p:nvSpPr>
-        <p:spPr>
-          <a:xfrm>
-            <a:off x="4343400" y="2121408"/>
-            <a:ext cx="266700" cy="219456"/>
-          </a:xfrm>
-          <a:prstGeom prst="rect">
-            <a:avLst/>
-          </a:prstGeom>
-          <a:solidFill>
-            <a:srgbClr val="2E7D4F"/>
-          </a:solidFill>
-          <a:ln>
-            <a:noFill/>
-          </a:ln>
-          <a:effectLst/>
-        </p:spPr>
-        <p:style>
-          <a:lnRef idx="1">
-            <a:schemeClr val="accent1"/>
-          </a:lnRef>
-          <a:fillRef idx="3">
-            <a:schemeClr val="accent1"/>
-          </a:fillRef>
-          <a:effectRef idx="2">
-            <a:schemeClr val="accent1"/>
-          </a:effectRef>
-          <a:fontRef idx="minor">
-            <a:schemeClr val="lt1"/>
-          </a:fontRef>
-        </p:style>
-        <p:txBody>
-          <a:bodyPr rtlCol="0" anchor="ctr"/>
-          <a:lstStyle/>
-          <a:p>
-            <a:pPr algn="ctr"/>
-          </a:p>
-        </p:txBody>
-      </p:sp>
-      <p:sp>
-        <p:nvSpPr>
-          <p:cNvPr id="23" name="TextBox 22"/>
-          <p:cNvSpPr txBox="1"/>
-          <p:nvPr/>
-        </p:nvSpPr>
-        <p:spPr>
-          <a:xfrm>
-            <a:off x="10927080" y="2075688"/>
-            <a:ext cx="1463040" cy="301752"/>
-          </a:xfrm>
-          <a:prstGeom prst="rect">
-            <a:avLst/>
-          </a:prstGeom>
-          <a:noFill/>
-        </p:spPr>
-        <p:txBody>
-          <a:bodyPr wrap="square" lIns="18288" rIns="18288" tIns="18288" bIns="18288" anchor="ctr"/>
-          <a:lstStyle/>
-          <a:p>
-            <a:pPr algn="l" marL="0" indent="0">
-              <a:spcAft>
-                <a:spcPts val="0"/>
-              </a:spcAft>
-              <a:buNone/>
-            </a:pPr>
-            <a:r>
-              <a:rPr sz="1200" b="1" i="0">
-                <a:solidFill>
-                  <a:srgbClr val="2E7D4F"/>
-                </a:solidFill>
-                <a:latin typeface="Arial"/>
-                <a:cs typeface="Arial"/>
-                <a:ea typeface="Arial"/>
-              </a:rPr>
-              <a:t>Completed</a:t>
-            </a:r>
-          </a:p>
-        </p:txBody>
-      </p:sp>
-      <p:sp>
-        <p:nvSpPr>
-          <p:cNvPr id="24" name="TextBox 23"/>
-          <p:cNvSpPr txBox="1"/>
-          <p:nvPr/>
-        </p:nvSpPr>
-        <p:spPr>
-          <a:xfrm>
-            <a:off x="457200" y="2427732"/>
-            <a:ext cx="3840480" cy="301752"/>
-          </a:xfrm>
-          <a:prstGeom prst="rect">
-            <a:avLst/>
-          </a:prstGeom>
-          <a:noFill/>
-        </p:spPr>
-        <p:txBody>
-          <a:bodyPr wrap="square" lIns="18288" rIns="18288" tIns="18288" bIns="18288" anchor="ctr"/>
-          <a:lstStyle/>
-          <a:p>
-            <a:pPr algn="l" marL="0" indent="0">
-              <a:spcAft>
-                <a:spcPts val="0"/>
-              </a:spcAft>
-              <a:buNone/>
-            </a:pPr>
-            <a:r>
-              <a:rPr sz="1200" b="0" i="0">
-                <a:solidFill>
-                  <a:srgbClr val="1A1A1A"/>
-                </a:solidFill>
-                <a:latin typeface="Arial"/>
-                <a:cs typeface="Arial"/>
-                <a:ea typeface="Arial"/>
-              </a:rPr>
-              <a:t>Real-data download, database, schema reports</a:t>
-            </a:r>
-          </a:p>
-        </p:txBody>
-      </p:sp>
-      <p:sp>
-        <p:nvSpPr>
-          <p:cNvPr id="25" name="Planned Real-data download, database, schema reports"/>
-          <p:cNvSpPr/>
-          <p:nvPr/>
-        </p:nvSpPr>
-        <p:spPr>
-          <a:xfrm>
-            <a:off x="4610100" y="2473452"/>
-            <a:ext cx="533400" cy="219456"/>
-          </a:xfrm>
-          <a:prstGeom prst="rect">
-            <a:avLst/>
-          </a:prstGeom>
-          <a:solidFill>
-            <a:srgbClr val="2E7D4F"/>
-          </a:solidFill>
-          <a:ln>
-            <a:noFill/>
-          </a:ln>
-          <a:effectLst/>
-        </p:spPr>
-        <p:style>
-          <a:lnRef idx="1">
-            <a:schemeClr val="accent1"/>
-          </a:lnRef>
-          <a:fillRef idx="3">
-            <a:schemeClr val="accent1"/>
-          </a:fillRef>
-          <a:effectRef idx="2">
-            <a:schemeClr val="accent1"/>
-          </a:effectRef>
-          <a:fontRef idx="minor">
-            <a:schemeClr val="lt1"/>
-          </a:fontRef>
-        </p:style>
-        <p:txBody>
-          <a:bodyPr rtlCol="0" anchor="ctr"/>
-          <a:lstStyle/>
-          <a:p>
-            <a:pPr algn="ctr"/>
-          </a:p>
-        </p:txBody>
-      </p:sp>
-      <p:sp>
-        <p:nvSpPr>
-          <p:cNvPr id="26" name="TextBox 25"/>
-          <p:cNvSpPr txBox="1"/>
-          <p:nvPr/>
-        </p:nvSpPr>
-        <p:spPr>
-          <a:xfrm>
-            <a:off x="10927080" y="2427732"/>
-            <a:ext cx="1463040" cy="301752"/>
-          </a:xfrm>
-          <a:prstGeom prst="rect">
-            <a:avLst/>
-          </a:prstGeom>
-          <a:noFill/>
-        </p:spPr>
-        <p:txBody>
-          <a:bodyPr wrap="square" lIns="18288" rIns="18288" tIns="18288" bIns="18288" anchor="ctr"/>
-          <a:lstStyle/>
-          <a:p>
-            <a:pPr algn="l" marL="0" indent="0">
-              <a:spcAft>
-                <a:spcPts val="0"/>
-              </a:spcAft>
-              <a:buNone/>
-            </a:pPr>
-            <a:r>
-              <a:rPr sz="1200" b="1" i="0">
-                <a:solidFill>
-                  <a:srgbClr val="2E7D4F"/>
-                </a:solidFill>
-                <a:latin typeface="Arial"/>
-                <a:cs typeface="Arial"/>
-                <a:ea typeface="Arial"/>
-              </a:rPr>
-              <a:t>Completed</a:t>
-            </a:r>
-          </a:p>
-        </p:txBody>
-      </p:sp>
-      <p:sp>
-        <p:nvSpPr>
-          <p:cNvPr id="27" name="TextBox 26"/>
-          <p:cNvSpPr txBox="1"/>
-          <p:nvPr/>
-        </p:nvSpPr>
-        <p:spPr>
-          <a:xfrm>
-            <a:off x="457200" y="2779776"/>
-            <a:ext cx="3840480" cy="301752"/>
-          </a:xfrm>
-          <a:prstGeom prst="rect">
-            <a:avLst/>
-          </a:prstGeom>
-          <a:noFill/>
-        </p:spPr>
-        <p:txBody>
-          <a:bodyPr wrap="square" lIns="18288" rIns="18288" tIns="18288" bIns="18288" anchor="ctr"/>
-          <a:lstStyle/>
-          <a:p>
-            <a:pPr algn="l" marL="0" indent="0">
-              <a:spcAft>
-                <a:spcPts val="0"/>
-              </a:spcAft>
-              <a:buNone/>
-            </a:pPr>
-            <a:r>
-              <a:rPr sz="1200" b="0" i="0">
-                <a:solidFill>
-                  <a:srgbClr val="1A1A1A"/>
-                </a:solidFill>
-                <a:latin typeface="Arial"/>
-                <a:cs typeface="Arial"/>
-                <a:ea typeface="Arial"/>
-              </a:rPr>
-              <a:t>Preprocessing, graph, features, leakage tests</a:t>
-            </a:r>
-          </a:p>
-        </p:txBody>
-      </p:sp>
-      <p:sp>
-        <p:nvSpPr>
-          <p:cNvPr id="28" name="Planned Preprocessing, graph, features, leakage tests"/>
-          <p:cNvSpPr/>
-          <p:nvPr/>
-        </p:nvSpPr>
-        <p:spPr>
-          <a:xfrm>
-            <a:off x="4876800" y="2825496"/>
-            <a:ext cx="800100" cy="219456"/>
-          </a:xfrm>
-          <a:prstGeom prst="rect">
-            <a:avLst/>
-          </a:prstGeom>
-          <a:solidFill>
-            <a:srgbClr val="2E7D4F"/>
-          </a:solidFill>
-          <a:ln>
-            <a:noFill/>
-          </a:ln>
-          <a:effectLst/>
-        </p:spPr>
-        <p:style>
-          <a:lnRef idx="1">
-            <a:schemeClr val="accent1"/>
-          </a:lnRef>
-          <a:fillRef idx="3">
-            <a:schemeClr val="accent1"/>
-          </a:fillRef>
-          <a:effectRef idx="2">
-            <a:schemeClr val="accent1"/>
-          </a:effectRef>
-          <a:fontRef idx="minor">
-            <a:schemeClr val="lt1"/>
-          </a:fontRef>
-        </p:style>
-        <p:txBody>
-          <a:bodyPr rtlCol="0" anchor="ctr"/>
-          <a:lstStyle/>
-          <a:p>
-            <a:pPr algn="ctr"/>
-          </a:p>
-        </p:txBody>
-      </p:sp>
-      <p:sp>
-        <p:nvSpPr>
-          <p:cNvPr id="29" name="TextBox 28"/>
-          <p:cNvSpPr txBox="1"/>
-          <p:nvPr/>
-        </p:nvSpPr>
-        <p:spPr>
-          <a:xfrm>
-            <a:off x="10927080" y="2779776"/>
-            <a:ext cx="1463040" cy="301752"/>
-          </a:xfrm>
-          <a:prstGeom prst="rect">
-            <a:avLst/>
-          </a:prstGeom>
-          <a:noFill/>
-        </p:spPr>
-        <p:txBody>
-          <a:bodyPr wrap="square" lIns="18288" rIns="18288" tIns="18288" bIns="18288" anchor="ctr"/>
-          <a:lstStyle/>
-          <a:p>
-            <a:pPr algn="l" marL="0" indent="0">
-              <a:spcAft>
-                <a:spcPts val="0"/>
-              </a:spcAft>
-              <a:buNone/>
-            </a:pPr>
-            <a:r>
-              <a:rPr sz="1200" b="1" i="0">
-                <a:solidFill>
-                  <a:srgbClr val="2E7D4F"/>
-                </a:solidFill>
-                <a:latin typeface="Arial"/>
-                <a:cs typeface="Arial"/>
-                <a:ea typeface="Arial"/>
-              </a:rPr>
-              <a:t>Completed</a:t>
-            </a:r>
-          </a:p>
-        </p:txBody>
-      </p:sp>
-      <p:sp>
-        <p:nvSpPr>
-          <p:cNvPr id="30" name="TextBox 29"/>
-          <p:cNvSpPr txBox="1"/>
-          <p:nvPr/>
-        </p:nvSpPr>
-        <p:spPr>
-          <a:xfrm>
-            <a:off x="457200" y="3131820"/>
-            <a:ext cx="3840480" cy="301752"/>
-          </a:xfrm>
-          <a:prstGeom prst="rect">
-            <a:avLst/>
-          </a:prstGeom>
-          <a:noFill/>
-        </p:spPr>
-        <p:txBody>
-          <a:bodyPr wrap="square" lIns="18288" rIns="18288" tIns="18288" bIns="18288" anchor="ctr"/>
-          <a:lstStyle/>
-          <a:p>
-            <a:pPr algn="l" marL="0" indent="0">
-              <a:spcAft>
-                <a:spcPts val="0"/>
-              </a:spcAft>
-              <a:buNone/>
-            </a:pPr>
-            <a:r>
-              <a:rPr sz="1200" b="0" i="0">
-                <a:solidFill>
-                  <a:srgbClr val="1A1A1A"/>
-                </a:solidFill>
-                <a:latin typeface="Arial"/>
-                <a:cs typeface="Arial"/>
-                <a:ea typeface="Arial"/>
-              </a:rPr>
-              <a:t>Baselines and proposed-model training</a:t>
-            </a:r>
-          </a:p>
-        </p:txBody>
-      </p:sp>
-      <p:sp>
-        <p:nvSpPr>
-          <p:cNvPr id="31" name="Planned Baselines and proposed-model training"/>
-          <p:cNvSpPr/>
-          <p:nvPr/>
-        </p:nvSpPr>
-        <p:spPr>
-          <a:xfrm>
-            <a:off x="5410200" y="3177539"/>
-            <a:ext cx="1066800" cy="219456"/>
-          </a:xfrm>
-          <a:prstGeom prst="rect">
-            <a:avLst/>
-          </a:prstGeom>
-          <a:solidFill>
-            <a:srgbClr val="2E7D4F"/>
-          </a:solidFill>
-          <a:ln>
-            <a:noFill/>
-          </a:ln>
-          <a:effectLst/>
-        </p:spPr>
-        <p:style>
-          <a:lnRef idx="1">
-            <a:schemeClr val="accent1"/>
-          </a:lnRef>
-          <a:fillRef idx="3">
-            <a:schemeClr val="accent1"/>
-          </a:fillRef>
-          <a:effectRef idx="2">
-            <a:schemeClr val="accent1"/>
-          </a:effectRef>
-          <a:fontRef idx="minor">
-            <a:schemeClr val="lt1"/>
-          </a:fontRef>
-        </p:style>
-        <p:txBody>
-          <a:bodyPr rtlCol="0" anchor="ctr"/>
-          <a:lstStyle/>
-          <a:p>
-            <a:pPr algn="ctr"/>
-          </a:p>
-        </p:txBody>
-      </p:sp>
-      <p:sp>
-        <p:nvSpPr>
-          <p:cNvPr id="32" name="TextBox 31"/>
-          <p:cNvSpPr txBox="1"/>
-          <p:nvPr/>
-        </p:nvSpPr>
-        <p:spPr>
-          <a:xfrm>
-            <a:off x="10927080" y="3131820"/>
-            <a:ext cx="1463040" cy="301752"/>
-          </a:xfrm>
-          <a:prstGeom prst="rect">
-            <a:avLst/>
-          </a:prstGeom>
-          <a:noFill/>
-        </p:spPr>
-        <p:txBody>
-          <a:bodyPr wrap="square" lIns="18288" rIns="18288" tIns="18288" bIns="18288" anchor="ctr"/>
-          <a:lstStyle/>
-          <a:p>
-            <a:pPr algn="l" marL="0" indent="0">
-              <a:spcAft>
-                <a:spcPts val="0"/>
-              </a:spcAft>
-              <a:buNone/>
-            </a:pPr>
-            <a:r>
-              <a:rPr sz="1200" b="1" i="0">
-                <a:solidFill>
-                  <a:srgbClr val="2E7D4F"/>
-                </a:solidFill>
-                <a:latin typeface="Arial"/>
-                <a:cs typeface="Arial"/>
-                <a:ea typeface="Arial"/>
-              </a:rPr>
-              <a:t>Completed</a:t>
-            </a:r>
-          </a:p>
-        </p:txBody>
-      </p:sp>
-      <p:sp>
-        <p:nvSpPr>
-          <p:cNvPr id="33" name="TextBox 32"/>
-          <p:cNvSpPr txBox="1"/>
-          <p:nvPr/>
-        </p:nvSpPr>
-        <p:spPr>
-          <a:xfrm>
-            <a:off x="457200" y="3483864"/>
-            <a:ext cx="3840480" cy="301752"/>
-          </a:xfrm>
-          <a:prstGeom prst="rect">
-            <a:avLst/>
-          </a:prstGeom>
-          <a:noFill/>
-        </p:spPr>
-        <p:txBody>
-          <a:bodyPr wrap="square" lIns="18288" rIns="18288" tIns="18288" bIns="18288" anchor="ctr"/>
-          <a:lstStyle/>
-          <a:p>
-            <a:pPr algn="l" marL="0" indent="0">
-              <a:spcAft>
-                <a:spcPts val="0"/>
-              </a:spcAft>
-              <a:buNone/>
-            </a:pPr>
-            <a:r>
-              <a:rPr sz="1200" b="0" i="0">
-                <a:solidFill>
-                  <a:srgbClr val="1A1A1A"/>
-                </a:solidFill>
-                <a:latin typeface="Arial"/>
-                <a:cs typeface="Arial"/>
-                <a:ea typeface="Arial"/>
-              </a:rPr>
-              <a:t>Calibration and model explanations</a:t>
-            </a:r>
-          </a:p>
-        </p:txBody>
-      </p:sp>
-      <p:sp>
-        <p:nvSpPr>
-          <p:cNvPr id="34" name="Planned Calibration and model explanations"/>
-          <p:cNvSpPr/>
-          <p:nvPr/>
-        </p:nvSpPr>
-        <p:spPr>
-          <a:xfrm>
-            <a:off x="5943600" y="3529584"/>
-            <a:ext cx="1066800" cy="219456"/>
-          </a:xfrm>
-          <a:prstGeom prst="rect">
-            <a:avLst/>
-          </a:prstGeom>
-          <a:solidFill>
-            <a:srgbClr val="2E7D4F"/>
-          </a:solidFill>
-          <a:ln>
-            <a:noFill/>
-          </a:ln>
-          <a:effectLst/>
-        </p:spPr>
-        <p:style>
-          <a:lnRef idx="1">
-            <a:schemeClr val="accent1"/>
-          </a:lnRef>
-          <a:fillRef idx="3">
-            <a:schemeClr val="accent1"/>
-          </a:fillRef>
-          <a:effectRef idx="2">
-            <a:schemeClr val="accent1"/>
-          </a:effectRef>
-          <a:fontRef idx="minor">
-            <a:schemeClr val="lt1"/>
-          </a:fontRef>
-        </p:style>
-        <p:txBody>
-          <a:bodyPr rtlCol="0" anchor="ctr"/>
-          <a:lstStyle/>
-          <a:p>
-            <a:pPr algn="ctr"/>
-          </a:p>
-        </p:txBody>
-      </p:sp>
-      <p:sp>
-        <p:nvSpPr>
-          <p:cNvPr id="35" name="TextBox 34"/>
-          <p:cNvSpPr txBox="1"/>
-          <p:nvPr/>
-        </p:nvSpPr>
-        <p:spPr>
-          <a:xfrm>
-            <a:off x="10927080" y="3483864"/>
-            <a:ext cx="1463040" cy="301752"/>
-          </a:xfrm>
-          <a:prstGeom prst="rect">
-            <a:avLst/>
-          </a:prstGeom>
-          <a:noFill/>
-        </p:spPr>
-        <p:txBody>
-          <a:bodyPr wrap="square" lIns="18288" rIns="18288" tIns="18288" bIns="18288" anchor="ctr"/>
-          <a:lstStyle/>
-          <a:p>
-            <a:pPr algn="l" marL="0" indent="0">
-              <a:spcAft>
-                <a:spcPts val="0"/>
-              </a:spcAft>
-              <a:buNone/>
-            </a:pPr>
-            <a:r>
-              <a:rPr sz="1200" b="1" i="0">
-                <a:solidFill>
-                  <a:srgbClr val="2E7D4F"/>
-                </a:solidFill>
-                <a:latin typeface="Arial"/>
-                <a:cs typeface="Arial"/>
-                <a:ea typeface="Arial"/>
-              </a:rPr>
-              <a:t>Completed</a:t>
-            </a:r>
-          </a:p>
-        </p:txBody>
-      </p:sp>
-      <p:sp>
-        <p:nvSpPr>
-          <p:cNvPr id="36" name="TextBox 35"/>
-          <p:cNvSpPr txBox="1"/>
-          <p:nvPr/>
-        </p:nvSpPr>
-        <p:spPr>
-          <a:xfrm>
-            <a:off x="457200" y="3835908"/>
-            <a:ext cx="3840480" cy="301752"/>
-          </a:xfrm>
-          <a:prstGeom prst="rect">
-            <a:avLst/>
-          </a:prstGeom>
-          <a:noFill/>
-        </p:spPr>
-        <p:txBody>
-          <a:bodyPr wrap="square" lIns="18288" rIns="18288" tIns="18288" bIns="18288" anchor="ctr"/>
-          <a:lstStyle/>
-          <a:p>
-            <a:pPr algn="l" marL="0" indent="0">
-              <a:spcAft>
-                <a:spcPts val="0"/>
-              </a:spcAft>
-              <a:buNone/>
-            </a:pPr>
-            <a:r>
-              <a:rPr sz="1200" b="0" i="0">
-                <a:solidFill>
-                  <a:srgbClr val="1A1A1A"/>
-                </a:solidFill>
-                <a:latin typeface="Arial"/>
-                <a:cs typeface="Arial"/>
-                <a:ea typeface="Arial"/>
-              </a:rPr>
-              <a:t>Corpus, FAISS, real LLM, RAG evaluation</a:t>
-            </a:r>
-          </a:p>
-        </p:txBody>
-      </p:sp>
-      <p:sp>
-        <p:nvSpPr>
-          <p:cNvPr id="37" name="Planned Corpus, FAISS, real LLM, RAG evaluation"/>
-          <p:cNvSpPr/>
-          <p:nvPr/>
-        </p:nvSpPr>
-        <p:spPr>
-          <a:xfrm>
-            <a:off x="6210300" y="3881628"/>
-            <a:ext cx="1066800" cy="219456"/>
-          </a:xfrm>
-          <a:prstGeom prst="rect">
-            <a:avLst/>
-          </a:prstGeom>
-          <a:solidFill>
-            <a:srgbClr val="2E7D4F"/>
-          </a:solidFill>
-          <a:ln>
-            <a:noFill/>
-          </a:ln>
-          <a:effectLst/>
-        </p:spPr>
-        <p:style>
-          <a:lnRef idx="1">
-            <a:schemeClr val="accent1"/>
-          </a:lnRef>
-          <a:fillRef idx="3">
-            <a:schemeClr val="accent1"/>
-          </a:fillRef>
-          <a:effectRef idx="2">
-            <a:schemeClr val="accent1"/>
-          </a:effectRef>
-          <a:fontRef idx="minor">
-            <a:schemeClr val="lt1"/>
-          </a:fontRef>
-        </p:style>
-        <p:txBody>
-          <a:bodyPr rtlCol="0" anchor="ctr"/>
-          <a:lstStyle/>
-          <a:p>
-            <a:pPr algn="ctr"/>
-          </a:p>
-        </p:txBody>
-      </p:sp>
-      <p:sp>
-        <p:nvSpPr>
-          <p:cNvPr id="38" name="TextBox 37"/>
-          <p:cNvSpPr txBox="1"/>
-          <p:nvPr/>
-        </p:nvSpPr>
-        <p:spPr>
-          <a:xfrm>
-            <a:off x="10927080" y="3835908"/>
-            <a:ext cx="1463040" cy="301752"/>
-          </a:xfrm>
-          <a:prstGeom prst="rect">
-            <a:avLst/>
-          </a:prstGeom>
-          <a:noFill/>
-        </p:spPr>
-        <p:txBody>
-          <a:bodyPr wrap="square" lIns="18288" rIns="18288" tIns="18288" bIns="18288" anchor="ctr"/>
-          <a:lstStyle/>
-          <a:p>
-            <a:pPr algn="l" marL="0" indent="0">
-              <a:spcAft>
-                <a:spcPts val="0"/>
-              </a:spcAft>
-              <a:buNone/>
-            </a:pPr>
-            <a:r>
-              <a:rPr sz="1200" b="1" i="0">
-                <a:solidFill>
-                  <a:srgbClr val="2E7D4F"/>
-                </a:solidFill>
-                <a:latin typeface="Arial"/>
-                <a:cs typeface="Arial"/>
-                <a:ea typeface="Arial"/>
-              </a:rPr>
-              <a:t>Completed</a:t>
-            </a:r>
-          </a:p>
-        </p:txBody>
-      </p:sp>
-      <p:sp>
-        <p:nvSpPr>
-          <p:cNvPr id="39" name="TextBox 38"/>
-          <p:cNvSpPr txBox="1"/>
-          <p:nvPr/>
-        </p:nvSpPr>
-        <p:spPr>
-          <a:xfrm>
-            <a:off x="457200" y="4187952"/>
-            <a:ext cx="3840480" cy="301752"/>
-          </a:xfrm>
-          <a:prstGeom prst="rect">
-            <a:avLst/>
-          </a:prstGeom>
-          <a:noFill/>
-        </p:spPr>
-        <p:txBody>
-          <a:bodyPr wrap="square" lIns="18288" rIns="18288" tIns="18288" bIns="18288" anchor="ctr"/>
-          <a:lstStyle/>
-          <a:p>
-            <a:pPr algn="l" marL="0" indent="0">
-              <a:spcAft>
-                <a:spcPts val="0"/>
-              </a:spcAft>
-              <a:buNone/>
-            </a:pPr>
-            <a:r>
-              <a:rPr sz="1200" b="0" i="0">
-                <a:solidFill>
-                  <a:srgbClr val="1A1A1A"/>
-                </a:solidFill>
-                <a:latin typeface="Arial"/>
-                <a:cs typeface="Arial"/>
-                <a:ea typeface="Arial"/>
-              </a:rPr>
-              <a:t>SUMO mapping, demand, baseline controllers</a:t>
-            </a:r>
-          </a:p>
-        </p:txBody>
-      </p:sp>
-      <p:sp>
-        <p:nvSpPr>
-          <p:cNvPr id="40" name="Planned SUMO mapping, demand, baseline controllers"/>
-          <p:cNvSpPr/>
-          <p:nvPr/>
-        </p:nvSpPr>
-        <p:spPr>
-          <a:xfrm>
-            <a:off x="6743700" y="4233672"/>
-            <a:ext cx="1333500" cy="219456"/>
-          </a:xfrm>
-          <a:prstGeom prst="rect">
-            <a:avLst/>
-          </a:prstGeom>
-          <a:solidFill>
-            <a:srgbClr val="B26B00"/>
-          </a:solidFill>
-          <a:ln>
-            <a:noFill/>
-          </a:ln>
-          <a:effectLst/>
-        </p:spPr>
-        <p:style>
-          <a:lnRef idx="1">
-            <a:schemeClr val="accent1"/>
-          </a:lnRef>
-          <a:fillRef idx="3">
-            <a:schemeClr val="accent1"/>
-          </a:fillRef>
-          <a:effectRef idx="2">
-            <a:schemeClr val="accent1"/>
-          </a:effectRef>
-          <a:fontRef idx="minor">
-            <a:schemeClr val="lt1"/>
-          </a:fontRef>
-        </p:style>
-        <p:txBody>
-          <a:bodyPr rtlCol="0" anchor="ctr"/>
-          <a:lstStyle/>
-          <a:p>
-            <a:pPr algn="ctr"/>
-          </a:p>
-        </p:txBody>
-      </p:sp>
-      <p:sp>
-        <p:nvSpPr>
-          <p:cNvPr id="41" name="TextBox 40"/>
-          <p:cNvSpPr txBox="1"/>
-          <p:nvPr/>
-        </p:nvSpPr>
-        <p:spPr>
-          <a:xfrm>
-            <a:off x="10927080" y="4187952"/>
-            <a:ext cx="1463040" cy="301752"/>
-          </a:xfrm>
-          <a:prstGeom prst="rect">
-            <a:avLst/>
-          </a:prstGeom>
-          <a:noFill/>
-        </p:spPr>
-        <p:txBody>
-          <a:bodyPr wrap="square" lIns="18288" rIns="18288" tIns="18288" bIns="18288" anchor="ctr"/>
-          <a:lstStyle/>
-          <a:p>
-            <a:pPr algn="l" marL="0" indent="0">
-              <a:spcAft>
-                <a:spcPts val="0"/>
-              </a:spcAft>
-              <a:buNone/>
-            </a:pPr>
-            <a:r>
-              <a:rPr sz="1200" b="1" i="0">
-                <a:solidFill>
-                  <a:srgbClr val="B26B00"/>
-                </a:solidFill>
-                <a:latin typeface="Arial"/>
-                <a:cs typeface="Arial"/>
-                <a:ea typeface="Arial"/>
-              </a:rPr>
-              <a:t>Partial</a:t>
-            </a:r>
-          </a:p>
-        </p:txBody>
-      </p:sp>
-      <p:sp>
-        <p:nvSpPr>
-          <p:cNvPr id="42" name="TextBox 41"/>
-          <p:cNvSpPr txBox="1"/>
-          <p:nvPr/>
-        </p:nvSpPr>
-        <p:spPr>
-          <a:xfrm>
-            <a:off x="457200" y="4539996"/>
-            <a:ext cx="3840480" cy="301752"/>
-          </a:xfrm>
-          <a:prstGeom prst="rect">
-            <a:avLst/>
-          </a:prstGeom>
-          <a:noFill/>
-        </p:spPr>
-        <p:txBody>
-          <a:bodyPr wrap="square" lIns="18288" rIns="18288" tIns="18288" bIns="18288" anchor="ctr"/>
-          <a:lstStyle/>
-          <a:p>
-            <a:pPr algn="l" marL="0" indent="0">
-              <a:spcAft>
-                <a:spcPts val="0"/>
-              </a:spcAft>
-              <a:buNone/>
-            </a:pPr>
-            <a:r>
-              <a:rPr sz="1200" b="0" i="0">
-                <a:solidFill>
-                  <a:srgbClr val="1A1A1A"/>
-                </a:solidFill>
-                <a:latin typeface="Arial"/>
-                <a:cs typeface="Arial"/>
-                <a:ea typeface="Arial"/>
-              </a:rPr>
-              <a:t>LangGraph, constraints, worker, human review</a:t>
-            </a:r>
-          </a:p>
-        </p:txBody>
-      </p:sp>
-      <p:sp>
-        <p:nvSpPr>
-          <p:cNvPr id="43" name="Planned LangGraph, constraints, worker, human review"/>
-          <p:cNvSpPr/>
-          <p:nvPr/>
-        </p:nvSpPr>
-        <p:spPr>
-          <a:xfrm>
-            <a:off x="7277100" y="4585716"/>
-            <a:ext cx="1333500" cy="219456"/>
-          </a:xfrm>
-          <a:prstGeom prst="rect">
-            <a:avLst/>
-          </a:prstGeom>
-          <a:solidFill>
-            <a:srgbClr val="2E7D4F"/>
-          </a:solidFill>
-          <a:ln>
-            <a:noFill/>
-          </a:ln>
-          <a:effectLst/>
-        </p:spPr>
-        <p:style>
-          <a:lnRef idx="1">
-            <a:schemeClr val="accent1"/>
-          </a:lnRef>
-          <a:fillRef idx="3">
-            <a:schemeClr val="accent1"/>
-          </a:fillRef>
-          <a:effectRef idx="2">
-            <a:schemeClr val="accent1"/>
-          </a:effectRef>
-          <a:fontRef idx="minor">
-            <a:schemeClr val="lt1"/>
-          </a:fontRef>
-        </p:style>
-        <p:txBody>
-          <a:bodyPr rtlCol="0" anchor="ctr"/>
-          <a:lstStyle/>
-          <a:p>
-            <a:pPr algn="ctr"/>
-          </a:p>
-        </p:txBody>
-      </p:sp>
-      <p:sp>
-        <p:nvSpPr>
-          <p:cNvPr id="44" name="TextBox 43"/>
-          <p:cNvSpPr txBox="1"/>
-          <p:nvPr/>
-        </p:nvSpPr>
-        <p:spPr>
-          <a:xfrm>
-            <a:off x="10927080" y="4539996"/>
-            <a:ext cx="1463040" cy="301752"/>
-          </a:xfrm>
-          <a:prstGeom prst="rect">
-            <a:avLst/>
-          </a:prstGeom>
-          <a:noFill/>
-        </p:spPr>
-        <p:txBody>
-          <a:bodyPr wrap="square" lIns="18288" rIns="18288" tIns="18288" bIns="18288" anchor="ctr"/>
-          <a:lstStyle/>
-          <a:p>
-            <a:pPr algn="l" marL="0" indent="0">
-              <a:spcAft>
-                <a:spcPts val="0"/>
-              </a:spcAft>
-              <a:buNone/>
-            </a:pPr>
-            <a:r>
-              <a:rPr sz="1200" b="1" i="0">
-                <a:solidFill>
-                  <a:srgbClr val="2E7D4F"/>
-                </a:solidFill>
-                <a:latin typeface="Arial"/>
-                <a:cs typeface="Arial"/>
-                <a:ea typeface="Arial"/>
-              </a:rPr>
-              <a:t>Completed</a:t>
-            </a:r>
-          </a:p>
-        </p:txBody>
-      </p:sp>
-      <p:sp>
-        <p:nvSpPr>
-          <p:cNvPr id="45" name="TextBox 44"/>
-          <p:cNvSpPr txBox="1"/>
-          <p:nvPr/>
-        </p:nvSpPr>
-        <p:spPr>
-          <a:xfrm>
-            <a:off x="457200" y="4892040"/>
-            <a:ext cx="3840480" cy="301752"/>
-          </a:xfrm>
-          <a:prstGeom prst="rect">
-            <a:avLst/>
-          </a:prstGeom>
-          <a:noFill/>
-        </p:spPr>
-        <p:txBody>
-          <a:bodyPr wrap="square" lIns="18288" rIns="18288" tIns="18288" bIns="18288" anchor="ctr"/>
-          <a:lstStyle/>
-          <a:p>
-            <a:pPr algn="l" marL="0" indent="0">
-              <a:spcAft>
-                <a:spcPts val="0"/>
-              </a:spcAft>
-              <a:buNone/>
-            </a:pPr>
-            <a:r>
-              <a:rPr sz="1200" b="0" i="0">
-                <a:solidFill>
-                  <a:srgbClr val="1A1A1A"/>
-                </a:solidFill>
-                <a:latin typeface="Arial"/>
-                <a:cs typeface="Arial"/>
-                <a:ea typeface="Arial"/>
-              </a:rPr>
-              <a:t>FastAPI, dashboard, MLflow tracking</a:t>
-            </a:r>
-          </a:p>
-        </p:txBody>
-      </p:sp>
-      <p:sp>
-        <p:nvSpPr>
-          <p:cNvPr id="46" name="Planned FastAPI, dashboard, MLflow tracking"/>
-          <p:cNvSpPr/>
-          <p:nvPr/>
-        </p:nvSpPr>
-        <p:spPr>
-          <a:xfrm>
-            <a:off x="7810500" y="4937759"/>
-            <a:ext cx="1333500" cy="219456"/>
-          </a:xfrm>
-          <a:prstGeom prst="rect">
-            <a:avLst/>
-          </a:prstGeom>
-          <a:solidFill>
-            <a:srgbClr val="2E7D4F"/>
-          </a:solidFill>
-          <a:ln>
-            <a:noFill/>
-          </a:ln>
-          <a:effectLst/>
-        </p:spPr>
-        <p:style>
-          <a:lnRef idx="1">
-            <a:schemeClr val="accent1"/>
-          </a:lnRef>
-          <a:fillRef idx="3">
-            <a:schemeClr val="accent1"/>
-          </a:fillRef>
-          <a:effectRef idx="2">
-            <a:schemeClr val="accent1"/>
-          </a:effectRef>
-          <a:fontRef idx="minor">
-            <a:schemeClr val="lt1"/>
-          </a:fontRef>
-        </p:style>
-        <p:txBody>
-          <a:bodyPr rtlCol="0" anchor="ctr"/>
-          <a:lstStyle/>
-          <a:p>
-            <a:pPr algn="ctr"/>
-          </a:p>
-        </p:txBody>
-      </p:sp>
-      <p:sp>
-        <p:nvSpPr>
-          <p:cNvPr id="47" name="TextBox 46"/>
-          <p:cNvSpPr txBox="1"/>
-          <p:nvPr/>
-        </p:nvSpPr>
-        <p:spPr>
-          <a:xfrm>
-            <a:off x="10927080" y="4892040"/>
-            <a:ext cx="1463040" cy="301752"/>
-          </a:xfrm>
-          <a:prstGeom prst="rect">
-            <a:avLst/>
-          </a:prstGeom>
-          <a:noFill/>
-        </p:spPr>
-        <p:txBody>
-          <a:bodyPr wrap="square" lIns="18288" rIns="18288" tIns="18288" bIns="18288" anchor="ctr"/>
-          <a:lstStyle/>
-          <a:p>
-            <a:pPr algn="l" marL="0" indent="0">
-              <a:spcAft>
-                <a:spcPts val="0"/>
-              </a:spcAft>
-              <a:buNone/>
-            </a:pPr>
-            <a:r>
-              <a:rPr sz="1200" b="1" i="0">
-                <a:solidFill>
-                  <a:srgbClr val="2E7D4F"/>
-                </a:solidFill>
-                <a:latin typeface="Arial"/>
-                <a:cs typeface="Arial"/>
-                <a:ea typeface="Arial"/>
-              </a:rPr>
-              <a:t>Completed</a:t>
-            </a:r>
-          </a:p>
-        </p:txBody>
-      </p:sp>
-      <p:sp>
-        <p:nvSpPr>
-          <p:cNvPr id="48" name="TextBox 47"/>
-          <p:cNvSpPr txBox="1"/>
-          <p:nvPr/>
-        </p:nvSpPr>
-        <p:spPr>
-          <a:xfrm>
-            <a:off x="457200" y="5244083"/>
-            <a:ext cx="3840480" cy="301752"/>
-          </a:xfrm>
-          <a:prstGeom prst="rect">
-            <a:avLst/>
-          </a:prstGeom>
-          <a:noFill/>
-        </p:spPr>
-        <p:txBody>
-          <a:bodyPr wrap="square" lIns="18288" rIns="18288" tIns="18288" bIns="18288" anchor="ctr"/>
-          <a:lstStyle/>
-          <a:p>
-            <a:pPr algn="l" marL="0" indent="0">
-              <a:spcAft>
-                <a:spcPts val="0"/>
-              </a:spcAft>
-              <a:buNone/>
-            </a:pPr>
-            <a:r>
-              <a:rPr sz="1200" b="0" i="0">
-                <a:solidFill>
-                  <a:srgbClr val="1A1A1A"/>
-                </a:solidFill>
-                <a:latin typeface="Arial"/>
-                <a:cs typeface="Arial"/>
-                <a:ea typeface="Arial"/>
-              </a:rPr>
-              <a:t>End-to-end tests, ablations, paired simulation</a:t>
-            </a:r>
-          </a:p>
-        </p:txBody>
-      </p:sp>
-      <p:sp>
-        <p:nvSpPr>
-          <p:cNvPr id="49" name="Planned End-to-end tests, ablations, paired simulation"/>
-          <p:cNvSpPr/>
-          <p:nvPr/>
-        </p:nvSpPr>
-        <p:spPr>
-          <a:xfrm>
-            <a:off x="8610600" y="5289803"/>
-            <a:ext cx="1333500" cy="219456"/>
-          </a:xfrm>
-          <a:prstGeom prst="rect">
-            <a:avLst/>
-          </a:prstGeom>
-          <a:solidFill>
-            <a:srgbClr val="B26B00"/>
-          </a:solidFill>
-          <a:ln>
-            <a:noFill/>
-          </a:ln>
-          <a:effectLst/>
-        </p:spPr>
-        <p:style>
-          <a:lnRef idx="1">
-            <a:schemeClr val="accent1"/>
-          </a:lnRef>
-          <a:fillRef idx="3">
-            <a:schemeClr val="accent1"/>
-          </a:fillRef>
-          <a:effectRef idx="2">
-            <a:schemeClr val="accent1"/>
-          </a:effectRef>
-          <a:fontRef idx="minor">
-            <a:schemeClr val="lt1"/>
-          </a:fontRef>
-        </p:style>
-        <p:txBody>
-          <a:bodyPr rtlCol="0" anchor="ctr"/>
-          <a:lstStyle/>
-          <a:p>
-            <a:pPr algn="ctr"/>
-          </a:p>
-        </p:txBody>
-      </p:sp>
-      <p:sp>
-        <p:nvSpPr>
-          <p:cNvPr id="50" name="TextBox 49"/>
-          <p:cNvSpPr txBox="1"/>
-          <p:nvPr/>
-        </p:nvSpPr>
-        <p:spPr>
-          <a:xfrm>
-            <a:off x="10927080" y="5244083"/>
-            <a:ext cx="1463040" cy="301752"/>
-          </a:xfrm>
-          <a:prstGeom prst="rect">
-            <a:avLst/>
-          </a:prstGeom>
-          <a:noFill/>
-        </p:spPr>
-        <p:txBody>
-          <a:bodyPr wrap="square" lIns="18288" rIns="18288" tIns="18288" bIns="18288" anchor="ctr"/>
-          <a:lstStyle/>
-          <a:p>
-            <a:pPr algn="l" marL="0" indent="0">
-              <a:spcAft>
-                <a:spcPts val="0"/>
-              </a:spcAft>
-              <a:buNone/>
-            </a:pPr>
-            <a:r>
-              <a:rPr sz="1200" b="1" i="0">
-                <a:solidFill>
-                  <a:srgbClr val="B26B00"/>
-                </a:solidFill>
-                <a:latin typeface="Arial"/>
-                <a:cs typeface="Arial"/>
-                <a:ea typeface="Arial"/>
-              </a:rPr>
-              <a:t>Partial</a:t>
-            </a:r>
-          </a:p>
-        </p:txBody>
-      </p:sp>
-      <p:sp>
-        <p:nvSpPr>
-          <p:cNvPr id="51" name="TextBox 50"/>
-          <p:cNvSpPr txBox="1"/>
-          <p:nvPr/>
-        </p:nvSpPr>
-        <p:spPr>
-          <a:xfrm>
-            <a:off x="457200" y="5596128"/>
-            <a:ext cx="3840480" cy="301752"/>
-          </a:xfrm>
-          <a:prstGeom prst="rect">
-            <a:avLst/>
-          </a:prstGeom>
-          <a:noFill/>
-        </p:spPr>
-        <p:txBody>
-          <a:bodyPr wrap="square" lIns="18288" rIns="18288" tIns="18288" bIns="18288" anchor="ctr"/>
-          <a:lstStyle/>
-          <a:p>
-            <a:pPr algn="l" marL="0" indent="0">
-              <a:spcAft>
-                <a:spcPts val="0"/>
-              </a:spcAft>
-              <a:buNone/>
-            </a:pPr>
-            <a:r>
-              <a:rPr sz="1200" b="0" i="0">
-                <a:solidFill>
-                  <a:srgbClr val="1A1A1A"/>
-                </a:solidFill>
-                <a:latin typeface="Arial"/>
-                <a:cs typeface="Arial"/>
-                <a:ea typeface="Arial"/>
-              </a:rPr>
-              <a:t>README, Docker verification, clean-up</a:t>
-            </a:r>
-          </a:p>
-        </p:txBody>
-      </p:sp>
-      <p:sp>
-        <p:nvSpPr>
-          <p:cNvPr id="52" name="Planned README, Docker verification, clean-up"/>
-          <p:cNvSpPr/>
-          <p:nvPr/>
-        </p:nvSpPr>
-        <p:spPr>
-          <a:xfrm>
-            <a:off x="9677400" y="5641848"/>
-            <a:ext cx="800100" cy="219456"/>
-          </a:xfrm>
-          <a:prstGeom prst="rect">
-            <a:avLst/>
-          </a:prstGeom>
-          <a:solidFill>
-            <a:srgbClr val="2E7D4F"/>
-          </a:solidFill>
-          <a:ln>
-            <a:noFill/>
-          </a:ln>
-          <a:effectLst/>
-        </p:spPr>
-        <p:style>
-          <a:lnRef idx="1">
-            <a:schemeClr val="accent1"/>
-          </a:lnRef>
-          <a:fillRef idx="3">
-            <a:schemeClr val="accent1"/>
-          </a:fillRef>
-          <a:effectRef idx="2">
-            <a:schemeClr val="accent1"/>
-          </a:effectRef>
-          <a:fontRef idx="minor">
-            <a:schemeClr val="lt1"/>
-          </a:fontRef>
-        </p:style>
-        <p:txBody>
-          <a:bodyPr rtlCol="0" anchor="ctr"/>
-          <a:lstStyle/>
-          <a:p>
-            <a:pPr algn="ctr"/>
-          </a:p>
-        </p:txBody>
-      </p:sp>
-      <p:sp>
-        <p:nvSpPr>
-          <p:cNvPr id="53" name="TextBox 52"/>
-          <p:cNvSpPr txBox="1"/>
-          <p:nvPr/>
-        </p:nvSpPr>
-        <p:spPr>
-          <a:xfrm>
-            <a:off x="10927080" y="5596128"/>
-            <a:ext cx="1463040" cy="301752"/>
-          </a:xfrm>
-          <a:prstGeom prst="rect">
-            <a:avLst/>
-          </a:prstGeom>
-          <a:noFill/>
-        </p:spPr>
-        <p:txBody>
-          <a:bodyPr wrap="square" lIns="18288" rIns="18288" tIns="18288" bIns="18288" anchor="ctr"/>
-          <a:lstStyle/>
-          <a:p>
-            <a:pPr algn="l" marL="0" indent="0">
-              <a:spcAft>
-                <a:spcPts val="0"/>
-              </a:spcAft>
-              <a:buNone/>
-            </a:pPr>
-            <a:r>
-              <a:rPr sz="1200" b="1" i="0">
-                <a:solidFill>
-                  <a:srgbClr val="2E7D4F"/>
-                </a:solidFill>
-                <a:latin typeface="Arial"/>
-                <a:cs typeface="Arial"/>
-                <a:ea typeface="Arial"/>
-              </a:rPr>
-              <a:t>Completed</a:t>
-            </a:r>
-          </a:p>
-        </p:txBody>
-      </p:sp>
-      <p:sp>
-        <p:nvSpPr>
-          <p:cNvPr id="54" name="TextBox 53"/>
-          <p:cNvSpPr txBox="1"/>
-          <p:nvPr/>
-        </p:nvSpPr>
-        <p:spPr>
-          <a:xfrm>
-            <a:off x="457200" y="5948172"/>
-            <a:ext cx="3840480" cy="301752"/>
-          </a:xfrm>
-          <a:prstGeom prst="rect">
-            <a:avLst/>
-          </a:prstGeom>
-          <a:noFill/>
-        </p:spPr>
-        <p:txBody>
-          <a:bodyPr wrap="square" lIns="18288" rIns="18288" tIns="18288" bIns="18288" anchor="ctr"/>
-          <a:lstStyle/>
-          <a:p>
-            <a:pPr algn="l" marL="0" indent="0">
-              <a:spcAft>
-                <a:spcPts val="0"/>
-              </a:spcAft>
-              <a:buNone/>
-            </a:pPr>
-            <a:r>
-              <a:rPr sz="1200" b="0" i="0">
-                <a:solidFill>
-                  <a:srgbClr val="1A1A1A"/>
-                </a:solidFill>
-                <a:latin typeface="Arial"/>
-                <a:cs typeface="Arial"/>
-                <a:ea typeface="Arial"/>
-              </a:rPr>
-              <a:t>Freeze artifacts, status report, final review</a:t>
-            </a:r>
-          </a:p>
-        </p:txBody>
-      </p:sp>
-      <p:sp>
-        <p:nvSpPr>
-          <p:cNvPr id="55" name="Planned Freeze artifacts, status report, final review"/>
-          <p:cNvSpPr/>
-          <p:nvPr/>
-        </p:nvSpPr>
-        <p:spPr>
-          <a:xfrm>
-            <a:off x="10477500" y="5993892"/>
-            <a:ext cx="266700" cy="219456"/>
-          </a:xfrm>
-          <a:prstGeom prst="rect">
-            <a:avLst/>
-          </a:prstGeom>
-          <a:solidFill>
-            <a:srgbClr val="2E7D4F"/>
-          </a:solidFill>
-          <a:ln>
-            <a:noFill/>
-          </a:ln>
-          <a:effectLst/>
-        </p:spPr>
-        <p:style>
-          <a:lnRef idx="1">
-            <a:schemeClr val="accent1"/>
-          </a:lnRef>
-          <a:fillRef idx="3">
-            <a:schemeClr val="accent1"/>
-          </a:fillRef>
-          <a:effectRef idx="2">
-            <a:schemeClr val="accent1"/>
-          </a:effectRef>
-          <a:fontRef idx="minor">
-            <a:schemeClr val="lt1"/>
-          </a:fontRef>
-        </p:style>
-        <p:txBody>
-          <a:bodyPr rtlCol="0" anchor="ctr"/>
-          <a:lstStyle/>
-          <a:p>
-            <a:pPr algn="ctr"/>
-          </a:p>
-        </p:txBody>
-      </p:sp>
-      <p:sp>
-        <p:nvSpPr>
-          <p:cNvPr id="56" name="TextBox 55"/>
-          <p:cNvSpPr txBox="1"/>
-          <p:nvPr/>
-        </p:nvSpPr>
-        <p:spPr>
-          <a:xfrm>
-            <a:off x="10927080" y="5948172"/>
-            <a:ext cx="1463040" cy="301752"/>
-          </a:xfrm>
-          <a:prstGeom prst="rect">
-            <a:avLst/>
-          </a:prstGeom>
-          <a:noFill/>
-        </p:spPr>
-        <p:txBody>
-          <a:bodyPr wrap="square" lIns="18288" rIns="18288" tIns="18288" bIns="18288" anchor="ctr"/>
-          <a:lstStyle/>
-          <a:p>
-            <a:pPr algn="l" marL="0" indent="0">
-              <a:spcAft>
-                <a:spcPts val="0"/>
-              </a:spcAft>
-              <a:buNone/>
-            </a:pPr>
-            <a:r>
-              <a:rPr sz="1200" b="1" i="0">
-                <a:solidFill>
-                  <a:srgbClr val="2E7D4F"/>
-                </a:solidFill>
-                <a:latin typeface="Arial"/>
-                <a:cs typeface="Arial"/>
-                <a:ea typeface="Arial"/>
-              </a:rPr>
-              <a:t>Completed</a:t>
-            </a:r>
-          </a:p>
-        </p:txBody>
-      </p:sp>
-      <p:sp>
-        <p:nvSpPr>
-          <p:cNvPr id="57" name="TextBox 56"/>
-          <p:cNvSpPr txBox="1"/>
-          <p:nvPr/>
-        </p:nvSpPr>
-        <p:spPr>
-          <a:xfrm>
-            <a:off x="457200" y="6327648"/>
-            <a:ext cx="11887200" cy="411480"/>
-          </a:xfrm>
-          <a:prstGeom prst="rect">
-            <a:avLst/>
-          </a:prstGeom>
-          <a:noFill/>
-        </p:spPr>
-        <p:txBody>
-          <a:bodyPr wrap="square" lIns="18288" rIns="18288" tIns="18288" bIns="18288" anchor="t"/>
-          <a:lstStyle/>
-          <a:p>
-            <a:pPr algn="l" marL="0" indent="0">
-              <a:spcAft>
-                <a:spcPts val="0"/>
-              </a:spcAft>
-              <a:buNone/>
-            </a:pPr>
-            <a:r>
-              <a:rPr sz="1100" b="0" i="0">
-                <a:solidFill>
-                  <a:srgbClr val="555F6B"/>
-                </a:solidFill>
-                <a:latin typeface="Arial"/>
-                <a:cs typeface="Arial"/>
-                <a:ea typeface="Arial"/>
-              </a:rPr>
-              <a:t>Bars: planned window (project specification). Colour: actual status, 19–21 Oct 2026 (repository history). Next milestones: calibrate West St signal timing to the observed 10.95 mph (or obtain DOT timing plans) → controller comparison; more seeds without the compute budget; paper submission.</a:t>
+              <a:t>Screenshots of the project's Streamlit dashboard (src/smartcity/dashboard/app.py) captured on 21 Oct 2026; every number on them is read from committed result files. Live NYC feeds were not reachable from the capture machine, so no LIVE view is shown.</a:t>
             </a:r>
           </a:p>
         </p:txBody>
@@ -13976,7 +12077,7 @@
     </p:spTree>
     <p:extLst>
       <p:ext uri="{BB962C8B-B14F-4D97-AF65-F5344CB8AC3E}">
-        <p14:creationId xmlns:p14="http://schemas.microsoft.com/office/powerpoint/2010/main" val="3187296211"/>
+        <p14:creationId xmlns:p14="http://schemas.microsoft.com/office/powerpoint/2010/main" val="3319743353"/>
       </p:ext>
     </p:extLst>
   </p:cSld>
@@ -13994,7 +12095,7 @@
         <p:cNvPr id="1" name="">
           <a:extLst>
             <a:ext uri="{FF2B5EF4-FFF2-40B4-BE49-F238E27FC236}">
-              <a16:creationId xmlns:a16="http://schemas.microsoft.com/office/drawing/2014/main" id="{2AF24EBC-07D1-5582-ECAD-FB015F64BD9E}"/>
+              <a16:creationId xmlns:a16="http://schemas.microsoft.com/office/drawing/2014/main" id="{D0E88BB3-2A5B-34AC-B39B-BAE5C65E68D6}"/>
             </a:ext>
           </a:extLst>
         </p:cNvPr>
@@ -14014,7 +12115,7 @@
           <p:cNvPr id="2" name="Title 1">
             <a:extLst>
               <a:ext uri="{FF2B5EF4-FFF2-40B4-BE49-F238E27FC236}">
-                <a16:creationId xmlns:a16="http://schemas.microsoft.com/office/drawing/2014/main" id="{FA93089C-2484-51E9-0A89-B13831434514}"/>
+                <a16:creationId xmlns:a16="http://schemas.microsoft.com/office/drawing/2014/main" id="{4BD448EB-8A1A-C9A3-3C48-4830472042E6}"/>
               </a:ext>
             </a:extLst>
           </p:cNvPr>
@@ -14031,14 +12132,11 @@
             <a:ext cx="12801600" cy="1512146"/>
           </a:xfrm>
           <a:solidFill>
-            <a:schemeClr val="tx2">
-              <a:lumMod val="60000"/>
-              <a:lumOff val="40000"/>
-            </a:schemeClr>
+            <a:srgbClr val="558ED5"/>
           </a:solidFill>
         </p:spPr>
         <p:txBody>
-          <a:bodyPr vert="horz" lIns="114945" tIns="57473" rIns="114945" bIns="57473" rtlCol="0" anchor="ctr">
+          <a:bodyPr>
             <a:normAutofit/>
           </a:bodyPr>
           <a:lstStyle/>
@@ -14051,15 +12149,8 @@
                 <a:latin typeface="Arial" panose="020B0604020202020204" pitchFamily="34" charset="0"/>
                 <a:cs typeface="Arial" panose="020B0604020202020204" pitchFamily="34" charset="0"/>
               </a:rPr>
-              <a:t>REFERENCES</a:t>
-            </a:r>
-            <a:endParaRPr lang="en-GB" sz="3600" b="1" dirty="0">
-              <a:solidFill>
-                <a:schemeClr val="bg1"/>
-              </a:solidFill>
-              <a:latin typeface="Arial" panose="020B0604020202020204" pitchFamily="34" charset="0"/>
-              <a:cs typeface="Arial" panose="020B0604020202020204" pitchFamily="34" charset="0"/>
-            </a:endParaRPr>
+              <a:t>8. OUTCOME: WORKING DASHBOARD (2/4)</a:t>
+            </a:r>
           </a:p>
         </p:txBody>
       </p:sp>
@@ -14068,7 +12159,7 @@
           <p:cNvPr id="4" name="Slide Number Placeholder 3">
             <a:extLst>
               <a:ext uri="{FF2B5EF4-FFF2-40B4-BE49-F238E27FC236}">
-                <a16:creationId xmlns:a16="http://schemas.microsoft.com/office/drawing/2014/main" id="{A9E1DF2F-2EFC-F28C-9A44-F9337C42CAAA}"/>
+                <a16:creationId xmlns:a16="http://schemas.microsoft.com/office/drawing/2014/main" id="{3C63C818-3FBA-7FB8-3369-BCE4AC4BD8EF}"/>
               </a:ext>
             </a:extLst>
           </p:cNvPr>
@@ -14086,7 +12177,7 @@
           <a:p>
             <a:fld id="{C02A2637-A5A3-49FA-B214-6E67543099EF}" type="slidenum">
               <a:rPr lang="en-US" smtClean="0"/>
-              <a:t>6</a:t>
+              <a:t>18</a:t>
             </a:fld>
             <a:endParaRPr lang="en-US"/>
           </a:p>
@@ -14100,8 +12191,8 @@
         </p:nvSpPr>
         <p:spPr>
           <a:xfrm>
-            <a:off x="548640" y="1783080"/>
-            <a:ext cx="11704320" cy="4892040"/>
+            <a:off x="502920" y="1600200"/>
+            <a:ext cx="5715000" cy="329184"/>
           </a:xfrm>
           <a:prstGeom prst="rect">
             <a:avLst/>
@@ -14109,234 +12200,207 @@
           <a:noFill/>
         </p:spPr>
         <p:txBody>
-          <a:bodyPr wrap="square" lIns="36576" rIns="36576" tIns="36576" bIns="36576" anchor="t"/>
+          <a:bodyPr wrap="square" lIns="18288" rIns="18288" tIns="18288" bIns="18288" anchor="b"/>
           <a:lstStyle/>
           <a:p>
             <a:pPr algn="l" marL="0" indent="0">
               <a:spcAft>
-                <a:spcPts val="500"/>
-              </a:spcAft>
-              <a:buNone/>
-            </a:pPr>
-            <a:r>
-              <a:rPr sz="1400" b="0" i="0">
-                <a:solidFill>
-                  <a:srgbClr val="1A1A1A"/>
-                </a:solidFill>
-                <a:latin typeface="Times New Roman"/>
-                <a:cs typeface="Times New Roman"/>
-                <a:ea typeface="Times New Roman"/>
-              </a:rPr>
-              <a:t>[1] Y. Li, R. Yu, C. Shahabi, and Y. Liu, “Diffusion convolutional recurrent neural network: Data-driven traffic forecasting,” in Proc. ICLR, 2018.</a:t>
-            </a:r>
-          </a:p>
+                <a:spcPts val="0"/>
+              </a:spcAft>
+              <a:buNone/>
+            </a:pPr>
+            <a:r>
+              <a:rPr sz="1400" b="1" i="0">
+                <a:solidFill>
+                  <a:srgbClr val="1F497D"/>
+                </a:solidFill>
+                <a:latin typeface="Arial"/>
+                <a:cs typeface="Arial"/>
+                <a:ea typeface="Arial"/>
+              </a:rPr>
+              <a:t>Experiment results</a:t>
+            </a:r>
+            <a:r>
+              <a:rPr sz="1200" b="0" i="0">
+                <a:solidFill>
+                  <a:srgbClr val="555F6B"/>
+                </a:solidFill>
+                <a:latin typeface="Arial"/>
+                <a:cs typeface="Arial"/>
+                <a:ea typeface="Arial"/>
+              </a:rPr>
+              <a:t>   Mode shown: </a:t>
+            </a:r>
+            <a:r>
+              <a:rPr sz="1200" b="1" i="0">
+                <a:solidFill>
+                  <a:srgbClr val="C25E00"/>
+                </a:solidFill>
+                <a:latin typeface="Arial"/>
+                <a:cs typeface="Arial"/>
+                <a:ea typeface="Arial"/>
+              </a:rPr>
+              <a:t>REPLAY</a:t>
+            </a:r>
+          </a:p>
+        </p:txBody>
+      </p:sp>
+      <p:pic>
+        <p:nvPicPr>
+          <p:cNvPr id="6" name="Dashboard: Experiment results" descr="experiments.png"/>
+          <p:cNvPicPr>
+            <a:picLocks noChangeAspect="1"/>
+          </p:cNvPicPr>
+          <p:nvPr/>
+        </p:nvPicPr>
+        <p:blipFill>
+          <a:blip r:embed="rId2"/>
+          <a:stretch>
+            <a:fillRect/>
+          </a:stretch>
+        </p:blipFill>
+        <p:spPr>
+          <a:xfrm>
+            <a:off x="502920" y="1984248"/>
+            <a:ext cx="5715000" cy="4366516"/>
+          </a:xfrm>
+          <a:prstGeom prst="rect">
+            <a:avLst/>
+          </a:prstGeom>
+          <a:ln w="12700">
+            <a:solidFill>
+              <a:srgbClr val="C9D3E0"/>
+            </a:solidFill>
+          </a:ln>
+        </p:spPr>
+      </p:pic>
+      <p:sp>
+        <p:nvSpPr>
+          <p:cNvPr id="7" name="TextBox 6"/>
+          <p:cNvSpPr txBox="1"/>
+          <p:nvPr/>
+        </p:nvSpPr>
+        <p:spPr>
+          <a:xfrm>
+            <a:off x="6583680" y="1600200"/>
+            <a:ext cx="5715000" cy="329184"/>
+          </a:xfrm>
+          <a:prstGeom prst="rect">
+            <a:avLst/>
+          </a:prstGeom>
+          <a:noFill/>
+        </p:spPr>
+        <p:txBody>
+          <a:bodyPr wrap="square" lIns="18288" rIns="18288" tIns="18288" bIns="18288" anchor="b"/>
+          <a:lstStyle/>
           <a:p>
             <a:pPr algn="l" marL="0" indent="0">
               <a:spcAft>
-                <a:spcPts val="500"/>
-              </a:spcAft>
-              <a:buNone/>
-            </a:pPr>
-            <a:r>
-              <a:rPr sz="1400" b="0" i="0">
-                <a:solidFill>
-                  <a:srgbClr val="1A1A1A"/>
-                </a:solidFill>
-                <a:latin typeface="Times New Roman"/>
-                <a:cs typeface="Times New Roman"/>
-                <a:ea typeface="Times New Roman"/>
-              </a:rPr>
-              <a:t>[2] B. Yu, H. Yin, and Z. Zhu, “Spatio-temporal graph convolutional networks: A deep learning framework for traffic forecasting,” in Proc. IJCAI, 2018, pp. 3634–3640.</a:t>
-            </a:r>
-          </a:p>
+                <a:spcPts val="0"/>
+              </a:spcAft>
+              <a:buNone/>
+            </a:pPr>
+            <a:r>
+              <a:rPr sz="1400" b="1" i="0">
+                <a:solidFill>
+                  <a:srgbClr val="1F497D"/>
+                </a:solidFill>
+                <a:latin typeface="Arial"/>
+                <a:cs typeface="Arial"/>
+                <a:ea typeface="Arial"/>
+              </a:rPr>
+              <a:t>Uncertainty &amp; reliability</a:t>
+            </a:r>
+            <a:r>
+              <a:rPr sz="1200" b="0" i="0">
+                <a:solidFill>
+                  <a:srgbClr val="555F6B"/>
+                </a:solidFill>
+                <a:latin typeface="Arial"/>
+                <a:cs typeface="Arial"/>
+                <a:ea typeface="Arial"/>
+              </a:rPr>
+              <a:t>   Mode shown: </a:t>
+            </a:r>
+            <a:r>
+              <a:rPr sz="1200" b="1" i="0">
+                <a:solidFill>
+                  <a:srgbClr val="C25E00"/>
+                </a:solidFill>
+                <a:latin typeface="Arial"/>
+                <a:cs typeface="Arial"/>
+                <a:ea typeface="Arial"/>
+              </a:rPr>
+              <a:t>REPLAY</a:t>
+            </a:r>
+          </a:p>
+        </p:txBody>
+      </p:sp>
+      <p:pic>
+        <p:nvPicPr>
+          <p:cNvPr id="8" name="Dashboard: Uncertainty &amp; reliability" descr="uncertainty.png"/>
+          <p:cNvPicPr>
+            <a:picLocks noChangeAspect="1"/>
+          </p:cNvPicPr>
+          <p:nvPr/>
+        </p:nvPicPr>
+        <p:blipFill>
+          <a:blip r:embed="rId3"/>
+          <a:stretch>
+            <a:fillRect/>
+          </a:stretch>
+        </p:blipFill>
+        <p:spPr>
+          <a:xfrm>
+            <a:off x="6583680" y="1984248"/>
+            <a:ext cx="5715000" cy="4366516"/>
+          </a:xfrm>
+          <a:prstGeom prst="rect">
+            <a:avLst/>
+          </a:prstGeom>
+          <a:ln w="12700">
+            <a:solidFill>
+              <a:srgbClr val="C9D3E0"/>
+            </a:solidFill>
+          </a:ln>
+        </p:spPr>
+      </p:pic>
+      <p:sp>
+        <p:nvSpPr>
+          <p:cNvPr id="9" name="TextBox 8"/>
+          <p:cNvSpPr txBox="1"/>
+          <p:nvPr/>
+        </p:nvSpPr>
+        <p:spPr>
+          <a:xfrm>
+            <a:off x="502920" y="6423916"/>
+            <a:ext cx="11795760" cy="457200"/>
+          </a:xfrm>
+          <a:prstGeom prst="rect">
+            <a:avLst/>
+          </a:prstGeom>
+          <a:noFill/>
+        </p:spPr>
+        <p:txBody>
+          <a:bodyPr wrap="square" lIns="18288" rIns="18288" tIns="18288" bIns="18288" anchor="t"/>
+          <a:lstStyle/>
           <a:p>
             <a:pPr algn="l" marL="0" indent="0">
               <a:spcAft>
-                <a:spcPts val="500"/>
-              </a:spcAft>
-              <a:buNone/>
-            </a:pPr>
-            <a:r>
-              <a:rPr sz="1400" b="0" i="0">
-                <a:solidFill>
-                  <a:srgbClr val="1A1A1A"/>
-                </a:solidFill>
-                <a:latin typeface="Times New Roman"/>
-                <a:cs typeface="Times New Roman"/>
-                <a:ea typeface="Times New Roman"/>
-              </a:rPr>
-              <a:t>[3] Z. Wu, S. Pan, G. Long, J. Jiang, and C. Zhang, “Graph WaveNet for deep spatial-temporal graph modeling,” in Proc. IJCAI, 2019, pp. 1907–1913.</a:t>
-            </a:r>
-          </a:p>
-          <a:p>
-            <a:pPr algn="l" marL="0" indent="0">
-              <a:spcAft>
-                <a:spcPts val="500"/>
-              </a:spcAft>
-              <a:buNone/>
-            </a:pPr>
-            <a:r>
-              <a:rPr sz="1400" b="0" i="0">
-                <a:solidFill>
-                  <a:srgbClr val="1A1A1A"/>
-                </a:solidFill>
-                <a:latin typeface="Times New Roman"/>
-                <a:cs typeface="Times New Roman"/>
-                <a:ea typeface="Times New Roman"/>
-              </a:rPr>
-              <a:t>[4] P. Lewis et al., “Retrieval-augmented generation for knowledge-intensive NLP tasks,” in Proc. NeurIPS, 2020.</a:t>
-            </a:r>
-          </a:p>
-          <a:p>
-            <a:pPr algn="l" marL="0" indent="0">
-              <a:spcAft>
-                <a:spcPts val="500"/>
-              </a:spcAft>
-              <a:buNone/>
-            </a:pPr>
-            <a:r>
-              <a:rPr sz="1400" b="0" i="0">
-                <a:solidFill>
-                  <a:srgbClr val="1A1A1A"/>
-                </a:solidFill>
-                <a:latin typeface="Times New Roman"/>
-                <a:cs typeface="Times New Roman"/>
-                <a:ea typeface="Times New Roman"/>
-              </a:rPr>
-              <a:t>[5] P. A. Lopez et al., “Microscopic traffic simulation using SUMO,” in Proc. IEEE ITSC, 2018, pp. 2575–2582.</a:t>
-            </a:r>
-          </a:p>
-          <a:p>
-            <a:pPr algn="l" marL="0" indent="0">
-              <a:spcAft>
-                <a:spcPts val="500"/>
-              </a:spcAft>
-              <a:buNone/>
-            </a:pPr>
-            <a:r>
-              <a:rPr sz="1400" b="0" i="0">
-                <a:solidFill>
-                  <a:srgbClr val="1A1A1A"/>
-                </a:solidFill>
-                <a:latin typeface="Times New Roman"/>
-                <a:cs typeface="Times New Roman"/>
-                <a:ea typeface="Times New Roman"/>
-              </a:rPr>
-              <a:t>[6] S. Brody, U. Alon, and E. Yahav, “How attentive are graph attention networks?,” in Proc. ICLR, 2022.</a:t>
-            </a:r>
-          </a:p>
-          <a:p>
-            <a:pPr algn="l" marL="0" indent="0">
-              <a:spcAft>
-                <a:spcPts val="500"/>
-              </a:spcAft>
-              <a:buNone/>
-            </a:pPr>
-            <a:r>
-              <a:rPr sz="1400" b="0" i="0">
-                <a:solidFill>
-                  <a:srgbClr val="1A1A1A"/>
-                </a:solidFill>
-                <a:latin typeface="Times New Roman"/>
-                <a:cs typeface="Times New Roman"/>
-                <a:ea typeface="Times New Roman"/>
-              </a:rPr>
-              <a:t>[7] A. N. Angelopoulos and S. Bates, “A gentle introduction to conformal prediction and distribution-free uncertainty quantification,” arXiv:2107.07511, 2021.</a:t>
-            </a:r>
-          </a:p>
-          <a:p>
-            <a:pPr algn="l" marL="0" indent="0">
-              <a:spcAft>
-                <a:spcPts val="500"/>
-              </a:spcAft>
-              <a:buNone/>
-            </a:pPr>
-            <a:r>
-              <a:rPr sz="1400" b="0" i="0">
-                <a:solidFill>
-                  <a:srgbClr val="1A1A1A"/>
-                </a:solidFill>
-                <a:latin typeface="Times New Roman"/>
-                <a:cs typeface="Times New Roman"/>
-                <a:ea typeface="Times New Roman"/>
-              </a:rPr>
-              <a:t>[8] C. Xu and Y. Xie, “Conformal prediction interval for dynamic time-series,” in Proc. ICML, PMLR vol. 139, 2021, pp. 11559–11569.</a:t>
-            </a:r>
-          </a:p>
-          <a:p>
-            <a:pPr algn="l" marL="0" indent="0">
-              <a:spcAft>
-                <a:spcPts val="500"/>
-              </a:spcAft>
-              <a:buNone/>
-            </a:pPr>
-            <a:r>
-              <a:rPr sz="1400" b="0" i="0">
-                <a:solidFill>
-                  <a:srgbClr val="1A1A1A"/>
-                </a:solidFill>
-                <a:latin typeface="Times New Roman"/>
-                <a:cs typeface="Times New Roman"/>
-                <a:ea typeface="Times New Roman"/>
-              </a:rPr>
-              <a:t>[9] S. M. Lundberg and S.-I. Lee, “A unified approach to interpreting model predictions,” in Proc. NeurIPS, 2017.</a:t>
-            </a:r>
-          </a:p>
-          <a:p>
-            <a:pPr algn="l" marL="0" indent="0">
-              <a:spcAft>
-                <a:spcPts val="500"/>
-              </a:spcAft>
-              <a:buNone/>
-            </a:pPr>
-            <a:r>
-              <a:rPr sz="1400" b="0" i="0">
-                <a:solidFill>
-                  <a:srgbClr val="1A1A1A"/>
-                </a:solidFill>
-                <a:latin typeface="Times New Roman"/>
-                <a:cs typeface="Times New Roman"/>
-                <a:ea typeface="Times New Roman"/>
-              </a:rPr>
-              <a:t>[10] B. Rozemberczki et al., “PyTorch Geometric Temporal: Spatiotemporal signal processing with neural machine learning models,” in Proc. ACM CIKM, 2021, pp. 4564–4573.</a:t>
-            </a:r>
-          </a:p>
-          <a:p>
-            <a:pPr algn="l" marL="0" indent="0">
-              <a:spcAft>
-                <a:spcPts val="500"/>
-              </a:spcAft>
-              <a:buNone/>
-            </a:pPr>
-            <a:r>
-              <a:rPr sz="1400" b="0" i="0">
-                <a:solidFill>
-                  <a:srgbClr val="1A1A1A"/>
-                </a:solidFill>
-                <a:latin typeface="Times New Roman"/>
-                <a:cs typeface="Times New Roman"/>
-                <a:ea typeface="Times New Roman"/>
-              </a:rPr>
-              <a:t>[11] NYC Department of Transportation, “DOT Traffic Speeds NBE,” NYC Open Data, dataset i4gi-tjb9, accessed Oct. 2026.</a:t>
-            </a:r>
-          </a:p>
-          <a:p>
-            <a:pPr algn="l" marL="0" indent="0">
-              <a:spcAft>
-                <a:spcPts val="500"/>
-              </a:spcAft>
-              <a:buNone/>
-            </a:pPr>
-            <a:r>
-              <a:rPr sz="1400" b="0" i="0">
-                <a:solidFill>
-                  <a:srgbClr val="1A1A1A"/>
-                </a:solidFill>
-                <a:latin typeface="Times New Roman"/>
-                <a:cs typeface="Times New Roman"/>
-                <a:ea typeface="Times New Roman"/>
-              </a:rPr>
-              <a:t>[12] NYC Department of Transportation, “Automated Traffic Volume Counts,” NYC Open Data, dataset 7ym2-wayt, accessed Oct. 2026.</a:t>
+                <a:spcPts val="0"/>
+              </a:spcAft>
+              <a:buNone/>
+            </a:pPr>
+            <a:r>
+              <a:rPr sz="1100" b="0" i="0">
+                <a:solidFill>
+                  <a:srgbClr val="555F6B"/>
+                </a:solidFill>
+                <a:latin typeface="Arial"/>
+                <a:cs typeface="Arial"/>
+                <a:ea typeface="Arial"/>
+              </a:rPr>
+              <a:t>Screenshots of the project's Streamlit dashboard (src/smartcity/dashboard/app.py) captured on 21 Oct 2026; every number on them is read from committed result files. Live NYC feeds were not reachable from the capture machine, so no LIVE view is shown.</a:t>
             </a:r>
           </a:p>
         </p:txBody>
@@ -14344,7 +12408,7 @@
     </p:spTree>
     <p:extLst>
       <p:ext uri="{BB962C8B-B14F-4D97-AF65-F5344CB8AC3E}">
-        <p14:creationId xmlns:p14="http://schemas.microsoft.com/office/powerpoint/2010/main" val="4241540286"/>
+        <p14:creationId xmlns:p14="http://schemas.microsoft.com/office/powerpoint/2010/main" val="3319743353"/>
       </p:ext>
     </p:extLst>
   </p:cSld>
@@ -14359,7 +12423,13 @@
   <p:cSld>
     <p:spTree>
       <p:nvGrpSpPr>
-        <p:cNvPr id="1" name=""/>
+        <p:cNvPr id="1" name="">
+          <a:extLst>
+            <a:ext uri="{FF2B5EF4-FFF2-40B4-BE49-F238E27FC236}">
+              <a16:creationId xmlns:a16="http://schemas.microsoft.com/office/drawing/2014/main" id="{D0E88BB3-2A5B-34AC-B39B-BAE5C65E68D6}"/>
+            </a:ext>
+          </a:extLst>
+        </p:cNvPr>
         <p:cNvGrpSpPr/>
         <p:nvPr/>
       </p:nvGrpSpPr>
@@ -14373,7 +12443,13 @@
       </p:grpSpPr>
       <p:sp>
         <p:nvSpPr>
-          <p:cNvPr id="2" name="Title 1"/>
+          <p:cNvPr id="2" name="Title 1">
+            <a:extLst>
+              <a:ext uri="{FF2B5EF4-FFF2-40B4-BE49-F238E27FC236}">
+                <a16:creationId xmlns:a16="http://schemas.microsoft.com/office/drawing/2014/main" id="{4BD448EB-8A1A-C9A3-3C48-4830472042E6}"/>
+              </a:ext>
+            </a:extLst>
+          </p:cNvPr>
           <p:cNvSpPr>
             <a:spLocks noGrp="1"/>
           </p:cNvSpPr>
@@ -14383,35 +12459,41 @@
         </p:nvSpPr>
         <p:spPr>
           <a:xfrm>
-            <a:off x="640080" y="2819401"/>
-            <a:ext cx="11521440" cy="1219200"/>
+            <a:off x="0" y="0"/>
+            <a:ext cx="12801600" cy="1512146"/>
           </a:xfrm>
+          <a:solidFill>
+            <a:srgbClr val="558ED5"/>
+          </a:solidFill>
         </p:spPr>
         <p:txBody>
           <a:bodyPr>
-            <a:normAutofit fontScale="90000"/>
+            <a:normAutofit/>
           </a:bodyPr>
           <a:lstStyle/>
           <a:p>
             <a:r>
-              <a:rPr lang="en-US" sz="10000" b="1" dirty="0">
-                <a:solidFill>
-                  <a:schemeClr val="tx2">
-                    <a:lumMod val="60000"/>
-                    <a:lumOff val="40000"/>
-                  </a:schemeClr>
+              <a:rPr lang="en-US" sz="3600" b="1" dirty="0">
+                <a:solidFill>
+                  <a:schemeClr val="bg1"/>
                 </a:solidFill>
                 <a:latin typeface="Arial" panose="020B0604020202020204" pitchFamily="34" charset="0"/>
                 <a:cs typeface="Arial" panose="020B0604020202020204" pitchFamily="34" charset="0"/>
               </a:rPr>
-              <a:t>Thank You</a:t>
-            </a:r>
-          </a:p>
-        </p:txBody>
-      </p:sp>
-      <p:sp>
-        <p:nvSpPr>
-          <p:cNvPr id="3" name="Slide Number Placeholder 2"/>
+              <a:t>8. OUTCOME: WORKING DASHBOARD (3/4)</a:t>
+            </a:r>
+          </a:p>
+        </p:txBody>
+      </p:sp>
+      <p:sp>
+        <p:nvSpPr>
+          <p:cNvPr id="4" name="Slide Number Placeholder 3">
+            <a:extLst>
+              <a:ext uri="{FF2B5EF4-FFF2-40B4-BE49-F238E27FC236}">
+                <a16:creationId xmlns:a16="http://schemas.microsoft.com/office/drawing/2014/main" id="{3C63C818-3FBA-7FB8-3369-BCE4AC4BD8EF}"/>
+              </a:ext>
+            </a:extLst>
+          </p:cNvPr>
           <p:cNvSpPr>
             <a:spLocks noGrp="1"/>
           </p:cNvSpPr>
@@ -14426,16 +12508,238 @@
           <a:p>
             <a:fld id="{C02A2637-A5A3-49FA-B214-6E67543099EF}" type="slidenum">
               <a:rPr lang="en-US" smtClean="0"/>
-              <a:t>16</a:t>
+              <a:t>19</a:t>
             </a:fld>
             <a:endParaRPr lang="en-US"/>
+          </a:p>
+        </p:txBody>
+      </p:sp>
+      <p:sp>
+        <p:nvSpPr>
+          <p:cNvPr id="5" name="TextBox 4"/>
+          <p:cNvSpPr txBox="1"/>
+          <p:nvPr/>
+        </p:nvSpPr>
+        <p:spPr>
+          <a:xfrm>
+            <a:off x="502920" y="1600200"/>
+            <a:ext cx="5715000" cy="329184"/>
+          </a:xfrm>
+          <a:prstGeom prst="rect">
+            <a:avLst/>
+          </a:prstGeom>
+          <a:noFill/>
+        </p:spPr>
+        <p:txBody>
+          <a:bodyPr wrap="square" lIns="18288" rIns="18288" tIns="18288" bIns="18288" anchor="b"/>
+          <a:lstStyle/>
+          <a:p>
+            <a:pPr algn="l" marL="0" indent="0">
+              <a:spcAft>
+                <a:spcPts val="0"/>
+              </a:spcAft>
+              <a:buNone/>
+            </a:pPr>
+            <a:r>
+              <a:rPr sz="1400" b="1" i="0">
+                <a:solidFill>
+                  <a:srgbClr val="1F497D"/>
+                </a:solidFill>
+                <a:latin typeface="Arial"/>
+                <a:cs typeface="Arial"/>
+                <a:ea typeface="Arial"/>
+              </a:rPr>
+              <a:t>Explainability (proposed model)</a:t>
+            </a:r>
+            <a:r>
+              <a:rPr sz="1200" b="0" i="0">
+                <a:solidFill>
+                  <a:srgbClr val="555F6B"/>
+                </a:solidFill>
+                <a:latin typeface="Arial"/>
+                <a:cs typeface="Arial"/>
+                <a:ea typeface="Arial"/>
+              </a:rPr>
+              <a:t>   Mode shown: </a:t>
+            </a:r>
+            <a:r>
+              <a:rPr sz="1200" b="1" i="0">
+                <a:solidFill>
+                  <a:srgbClr val="C25E00"/>
+                </a:solidFill>
+                <a:latin typeface="Arial"/>
+                <a:cs typeface="Arial"/>
+                <a:ea typeface="Arial"/>
+              </a:rPr>
+              <a:t>REPLAY</a:t>
+            </a:r>
+          </a:p>
+        </p:txBody>
+      </p:sp>
+      <p:pic>
+        <p:nvPicPr>
+          <p:cNvPr id="6" name="Dashboard: Explainability (proposed model)" descr="explainability.png"/>
+          <p:cNvPicPr>
+            <a:picLocks noChangeAspect="1"/>
+          </p:cNvPicPr>
+          <p:nvPr/>
+        </p:nvPicPr>
+        <p:blipFill>
+          <a:blip r:embed="rId2"/>
+          <a:stretch>
+            <a:fillRect/>
+          </a:stretch>
+        </p:blipFill>
+        <p:spPr>
+          <a:xfrm>
+            <a:off x="502920" y="1984248"/>
+            <a:ext cx="5715000" cy="4366516"/>
+          </a:xfrm>
+          <a:prstGeom prst="rect">
+            <a:avLst/>
+          </a:prstGeom>
+          <a:ln w="12700">
+            <a:solidFill>
+              <a:srgbClr val="C9D3E0"/>
+            </a:solidFill>
+          </a:ln>
+        </p:spPr>
+      </p:pic>
+      <p:sp>
+        <p:nvSpPr>
+          <p:cNvPr id="7" name="TextBox 6"/>
+          <p:cNvSpPr txBox="1"/>
+          <p:nvPr/>
+        </p:nvSpPr>
+        <p:spPr>
+          <a:xfrm>
+            <a:off x="6583680" y="1600200"/>
+            <a:ext cx="5715000" cy="329184"/>
+          </a:xfrm>
+          <a:prstGeom prst="rect">
+            <a:avLst/>
+          </a:prstGeom>
+          <a:noFill/>
+        </p:spPr>
+        <p:txBody>
+          <a:bodyPr wrap="square" lIns="18288" rIns="18288" tIns="18288" bIns="18288" anchor="b"/>
+          <a:lstStyle/>
+          <a:p>
+            <a:pPr algn="l" marL="0" indent="0">
+              <a:spcAft>
+                <a:spcPts val="0"/>
+              </a:spcAft>
+              <a:buNone/>
+            </a:pPr>
+            <a:r>
+              <a:rPr sz="1400" b="1" i="0">
+                <a:solidFill>
+                  <a:srgbClr val="1F497D"/>
+                </a:solidFill>
+                <a:latin typeface="Arial"/>
+                <a:cs typeface="Arial"/>
+                <a:ea typeface="Arial"/>
+              </a:rPr>
+              <a:t>Agent trace &amp; advisory</a:t>
+            </a:r>
+            <a:r>
+              <a:rPr sz="1200" b="0" i="0">
+                <a:solidFill>
+                  <a:srgbClr val="555F6B"/>
+                </a:solidFill>
+                <a:latin typeface="Arial"/>
+                <a:cs typeface="Arial"/>
+                <a:ea typeface="Arial"/>
+              </a:rPr>
+              <a:t>   Mode shown: </a:t>
+            </a:r>
+            <a:r>
+              <a:rPr sz="1200" b="1" i="0">
+                <a:solidFill>
+                  <a:srgbClr val="C25E00"/>
+                </a:solidFill>
+                <a:latin typeface="Arial"/>
+                <a:cs typeface="Arial"/>
+                <a:ea typeface="Arial"/>
+              </a:rPr>
+              <a:t>REPLAY</a:t>
+            </a:r>
+          </a:p>
+        </p:txBody>
+      </p:sp>
+      <p:pic>
+        <p:nvPicPr>
+          <p:cNvPr id="8" name="Dashboard: Agent trace &amp; advisory" descr="agent.png"/>
+          <p:cNvPicPr>
+            <a:picLocks noChangeAspect="1"/>
+          </p:cNvPicPr>
+          <p:nvPr/>
+        </p:nvPicPr>
+        <p:blipFill>
+          <a:blip r:embed="rId3"/>
+          <a:stretch>
+            <a:fillRect/>
+          </a:stretch>
+        </p:blipFill>
+        <p:spPr>
+          <a:xfrm>
+            <a:off x="6583680" y="1984248"/>
+            <a:ext cx="5715000" cy="4366516"/>
+          </a:xfrm>
+          <a:prstGeom prst="rect">
+            <a:avLst/>
+          </a:prstGeom>
+          <a:ln w="12700">
+            <a:solidFill>
+              <a:srgbClr val="C9D3E0"/>
+            </a:solidFill>
+          </a:ln>
+        </p:spPr>
+      </p:pic>
+      <p:sp>
+        <p:nvSpPr>
+          <p:cNvPr id="9" name="TextBox 8"/>
+          <p:cNvSpPr txBox="1"/>
+          <p:nvPr/>
+        </p:nvSpPr>
+        <p:spPr>
+          <a:xfrm>
+            <a:off x="502920" y="6423916"/>
+            <a:ext cx="11795760" cy="457200"/>
+          </a:xfrm>
+          <a:prstGeom prst="rect">
+            <a:avLst/>
+          </a:prstGeom>
+          <a:noFill/>
+        </p:spPr>
+        <p:txBody>
+          <a:bodyPr wrap="square" lIns="18288" rIns="18288" tIns="18288" bIns="18288" anchor="t"/>
+          <a:lstStyle/>
+          <a:p>
+            <a:pPr algn="l" marL="0" indent="0">
+              <a:spcAft>
+                <a:spcPts val="0"/>
+              </a:spcAft>
+              <a:buNone/>
+            </a:pPr>
+            <a:r>
+              <a:rPr sz="1100" b="0" i="0">
+                <a:solidFill>
+                  <a:srgbClr val="555F6B"/>
+                </a:solidFill>
+                <a:latin typeface="Arial"/>
+                <a:cs typeface="Arial"/>
+                <a:ea typeface="Arial"/>
+              </a:rPr>
+              <a:t>Screenshots of the project's Streamlit dashboard (src/smartcity/dashboard/app.py) captured on 21 Oct 2026; every number on them is read from committed result files. Live NYC feeds were not reachable from the capture machine, so no LIVE view is shown.</a:t>
+            </a:r>
           </a:p>
         </p:txBody>
       </p:sp>
     </p:spTree>
     <p:extLst>
       <p:ext uri="{BB962C8B-B14F-4D97-AF65-F5344CB8AC3E}">
-        <p14:creationId xmlns:p14="http://schemas.microsoft.com/office/powerpoint/2010/main" val="2750398038"/>
+        <p14:creationId xmlns:p14="http://schemas.microsoft.com/office/powerpoint/2010/main" val="3319743353"/>
       </p:ext>
     </p:extLst>
   </p:cSld>
@@ -14850,7 +13154,7 @@
                 <a:latin typeface="Arial" panose="020B0604020202020204" pitchFamily="34" charset="0"/>
                 <a:cs typeface="Arial" panose="020B0604020202020204" pitchFamily="34" charset="0"/>
               </a:rPr>
-              <a:t>TIMELINE / GANTT CHART</a:t>
+              <a:t>RESULTS &amp; OUTCOMES</a:t>
             </a:r>
           </a:p>
           <a:p>
@@ -14872,6 +13176,3100 @@
     <p:extLst>
       <p:ext uri="{BB962C8B-B14F-4D97-AF65-F5344CB8AC3E}">
         <p14:creationId xmlns:p14="http://schemas.microsoft.com/office/powerpoint/2010/main" val="2490154017"/>
+      </p:ext>
+    </p:extLst>
+  </p:cSld>
+  <p:clrMapOvr>
+    <a:masterClrMapping/>
+  </p:clrMapOvr>
+</p:sld>
+</file>
+
+<file path=ppt/slides/slide20.xml><?xml version="1.0" encoding="utf-8"?>
+<p:sld xmlns:a="http://schemas.openxmlformats.org/drawingml/2006/main" xmlns:r="http://schemas.openxmlformats.org/officeDocument/2006/relationships" xmlns:p="http://schemas.openxmlformats.org/presentationml/2006/main">
+  <p:cSld>
+    <p:spTree>
+      <p:nvGrpSpPr>
+        <p:cNvPr id="1" name="">
+          <a:extLst>
+            <a:ext uri="{FF2B5EF4-FFF2-40B4-BE49-F238E27FC236}">
+              <a16:creationId xmlns:a16="http://schemas.microsoft.com/office/drawing/2014/main" id="{D0E88BB3-2A5B-34AC-B39B-BAE5C65E68D6}"/>
+            </a:ext>
+          </a:extLst>
+        </p:cNvPr>
+        <p:cNvGrpSpPr/>
+        <p:nvPr/>
+      </p:nvGrpSpPr>
+      <p:grpSpPr>
+        <a:xfrm>
+          <a:off x="0" y="0"/>
+          <a:ext cx="0" cy="0"/>
+          <a:chOff x="0" y="0"/>
+          <a:chExt cx="0" cy="0"/>
+        </a:xfrm>
+      </p:grpSpPr>
+      <p:sp>
+        <p:nvSpPr>
+          <p:cNvPr id="2" name="Title 1">
+            <a:extLst>
+              <a:ext uri="{FF2B5EF4-FFF2-40B4-BE49-F238E27FC236}">
+                <a16:creationId xmlns:a16="http://schemas.microsoft.com/office/drawing/2014/main" id="{4BD448EB-8A1A-C9A3-3C48-4830472042E6}"/>
+              </a:ext>
+            </a:extLst>
+          </p:cNvPr>
+          <p:cNvSpPr>
+            <a:spLocks noGrp="1"/>
+          </p:cNvSpPr>
+          <p:nvPr>
+            <p:ph type="title"/>
+          </p:nvPr>
+        </p:nvSpPr>
+        <p:spPr>
+          <a:xfrm>
+            <a:off x="0" y="0"/>
+            <a:ext cx="12801600" cy="1512146"/>
+          </a:xfrm>
+          <a:solidFill>
+            <a:srgbClr val="558ED5"/>
+          </a:solidFill>
+        </p:spPr>
+        <p:txBody>
+          <a:bodyPr>
+            <a:normAutofit/>
+          </a:bodyPr>
+          <a:lstStyle/>
+          <a:p>
+            <a:r>
+              <a:rPr lang="en-US" sz="3600" b="1" dirty="0">
+                <a:solidFill>
+                  <a:schemeClr val="bg1"/>
+                </a:solidFill>
+                <a:latin typeface="Arial" panose="020B0604020202020204" pitchFamily="34" charset="0"/>
+                <a:cs typeface="Arial" panose="020B0604020202020204" pitchFamily="34" charset="0"/>
+              </a:rPr>
+              <a:t>8. OUTCOME: WORKING DASHBOARD (4/4)</a:t>
+            </a:r>
+          </a:p>
+        </p:txBody>
+      </p:sp>
+      <p:sp>
+        <p:nvSpPr>
+          <p:cNvPr id="4" name="Slide Number Placeholder 3">
+            <a:extLst>
+              <a:ext uri="{FF2B5EF4-FFF2-40B4-BE49-F238E27FC236}">
+                <a16:creationId xmlns:a16="http://schemas.microsoft.com/office/drawing/2014/main" id="{3C63C818-3FBA-7FB8-3369-BCE4AC4BD8EF}"/>
+              </a:ext>
+            </a:extLst>
+          </p:cNvPr>
+          <p:cNvSpPr>
+            <a:spLocks noGrp="1"/>
+          </p:cNvSpPr>
+          <p:nvPr>
+            <p:ph type="sldNum" sz="quarter" idx="12"/>
+          </p:nvPr>
+        </p:nvSpPr>
+        <p:spPr/>
+        <p:txBody>
+          <a:bodyPr/>
+          <a:lstStyle/>
+          <a:p>
+            <a:fld id="{C02A2637-A5A3-49FA-B214-6E67543099EF}" type="slidenum">
+              <a:rPr lang="en-US" smtClean="0"/>
+              <a:t>20</a:t>
+            </a:fld>
+            <a:endParaRPr lang="en-US"/>
+          </a:p>
+        </p:txBody>
+      </p:sp>
+      <p:sp>
+        <p:nvSpPr>
+          <p:cNvPr id="5" name="TextBox 4"/>
+          <p:cNvSpPr txBox="1"/>
+          <p:nvPr/>
+        </p:nvSpPr>
+        <p:spPr>
+          <a:xfrm>
+            <a:off x="502920" y="1600200"/>
+            <a:ext cx="5715000" cy="329184"/>
+          </a:xfrm>
+          <a:prstGeom prst="rect">
+            <a:avLst/>
+          </a:prstGeom>
+          <a:noFill/>
+        </p:spPr>
+        <p:txBody>
+          <a:bodyPr wrap="square" lIns="18288" rIns="18288" tIns="18288" bIns="18288" anchor="b"/>
+          <a:lstStyle/>
+          <a:p>
+            <a:pPr algn="l" marL="0" indent="0">
+              <a:spcAft>
+                <a:spcPts val="0"/>
+              </a:spcAft>
+              <a:buNone/>
+            </a:pPr>
+            <a:r>
+              <a:rPr sz="1400" b="1" i="0">
+                <a:solidFill>
+                  <a:srgbClr val="1F497D"/>
+                </a:solidFill>
+                <a:latin typeface="Arial"/>
+                <a:cs typeface="Arial"/>
+                <a:ea typeface="Arial"/>
+              </a:rPr>
+              <a:t>SUMO comparisons</a:t>
+            </a:r>
+            <a:r>
+              <a:rPr sz="1200" b="0" i="0">
+                <a:solidFill>
+                  <a:srgbClr val="555F6B"/>
+                </a:solidFill>
+                <a:latin typeface="Arial"/>
+                <a:cs typeface="Arial"/>
+                <a:ea typeface="Arial"/>
+              </a:rPr>
+              <a:t>   Mode shown: </a:t>
+            </a:r>
+            <a:r>
+              <a:rPr sz="1200" b="1" i="0">
+                <a:solidFill>
+                  <a:srgbClr val="6A3FA0"/>
+                </a:solidFill>
+                <a:latin typeface="Arial"/>
+                <a:cs typeface="Arial"/>
+                <a:ea typeface="Arial"/>
+              </a:rPr>
+              <a:t>SIMULATION</a:t>
+            </a:r>
+          </a:p>
+        </p:txBody>
+      </p:sp>
+      <p:pic>
+        <p:nvPicPr>
+          <p:cNvPr id="6" name="Dashboard: SUMO comparisons" descr="sumo.png"/>
+          <p:cNvPicPr>
+            <a:picLocks noChangeAspect="1"/>
+          </p:cNvPicPr>
+          <p:nvPr/>
+        </p:nvPicPr>
+        <p:blipFill>
+          <a:blip r:embed="rId2"/>
+          <a:stretch>
+            <a:fillRect/>
+          </a:stretch>
+        </p:blipFill>
+        <p:spPr>
+          <a:xfrm>
+            <a:off x="502920" y="1984248"/>
+            <a:ext cx="5715000" cy="4366516"/>
+          </a:xfrm>
+          <a:prstGeom prst="rect">
+            <a:avLst/>
+          </a:prstGeom>
+          <a:ln w="12700">
+            <a:solidFill>
+              <a:srgbClr val="C9D3E0"/>
+            </a:solidFill>
+          </a:ln>
+        </p:spPr>
+      </p:pic>
+      <p:sp>
+        <p:nvSpPr>
+          <p:cNvPr id="7" name="TextBox 6"/>
+          <p:cNvSpPr txBox="1"/>
+          <p:nvPr/>
+        </p:nvSpPr>
+        <p:spPr>
+          <a:xfrm>
+            <a:off x="502920" y="6423916"/>
+            <a:ext cx="11795760" cy="457200"/>
+          </a:xfrm>
+          <a:prstGeom prst="rect">
+            <a:avLst/>
+          </a:prstGeom>
+          <a:noFill/>
+        </p:spPr>
+        <p:txBody>
+          <a:bodyPr wrap="square" lIns="18288" rIns="18288" tIns="18288" bIns="18288" anchor="t"/>
+          <a:lstStyle/>
+          <a:p>
+            <a:pPr algn="l" marL="0" indent="0">
+              <a:spcAft>
+                <a:spcPts val="0"/>
+              </a:spcAft>
+              <a:buNone/>
+            </a:pPr>
+            <a:r>
+              <a:rPr sz="1100" b="0" i="0">
+                <a:solidFill>
+                  <a:srgbClr val="555F6B"/>
+                </a:solidFill>
+                <a:latin typeface="Arial"/>
+                <a:cs typeface="Arial"/>
+                <a:ea typeface="Arial"/>
+              </a:rPr>
+              <a:t>Screenshots of the project's Streamlit dashboard (src/smartcity/dashboard/app.py) captured on 21 Oct 2026; every number on them is read from committed result files. Live NYC feeds were not reachable from the capture machine, so no LIVE view is shown.</a:t>
+            </a:r>
+          </a:p>
+        </p:txBody>
+      </p:sp>
+      <p:sp>
+        <p:nvSpPr>
+          <p:cNvPr id="8" name="Dashboard notes"/>
+          <p:cNvSpPr/>
+          <p:nvPr/>
+        </p:nvSpPr>
+        <p:spPr>
+          <a:xfrm>
+            <a:off x="6583680" y="1984248"/>
+            <a:ext cx="5715000" cy="4370832"/>
+          </a:xfrm>
+          <a:prstGeom prst="roundRect">
+            <a:avLst>
+              <a:gd name="adj" fmla="val 8000"/>
+            </a:avLst>
+          </a:prstGeom>
+          <a:solidFill>
+            <a:srgbClr val="E4ECF7"/>
+          </a:solidFill>
+          <a:ln>
+            <a:noFill/>
+          </a:ln>
+          <a:effectLst/>
+        </p:spPr>
+        <p:style>
+          <a:lnRef idx="1">
+            <a:schemeClr val="accent1"/>
+          </a:lnRef>
+          <a:fillRef idx="3">
+            <a:schemeClr val="accent1"/>
+          </a:fillRef>
+          <a:effectRef idx="2">
+            <a:schemeClr val="accent1"/>
+          </a:effectRef>
+          <a:fontRef idx="minor">
+            <a:schemeClr val="lt1"/>
+          </a:fontRef>
+        </p:style>
+        <p:txBody>
+          <a:bodyPr rtlCol="0" anchor="t" lIns="164592" rIns="164592" tIns="164592" bIns="164592" wrap="square"/>
+          <a:lstStyle/>
+          <a:p>
+            <a:pPr algn="l" marL="0" indent="0">
+              <a:spcAft>
+                <a:spcPts val="800"/>
+              </a:spcAft>
+              <a:buNone/>
+            </a:pPr>
+            <a:r>
+              <a:rPr sz="1700" b="1" i="0">
+                <a:solidFill>
+                  <a:srgbClr val="1F497D"/>
+                </a:solidFill>
+                <a:latin typeface="Arial"/>
+                <a:cs typeface="Arial"/>
+                <a:ea typeface="Arial"/>
+              </a:rPr>
+              <a:t>What the dashboard shows, and what it does not</a:t>
+            </a:r>
+          </a:p>
+          <a:p>
+            <a:pPr algn="l" marL="274320" indent="-228600">
+              <a:spcAft>
+                <a:spcPts val="800"/>
+              </a:spcAft>
+              <a:buFont typeface="Arial"/>
+              <a:buChar char="•"/>
+            </a:pPr>
+            <a:r>
+              <a:rPr sz="1400" b="0" i="0">
+                <a:solidFill>
+                  <a:srgbClr val="1A1A1A"/>
+                </a:solidFill>
+                <a:latin typeface="Arial"/>
+                <a:cs typeface="Arial"/>
+                <a:ea typeface="Arial"/>
+              </a:rPr>
+              <a:t>The SUMO page states the first 45-run comparison is SUPERSEDED and the controller comparison NOT RUN, so it shows no simulated gain.</a:t>
+            </a:r>
+          </a:p>
+          <a:p>
+            <a:pPr algn="l" marL="274320" indent="-228600">
+              <a:spcAft>
+                <a:spcPts val="800"/>
+              </a:spcAft>
+              <a:buFont typeface="Arial"/>
+              <a:buChar char="•"/>
+            </a:pPr>
+            <a:r>
+              <a:rPr sz="1400" b="0" i="0">
+                <a:solidFill>
+                  <a:srgbClr val="1A1A1A"/>
+                </a:solidFill>
+                <a:latin typeface="Arial"/>
+                <a:cs typeface="Arial"/>
+                <a:ea typeface="Arial"/>
+              </a:rPr>
+              <a:t>Agent traces end in PENDING_HUMAN_REVIEW, DEFER or REJECT; approval is for simulation only and nothing is sent to real signals.</a:t>
+            </a:r>
+          </a:p>
+          <a:p>
+            <a:pPr algn="l" marL="274320" indent="-228600">
+              <a:spcAft>
+                <a:spcPts val="800"/>
+              </a:spcAft>
+              <a:buFont typeface="Arial"/>
+              <a:buChar char="•"/>
+            </a:pPr>
+            <a:r>
+              <a:rPr sz="1400" b="0" i="0">
+                <a:solidFill>
+                  <a:srgbClr val="1A1A1A"/>
+                </a:solidFill>
+                <a:latin typeface="Arial"/>
+                <a:cs typeface="Arial"/>
+                <a:ea typeface="Arial"/>
+              </a:rPr>
+              <a:t>Not captured yet: the Multi-horizon forecast and Traffic map pages need the trained model file and processed data held on the training laptop; they will be captured there for the final version.</a:t>
+            </a:r>
+          </a:p>
+          <a:p>
+            <a:pPr algn="l" marL="274320" indent="-228600">
+              <a:spcAft>
+                <a:spcPts val="800"/>
+              </a:spcAft>
+              <a:buFont typeface="Arial"/>
+              <a:buChar char="•"/>
+            </a:pPr>
+            <a:r>
+              <a:rPr sz="1400" b="0" i="0">
+                <a:solidFill>
+                  <a:srgbClr val="1A1A1A"/>
+                </a:solidFill>
+                <a:latin typeface="Arial"/>
+                <a:cs typeface="Arial"/>
+                <a:ea typeface="Arial"/>
+              </a:rPr>
+              <a:t>The Experiment results page shows the seed-42 runs; the three-seed results are on slide 21.</a:t>
+            </a:r>
+          </a:p>
+        </p:txBody>
+      </p:sp>
+    </p:spTree>
+    <p:extLst>
+      <p:ext uri="{BB962C8B-B14F-4D97-AF65-F5344CB8AC3E}">
+        <p14:creationId xmlns:p14="http://schemas.microsoft.com/office/powerpoint/2010/main" val="3319743353"/>
+      </p:ext>
+    </p:extLst>
+  </p:cSld>
+  <p:clrMapOvr>
+    <a:masterClrMapping/>
+  </p:clrMapOvr>
+</p:sld>
+</file>
+
+<file path=ppt/slides/slide21.xml><?xml version="1.0" encoding="utf-8"?>
+<p:sld xmlns:a="http://schemas.openxmlformats.org/drawingml/2006/main" xmlns:r="http://schemas.openxmlformats.org/officeDocument/2006/relationships" xmlns:p="http://schemas.openxmlformats.org/presentationml/2006/main">
+  <p:cSld>
+    <p:spTree>
+      <p:nvGrpSpPr>
+        <p:cNvPr id="1" name=""/>
+        <p:cNvGrpSpPr/>
+        <p:nvPr/>
+      </p:nvGrpSpPr>
+      <p:grpSpPr>
+        <a:xfrm>
+          <a:off x="0" y="0"/>
+          <a:ext cx="0" cy="0"/>
+          <a:chOff x="0" y="0"/>
+          <a:chExt cx="0" cy="0"/>
+        </a:xfrm>
+      </p:grpSpPr>
+      <p:sp>
+        <p:nvSpPr>
+          <p:cNvPr id="2" name="Title 1"/>
+          <p:cNvSpPr>
+            <a:spLocks noGrp="1"/>
+          </p:cNvSpPr>
+          <p:nvPr>
+            <p:ph type="title"/>
+          </p:nvPr>
+        </p:nvSpPr>
+        <p:spPr>
+          <a:xfrm>
+            <a:off x="0" y="0"/>
+            <a:ext cx="12801600" cy="1512146"/>
+          </a:xfrm>
+          <a:solidFill>
+            <a:srgbClr val="558ED5"/>
+          </a:solidFill>
+        </p:spPr>
+        <p:txBody>
+          <a:bodyPr>
+            <a:normAutofit/>
+          </a:bodyPr>
+          <a:lstStyle/>
+          <a:p>
+            <a:r>
+              <a:rPr lang="en-US" sz="3600" b="1" dirty="0">
+                <a:solidFill>
+                  <a:schemeClr val="bg1"/>
+                </a:solidFill>
+                <a:latin typeface="Arial" panose="020B0604020202020204" pitchFamily="34" charset="0"/>
+                <a:cs typeface="Arial" panose="020B0604020202020204" pitchFamily="34" charset="0"/>
+              </a:rPr>
+              <a:t>9. RESULTS &amp; OUTCOMES</a:t>
+            </a:r>
+          </a:p>
+        </p:txBody>
+      </p:sp>
+      <p:sp>
+        <p:nvSpPr>
+          <p:cNvPr id="4" name="Slide Number Placeholder 3"/>
+          <p:cNvSpPr>
+            <a:spLocks noGrp="1"/>
+          </p:cNvSpPr>
+          <p:nvPr>
+            <p:ph type="sldNum" sz="quarter" idx="12"/>
+          </p:nvPr>
+        </p:nvSpPr>
+        <p:spPr/>
+        <p:txBody>
+          <a:bodyPr/>
+          <a:lstStyle/>
+          <a:p>
+            <a:fld id="{C02A2637-A5A3-49FA-B214-6E67543099EF}" type="slidenum">
+              <a:rPr lang="en-US" smtClean="0"/>
+              <a:t>21</a:t>
+            </a:fld>
+            <a:endParaRPr lang="en-US"/>
+          </a:p>
+        </p:txBody>
+      </p:sp>
+      <p:sp>
+        <p:nvSpPr>
+          <p:cNvPr id="5" name="TextBox 4"/>
+          <p:cNvSpPr txBox="1"/>
+          <p:nvPr/>
+        </p:nvSpPr>
+        <p:spPr>
+          <a:xfrm>
+            <a:off x="502920" y="1600200"/>
+            <a:ext cx="11795760" cy="365760"/>
+          </a:xfrm>
+          <a:prstGeom prst="rect">
+            <a:avLst/>
+          </a:prstGeom>
+          <a:noFill/>
+        </p:spPr>
+        <p:txBody>
+          <a:bodyPr wrap="square" lIns="18288" rIns="18288" tIns="18288" bIns="18288" anchor="t"/>
+          <a:lstStyle/>
+          <a:p>
+            <a:pPr algn="l" marL="0" indent="0">
+              <a:spcAft>
+                <a:spcPts val="0"/>
+              </a:spcAft>
+              <a:buNone/>
+            </a:pPr>
+            <a:r>
+              <a:rPr sz="1400" b="0" i="0">
+                <a:solidFill>
+                  <a:srgbClr val="555F6B"/>
+                </a:solidFill>
+                <a:latin typeface="Arial"/>
+                <a:cs typeface="Arial"/>
+                <a:ea typeface="Arial"/>
+              </a:rPr>
+              <a:t>Held-out test period 6 Sep – 20 Oct 2026, 16 Manhattan links; advisory and retrieval results from the REPLAY workflow runs</a:t>
+            </a:r>
+          </a:p>
+        </p:txBody>
+      </p:sp>
+      <p:sp>
+        <p:nvSpPr>
+          <p:cNvPr id="6" name="TextBox 5"/>
+          <p:cNvSpPr txBox="1"/>
+          <p:nvPr/>
+        </p:nvSpPr>
+        <p:spPr>
+          <a:xfrm>
+            <a:off x="502920" y="2011680"/>
+            <a:ext cx="6035040" cy="365760"/>
+          </a:xfrm>
+          <a:prstGeom prst="rect">
+            <a:avLst/>
+          </a:prstGeom>
+          <a:noFill/>
+        </p:spPr>
+        <p:txBody>
+          <a:bodyPr wrap="square" lIns="18288" rIns="18288" tIns="18288" bIns="18288" anchor="t"/>
+          <a:lstStyle/>
+          <a:p>
+            <a:pPr algn="l" marL="0" indent="0">
+              <a:spcAft>
+                <a:spcPts val="0"/>
+              </a:spcAft>
+              <a:buNone/>
+            </a:pPr>
+            <a:r>
+              <a:rPr sz="1600" b="1" i="0">
+                <a:solidFill>
+                  <a:srgbClr val="1F497D"/>
+                </a:solidFill>
+                <a:latin typeface="Arial"/>
+                <a:cs typeface="Arial"/>
+                <a:ea typeface="Arial"/>
+              </a:rPr>
+              <a:t>Test MAE (mph): mean ± s.d. over seeds 42, 1 and 2</a:t>
+            </a:r>
+          </a:p>
+        </p:txBody>
+      </p:sp>
+      <p:graphicFrame>
+        <p:nvGraphicFramePr>
+          <p:cNvPr id="7" name="Three-seed results"/>
+          <p:cNvGraphicFramePr>
+            <a:graphicFrameLocks noGrp="1"/>
+          </p:cNvGraphicFramePr>
+          <p:nvPr/>
+        </p:nvGraphicFramePr>
+        <p:xfrm>
+          <a:off x="502920" y="2423160"/>
+          <a:ext cx="6035040" cy="2468880"/>
+        </p:xfrm>
+        <a:graphic>
+          <a:graphicData uri="http://schemas.openxmlformats.org/drawingml/2006/table">
+            <a:tbl>
+              <a:tblPr firstRow="1" bandRow="1">
+                <a:tableStyleId>{5C22544A-7EE6-4342-B048-85BDC9FD1C3A}</a:tableStyleId>
+              </a:tblPr>
+              <a:tblGrid>
+                <a:gridCol w="2606040"/>
+                <a:gridCol w="1143000"/>
+                <a:gridCol w="1143000"/>
+                <a:gridCol w="1143000"/>
+              </a:tblGrid>
+              <a:tr h="411480">
+                <a:tc>
+                  <a:txBody>
+                    <a:bodyPr wrap="square"/>
+                    <a:lstStyle/>
+                    <a:p>
+                      <a:pPr algn="l" marL="0" indent="0">
+                        <a:spcAft>
+                          <a:spcPts val="0"/>
+                        </a:spcAft>
+                        <a:buNone/>
+                      </a:pPr>
+                      <a:r>
+                        <a:rPr sz="1400" b="1" i="0">
+                          <a:solidFill>
+                            <a:srgbClr val="FFFFFF"/>
+                          </a:solidFill>
+                          <a:latin typeface="Arial"/>
+                          <a:cs typeface="Arial"/>
+                          <a:ea typeface="Arial"/>
+                        </a:rPr>
+                        <a:t>Model</a:t>
+                      </a:r>
+                    </a:p>
+                  </a:txBody>
+                  <a:tcPr anchor="ctr">
+                    <a:solidFill>
+                      <a:srgbClr val="1F497D"/>
+                    </a:solidFill>
+                  </a:tcPr>
+                </a:tc>
+                <a:tc>
+                  <a:txBody>
+                    <a:bodyPr wrap="square"/>
+                    <a:lstStyle/>
+                    <a:p>
+                      <a:pPr algn="ctr" marL="0" indent="0">
+                        <a:spcAft>
+                          <a:spcPts val="0"/>
+                        </a:spcAft>
+                        <a:buNone/>
+                      </a:pPr>
+                      <a:r>
+                        <a:rPr sz="1400" b="1" i="0">
+                          <a:solidFill>
+                            <a:srgbClr val="FFFFFF"/>
+                          </a:solidFill>
+                          <a:latin typeface="Arial"/>
+                          <a:cs typeface="Arial"/>
+                          <a:ea typeface="Arial"/>
+                        </a:rPr>
+                        <a:t>15 min</a:t>
+                      </a:r>
+                    </a:p>
+                  </a:txBody>
+                  <a:tcPr anchor="ctr">
+                    <a:solidFill>
+                      <a:srgbClr val="1F497D"/>
+                    </a:solidFill>
+                  </a:tcPr>
+                </a:tc>
+                <a:tc>
+                  <a:txBody>
+                    <a:bodyPr wrap="square"/>
+                    <a:lstStyle/>
+                    <a:p>
+                      <a:pPr algn="ctr" marL="0" indent="0">
+                        <a:spcAft>
+                          <a:spcPts val="0"/>
+                        </a:spcAft>
+                        <a:buNone/>
+                      </a:pPr>
+                      <a:r>
+                        <a:rPr sz="1400" b="1" i="0">
+                          <a:solidFill>
+                            <a:srgbClr val="FFFFFF"/>
+                          </a:solidFill>
+                          <a:latin typeface="Arial"/>
+                          <a:cs typeface="Arial"/>
+                          <a:ea typeface="Arial"/>
+                        </a:rPr>
+                        <a:t>30 min</a:t>
+                      </a:r>
+                    </a:p>
+                  </a:txBody>
+                  <a:tcPr anchor="ctr">
+                    <a:solidFill>
+                      <a:srgbClr val="1F497D"/>
+                    </a:solidFill>
+                  </a:tcPr>
+                </a:tc>
+                <a:tc>
+                  <a:txBody>
+                    <a:bodyPr wrap="square"/>
+                    <a:lstStyle/>
+                    <a:p>
+                      <a:pPr algn="ctr" marL="0" indent="0">
+                        <a:spcAft>
+                          <a:spcPts val="0"/>
+                        </a:spcAft>
+                        <a:buNone/>
+                      </a:pPr>
+                      <a:r>
+                        <a:rPr sz="1400" b="1" i="0">
+                          <a:solidFill>
+                            <a:srgbClr val="FFFFFF"/>
+                          </a:solidFill>
+                          <a:latin typeface="Arial"/>
+                          <a:cs typeface="Arial"/>
+                          <a:ea typeface="Arial"/>
+                        </a:rPr>
+                        <a:t>60 min</a:t>
+                      </a:r>
+                    </a:p>
+                  </a:txBody>
+                  <a:tcPr anchor="ctr">
+                    <a:solidFill>
+                      <a:srgbClr val="1F497D"/>
+                    </a:solidFill>
+                  </a:tcPr>
+                </a:tc>
+              </a:tr>
+              <a:tr h="411480">
+                <a:tc>
+                  <a:txBody>
+                    <a:bodyPr wrap="square"/>
+                    <a:lstStyle/>
+                    <a:p>
+                      <a:pPr algn="l" marL="0" indent="0">
+                        <a:spcAft>
+                          <a:spcPts val="0"/>
+                        </a:spcAft>
+                        <a:buNone/>
+                      </a:pPr>
+                      <a:r>
+                        <a:rPr sz="1400" b="1" i="0">
+                          <a:solidFill>
+                            <a:srgbClr val="1A1A1A"/>
+                          </a:solidFill>
+                          <a:latin typeface="Arial"/>
+                          <a:cs typeface="Arial"/>
+                          <a:ea typeface="Arial"/>
+                        </a:rPr>
+                        <a:t>Proposed GATv2–Transformer</a:t>
+                      </a:r>
+                    </a:p>
+                  </a:txBody>
+                  <a:tcPr anchor="ctr">
+                    <a:solidFill>
+                      <a:srgbClr val="E4ECF7"/>
+                    </a:solidFill>
+                  </a:tcPr>
+                </a:tc>
+                <a:tc>
+                  <a:txBody>
+                    <a:bodyPr wrap="square"/>
+                    <a:lstStyle/>
+                    <a:p>
+                      <a:pPr algn="ctr" marL="0" indent="0">
+                        <a:spcAft>
+                          <a:spcPts val="0"/>
+                        </a:spcAft>
+                        <a:buNone/>
+                      </a:pPr>
+                      <a:r>
+                        <a:rPr sz="1400" b="1" i="0">
+                          <a:solidFill>
+                            <a:srgbClr val="1A1A1A"/>
+                          </a:solidFill>
+                          <a:latin typeface="Arial"/>
+                          <a:cs typeface="Arial"/>
+                          <a:ea typeface="Arial"/>
+                        </a:rPr>
+                        <a:t>4.69 ± 0.06</a:t>
+                      </a:r>
+                    </a:p>
+                  </a:txBody>
+                  <a:tcPr anchor="ctr">
+                    <a:solidFill>
+                      <a:srgbClr val="E4ECF7"/>
+                    </a:solidFill>
+                  </a:tcPr>
+                </a:tc>
+                <a:tc>
+                  <a:txBody>
+                    <a:bodyPr wrap="square"/>
+                    <a:lstStyle/>
+                    <a:p>
+                      <a:pPr algn="ctr" marL="0" indent="0">
+                        <a:spcAft>
+                          <a:spcPts val="0"/>
+                        </a:spcAft>
+                        <a:buNone/>
+                      </a:pPr>
+                      <a:r>
+                        <a:rPr sz="1400" b="1" i="0">
+                          <a:solidFill>
+                            <a:srgbClr val="1A1A1A"/>
+                          </a:solidFill>
+                          <a:latin typeface="Arial"/>
+                          <a:cs typeface="Arial"/>
+                          <a:ea typeface="Arial"/>
+                        </a:rPr>
+                        <a:t>5.34 ± 0.03</a:t>
+                      </a:r>
+                    </a:p>
+                  </a:txBody>
+                  <a:tcPr anchor="ctr">
+                    <a:solidFill>
+                      <a:srgbClr val="E4ECF7"/>
+                    </a:solidFill>
+                  </a:tcPr>
+                </a:tc>
+                <a:tc>
+                  <a:txBody>
+                    <a:bodyPr wrap="square"/>
+                    <a:lstStyle/>
+                    <a:p>
+                      <a:pPr algn="ctr" marL="0" indent="0">
+                        <a:spcAft>
+                          <a:spcPts val="0"/>
+                        </a:spcAft>
+                        <a:buNone/>
+                      </a:pPr>
+                      <a:r>
+                        <a:rPr sz="1400" b="1" i="0">
+                          <a:solidFill>
+                            <a:srgbClr val="1A1A1A"/>
+                          </a:solidFill>
+                          <a:latin typeface="Arial"/>
+                          <a:cs typeface="Arial"/>
+                          <a:ea typeface="Arial"/>
+                        </a:rPr>
+                        <a:t>6.15 ± 0.02</a:t>
+                      </a:r>
+                    </a:p>
+                  </a:txBody>
+                  <a:tcPr anchor="ctr">
+                    <a:solidFill>
+                      <a:srgbClr val="E4ECF7"/>
+                    </a:solidFill>
+                  </a:tcPr>
+                </a:tc>
+              </a:tr>
+              <a:tr h="411480">
+                <a:tc>
+                  <a:txBody>
+                    <a:bodyPr wrap="square"/>
+                    <a:lstStyle/>
+                    <a:p>
+                      <a:pPr algn="l" marL="0" indent="0">
+                        <a:spcAft>
+                          <a:spcPts val="0"/>
+                        </a:spcAft>
+                        <a:buNone/>
+                      </a:pPr>
+                      <a:r>
+                        <a:rPr sz="1400" b="0" i="0">
+                          <a:solidFill>
+                            <a:srgbClr val="1A1A1A"/>
+                          </a:solidFill>
+                          <a:latin typeface="Arial"/>
+                          <a:cs typeface="Arial"/>
+                          <a:ea typeface="Arial"/>
+                        </a:rPr>
+                        <a:t>GRU</a:t>
+                      </a:r>
+                    </a:p>
+                  </a:txBody>
+                  <a:tcPr anchor="ctr">
+                    <a:solidFill>
+                      <a:srgbClr val="FFFFFF"/>
+                    </a:solidFill>
+                  </a:tcPr>
+                </a:tc>
+                <a:tc>
+                  <a:txBody>
+                    <a:bodyPr wrap="square"/>
+                    <a:lstStyle/>
+                    <a:p>
+                      <a:pPr algn="ctr" marL="0" indent="0">
+                        <a:spcAft>
+                          <a:spcPts val="0"/>
+                        </a:spcAft>
+                        <a:buNone/>
+                      </a:pPr>
+                      <a:r>
+                        <a:rPr sz="1400" b="0" i="0">
+                          <a:solidFill>
+                            <a:srgbClr val="1A1A1A"/>
+                          </a:solidFill>
+                          <a:latin typeface="Arial"/>
+                          <a:cs typeface="Arial"/>
+                          <a:ea typeface="Arial"/>
+                        </a:rPr>
+                        <a:t>4.67 ± 0.06</a:t>
+                      </a:r>
+                    </a:p>
+                  </a:txBody>
+                  <a:tcPr anchor="ctr">
+                    <a:solidFill>
+                      <a:srgbClr val="FFFFFF"/>
+                    </a:solidFill>
+                  </a:tcPr>
+                </a:tc>
+                <a:tc>
+                  <a:txBody>
+                    <a:bodyPr wrap="square"/>
+                    <a:lstStyle/>
+                    <a:p>
+                      <a:pPr algn="ctr" marL="0" indent="0">
+                        <a:spcAft>
+                          <a:spcPts val="0"/>
+                        </a:spcAft>
+                        <a:buNone/>
+                      </a:pPr>
+                      <a:r>
+                        <a:rPr sz="1400" b="0" i="0">
+                          <a:solidFill>
+                            <a:srgbClr val="1A1A1A"/>
+                          </a:solidFill>
+                          <a:latin typeface="Arial"/>
+                          <a:cs typeface="Arial"/>
+                          <a:ea typeface="Arial"/>
+                        </a:rPr>
+                        <a:t>5.37 ± 0.02</a:t>
+                      </a:r>
+                    </a:p>
+                  </a:txBody>
+                  <a:tcPr anchor="ctr">
+                    <a:solidFill>
+                      <a:srgbClr val="FFFFFF"/>
+                    </a:solidFill>
+                  </a:tcPr>
+                </a:tc>
+                <a:tc>
+                  <a:txBody>
+                    <a:bodyPr wrap="square"/>
+                    <a:lstStyle/>
+                    <a:p>
+                      <a:pPr algn="ctr" marL="0" indent="0">
+                        <a:spcAft>
+                          <a:spcPts val="0"/>
+                        </a:spcAft>
+                        <a:buNone/>
+                      </a:pPr>
+                      <a:r>
+                        <a:rPr sz="1400" b="0" i="0">
+                          <a:solidFill>
+                            <a:srgbClr val="1A1A1A"/>
+                          </a:solidFill>
+                          <a:latin typeface="Arial"/>
+                          <a:cs typeface="Arial"/>
+                          <a:ea typeface="Arial"/>
+                        </a:rPr>
+                        <a:t>6.18 ± 0.01</a:t>
+                      </a:r>
+                    </a:p>
+                  </a:txBody>
+                  <a:tcPr anchor="ctr">
+                    <a:solidFill>
+                      <a:srgbClr val="FFFFFF"/>
+                    </a:solidFill>
+                  </a:tcPr>
+                </a:tc>
+              </a:tr>
+              <a:tr h="411480">
+                <a:tc>
+                  <a:txBody>
+                    <a:bodyPr wrap="square"/>
+                    <a:lstStyle/>
+                    <a:p>
+                      <a:pPr algn="l" marL="0" indent="0">
+                        <a:spcAft>
+                          <a:spcPts val="0"/>
+                        </a:spcAft>
+                        <a:buNone/>
+                      </a:pPr>
+                      <a:r>
+                        <a:rPr sz="1400" b="0" i="0">
+                          <a:solidFill>
+                            <a:srgbClr val="1A1A1A"/>
+                          </a:solidFill>
+                          <a:latin typeface="Arial"/>
+                          <a:cs typeface="Arial"/>
+                          <a:ea typeface="Arial"/>
+                        </a:rPr>
+                        <a:t>Temporal Transformer</a:t>
+                      </a:r>
+                    </a:p>
+                  </a:txBody>
+                  <a:tcPr anchor="ctr">
+                    <a:solidFill>
+                      <a:srgbClr val="E4ECF7"/>
+                    </a:solidFill>
+                  </a:tcPr>
+                </a:tc>
+                <a:tc>
+                  <a:txBody>
+                    <a:bodyPr wrap="square"/>
+                    <a:lstStyle/>
+                    <a:p>
+                      <a:pPr algn="ctr" marL="0" indent="0">
+                        <a:spcAft>
+                          <a:spcPts val="0"/>
+                        </a:spcAft>
+                        <a:buNone/>
+                      </a:pPr>
+                      <a:r>
+                        <a:rPr sz="1400" b="0" i="0">
+                          <a:solidFill>
+                            <a:srgbClr val="1A1A1A"/>
+                          </a:solidFill>
+                          <a:latin typeface="Arial"/>
+                          <a:cs typeface="Arial"/>
+                          <a:ea typeface="Arial"/>
+                        </a:rPr>
+                        <a:t>4.72 ± 0.03</a:t>
+                      </a:r>
+                    </a:p>
+                  </a:txBody>
+                  <a:tcPr anchor="ctr">
+                    <a:solidFill>
+                      <a:srgbClr val="E4ECF7"/>
+                    </a:solidFill>
+                  </a:tcPr>
+                </a:tc>
+                <a:tc>
+                  <a:txBody>
+                    <a:bodyPr wrap="square"/>
+                    <a:lstStyle/>
+                    <a:p>
+                      <a:pPr algn="ctr" marL="0" indent="0">
+                        <a:spcAft>
+                          <a:spcPts val="0"/>
+                        </a:spcAft>
+                        <a:buNone/>
+                      </a:pPr>
+                      <a:r>
+                        <a:rPr sz="1400" b="0" i="0">
+                          <a:solidFill>
+                            <a:srgbClr val="1A1A1A"/>
+                          </a:solidFill>
+                          <a:latin typeface="Arial"/>
+                          <a:cs typeface="Arial"/>
+                          <a:ea typeface="Arial"/>
+                        </a:rPr>
+                        <a:t>5.38 ± 0.03</a:t>
+                      </a:r>
+                    </a:p>
+                  </a:txBody>
+                  <a:tcPr anchor="ctr">
+                    <a:solidFill>
+                      <a:srgbClr val="E4ECF7"/>
+                    </a:solidFill>
+                  </a:tcPr>
+                </a:tc>
+                <a:tc>
+                  <a:txBody>
+                    <a:bodyPr wrap="square"/>
+                    <a:lstStyle/>
+                    <a:p>
+                      <a:pPr algn="ctr" marL="0" indent="0">
+                        <a:spcAft>
+                          <a:spcPts val="0"/>
+                        </a:spcAft>
+                        <a:buNone/>
+                      </a:pPr>
+                      <a:r>
+                        <a:rPr sz="1400" b="0" i="0">
+                          <a:solidFill>
+                            <a:srgbClr val="1A1A1A"/>
+                          </a:solidFill>
+                          <a:latin typeface="Arial"/>
+                          <a:cs typeface="Arial"/>
+                          <a:ea typeface="Arial"/>
+                        </a:rPr>
+                        <a:t>6.23 ± 0.08</a:t>
+                      </a:r>
+                    </a:p>
+                  </a:txBody>
+                  <a:tcPr anchor="ctr">
+                    <a:solidFill>
+                      <a:srgbClr val="E4ECF7"/>
+                    </a:solidFill>
+                  </a:tcPr>
+                </a:tc>
+              </a:tr>
+              <a:tr h="411480">
+                <a:tc>
+                  <a:txBody>
+                    <a:bodyPr wrap="square"/>
+                    <a:lstStyle/>
+                    <a:p>
+                      <a:pPr algn="l" marL="0" indent="0">
+                        <a:spcAft>
+                          <a:spcPts val="0"/>
+                        </a:spcAft>
+                        <a:buNone/>
+                      </a:pPr>
+                      <a:r>
+                        <a:rPr sz="1400" b="0" i="0">
+                          <a:solidFill>
+                            <a:srgbClr val="555F6B"/>
+                          </a:solidFill>
+                          <a:latin typeface="Arial"/>
+                          <a:cs typeface="Arial"/>
+                          <a:ea typeface="Arial"/>
+                        </a:rPr>
+                        <a:t>Proposed, seed 42 only</a:t>
+                      </a:r>
+                    </a:p>
+                  </a:txBody>
+                  <a:tcPr anchor="ctr">
+                    <a:solidFill>
+                      <a:srgbClr val="FFFFFF"/>
+                    </a:solidFill>
+                  </a:tcPr>
+                </a:tc>
+                <a:tc>
+                  <a:txBody>
+                    <a:bodyPr wrap="square"/>
+                    <a:lstStyle/>
+                    <a:p>
+                      <a:pPr algn="ctr" marL="0" indent="0">
+                        <a:spcAft>
+                          <a:spcPts val="0"/>
+                        </a:spcAft>
+                        <a:buNone/>
+                      </a:pPr>
+                      <a:r>
+                        <a:rPr sz="1400" b="0" i="0">
+                          <a:solidFill>
+                            <a:srgbClr val="555F6B"/>
+                          </a:solidFill>
+                          <a:latin typeface="Arial"/>
+                          <a:cs typeface="Arial"/>
+                          <a:ea typeface="Arial"/>
+                        </a:rPr>
+                        <a:t>4.77</a:t>
+                      </a:r>
+                    </a:p>
+                  </a:txBody>
+                  <a:tcPr anchor="ctr">
+                    <a:solidFill>
+                      <a:srgbClr val="FFFFFF"/>
+                    </a:solidFill>
+                  </a:tcPr>
+                </a:tc>
+                <a:tc>
+                  <a:txBody>
+                    <a:bodyPr wrap="square"/>
+                    <a:lstStyle/>
+                    <a:p>
+                      <a:pPr algn="ctr" marL="0" indent="0">
+                        <a:spcAft>
+                          <a:spcPts val="0"/>
+                        </a:spcAft>
+                        <a:buNone/>
+                      </a:pPr>
+                      <a:r>
+                        <a:rPr sz="1400" b="0" i="0">
+                          <a:solidFill>
+                            <a:srgbClr val="555F6B"/>
+                          </a:solidFill>
+                          <a:latin typeface="Arial"/>
+                          <a:cs typeface="Arial"/>
+                          <a:ea typeface="Arial"/>
+                        </a:rPr>
+                        <a:t>5.33</a:t>
+                      </a:r>
+                    </a:p>
+                  </a:txBody>
+                  <a:tcPr anchor="ctr">
+                    <a:solidFill>
+                      <a:srgbClr val="FFFFFF"/>
+                    </a:solidFill>
+                  </a:tcPr>
+                </a:tc>
+                <a:tc>
+                  <a:txBody>
+                    <a:bodyPr wrap="square"/>
+                    <a:lstStyle/>
+                    <a:p>
+                      <a:pPr algn="ctr" marL="0" indent="0">
+                        <a:spcAft>
+                          <a:spcPts val="0"/>
+                        </a:spcAft>
+                        <a:buNone/>
+                      </a:pPr>
+                      <a:r>
+                        <a:rPr sz="1400" b="0" i="0">
+                          <a:solidFill>
+                            <a:srgbClr val="555F6B"/>
+                          </a:solidFill>
+                          <a:latin typeface="Arial"/>
+                          <a:cs typeface="Arial"/>
+                          <a:ea typeface="Arial"/>
+                        </a:rPr>
+                        <a:t>6.15</a:t>
+                      </a:r>
+                    </a:p>
+                  </a:txBody>
+                  <a:tcPr anchor="ctr">
+                    <a:solidFill>
+                      <a:srgbClr val="FFFFFF"/>
+                    </a:solidFill>
+                  </a:tcPr>
+                </a:tc>
+              </a:tr>
+              <a:tr h="411480">
+                <a:tc>
+                  <a:txBody>
+                    <a:bodyPr wrap="square"/>
+                    <a:lstStyle/>
+                    <a:p>
+                      <a:pPr algn="l" marL="0" indent="0">
+                        <a:spcAft>
+                          <a:spcPts val="0"/>
+                        </a:spcAft>
+                        <a:buNone/>
+                      </a:pPr>
+                      <a:r>
+                        <a:rPr sz="1400" b="0" i="0">
+                          <a:solidFill>
+                            <a:srgbClr val="555F6B"/>
+                          </a:solidFill>
+                          <a:latin typeface="Arial"/>
+                          <a:cs typeface="Arial"/>
+                          <a:ea typeface="Arial"/>
+                        </a:rPr>
+                        <a:t>Persistence</a:t>
+                      </a:r>
+                    </a:p>
+                  </a:txBody>
+                  <a:tcPr anchor="ctr">
+                    <a:solidFill>
+                      <a:srgbClr val="E4ECF7"/>
+                    </a:solidFill>
+                  </a:tcPr>
+                </a:tc>
+                <a:tc>
+                  <a:txBody>
+                    <a:bodyPr wrap="square"/>
+                    <a:lstStyle/>
+                    <a:p>
+                      <a:pPr algn="ctr" marL="0" indent="0">
+                        <a:spcAft>
+                          <a:spcPts val="0"/>
+                        </a:spcAft>
+                        <a:buNone/>
+                      </a:pPr>
+                      <a:r>
+                        <a:rPr sz="1400" b="0" i="0">
+                          <a:solidFill>
+                            <a:srgbClr val="555F6B"/>
+                          </a:solidFill>
+                          <a:latin typeface="Arial"/>
+                          <a:cs typeface="Arial"/>
+                          <a:ea typeface="Arial"/>
+                        </a:rPr>
+                        <a:t>5.14</a:t>
+                      </a:r>
+                    </a:p>
+                  </a:txBody>
+                  <a:tcPr anchor="ctr">
+                    <a:solidFill>
+                      <a:srgbClr val="E4ECF7"/>
+                    </a:solidFill>
+                  </a:tcPr>
+                </a:tc>
+                <a:tc>
+                  <a:txBody>
+                    <a:bodyPr wrap="square"/>
+                    <a:lstStyle/>
+                    <a:p>
+                      <a:pPr algn="ctr" marL="0" indent="0">
+                        <a:spcAft>
+                          <a:spcPts val="0"/>
+                        </a:spcAft>
+                        <a:buNone/>
+                      </a:pPr>
+                      <a:r>
+                        <a:rPr sz="1400" b="0" i="0">
+                          <a:solidFill>
+                            <a:srgbClr val="555F6B"/>
+                          </a:solidFill>
+                          <a:latin typeface="Arial"/>
+                          <a:cs typeface="Arial"/>
+                          <a:ea typeface="Arial"/>
+                        </a:rPr>
+                        <a:t>6.06</a:t>
+                      </a:r>
+                    </a:p>
+                  </a:txBody>
+                  <a:tcPr anchor="ctr">
+                    <a:solidFill>
+                      <a:srgbClr val="E4ECF7"/>
+                    </a:solidFill>
+                  </a:tcPr>
+                </a:tc>
+                <a:tc>
+                  <a:txBody>
+                    <a:bodyPr wrap="square"/>
+                    <a:lstStyle/>
+                    <a:p>
+                      <a:pPr algn="ctr" marL="0" indent="0">
+                        <a:spcAft>
+                          <a:spcPts val="0"/>
+                        </a:spcAft>
+                        <a:buNone/>
+                      </a:pPr>
+                      <a:r>
+                        <a:rPr sz="1400" b="0" i="0">
+                          <a:solidFill>
+                            <a:srgbClr val="555F6B"/>
+                          </a:solidFill>
+                          <a:latin typeface="Arial"/>
+                          <a:cs typeface="Arial"/>
+                          <a:ea typeface="Arial"/>
+                        </a:rPr>
+                        <a:t>7.29</a:t>
+                      </a:r>
+                    </a:p>
+                  </a:txBody>
+                  <a:tcPr anchor="ctr">
+                    <a:solidFill>
+                      <a:srgbClr val="E4ECF7"/>
+                    </a:solidFill>
+                  </a:tcPr>
+                </a:tc>
+              </a:tr>
+            </a:tbl>
+          </a:graphicData>
+        </a:graphic>
+      </p:graphicFrame>
+      <p:sp>
+        <p:nvSpPr>
+          <p:cNvPr id="8" name="TextBox 7"/>
+          <p:cNvSpPr txBox="1"/>
+          <p:nvPr/>
+        </p:nvSpPr>
+        <p:spPr>
+          <a:xfrm>
+            <a:off x="502920" y="4983480"/>
+            <a:ext cx="6035040" cy="1737360"/>
+          </a:xfrm>
+          <a:prstGeom prst="rect">
+            <a:avLst/>
+          </a:prstGeom>
+          <a:noFill/>
+        </p:spPr>
+        <p:txBody>
+          <a:bodyPr wrap="square" lIns="18288" rIns="18288" tIns="18288" bIns="18288" anchor="t"/>
+          <a:lstStyle/>
+          <a:p>
+            <a:pPr algn="l" marL="0" indent="0">
+              <a:spcAft>
+                <a:spcPts val="400"/>
+              </a:spcAft>
+              <a:buNone/>
+            </a:pPr>
+            <a:r>
+              <a:rPr sz="1300" b="0" i="0">
+                <a:solidFill>
+                  <a:srgbClr val="1A1A1A"/>
+                </a:solidFill>
+                <a:latin typeface="Arial"/>
+                <a:cs typeface="Arial"/>
+                <a:ea typeface="Arial"/>
+              </a:rPr>
+              <a:t>Paired day-block bootstrap (44 test days): the proposed model is lower than the temporal Transformer at every horizon (0.035 / 0.037 / 0.080 mph) and than the GRU at 30 and 60 min (0.032 / 0.031); the GRU is lower at 15 min (0.021). All intervals exclude zero, but with three seeds the advantage is small, not decisive.</a:t>
+            </a:r>
+          </a:p>
+          <a:p>
+            <a:pPr algn="l" marL="0" indent="0">
+              <a:spcAft>
+                <a:spcPts val="400"/>
+              </a:spcAft>
+              <a:buNone/>
+            </a:pPr>
+            <a:r>
+              <a:rPr sz="1100" b="0" i="0">
+                <a:solidFill>
+                  <a:srgbClr val="555F6B"/>
+                </a:solidFill>
+                <a:latin typeface="Arial"/>
+                <a:cs typeface="Arial"/>
+                <a:ea typeface="Arial"/>
+              </a:rPr>
+              <a:t>Source: reports/experiments/multi_seed_summary.csv (nine GPU runs, 21 Oct 2026).</a:t>
+            </a:r>
+          </a:p>
+        </p:txBody>
+      </p:sp>
+      <p:sp>
+        <p:nvSpPr>
+          <p:cNvPr id="9" name="Result 1"/>
+          <p:cNvSpPr/>
+          <p:nvPr/>
+        </p:nvSpPr>
+        <p:spPr>
+          <a:xfrm>
+            <a:off x="6858000" y="2011680"/>
+            <a:ext cx="2606040" cy="1344168"/>
+          </a:xfrm>
+          <a:prstGeom prst="roundRect">
+            <a:avLst>
+              <a:gd name="adj" fmla="val 8000"/>
+            </a:avLst>
+          </a:prstGeom>
+          <a:solidFill>
+            <a:srgbClr val="E4ECF7"/>
+          </a:solidFill>
+          <a:ln>
+            <a:noFill/>
+          </a:ln>
+          <a:effectLst/>
+        </p:spPr>
+        <p:style>
+          <a:lnRef idx="1">
+            <a:schemeClr val="accent1"/>
+          </a:lnRef>
+          <a:fillRef idx="3">
+            <a:schemeClr val="accent1"/>
+          </a:fillRef>
+          <a:effectRef idx="2">
+            <a:schemeClr val="accent1"/>
+          </a:effectRef>
+          <a:fontRef idx="minor">
+            <a:schemeClr val="lt1"/>
+          </a:fontRef>
+        </p:style>
+        <p:txBody>
+          <a:bodyPr rtlCol="0" anchor="ctr" tIns="91440" bIns="91440" wrap="square"/>
+          <a:lstStyle/>
+          <a:p>
+            <a:pPr algn="ctr" marL="0" indent="0">
+              <a:spcAft>
+                <a:spcPts val="300"/>
+              </a:spcAft>
+              <a:buNone/>
+            </a:pPr>
+            <a:r>
+              <a:rPr sz="2000" b="1" i="0">
+                <a:solidFill>
+                  <a:srgbClr val="1F497D"/>
+                </a:solidFill>
+                <a:latin typeface="Arial"/>
+                <a:cs typeface="Arial"/>
+                <a:ea typeface="Arial"/>
+              </a:rPr>
+              <a:t>7–16 %</a:t>
+            </a:r>
+          </a:p>
+          <a:p>
+            <a:pPr algn="ctr" marL="0" indent="0">
+              <a:spcAft>
+                <a:spcPts val="300"/>
+              </a:spcAft>
+              <a:buNone/>
+            </a:pPr>
+            <a:r>
+              <a:rPr sz="1200" b="0" i="0">
+                <a:solidFill>
+                  <a:srgbClr val="1A1A1A"/>
+                </a:solidFill>
+                <a:latin typeface="Arial"/>
+                <a:cs typeface="Arial"/>
+                <a:ea typeface="Arial"/>
+              </a:rPr>
+              <a:t>lower MAE than persistence (seed 42 run)</a:t>
+            </a:r>
+          </a:p>
+        </p:txBody>
+      </p:sp>
+      <p:sp>
+        <p:nvSpPr>
+          <p:cNvPr id="10" name="Result 2"/>
+          <p:cNvSpPr/>
+          <p:nvPr/>
+        </p:nvSpPr>
+        <p:spPr>
+          <a:xfrm>
+            <a:off x="9601200" y="2011680"/>
+            <a:ext cx="2606040" cy="1344168"/>
+          </a:xfrm>
+          <a:prstGeom prst="roundRect">
+            <a:avLst>
+              <a:gd name="adj" fmla="val 8000"/>
+            </a:avLst>
+          </a:prstGeom>
+          <a:solidFill>
+            <a:srgbClr val="E4ECF7"/>
+          </a:solidFill>
+          <a:ln>
+            <a:noFill/>
+          </a:ln>
+          <a:effectLst/>
+        </p:spPr>
+        <p:style>
+          <a:lnRef idx="1">
+            <a:schemeClr val="accent1"/>
+          </a:lnRef>
+          <a:fillRef idx="3">
+            <a:schemeClr val="accent1"/>
+          </a:fillRef>
+          <a:effectRef idx="2">
+            <a:schemeClr val="accent1"/>
+          </a:effectRef>
+          <a:fontRef idx="minor">
+            <a:schemeClr val="lt1"/>
+          </a:fontRef>
+        </p:style>
+        <p:txBody>
+          <a:bodyPr rtlCol="0" anchor="ctr" tIns="91440" bIns="91440" wrap="square"/>
+          <a:lstStyle/>
+          <a:p>
+            <a:pPr algn="ctr" marL="0" indent="0">
+              <a:spcAft>
+                <a:spcPts val="300"/>
+              </a:spcAft>
+              <a:buNone/>
+            </a:pPr>
+            <a:r>
+              <a:rPr sz="2000" b="1" i="0">
+                <a:solidFill>
+                  <a:srgbClr val="1F497D"/>
+                </a:solidFill>
+                <a:latin typeface="Arial"/>
+                <a:cs typeface="Arial"/>
+                <a:ea typeface="Arial"/>
+              </a:rPr>
+              <a:t>0.91 / 0.91 / 0.90</a:t>
+            </a:r>
+          </a:p>
+          <a:p>
+            <a:pPr algn="ctr" marL="0" indent="0">
+              <a:spcAft>
+                <a:spcPts val="300"/>
+              </a:spcAft>
+              <a:buNone/>
+            </a:pPr>
+            <a:r>
+              <a:rPr sz="1200" b="0" i="0">
+                <a:solidFill>
+                  <a:srgbClr val="1A1A1A"/>
+                </a:solidFill>
+                <a:latin typeface="Arial"/>
+                <a:cs typeface="Arial"/>
+                <a:ea typeface="Arial"/>
+              </a:rPr>
+              <a:t>coverage of the 90 % conformal intervals; 0.76–0.80 under congestion</a:t>
+            </a:r>
+          </a:p>
+        </p:txBody>
+      </p:sp>
+      <p:sp>
+        <p:nvSpPr>
+          <p:cNvPr id="11" name="Result 3"/>
+          <p:cNvSpPr/>
+          <p:nvPr/>
+        </p:nvSpPr>
+        <p:spPr>
+          <a:xfrm>
+            <a:off x="6858000" y="3493008"/>
+            <a:ext cx="2606040" cy="1344168"/>
+          </a:xfrm>
+          <a:prstGeom prst="roundRect">
+            <a:avLst>
+              <a:gd name="adj" fmla="val 8000"/>
+            </a:avLst>
+          </a:prstGeom>
+          <a:solidFill>
+            <a:srgbClr val="E4ECF7"/>
+          </a:solidFill>
+          <a:ln>
+            <a:noFill/>
+          </a:ln>
+          <a:effectLst/>
+        </p:spPr>
+        <p:style>
+          <a:lnRef idx="1">
+            <a:schemeClr val="accent1"/>
+          </a:lnRef>
+          <a:fillRef idx="3">
+            <a:schemeClr val="accent1"/>
+          </a:fillRef>
+          <a:effectRef idx="2">
+            <a:schemeClr val="accent1"/>
+          </a:effectRef>
+          <a:fontRef idx="minor">
+            <a:schemeClr val="lt1"/>
+          </a:fontRef>
+        </p:style>
+        <p:txBody>
+          <a:bodyPr rtlCol="0" anchor="ctr" tIns="91440" bIns="91440" wrap="square"/>
+          <a:lstStyle/>
+          <a:p>
+            <a:pPr algn="ctr" marL="0" indent="0">
+              <a:spcAft>
+                <a:spcPts val="300"/>
+              </a:spcAft>
+              <a:buNone/>
+            </a:pPr>
+            <a:r>
+              <a:rPr sz="2000" b="1" i="0">
+                <a:solidFill>
+                  <a:srgbClr val="1F497D"/>
+                </a:solidFill>
+                <a:latin typeface="Arial"/>
+                <a:cs typeface="Arial"/>
+                <a:ea typeface="Arial"/>
+              </a:rPr>
+              <a:t>15–22 %</a:t>
+            </a:r>
+          </a:p>
+          <a:p>
+            <a:pPr algn="ctr" marL="0" indent="0">
+              <a:spcAft>
+                <a:spcPts val="300"/>
+              </a:spcAft>
+              <a:buNone/>
+            </a:pPr>
+            <a:r>
+              <a:rPr sz="1200" b="0" i="0">
+                <a:solidFill>
+                  <a:srgbClr val="1A1A1A"/>
+                </a:solidFill>
+                <a:latin typeface="Arial"/>
+                <a:cs typeface="Arial"/>
+                <a:ea typeface="Arial"/>
+              </a:rPr>
+              <a:t>lower MAE on forecasts the reliability gate keeps (≈26 % deferred)</a:t>
+            </a:r>
+          </a:p>
+        </p:txBody>
+      </p:sp>
+      <p:sp>
+        <p:nvSpPr>
+          <p:cNvPr id="12" name="Result 4"/>
+          <p:cNvSpPr/>
+          <p:nvPr/>
+        </p:nvSpPr>
+        <p:spPr>
+          <a:xfrm>
+            <a:off x="9601200" y="3493008"/>
+            <a:ext cx="2606040" cy="1344168"/>
+          </a:xfrm>
+          <a:prstGeom prst="roundRect">
+            <a:avLst>
+              <a:gd name="adj" fmla="val 8000"/>
+            </a:avLst>
+          </a:prstGeom>
+          <a:solidFill>
+            <a:srgbClr val="E4ECF7"/>
+          </a:solidFill>
+          <a:ln>
+            <a:noFill/>
+          </a:ln>
+          <a:effectLst/>
+        </p:spPr>
+        <p:style>
+          <a:lnRef idx="1">
+            <a:schemeClr val="accent1"/>
+          </a:lnRef>
+          <a:fillRef idx="3">
+            <a:schemeClr val="accent1"/>
+          </a:fillRef>
+          <a:effectRef idx="2">
+            <a:schemeClr val="accent1"/>
+          </a:effectRef>
+          <a:fontRef idx="minor">
+            <a:schemeClr val="lt1"/>
+          </a:fontRef>
+        </p:style>
+        <p:txBody>
+          <a:bodyPr rtlCol="0" anchor="ctr" tIns="91440" bIns="91440" wrap="square"/>
+          <a:lstStyle/>
+          <a:p>
+            <a:pPr algn="ctr" marL="0" indent="0">
+              <a:spcAft>
+                <a:spcPts val="300"/>
+              </a:spcAft>
+              <a:buNone/>
+            </a:pPr>
+            <a:r>
+              <a:rPr sz="2000" b="1" i="0">
+                <a:solidFill>
+                  <a:srgbClr val="1F497D"/>
+                </a:solidFill>
+                <a:latin typeface="Arial"/>
+                <a:cs typeface="Arial"/>
+                <a:ea typeface="Arial"/>
+              </a:rPr>
+              <a:t>24 / 24</a:t>
+            </a:r>
+          </a:p>
+          <a:p>
+            <a:pPr algn="ctr" marL="0" indent="0">
+              <a:spcAft>
+                <a:spcPts val="300"/>
+              </a:spcAft>
+              <a:buNone/>
+            </a:pPr>
+            <a:r>
+              <a:rPr sz="1200" b="0" i="0">
+                <a:solidFill>
+                  <a:srgbClr val="1A1A1A"/>
+                </a:solidFill>
+                <a:latin typeface="Arial"/>
+                <a:cs typeface="Arial"/>
+                <a:ea typeface="Arial"/>
+              </a:rPr>
+              <a:t>local-LLM responses schema-valid over two workflow passes (qwen2.5 7B)</a:t>
+            </a:r>
+          </a:p>
+        </p:txBody>
+      </p:sp>
+      <p:sp>
+        <p:nvSpPr>
+          <p:cNvPr id="13" name="Result 5"/>
+          <p:cNvSpPr/>
+          <p:nvPr/>
+        </p:nvSpPr>
+        <p:spPr>
+          <a:xfrm>
+            <a:off x="6858000" y="4974336"/>
+            <a:ext cx="2606040" cy="1344168"/>
+          </a:xfrm>
+          <a:prstGeom prst="roundRect">
+            <a:avLst>
+              <a:gd name="adj" fmla="val 8000"/>
+            </a:avLst>
+          </a:prstGeom>
+          <a:solidFill>
+            <a:srgbClr val="E4ECF7"/>
+          </a:solidFill>
+          <a:ln>
+            <a:noFill/>
+          </a:ln>
+          <a:effectLst/>
+        </p:spPr>
+        <p:style>
+          <a:lnRef idx="1">
+            <a:schemeClr val="accent1"/>
+          </a:lnRef>
+          <a:fillRef idx="3">
+            <a:schemeClr val="accent1"/>
+          </a:fillRef>
+          <a:effectRef idx="2">
+            <a:schemeClr val="accent1"/>
+          </a:effectRef>
+          <a:fontRef idx="minor">
+            <a:schemeClr val="lt1"/>
+          </a:fontRef>
+        </p:style>
+        <p:txBody>
+          <a:bodyPr rtlCol="0" anchor="ctr" tIns="91440" bIns="91440" wrap="square"/>
+          <a:lstStyle/>
+          <a:p>
+            <a:pPr algn="ctr" marL="0" indent="0">
+              <a:spcAft>
+                <a:spcPts val="300"/>
+              </a:spcAft>
+              <a:buNone/>
+            </a:pPr>
+            <a:r>
+              <a:rPr sz="2000" b="1" i="0">
+                <a:solidFill>
+                  <a:srgbClr val="1F497D"/>
+                </a:solidFill>
+                <a:latin typeface="Arial"/>
+                <a:cs typeface="Arial"/>
+                <a:ea typeface="Arial"/>
+              </a:rPr>
+              <a:t>3 of 3 → 0 of 9</a:t>
+            </a:r>
+          </a:p>
+          <a:p>
+            <a:pPr algn="ctr" marL="0" indent="0">
+              <a:spcAft>
+                <a:spcPts val="300"/>
+              </a:spcAft>
+              <a:buNone/>
+            </a:pPr>
+            <a:r>
+              <a:rPr sz="1200" b="0" i="0">
+                <a:solidFill>
+                  <a:srgbClr val="1A1A1A"/>
+                </a:solidFill>
+                <a:latin typeface="Arial"/>
+                <a:cs typeface="Arial"/>
+                <a:ea typeface="Arial"/>
+              </a:rPr>
+              <a:t>advisories citing non-existent evidence, without vs with retrieval</a:t>
+            </a:r>
+          </a:p>
+        </p:txBody>
+      </p:sp>
+      <p:sp>
+        <p:nvSpPr>
+          <p:cNvPr id="14" name="Result 6"/>
+          <p:cNvSpPr/>
+          <p:nvPr/>
+        </p:nvSpPr>
+        <p:spPr>
+          <a:xfrm>
+            <a:off x="9601200" y="4974336"/>
+            <a:ext cx="2606040" cy="1344168"/>
+          </a:xfrm>
+          <a:prstGeom prst="roundRect">
+            <a:avLst>
+              <a:gd name="adj" fmla="val 8000"/>
+            </a:avLst>
+          </a:prstGeom>
+          <a:solidFill>
+            <a:srgbClr val="E4ECF7"/>
+          </a:solidFill>
+          <a:ln>
+            <a:noFill/>
+          </a:ln>
+          <a:effectLst/>
+        </p:spPr>
+        <p:style>
+          <a:lnRef idx="1">
+            <a:schemeClr val="accent1"/>
+          </a:lnRef>
+          <a:fillRef idx="3">
+            <a:schemeClr val="accent1"/>
+          </a:fillRef>
+          <a:effectRef idx="2">
+            <a:schemeClr val="accent1"/>
+          </a:effectRef>
+          <a:fontRef idx="minor">
+            <a:schemeClr val="lt1"/>
+          </a:fontRef>
+        </p:style>
+        <p:txBody>
+          <a:bodyPr rtlCol="0" anchor="ctr" tIns="91440" bIns="91440" wrap="square"/>
+          <a:lstStyle/>
+          <a:p>
+            <a:pPr algn="ctr" marL="0" indent="0">
+              <a:spcAft>
+                <a:spcPts val="300"/>
+              </a:spcAft>
+              <a:buNone/>
+            </a:pPr>
+            <a:r>
+              <a:rPr sz="2000" b="1" i="0">
+                <a:solidFill>
+                  <a:srgbClr val="1F497D"/>
+                </a:solidFill>
+                <a:latin typeface="Arial"/>
+                <a:cs typeface="Arial"/>
+                <a:ea typeface="Arial"/>
+              </a:rPr>
+              <a:t>19</a:t>
+            </a:r>
+          </a:p>
+          <a:p>
+            <a:pPr algn="ctr" marL="0" indent="0">
+              <a:spcAft>
+                <a:spcPts val="300"/>
+              </a:spcAft>
+              <a:buNone/>
+            </a:pPr>
+            <a:r>
+              <a:rPr sz="1200" b="0" i="0">
+                <a:solidFill>
+                  <a:srgbClr val="1A1A1A"/>
+                </a:solidFill>
+                <a:latin typeface="Arial"/>
+                <a:cs typeface="Arial"/>
+                <a:ea typeface="Arial"/>
+              </a:rPr>
+              <a:t>workflow runs per pass: 7 pending human review, 5 rejected by safety checks, 7 deferred</a:t>
+            </a:r>
+          </a:p>
+        </p:txBody>
+      </p:sp>
+      <p:sp>
+        <p:nvSpPr>
+          <p:cNvPr id="15" name="TextBox 14"/>
+          <p:cNvSpPr txBox="1"/>
+          <p:nvPr/>
+        </p:nvSpPr>
+        <p:spPr>
+          <a:xfrm>
+            <a:off x="502920" y="6446520"/>
+            <a:ext cx="11795760" cy="457200"/>
+          </a:xfrm>
+          <a:prstGeom prst="rect">
+            <a:avLst/>
+          </a:prstGeom>
+          <a:noFill/>
+        </p:spPr>
+        <p:txBody>
+          <a:bodyPr wrap="square" lIns="18288" rIns="18288" tIns="18288" bIns="18288" anchor="t"/>
+          <a:lstStyle/>
+          <a:p>
+            <a:pPr algn="l" marL="0" indent="0">
+              <a:spcAft>
+                <a:spcPts val="0"/>
+              </a:spcAft>
+              <a:buNone/>
+            </a:pPr>
+            <a:r>
+              <a:rPr sz="1200" b="1" i="0">
+                <a:solidFill>
+                  <a:srgbClr val="1F497D"/>
+                </a:solidFill>
+                <a:latin typeface="Arial"/>
+                <a:cs typeface="Arial"/>
+                <a:ea typeface="Arial"/>
+              </a:rPr>
+              <a:t>Also measured: </a:t>
+            </a:r>
+            <a:r>
+              <a:rPr sz="1200" b="0" i="0">
+                <a:solidFill>
+                  <a:srgbClr val="1A1A1A"/>
+                </a:solidFill>
+                <a:latin typeface="Arial"/>
+                <a:cs typeface="Arial"/>
+                <a:ea typeface="Arial"/>
+              </a:rPr>
+              <a:t>removing the availability-aware gate raises MAE by 0.067 mph (95 % CI 0.048–0.086); removing operational weather features lowers it by 0.046 mph (a negative result). No simulated controller gain is claimed: the SUMO testbed fails its own baseline test (5.8 vs 10.95 mph).</a:t>
+            </a:r>
+          </a:p>
+        </p:txBody>
+      </p:sp>
+    </p:spTree>
+    <p:extLst>
+      <p:ext uri="{BB962C8B-B14F-4D97-AF65-F5344CB8AC3E}">
+        <p14:creationId xmlns:p14="http://schemas.microsoft.com/office/powerpoint/2010/main" val="3187296211"/>
+      </p:ext>
+    </p:extLst>
+  </p:cSld>
+  <p:clrMapOvr>
+    <a:masterClrMapping/>
+  </p:clrMapOvr>
+</p:sld>
+</file>
+
+<file path=ppt/slides/slide22.xml><?xml version="1.0" encoding="utf-8"?>
+<p:sld xmlns:a="http://schemas.openxmlformats.org/drawingml/2006/main" xmlns:r="http://schemas.openxmlformats.org/officeDocument/2006/relationships" xmlns:p="http://schemas.openxmlformats.org/presentationml/2006/main">
+  <p:cSld>
+    <p:spTree>
+      <p:nvGrpSpPr>
+        <p:cNvPr id="1" name=""/>
+        <p:cNvGrpSpPr/>
+        <p:nvPr/>
+      </p:nvGrpSpPr>
+      <p:grpSpPr>
+        <a:xfrm>
+          <a:off x="0" y="0"/>
+          <a:ext cx="0" cy="0"/>
+          <a:chOff x="0" y="0"/>
+          <a:chExt cx="0" cy="0"/>
+        </a:xfrm>
+      </p:grpSpPr>
+      <p:sp>
+        <p:nvSpPr>
+          <p:cNvPr id="2" name="Title 1"/>
+          <p:cNvSpPr>
+            <a:spLocks noGrp="1"/>
+          </p:cNvSpPr>
+          <p:nvPr>
+            <p:ph type="title"/>
+          </p:nvPr>
+        </p:nvSpPr>
+        <p:spPr>
+          <a:xfrm>
+            <a:off x="0" y="0"/>
+            <a:ext cx="12801600" cy="1512146"/>
+          </a:xfrm>
+          <a:solidFill>
+            <a:srgbClr val="558ED5"/>
+          </a:solidFill>
+        </p:spPr>
+        <p:txBody>
+          <a:bodyPr>
+            <a:normAutofit/>
+          </a:bodyPr>
+          <a:lstStyle/>
+          <a:p>
+            <a:r>
+              <a:rPr lang="en-US" sz="3600" b="1" dirty="0">
+                <a:solidFill>
+                  <a:schemeClr val="bg1"/>
+                </a:solidFill>
+                <a:latin typeface="Arial" panose="020B0604020202020204" pitchFamily="34" charset="0"/>
+                <a:cs typeface="Arial" panose="020B0604020202020204" pitchFamily="34" charset="0"/>
+              </a:rPr>
+              <a:t>9. RESULTS &amp; OUTCOMES (CONTD.)</a:t>
+            </a:r>
+          </a:p>
+        </p:txBody>
+      </p:sp>
+      <p:sp>
+        <p:nvSpPr>
+          <p:cNvPr id="4" name="Slide Number Placeholder 3"/>
+          <p:cNvSpPr>
+            <a:spLocks noGrp="1"/>
+          </p:cNvSpPr>
+          <p:nvPr>
+            <p:ph type="sldNum" sz="quarter" idx="12"/>
+          </p:nvPr>
+        </p:nvSpPr>
+        <p:spPr/>
+        <p:txBody>
+          <a:bodyPr/>
+          <a:lstStyle/>
+          <a:p>
+            <a:fld id="{C02A2637-A5A3-49FA-B214-6E67543099EF}" type="slidenum">
+              <a:rPr lang="en-US" smtClean="0"/>
+              <a:t>22</a:t>
+            </a:fld>
+            <a:endParaRPr lang="en-US"/>
+          </a:p>
+        </p:txBody>
+      </p:sp>
+      <p:sp>
+        <p:nvSpPr>
+          <p:cNvPr id="5" name="Implemented and verified header"/>
+          <p:cNvSpPr/>
+          <p:nvPr/>
+        </p:nvSpPr>
+        <p:spPr>
+          <a:xfrm>
+            <a:off x="502920" y="1691640"/>
+            <a:ext cx="3749039" cy="457200"/>
+          </a:xfrm>
+          <a:prstGeom prst="roundRect">
+            <a:avLst>
+              <a:gd name="adj" fmla="val 8000"/>
+            </a:avLst>
+          </a:prstGeom>
+          <a:solidFill>
+            <a:srgbClr val="2E7D4F"/>
+          </a:solidFill>
+          <a:ln>
+            <a:noFill/>
+          </a:ln>
+          <a:effectLst/>
+        </p:spPr>
+        <p:style>
+          <a:lnRef idx="1">
+            <a:schemeClr val="accent1"/>
+          </a:lnRef>
+          <a:fillRef idx="3">
+            <a:schemeClr val="accent1"/>
+          </a:fillRef>
+          <a:effectRef idx="2">
+            <a:schemeClr val="accent1"/>
+          </a:effectRef>
+          <a:fontRef idx="minor">
+            <a:schemeClr val="lt1"/>
+          </a:fontRef>
+        </p:style>
+        <p:txBody>
+          <a:bodyPr rtlCol="0" anchor="ctr" lIns="137160" rIns="137160" tIns="137160" bIns="137160" wrap="square"/>
+          <a:lstStyle/>
+          <a:p>
+            <a:pPr algn="l" marL="0" indent="0">
+              <a:spcAft>
+                <a:spcPts val="0"/>
+              </a:spcAft>
+              <a:buNone/>
+            </a:pPr>
+            <a:r>
+              <a:rPr sz="1700" b="1" i="0">
+                <a:solidFill>
+                  <a:srgbClr val="FFFFFF"/>
+                </a:solidFill>
+                <a:latin typeface="Arial"/>
+                <a:cs typeface="Arial"/>
+                <a:ea typeface="Arial"/>
+              </a:rPr>
+              <a:t>Implemented and verified</a:t>
+            </a:r>
+          </a:p>
+        </p:txBody>
+      </p:sp>
+      <p:sp>
+        <p:nvSpPr>
+          <p:cNvPr id="6" name="Implemented and verified"/>
+          <p:cNvSpPr/>
+          <p:nvPr/>
+        </p:nvSpPr>
+        <p:spPr>
+          <a:xfrm>
+            <a:off x="502920" y="2240280"/>
+            <a:ext cx="3749039" cy="4480560"/>
+          </a:xfrm>
+          <a:prstGeom prst="roundRect">
+            <a:avLst>
+              <a:gd name="adj" fmla="val 8000"/>
+            </a:avLst>
+          </a:prstGeom>
+          <a:solidFill>
+            <a:srgbClr val="E4ECF7"/>
+          </a:solidFill>
+          <a:ln>
+            <a:noFill/>
+          </a:ln>
+          <a:effectLst/>
+        </p:spPr>
+        <p:style>
+          <a:lnRef idx="1">
+            <a:schemeClr val="accent1"/>
+          </a:lnRef>
+          <a:fillRef idx="3">
+            <a:schemeClr val="accent1"/>
+          </a:fillRef>
+          <a:effectRef idx="2">
+            <a:schemeClr val="accent1"/>
+          </a:effectRef>
+          <a:fontRef idx="minor">
+            <a:schemeClr val="lt1"/>
+          </a:fontRef>
+        </p:style>
+        <p:txBody>
+          <a:bodyPr rtlCol="0" anchor="t" lIns="137160" rIns="137160" tIns="137160" bIns="137160" wrap="square"/>
+          <a:lstStyle/>
+          <a:p>
+            <a:pPr algn="l" marL="274320" indent="-228600">
+              <a:spcAft>
+                <a:spcPts val="700"/>
+              </a:spcAft>
+              <a:buFont typeface="Arial"/>
+              <a:buChar char="•"/>
+            </a:pPr>
+            <a:r>
+              <a:rPr sz="1400" b="0" i="0">
+                <a:solidFill>
+                  <a:srgbClr val="1A1A1A"/>
+                </a:solidFill>
+                <a:latin typeface="Arial"/>
+                <a:cs typeface="Arial"/>
+                <a:ea typeface="Arial"/>
+              </a:rPr>
+              <a:t>Real-data pipeline on NYC DOT speeds, 1 Jan – 20 Oct 2026, with provenance hashes</a:t>
+            </a:r>
+          </a:p>
+          <a:p>
+            <a:pPr algn="l" marL="274320" indent="-228600">
+              <a:spcAft>
+                <a:spcPts val="700"/>
+              </a:spcAft>
+              <a:buFont typeface="Arial"/>
+              <a:buChar char="•"/>
+            </a:pPr>
+            <a:r>
+              <a:rPr sz="1400" b="0" i="0">
+                <a:solidFill>
+                  <a:srgbClr val="1A1A1A"/>
+                </a:solidFill>
+                <a:latin typeface="Arial"/>
+                <a:cs typeface="Arial"/>
+                <a:ea typeface="Arial"/>
+              </a:rPr>
+              <a:t>Seven forecasting models on identical targets; three-seed study of the deep models; ablations</a:t>
+            </a:r>
+          </a:p>
+          <a:p>
+            <a:pPr algn="l" marL="274320" indent="-228600">
+              <a:spcAft>
+                <a:spcPts val="700"/>
+              </a:spcAft>
+              <a:buFont typeface="Arial"/>
+              <a:buChar char="•"/>
+            </a:pPr>
+            <a:r>
+              <a:rPr sz="1400" b="0" i="0">
+                <a:solidFill>
+                  <a:srgbClr val="1A1A1A"/>
+                </a:solidFill>
+                <a:latin typeface="Arial"/>
+                <a:cs typeface="Arial"/>
+                <a:ea typeface="Arial"/>
+              </a:rPr>
+              <a:t>Conformal intervals, reliability gate and grouped SHAP on the trained model</a:t>
+            </a:r>
+          </a:p>
+          <a:p>
+            <a:pPr algn="l" marL="274320" indent="-228600">
+              <a:spcAft>
+                <a:spcPts val="700"/>
+              </a:spcAft>
+              <a:buFont typeface="Arial"/>
+              <a:buChar char="•"/>
+            </a:pPr>
+            <a:r>
+              <a:rPr sz="1400" b="0" i="0">
+                <a:solidFill>
+                  <a:srgbClr val="1A1A1A"/>
+                </a:solidFill>
+                <a:latin typeface="Arial"/>
+                <a:cs typeface="Arial"/>
+                <a:ea typeface="Arial"/>
+              </a:rPr>
+              <a:t>FAISS retrieval over 15 approved documents; local LLM with schema validation</a:t>
+            </a:r>
+          </a:p>
+          <a:p>
+            <a:pPr algn="l" marL="274320" indent="-228600">
+              <a:spcAft>
+                <a:spcPts val="700"/>
+              </a:spcAft>
+              <a:buFont typeface="Arial"/>
+              <a:buChar char="•"/>
+            </a:pPr>
+            <a:r>
+              <a:rPr sz="1400" b="0" i="0">
+                <a:solidFill>
+                  <a:srgbClr val="1A1A1A"/>
+                </a:solidFill>
+                <a:latin typeface="Arial"/>
+                <a:cs typeface="Arial"/>
+                <a:ea typeface="Arial"/>
+              </a:rPr>
+              <a:t>LangGraph workflow with 13 deterministic safety checks</a:t>
+            </a:r>
+          </a:p>
+          <a:p>
+            <a:pPr algn="l" marL="274320" indent="-228600">
+              <a:spcAft>
+                <a:spcPts val="700"/>
+              </a:spcAft>
+              <a:buFont typeface="Arial"/>
+              <a:buChar char="•"/>
+            </a:pPr>
+            <a:r>
+              <a:rPr sz="1400" b="0" i="0">
+                <a:solidFill>
+                  <a:srgbClr val="1A1A1A"/>
+                </a:solidFill>
+                <a:latin typeface="Arial"/>
+                <a:cs typeface="Arial"/>
+                <a:ea typeface="Arial"/>
+              </a:rPr>
+              <a:t>FastAPI, PostGIS jobs, Streamlit, MLflow, Docker Compose</a:t>
+            </a:r>
+          </a:p>
+        </p:txBody>
+      </p:sp>
+      <p:sp>
+        <p:nvSpPr>
+          <p:cNvPr id="7" name="Partial or not run header"/>
+          <p:cNvSpPr/>
+          <p:nvPr/>
+        </p:nvSpPr>
+        <p:spPr>
+          <a:xfrm>
+            <a:off x="4498848" y="1691640"/>
+            <a:ext cx="3749039" cy="457200"/>
+          </a:xfrm>
+          <a:prstGeom prst="roundRect">
+            <a:avLst>
+              <a:gd name="adj" fmla="val 8000"/>
+            </a:avLst>
+          </a:prstGeom>
+          <a:solidFill>
+            <a:srgbClr val="B26B00"/>
+          </a:solidFill>
+          <a:ln>
+            <a:noFill/>
+          </a:ln>
+          <a:effectLst/>
+        </p:spPr>
+        <p:style>
+          <a:lnRef idx="1">
+            <a:schemeClr val="accent1"/>
+          </a:lnRef>
+          <a:fillRef idx="3">
+            <a:schemeClr val="accent1"/>
+          </a:fillRef>
+          <a:effectRef idx="2">
+            <a:schemeClr val="accent1"/>
+          </a:effectRef>
+          <a:fontRef idx="minor">
+            <a:schemeClr val="lt1"/>
+          </a:fontRef>
+        </p:style>
+        <p:txBody>
+          <a:bodyPr rtlCol="0" anchor="ctr" lIns="137160" rIns="137160" tIns="137160" bIns="137160" wrap="square"/>
+          <a:lstStyle/>
+          <a:p>
+            <a:pPr algn="l" marL="0" indent="0">
+              <a:spcAft>
+                <a:spcPts val="0"/>
+              </a:spcAft>
+              <a:buNone/>
+            </a:pPr>
+            <a:r>
+              <a:rPr sz="1700" b="1" i="0">
+                <a:solidFill>
+                  <a:srgbClr val="FFFFFF"/>
+                </a:solidFill>
+                <a:latin typeface="Arial"/>
+                <a:cs typeface="Arial"/>
+                <a:ea typeface="Arial"/>
+              </a:rPr>
+              <a:t>Partial or not run</a:t>
+            </a:r>
+          </a:p>
+        </p:txBody>
+      </p:sp>
+      <p:sp>
+        <p:nvSpPr>
+          <p:cNvPr id="8" name="Partial or not run"/>
+          <p:cNvSpPr/>
+          <p:nvPr/>
+        </p:nvSpPr>
+        <p:spPr>
+          <a:xfrm>
+            <a:off x="4498848" y="2240280"/>
+            <a:ext cx="3749039" cy="4480560"/>
+          </a:xfrm>
+          <a:prstGeom prst="roundRect">
+            <a:avLst>
+              <a:gd name="adj" fmla="val 8000"/>
+            </a:avLst>
+          </a:prstGeom>
+          <a:solidFill>
+            <a:srgbClr val="E4ECF7"/>
+          </a:solidFill>
+          <a:ln>
+            <a:noFill/>
+          </a:ln>
+          <a:effectLst/>
+        </p:spPr>
+        <p:style>
+          <a:lnRef idx="1">
+            <a:schemeClr val="accent1"/>
+          </a:lnRef>
+          <a:fillRef idx="3">
+            <a:schemeClr val="accent1"/>
+          </a:fillRef>
+          <a:effectRef idx="2">
+            <a:schemeClr val="accent1"/>
+          </a:effectRef>
+          <a:fontRef idx="minor">
+            <a:schemeClr val="lt1"/>
+          </a:fontRef>
+        </p:style>
+        <p:txBody>
+          <a:bodyPr rtlCol="0" anchor="t" lIns="137160" rIns="137160" tIns="137160" bIns="137160" wrap="square"/>
+          <a:lstStyle/>
+          <a:p>
+            <a:pPr algn="l" marL="274320" indent="-228600">
+              <a:spcAft>
+                <a:spcPts val="700"/>
+              </a:spcAft>
+              <a:buFont typeface="Arial"/>
+              <a:buChar char="•"/>
+            </a:pPr>
+            <a:r>
+              <a:rPr sz="1400" b="0" i="0">
+                <a:solidFill>
+                  <a:srgbClr val="1A1A1A"/>
+                </a:solidFill>
+                <a:latin typeface="Arial"/>
+                <a:cs typeface="Arial"/>
+                <a:ea typeface="Arial"/>
+              </a:rPr>
+              <a:t>SUMO controller comparison NOT RUN; the first 45-run comparison is superseded</a:t>
+            </a:r>
+          </a:p>
+          <a:p>
+            <a:pPr algn="l" marL="274320" indent="-228600">
+              <a:spcAft>
+                <a:spcPts val="700"/>
+              </a:spcAft>
+              <a:buFont typeface="Arial"/>
+              <a:buChar char="•"/>
+            </a:pPr>
+            <a:r>
+              <a:rPr sz="1400" b="0" i="0">
+                <a:solidFill>
+                  <a:srgbClr val="1A1A1A"/>
+                </a:solidFill>
+                <a:latin typeface="Arial"/>
+                <a:cs typeface="Arial"/>
+                <a:ea typeface="Arial"/>
+              </a:rPr>
+              <a:t>No real advisory has reached the simulation gate (the LLM chose monitor-only in both passes)</a:t>
+            </a:r>
+          </a:p>
+          <a:p>
+            <a:pPr algn="l" marL="274320" indent="-228600">
+              <a:spcAft>
+                <a:spcPts val="700"/>
+              </a:spcAft>
+              <a:buFont typeface="Arial"/>
+              <a:buChar char="•"/>
+            </a:pPr>
+            <a:r>
+              <a:rPr sz="1400" b="0" i="0">
+                <a:solidFill>
+                  <a:srgbClr val="1A1A1A"/>
+                </a:solidFill>
+                <a:latin typeface="Arial"/>
+                <a:cs typeface="Arial"/>
+                <a:ea typeface="Arial"/>
+              </a:rPr>
+              <a:t>Only three seeds; the proposed model is not bit-reproducible on GPU at a fixed seed</a:t>
+            </a:r>
+          </a:p>
+          <a:p>
+            <a:pPr algn="l" marL="274320" indent="-228600">
+              <a:spcAft>
+                <a:spcPts val="700"/>
+              </a:spcAft>
+              <a:buFont typeface="Arial"/>
+              <a:buChar char="•"/>
+            </a:pPr>
+            <a:r>
+              <a:rPr sz="1400" b="0" i="0">
+                <a:solidFill>
+                  <a:srgbClr val="1A1A1A"/>
+                </a:solidFill>
+                <a:latin typeface="Arial"/>
+                <a:cs typeface="Arial"/>
+                <a:ea typeface="Arial"/>
+              </a:rPr>
+              <a:t>Road graph is sparse: 26 nodes, 16 edges</a:t>
+            </a:r>
+          </a:p>
+          <a:p>
+            <a:pPr algn="l" marL="274320" indent="-228600">
+              <a:spcAft>
+                <a:spcPts val="700"/>
+              </a:spcAft>
+              <a:buFont typeface="Arial"/>
+              <a:buChar char="•"/>
+            </a:pPr>
+            <a:r>
+              <a:rPr sz="1400" b="0" i="0">
+                <a:solidFill>
+                  <a:srgbClr val="1A1A1A"/>
+                </a:solidFill>
+                <a:latin typeface="Arial"/>
+                <a:cs typeface="Arial"/>
+                <a:ea typeface="Arial"/>
+              </a:rPr>
+              <a:t>Intervals under-cover congested periods</a:t>
+            </a:r>
+          </a:p>
+        </p:txBody>
+      </p:sp>
+      <p:sp>
+        <p:nvSpPr>
+          <p:cNvPr id="9" name="Outcomes and next steps header"/>
+          <p:cNvSpPr/>
+          <p:nvPr/>
+        </p:nvSpPr>
+        <p:spPr>
+          <a:xfrm>
+            <a:off x="8494776" y="1691640"/>
+            <a:ext cx="3749039" cy="457200"/>
+          </a:xfrm>
+          <a:prstGeom prst="roundRect">
+            <a:avLst>
+              <a:gd name="adj" fmla="val 8000"/>
+            </a:avLst>
+          </a:prstGeom>
+          <a:solidFill>
+            <a:srgbClr val="1F497D"/>
+          </a:solidFill>
+          <a:ln>
+            <a:noFill/>
+          </a:ln>
+          <a:effectLst/>
+        </p:spPr>
+        <p:style>
+          <a:lnRef idx="1">
+            <a:schemeClr val="accent1"/>
+          </a:lnRef>
+          <a:fillRef idx="3">
+            <a:schemeClr val="accent1"/>
+          </a:fillRef>
+          <a:effectRef idx="2">
+            <a:schemeClr val="accent1"/>
+          </a:effectRef>
+          <a:fontRef idx="minor">
+            <a:schemeClr val="lt1"/>
+          </a:fontRef>
+        </p:style>
+        <p:txBody>
+          <a:bodyPr rtlCol="0" anchor="ctr" lIns="137160" rIns="137160" tIns="137160" bIns="137160" wrap="square"/>
+          <a:lstStyle/>
+          <a:p>
+            <a:pPr algn="l" marL="0" indent="0">
+              <a:spcAft>
+                <a:spcPts val="0"/>
+              </a:spcAft>
+              <a:buNone/>
+            </a:pPr>
+            <a:r>
+              <a:rPr sz="1700" b="1" i="0">
+                <a:solidFill>
+                  <a:srgbClr val="FFFFFF"/>
+                </a:solidFill>
+                <a:latin typeface="Arial"/>
+                <a:cs typeface="Arial"/>
+                <a:ea typeface="Arial"/>
+              </a:rPr>
+              <a:t>Outcomes and next steps</a:t>
+            </a:r>
+          </a:p>
+        </p:txBody>
+      </p:sp>
+      <p:sp>
+        <p:nvSpPr>
+          <p:cNvPr id="10" name="Outcomes and next steps"/>
+          <p:cNvSpPr/>
+          <p:nvPr/>
+        </p:nvSpPr>
+        <p:spPr>
+          <a:xfrm>
+            <a:off x="8494776" y="2240280"/>
+            <a:ext cx="3749039" cy="4480560"/>
+          </a:xfrm>
+          <a:prstGeom prst="roundRect">
+            <a:avLst>
+              <a:gd name="adj" fmla="val 8000"/>
+            </a:avLst>
+          </a:prstGeom>
+          <a:solidFill>
+            <a:srgbClr val="E4ECF7"/>
+          </a:solidFill>
+          <a:ln>
+            <a:noFill/>
+          </a:ln>
+          <a:effectLst/>
+        </p:spPr>
+        <p:style>
+          <a:lnRef idx="1">
+            <a:schemeClr val="accent1"/>
+          </a:lnRef>
+          <a:fillRef idx="3">
+            <a:schemeClr val="accent1"/>
+          </a:fillRef>
+          <a:effectRef idx="2">
+            <a:schemeClr val="accent1"/>
+          </a:effectRef>
+          <a:fontRef idx="minor">
+            <a:schemeClr val="lt1"/>
+          </a:fontRef>
+        </p:style>
+        <p:txBody>
+          <a:bodyPr rtlCol="0" anchor="t" lIns="137160" rIns="137160" tIns="137160" bIns="137160" wrap="square"/>
+          <a:lstStyle/>
+          <a:p>
+            <a:pPr algn="l" marL="274320" indent="-228600">
+              <a:spcAft>
+                <a:spcPts val="700"/>
+              </a:spcAft>
+              <a:buFont typeface="Arial"/>
+              <a:buChar char="•"/>
+            </a:pPr>
+            <a:r>
+              <a:rPr sz="1400" b="0" i="0">
+                <a:solidFill>
+                  <a:srgbClr val="1A1A1A"/>
+                </a:solidFill>
+                <a:latin typeface="Arial"/>
+                <a:cs typeface="Arial"/>
+                <a:ea typeface="Arial"/>
+              </a:rPr>
+              <a:t>IEEE conference paper (LaTeX and Word), every claim traced in the claims ledger</a:t>
+            </a:r>
+          </a:p>
+          <a:p>
+            <a:pPr algn="l" marL="274320" indent="-228600">
+              <a:spcAft>
+                <a:spcPts val="700"/>
+              </a:spcAft>
+              <a:buFont typeface="Arial"/>
+              <a:buChar char="•"/>
+            </a:pPr>
+            <a:r>
+              <a:rPr sz="1400" b="0" i="0">
+                <a:solidFill>
+                  <a:srgbClr val="1A1A1A"/>
+                </a:solidFill>
+                <a:latin typeface="Arial"/>
+                <a:cs typeface="Arial"/>
+                <a:ea typeface="Arial"/>
+              </a:rPr>
+              <a:t>GitHub repository with tests, runbooks and result files</a:t>
+            </a:r>
+          </a:p>
+          <a:p>
+            <a:pPr algn="l" marL="274320" indent="-228600">
+              <a:spcAft>
+                <a:spcPts val="700"/>
+              </a:spcAft>
+              <a:buFont typeface="Arial"/>
+              <a:buChar char="•"/>
+            </a:pPr>
+            <a:r>
+              <a:rPr sz="1400" b="0" i="0">
+                <a:solidFill>
+                  <a:srgbClr val="1A1A1A"/>
+                </a:solidFill>
+                <a:latin typeface="Arial"/>
+                <a:cs typeface="Arial"/>
+                <a:ea typeface="Arial"/>
+              </a:rPr>
+              <a:t>Next: calibrate West St signal timing to 10.95 mph or obtain NYC DOT timing plans, then run the comparison</a:t>
+            </a:r>
+          </a:p>
+          <a:p>
+            <a:pPr algn="l" marL="274320" indent="-228600">
+              <a:spcAft>
+                <a:spcPts val="700"/>
+              </a:spcAft>
+              <a:buFont typeface="Arial"/>
+              <a:buChar char="•"/>
+            </a:pPr>
+            <a:r>
+              <a:rPr sz="1400" b="0" i="0">
+                <a:solidFill>
+                  <a:srgbClr val="1A1A1A"/>
+                </a:solidFill>
+                <a:latin typeface="Arial"/>
+                <a:cs typeface="Arial"/>
+                <a:ea typeface="Arial"/>
+              </a:rPr>
+              <a:t>Next: more seeds without the compute budget</a:t>
+            </a:r>
+          </a:p>
+          <a:p>
+            <a:pPr algn="l" marL="274320" indent="-228600">
+              <a:spcAft>
+                <a:spcPts val="700"/>
+              </a:spcAft>
+              <a:buFont typeface="Arial"/>
+              <a:buChar char="•"/>
+            </a:pPr>
+            <a:r>
+              <a:rPr sz="1400" b="0" i="0">
+                <a:solidFill>
+                  <a:srgbClr val="1A1A1A"/>
+                </a:solidFill>
+                <a:latin typeface="Arial"/>
+                <a:cs typeface="Arial"/>
+                <a:ea typeface="Arial"/>
+              </a:rPr>
+              <a:t>Next: paper submission</a:t>
+            </a:r>
+          </a:p>
+        </p:txBody>
+      </p:sp>
+    </p:spTree>
+    <p:extLst>
+      <p:ext uri="{BB962C8B-B14F-4D97-AF65-F5344CB8AC3E}">
+        <p14:creationId xmlns:p14="http://schemas.microsoft.com/office/powerpoint/2010/main" val="3187296211"/>
+      </p:ext>
+    </p:extLst>
+  </p:cSld>
+  <p:clrMapOvr>
+    <a:masterClrMapping/>
+  </p:clrMapOvr>
+</p:sld>
+</file>
+
+<file path=ppt/slides/slide23.xml><?xml version="1.0" encoding="utf-8"?>
+<p:sld xmlns:a="http://schemas.openxmlformats.org/drawingml/2006/main" xmlns:r="http://schemas.openxmlformats.org/officeDocument/2006/relationships" xmlns:p="http://schemas.openxmlformats.org/presentationml/2006/main">
+  <p:cSld>
+    <p:spTree>
+      <p:nvGrpSpPr>
+        <p:cNvPr id="1" name="">
+          <a:extLst>
+            <a:ext uri="{FF2B5EF4-FFF2-40B4-BE49-F238E27FC236}">
+              <a16:creationId xmlns:a16="http://schemas.microsoft.com/office/drawing/2014/main" id="{2AF24EBC-07D1-5582-ECAD-FB015F64BD9E}"/>
+            </a:ext>
+          </a:extLst>
+        </p:cNvPr>
+        <p:cNvGrpSpPr/>
+        <p:nvPr/>
+      </p:nvGrpSpPr>
+      <p:grpSpPr>
+        <a:xfrm>
+          <a:off x="0" y="0"/>
+          <a:ext cx="0" cy="0"/>
+          <a:chOff x="0" y="0"/>
+          <a:chExt cx="0" cy="0"/>
+        </a:xfrm>
+      </p:grpSpPr>
+      <p:sp>
+        <p:nvSpPr>
+          <p:cNvPr id="2" name="Title 1">
+            <a:extLst>
+              <a:ext uri="{FF2B5EF4-FFF2-40B4-BE49-F238E27FC236}">
+                <a16:creationId xmlns:a16="http://schemas.microsoft.com/office/drawing/2014/main" id="{FA93089C-2484-51E9-0A89-B13831434514}"/>
+              </a:ext>
+            </a:extLst>
+          </p:cNvPr>
+          <p:cNvSpPr>
+            <a:spLocks noGrp="1"/>
+          </p:cNvSpPr>
+          <p:nvPr>
+            <p:ph type="title"/>
+          </p:nvPr>
+        </p:nvSpPr>
+        <p:spPr>
+          <a:xfrm>
+            <a:off x="0" y="0"/>
+            <a:ext cx="12801600" cy="1512146"/>
+          </a:xfrm>
+          <a:solidFill>
+            <a:schemeClr val="tx2">
+              <a:lumMod val="60000"/>
+              <a:lumOff val="40000"/>
+            </a:schemeClr>
+          </a:solidFill>
+        </p:spPr>
+        <p:txBody>
+          <a:bodyPr vert="horz" lIns="114945" tIns="57473" rIns="114945" bIns="57473" rtlCol="0" anchor="ctr">
+            <a:normAutofit/>
+          </a:bodyPr>
+          <a:lstStyle/>
+          <a:p>
+            <a:r>
+              <a:rPr lang="en-US" sz="3600" b="1" dirty="0">
+                <a:solidFill>
+                  <a:schemeClr val="bg1"/>
+                </a:solidFill>
+                <a:latin typeface="Arial" panose="020B0604020202020204" pitchFamily="34" charset="0"/>
+                <a:cs typeface="Arial" panose="020B0604020202020204" pitchFamily="34" charset="0"/>
+              </a:rPr>
+              <a:t>REFERENCES</a:t>
+            </a:r>
+            <a:endParaRPr lang="en-GB" sz="3600" b="1" dirty="0">
+              <a:solidFill>
+                <a:schemeClr val="bg1"/>
+              </a:solidFill>
+              <a:latin typeface="Arial" panose="020B0604020202020204" pitchFamily="34" charset="0"/>
+              <a:cs typeface="Arial" panose="020B0604020202020204" pitchFamily="34" charset="0"/>
+            </a:endParaRPr>
+          </a:p>
+        </p:txBody>
+      </p:sp>
+      <p:sp>
+        <p:nvSpPr>
+          <p:cNvPr id="4" name="Slide Number Placeholder 3">
+            <a:extLst>
+              <a:ext uri="{FF2B5EF4-FFF2-40B4-BE49-F238E27FC236}">
+                <a16:creationId xmlns:a16="http://schemas.microsoft.com/office/drawing/2014/main" id="{A9E1DF2F-2EFC-F28C-9A44-F9337C42CAAA}"/>
+              </a:ext>
+            </a:extLst>
+          </p:cNvPr>
+          <p:cNvSpPr>
+            <a:spLocks noGrp="1"/>
+          </p:cNvSpPr>
+          <p:nvPr>
+            <p:ph type="sldNum" sz="quarter" idx="12"/>
+          </p:nvPr>
+        </p:nvSpPr>
+        <p:spPr/>
+        <p:txBody>
+          <a:bodyPr/>
+          <a:lstStyle/>
+          <a:p>
+            <a:fld id="{C02A2637-A5A3-49FA-B214-6E67543099EF}" type="slidenum">
+              <a:rPr lang="en-US" smtClean="0"/>
+              <a:t>23</a:t>
+            </a:fld>
+            <a:endParaRPr lang="en-US"/>
+          </a:p>
+        </p:txBody>
+      </p:sp>
+      <p:sp>
+        <p:nvSpPr>
+          <p:cNvPr id="5" name="TextBox 4"/>
+          <p:cNvSpPr txBox="1"/>
+          <p:nvPr/>
+        </p:nvSpPr>
+        <p:spPr>
+          <a:xfrm>
+            <a:off x="548640" y="1783080"/>
+            <a:ext cx="11704320" cy="4892040"/>
+          </a:xfrm>
+          <a:prstGeom prst="rect">
+            <a:avLst/>
+          </a:prstGeom>
+          <a:noFill/>
+        </p:spPr>
+        <p:txBody>
+          <a:bodyPr wrap="square" lIns="36576" rIns="36576" tIns="36576" bIns="36576" anchor="t"/>
+          <a:lstStyle/>
+          <a:p>
+            <a:pPr algn="l" marL="0" indent="0">
+              <a:spcAft>
+                <a:spcPts val="500"/>
+              </a:spcAft>
+              <a:buNone/>
+            </a:pPr>
+            <a:r>
+              <a:rPr sz="1400" b="0" i="0">
+                <a:solidFill>
+                  <a:srgbClr val="1A1A1A"/>
+                </a:solidFill>
+                <a:latin typeface="Times New Roman"/>
+                <a:cs typeface="Times New Roman"/>
+                <a:ea typeface="Times New Roman"/>
+              </a:rPr>
+              <a:t>[1] Y. Li, R. Yu, C. Shahabi, and Y. Liu, “Diffusion convolutional recurrent neural network: Data-driven traffic forecasting,” in Proc. ICLR, 2018.</a:t>
+            </a:r>
+          </a:p>
+          <a:p>
+            <a:pPr algn="l" marL="0" indent="0">
+              <a:spcAft>
+                <a:spcPts val="500"/>
+              </a:spcAft>
+              <a:buNone/>
+            </a:pPr>
+            <a:r>
+              <a:rPr sz="1400" b="0" i="0">
+                <a:solidFill>
+                  <a:srgbClr val="1A1A1A"/>
+                </a:solidFill>
+                <a:latin typeface="Times New Roman"/>
+                <a:cs typeface="Times New Roman"/>
+                <a:ea typeface="Times New Roman"/>
+              </a:rPr>
+              <a:t>[2] B. Yu, H. Yin, and Z. Zhu, “Spatio-temporal graph convolutional networks: A deep learning framework for traffic forecasting,” in Proc. IJCAI, 2018, pp. 3634–3640.</a:t>
+            </a:r>
+          </a:p>
+          <a:p>
+            <a:pPr algn="l" marL="0" indent="0">
+              <a:spcAft>
+                <a:spcPts val="500"/>
+              </a:spcAft>
+              <a:buNone/>
+            </a:pPr>
+            <a:r>
+              <a:rPr sz="1400" b="0" i="0">
+                <a:solidFill>
+                  <a:srgbClr val="1A1A1A"/>
+                </a:solidFill>
+                <a:latin typeface="Times New Roman"/>
+                <a:cs typeface="Times New Roman"/>
+                <a:ea typeface="Times New Roman"/>
+              </a:rPr>
+              <a:t>[3] Z. Wu, S. Pan, G. Long, J. Jiang, and C. Zhang, “Graph WaveNet for deep spatial-temporal graph modeling,” in Proc. IJCAI, 2019, pp. 1907–1913.</a:t>
+            </a:r>
+          </a:p>
+          <a:p>
+            <a:pPr algn="l" marL="0" indent="0">
+              <a:spcAft>
+                <a:spcPts val="500"/>
+              </a:spcAft>
+              <a:buNone/>
+            </a:pPr>
+            <a:r>
+              <a:rPr sz="1400" b="0" i="0">
+                <a:solidFill>
+                  <a:srgbClr val="1A1A1A"/>
+                </a:solidFill>
+                <a:latin typeface="Times New Roman"/>
+                <a:cs typeface="Times New Roman"/>
+                <a:ea typeface="Times New Roman"/>
+              </a:rPr>
+              <a:t>[4] P. Lewis et al., “Retrieval-augmented generation for knowledge-intensive NLP tasks,” in Proc. NeurIPS, 2020.</a:t>
+            </a:r>
+          </a:p>
+          <a:p>
+            <a:pPr algn="l" marL="0" indent="0">
+              <a:spcAft>
+                <a:spcPts val="500"/>
+              </a:spcAft>
+              <a:buNone/>
+            </a:pPr>
+            <a:r>
+              <a:rPr sz="1400" b="0" i="0">
+                <a:solidFill>
+                  <a:srgbClr val="1A1A1A"/>
+                </a:solidFill>
+                <a:latin typeface="Times New Roman"/>
+                <a:cs typeface="Times New Roman"/>
+                <a:ea typeface="Times New Roman"/>
+              </a:rPr>
+              <a:t>[5] P. A. Lopez et al., “Microscopic traffic simulation using SUMO,” in Proc. IEEE ITSC, 2018, pp. 2575–2582.</a:t>
+            </a:r>
+          </a:p>
+          <a:p>
+            <a:pPr algn="l" marL="0" indent="0">
+              <a:spcAft>
+                <a:spcPts val="500"/>
+              </a:spcAft>
+              <a:buNone/>
+            </a:pPr>
+            <a:r>
+              <a:rPr sz="1400" b="0" i="0">
+                <a:solidFill>
+                  <a:srgbClr val="1A1A1A"/>
+                </a:solidFill>
+                <a:latin typeface="Times New Roman"/>
+                <a:cs typeface="Times New Roman"/>
+                <a:ea typeface="Times New Roman"/>
+              </a:rPr>
+              <a:t>[6] S. Brody, U. Alon, and E. Yahav, “How attentive are graph attention networks?,” in Proc. ICLR, 2022.</a:t>
+            </a:r>
+          </a:p>
+          <a:p>
+            <a:pPr algn="l" marL="0" indent="0">
+              <a:spcAft>
+                <a:spcPts val="500"/>
+              </a:spcAft>
+              <a:buNone/>
+            </a:pPr>
+            <a:r>
+              <a:rPr sz="1400" b="0" i="0">
+                <a:solidFill>
+                  <a:srgbClr val="1A1A1A"/>
+                </a:solidFill>
+                <a:latin typeface="Times New Roman"/>
+                <a:cs typeface="Times New Roman"/>
+                <a:ea typeface="Times New Roman"/>
+              </a:rPr>
+              <a:t>[7] A. N. Angelopoulos and S. Bates, “A gentle introduction to conformal prediction and distribution-free uncertainty quantification,” arXiv:2107.07511, 2021.</a:t>
+            </a:r>
+          </a:p>
+          <a:p>
+            <a:pPr algn="l" marL="0" indent="0">
+              <a:spcAft>
+                <a:spcPts val="500"/>
+              </a:spcAft>
+              <a:buNone/>
+            </a:pPr>
+            <a:r>
+              <a:rPr sz="1400" b="0" i="0">
+                <a:solidFill>
+                  <a:srgbClr val="1A1A1A"/>
+                </a:solidFill>
+                <a:latin typeface="Times New Roman"/>
+                <a:cs typeface="Times New Roman"/>
+                <a:ea typeface="Times New Roman"/>
+              </a:rPr>
+              <a:t>[8] C. Xu and Y. Xie, “Conformal prediction interval for dynamic time-series,” in Proc. ICML, PMLR vol. 139, 2021, pp. 11559–11569.</a:t>
+            </a:r>
+          </a:p>
+          <a:p>
+            <a:pPr algn="l" marL="0" indent="0">
+              <a:spcAft>
+                <a:spcPts val="500"/>
+              </a:spcAft>
+              <a:buNone/>
+            </a:pPr>
+            <a:r>
+              <a:rPr sz="1400" b="0" i="0">
+                <a:solidFill>
+                  <a:srgbClr val="1A1A1A"/>
+                </a:solidFill>
+                <a:latin typeface="Times New Roman"/>
+                <a:cs typeface="Times New Roman"/>
+                <a:ea typeface="Times New Roman"/>
+              </a:rPr>
+              <a:t>[9] S. M. Lundberg and S.-I. Lee, “A unified approach to interpreting model predictions,” in Proc. NeurIPS, 2017.</a:t>
+            </a:r>
+          </a:p>
+          <a:p>
+            <a:pPr algn="l" marL="0" indent="0">
+              <a:spcAft>
+                <a:spcPts val="500"/>
+              </a:spcAft>
+              <a:buNone/>
+            </a:pPr>
+            <a:r>
+              <a:rPr sz="1400" b="0" i="0">
+                <a:solidFill>
+                  <a:srgbClr val="1A1A1A"/>
+                </a:solidFill>
+                <a:latin typeface="Times New Roman"/>
+                <a:cs typeface="Times New Roman"/>
+                <a:ea typeface="Times New Roman"/>
+              </a:rPr>
+              <a:t>[10] B. Rozemberczki et al., “PyTorch Geometric Temporal: Spatiotemporal signal processing with neural machine learning models,” in Proc. ACM CIKM, 2021, pp. 4564–4573.</a:t>
+            </a:r>
+          </a:p>
+          <a:p>
+            <a:pPr algn="l" marL="0" indent="0">
+              <a:spcAft>
+                <a:spcPts val="500"/>
+              </a:spcAft>
+              <a:buNone/>
+            </a:pPr>
+            <a:r>
+              <a:rPr sz="1400" b="0" i="0">
+                <a:solidFill>
+                  <a:srgbClr val="1A1A1A"/>
+                </a:solidFill>
+                <a:latin typeface="Times New Roman"/>
+                <a:cs typeface="Times New Roman"/>
+                <a:ea typeface="Times New Roman"/>
+              </a:rPr>
+              <a:t>[11] NYC Department of Transportation, “DOT Traffic Speeds NBE,” NYC Open Data, dataset i4gi-tjb9, accessed Oct. 2026.</a:t>
+            </a:r>
+          </a:p>
+          <a:p>
+            <a:pPr algn="l" marL="0" indent="0">
+              <a:spcAft>
+                <a:spcPts val="500"/>
+              </a:spcAft>
+              <a:buNone/>
+            </a:pPr>
+            <a:r>
+              <a:rPr sz="1400" b="0" i="0">
+                <a:solidFill>
+                  <a:srgbClr val="1A1A1A"/>
+                </a:solidFill>
+                <a:latin typeface="Times New Roman"/>
+                <a:cs typeface="Times New Roman"/>
+                <a:ea typeface="Times New Roman"/>
+              </a:rPr>
+              <a:t>[12] NYC Department of Transportation, “Automated Traffic Volume Counts,” NYC Open Data, dataset 7ym2-wayt, accessed Oct. 2026.</a:t>
+            </a:r>
+          </a:p>
+        </p:txBody>
+      </p:sp>
+    </p:spTree>
+    <p:extLst>
+      <p:ext uri="{BB962C8B-B14F-4D97-AF65-F5344CB8AC3E}">
+        <p14:creationId xmlns:p14="http://schemas.microsoft.com/office/powerpoint/2010/main" val="4241540286"/>
+      </p:ext>
+    </p:extLst>
+  </p:cSld>
+  <p:clrMapOvr>
+    <a:masterClrMapping/>
+  </p:clrMapOvr>
+</p:sld>
+</file>
+
+<file path=ppt/slides/slide24.xml><?xml version="1.0" encoding="utf-8"?>
+<p:sld xmlns:a="http://schemas.openxmlformats.org/drawingml/2006/main" xmlns:r="http://schemas.openxmlformats.org/officeDocument/2006/relationships" xmlns:p="http://schemas.openxmlformats.org/presentationml/2006/main">
+  <p:cSld>
+    <p:spTree>
+      <p:nvGrpSpPr>
+        <p:cNvPr id="1" name=""/>
+        <p:cNvGrpSpPr/>
+        <p:nvPr/>
+      </p:nvGrpSpPr>
+      <p:grpSpPr>
+        <a:xfrm>
+          <a:off x="0" y="0"/>
+          <a:ext cx="0" cy="0"/>
+          <a:chOff x="0" y="0"/>
+          <a:chExt cx="0" cy="0"/>
+        </a:xfrm>
+      </p:grpSpPr>
+      <p:sp>
+        <p:nvSpPr>
+          <p:cNvPr id="2" name="Title 1"/>
+          <p:cNvSpPr>
+            <a:spLocks noGrp="1"/>
+          </p:cNvSpPr>
+          <p:nvPr>
+            <p:ph type="title"/>
+          </p:nvPr>
+        </p:nvSpPr>
+        <p:spPr>
+          <a:xfrm>
+            <a:off x="640080" y="2819401"/>
+            <a:ext cx="11521440" cy="1219200"/>
+          </a:xfrm>
+        </p:spPr>
+        <p:txBody>
+          <a:bodyPr>
+            <a:normAutofit fontScale="90000"/>
+          </a:bodyPr>
+          <a:lstStyle/>
+          <a:p>
+            <a:r>
+              <a:rPr lang="en-US" sz="10000" b="1" dirty="0">
+                <a:solidFill>
+                  <a:schemeClr val="tx2">
+                    <a:lumMod val="60000"/>
+                    <a:lumOff val="40000"/>
+                  </a:schemeClr>
+                </a:solidFill>
+                <a:latin typeface="Arial" panose="020B0604020202020204" pitchFamily="34" charset="0"/>
+                <a:cs typeface="Arial" panose="020B0604020202020204" pitchFamily="34" charset="0"/>
+              </a:rPr>
+              <a:t>Thank You</a:t>
+            </a:r>
+          </a:p>
+        </p:txBody>
+      </p:sp>
+      <p:sp>
+        <p:nvSpPr>
+          <p:cNvPr id="3" name="Slide Number Placeholder 2"/>
+          <p:cNvSpPr>
+            <a:spLocks noGrp="1"/>
+          </p:cNvSpPr>
+          <p:nvPr>
+            <p:ph type="sldNum" sz="quarter" idx="12"/>
+          </p:nvPr>
+        </p:nvSpPr>
+        <p:spPr/>
+        <p:txBody>
+          <a:bodyPr/>
+          <a:lstStyle/>
+          <a:p>
+            <a:fld id="{C02A2637-A5A3-49FA-B214-6E67543099EF}" type="slidenum">
+              <a:rPr lang="en-US" smtClean="0"/>
+              <a:t>24</a:t>
+            </a:fld>
+            <a:endParaRPr lang="en-US"/>
+          </a:p>
+        </p:txBody>
+      </p:sp>
+    </p:spTree>
+    <p:extLst>
+      <p:ext uri="{BB962C8B-B14F-4D97-AF65-F5344CB8AC3E}">
+        <p14:creationId xmlns:p14="http://schemas.microsoft.com/office/powerpoint/2010/main" val="2750398038"/>
       </p:ext>
     </p:extLst>
   </p:cSld>
@@ -17763,7 +19161,7 @@
           <a:p>
             <a:fld id="{C02A2637-A5A3-49FA-B214-6E67543099EF}" type="slidenum">
               <a:rPr lang="en-US" smtClean="0"/>
-              <a:t>5</a:t>
+              <a:t>6</a:t>
             </a:fld>
             <a:endParaRPr lang="en-US"/>
           </a:p>
@@ -17979,7 +19377,7 @@
           <a:p>
             <a:fld id="{C02A2637-A5A3-49FA-B214-6E67543099EF}" type="slidenum">
               <a:rPr lang="en-US" smtClean="0"/>
-              <a:t>6</a:t>
+              <a:t>7</a:t>
             </a:fld>
             <a:endParaRPr lang="en-US"/>
           </a:p>
@@ -18577,7 +19975,7 @@
           <a:p>
             <a:fld id="{C02A2637-A5A3-49FA-B214-6E67543099EF}" type="slidenum">
               <a:rPr lang="en-US" smtClean="0"/>
-              <a:t>7</a:t>
+              <a:t>8</a:t>
             </a:fld>
             <a:endParaRPr lang="en-US"/>
           </a:p>
@@ -19508,7 +20906,7 @@
           <a:p>
             <a:fld id="{C02A2637-A5A3-49FA-B214-6E67543099EF}" type="slidenum">
               <a:rPr lang="en-US" smtClean="0"/>
-              <a:t>8</a:t>
+              <a:t>9</a:t>
             </a:fld>
             <a:endParaRPr lang="en-US"/>
           </a:p>

--- a/presentation/Final_Review_S_K_Sricharan_25MML1010.pptx
+++ b/presentation/Final_Review_S_K_Sricharan_25MML1010.pptx
@@ -7380,7 +7380,7 @@
                 <a:cs typeface="Times New Roman"/>
                 <a:ea typeface="Times New Roman"/>
               </a:rPr>
-              <a:t>66 automated tests: unit, leakage, safety, integration, end-to-end</a:t>
+              <a:t>75 automated tests: unit, leakage, safety, integration, end-to-end (CI, 2026-10-21)</a:t>
             </a:r>
           </a:p>
         </p:txBody>
@@ -21212,7 +21212,7 @@
                 <a:cs typeface="Arial"/>
                 <a:ea typeface="Arial"/>
               </a:rPr>
-              <a:t>66</a:t>
+              <a:t>75</a:t>
             </a:r>
           </a:p>
           <a:p>

--- a/presentation/Final_Review_S_K_Sricharan_25MML1010.pptx
+++ b/presentation/Final_Review_S_K_Sricharan_25MML1010.pptx
@@ -7380,7 +7380,7 @@
                 <a:cs typeface="Times New Roman"/>
                 <a:ea typeface="Times New Roman"/>
               </a:rPr>
-              <a:t>75 automated tests: unit, leakage, safety, integration, end-to-end (CI, 2026-10-21)</a:t>
+              <a:t>82 automated tests: unit, leakage, safety, integration, end-to-end (CI run 65, 2026-10-21)</a:t>
             </a:r>
           </a:p>
         </p:txBody>
@@ -21212,7 +21212,7 @@
                 <a:cs typeface="Arial"/>
                 <a:ea typeface="Arial"/>
               </a:rPr>
-              <a:t>75</a:t>
+              <a:t>82</a:t>
             </a:r>
           </a:p>
           <a:p>

--- a/presentation/Final_Review_S_K_Sricharan_25MML1010.pptx
+++ b/presentation/Final_Review_S_K_Sricharan_25MML1010.pptx
@@ -28,6 +28,7 @@
     <p:sldId id="340" r:id="rId27"/>
     <p:sldId id="341" r:id="rId28"/>
     <p:sldId id="342" r:id="rId29"/>
+    <p:sldId id="344" r:id="rId31"/>
     <p:sldId id="327" r:id="rId16"/>
     <p:sldId id="343" r:id="rId30"/>
     <p:sldId id="338" r:id="rId25"/>
@@ -713,6 +714,511 @@
       </c:valAx>
     </c:plotArea>
     <c:dispBlanksAs val="gap"/>
+  </c:chart>
+  <c:txPr>
+    <a:bodyPr/>
+    <a:lstStyle/>
+    <a:p>
+      <a:pPr>
+        <a:defRPr sz="1800"/>
+      </a:pPr>
+      <a:endParaRPr lang="en-US"/>
+    </a:p>
+  </c:txPr>
+  <c:externalData r:id="rId1">
+    <c:autoUpdate val="0"/>
+  </c:externalData>
+</c:chartSpace>
+</file>
+
+<file path=ppt/charts/chart3.xml><?xml version="1.0" encoding="utf-8"?>
+<c:chartSpace xmlns:c="http://schemas.openxmlformats.org/drawingml/2006/chart" xmlns:a="http://schemas.openxmlformats.org/drawingml/2006/main" xmlns:r="http://schemas.openxmlformats.org/officeDocument/2006/relationships">
+  <c:date1904 val="0"/>
+  <c:chart>
+    <c:autoTitleDeleted val="0"/>
+    <c:plotArea>
+      <c:lineChart>
+        <c:grouping val="standard"/>
+        <c:varyColors val="0"/>
+        <c:ser>
+          <c:idx val="0"/>
+          <c:order val="0"/>
+          <c:tx>
+            <c:strRef>
+              <c:f>Sheet1!$B$1</c:f>
+              <c:strCache>
+                <c:ptCount val="1"/>
+                <c:pt idx="0">
+                  <c:v>Simulated speed, mean of 3 seeds</c:v>
+                </c:pt>
+              </c:strCache>
+            </c:strRef>
+          </c:tx>
+          <c:spPr>
+            <a:ln w="28575">
+              <a:solidFill>
+                <a:srgbClr val="1F497D"/>
+              </a:solidFill>
+            </a:ln>
+          </c:spPr>
+          <c:marker>
+            <c:spPr>
+              <a:solidFill>
+                <a:srgbClr val="1F497D"/>
+              </a:solidFill>
+              <a:ln>
+                <a:solidFill>
+                  <a:srgbClr val="1F497D"/>
+                </a:solidFill>
+              </a:ln>
+            </c:spPr>
+          </c:marker>
+          <c:dLbls>
+            <c:dLbl>
+              <c:idx val="0"/>
+              <c:spPr/>
+              <c:txPr>
+                <a:bodyPr/>
+                <a:lstStyle/>
+                <a:p>
+                  <a:pPr>
+                    <a:defRPr sz="1000">
+                      <a:solidFill>
+                        <a:srgbClr val="1F497D"/>
+                      </a:solidFill>
+                      <a:latin typeface="Arial"/>
+                    </a:defRPr>
+                  </a:pPr>
+                </a:p>
+              </c:txPr>
+              <c:dLblPos val="t"/>
+              <c:showLegendKey val="0"/>
+              <c:showVal val="1"/>
+              <c:showCatName val="0"/>
+              <c:showSerName val="0"/>
+              <c:showPercent val="0"/>
+              <c:showBubbleSize val="0"/>
+            </c:dLbl>
+            <c:dLbl>
+              <c:idx val="1"/>
+              <c:spPr/>
+              <c:txPr>
+                <a:bodyPr/>
+                <a:lstStyle/>
+                <a:p>
+                  <a:pPr>
+                    <a:defRPr sz="1000">
+                      <a:solidFill>
+                        <a:srgbClr val="1F497D"/>
+                      </a:solidFill>
+                      <a:latin typeface="Arial"/>
+                    </a:defRPr>
+                  </a:pPr>
+                </a:p>
+              </c:txPr>
+              <c:dLblPos val="t"/>
+              <c:showLegendKey val="0"/>
+              <c:showVal val="1"/>
+              <c:showCatName val="0"/>
+              <c:showSerName val="0"/>
+              <c:showPercent val="0"/>
+              <c:showBubbleSize val="0"/>
+            </c:dLbl>
+            <c:dLbl>
+              <c:idx val="2"/>
+              <c:spPr/>
+              <c:txPr>
+                <a:bodyPr/>
+                <a:lstStyle/>
+                <a:p>
+                  <a:pPr>
+                    <a:defRPr sz="1000">
+                      <a:solidFill>
+                        <a:srgbClr val="1F497D"/>
+                      </a:solidFill>
+                      <a:latin typeface="Arial"/>
+                    </a:defRPr>
+                  </a:pPr>
+                </a:p>
+              </c:txPr>
+              <c:dLblPos val="t"/>
+              <c:showLegendKey val="0"/>
+              <c:showVal val="1"/>
+              <c:showCatName val="0"/>
+              <c:showSerName val="0"/>
+              <c:showPercent val="0"/>
+              <c:showBubbleSize val="0"/>
+            </c:dLbl>
+            <c:dLbl>
+              <c:idx val="3"/>
+              <c:spPr/>
+              <c:txPr>
+                <a:bodyPr/>
+                <a:lstStyle/>
+                <a:p>
+                  <a:pPr>
+                    <a:defRPr sz="1000">
+                      <a:solidFill>
+                        <a:srgbClr val="1F497D"/>
+                      </a:solidFill>
+                      <a:latin typeface="Arial"/>
+                    </a:defRPr>
+                  </a:pPr>
+                </a:p>
+              </c:txPr>
+              <c:dLblPos val="t"/>
+              <c:showLegendKey val="0"/>
+              <c:showVal val="1"/>
+              <c:showCatName val="0"/>
+              <c:showSerName val="0"/>
+              <c:showPercent val="0"/>
+              <c:showBubbleSize val="0"/>
+            </c:dLbl>
+            <c:dLbl>
+              <c:idx val="4"/>
+              <c:spPr/>
+              <c:txPr>
+                <a:bodyPr/>
+                <a:lstStyle/>
+                <a:p>
+                  <a:pPr>
+                    <a:defRPr sz="1000">
+                      <a:solidFill>
+                        <a:srgbClr val="1F497D"/>
+                      </a:solidFill>
+                      <a:latin typeface="Arial"/>
+                    </a:defRPr>
+                  </a:pPr>
+                </a:p>
+              </c:txPr>
+              <c:dLblPos val="t"/>
+              <c:showLegendKey val="0"/>
+              <c:showVal val="1"/>
+              <c:showCatName val="0"/>
+              <c:showSerName val="0"/>
+              <c:showPercent val="0"/>
+              <c:showBubbleSize val="0"/>
+            </c:dLbl>
+            <c:dLbl>
+              <c:idx val="5"/>
+              <c:spPr/>
+              <c:txPr>
+                <a:bodyPr/>
+                <a:lstStyle/>
+                <a:p>
+                  <a:pPr>
+                    <a:defRPr sz="1000">
+                      <a:solidFill>
+                        <a:srgbClr val="1F497D"/>
+                      </a:solidFill>
+                      <a:latin typeface="Arial"/>
+                    </a:defRPr>
+                  </a:pPr>
+                </a:p>
+              </c:txPr>
+              <c:dLblPos val="t"/>
+              <c:showLegendKey val="0"/>
+              <c:showVal val="1"/>
+              <c:showCatName val="0"/>
+              <c:showSerName val="0"/>
+              <c:showPercent val="0"/>
+              <c:showBubbleSize val="0"/>
+            </c:dLbl>
+            <c:dLbl>
+              <c:idx val="6"/>
+              <c:spPr/>
+              <c:txPr>
+                <a:bodyPr/>
+                <a:lstStyle/>
+                <a:p>
+                  <a:pPr>
+                    <a:defRPr sz="1000">
+                      <a:solidFill>
+                        <a:srgbClr val="1F497D"/>
+                      </a:solidFill>
+                      <a:latin typeface="Arial"/>
+                    </a:defRPr>
+                  </a:pPr>
+                </a:p>
+              </c:txPr>
+              <c:dLblPos val="t"/>
+              <c:showLegendKey val="0"/>
+              <c:showVal val="1"/>
+              <c:showCatName val="0"/>
+              <c:showSerName val="0"/>
+              <c:showPercent val="0"/>
+              <c:showBubbleSize val="0"/>
+            </c:dLbl>
+            <c:showLegendKey val="0"/>
+            <c:showVal val="0"/>
+            <c:showCatName val="0"/>
+            <c:showSerName val="0"/>
+            <c:showPercent val="0"/>
+            <c:showBubbleSize val="0"/>
+            <c:showLeaderLines val="1"/>
+          </c:dLbls>
+          <c:cat>
+            <c:strRef>
+              <c:f>Sheet1!$A$2:$A$8</c:f>
+              <c:strCache>
+                <c:ptCount val="7"/>
+                <c:pt idx="0">
+                  <c:v>×1.0</c:v>
+                </c:pt>
+                <c:pt idx="1">
+                  <c:v>×1.2</c:v>
+                </c:pt>
+                <c:pt idx="2">
+                  <c:v>×1.4</c:v>
+                </c:pt>
+                <c:pt idx="3">
+                  <c:v>×1.6</c:v>
+                </c:pt>
+                <c:pt idx="4">
+                  <c:v>×1.8</c:v>
+                </c:pt>
+                <c:pt idx="5">
+                  <c:v>×2.0</c:v>
+                </c:pt>
+                <c:pt idx="6">
+                  <c:v>×2.5</c:v>
+                </c:pt>
+              </c:strCache>
+            </c:strRef>
+          </c:cat>
+          <c:val>
+            <c:numRef>
+              <c:f>Sheet1!$B$2:$B$8</c:f>
+              <c:numCache>
+                <c:formatCode>General</c:formatCode>
+                <c:ptCount val="7"/>
+                <c:pt idx="0">
+                  <c:v>5.82</c:v>
+                </c:pt>
+                <c:pt idx="1">
+                  <c:v>6.16</c:v>
+                </c:pt>
+                <c:pt idx="2">
+                  <c:v>6.52</c:v>
+                </c:pt>
+                <c:pt idx="3">
+                  <c:v>6.85</c:v>
+                </c:pt>
+                <c:pt idx="4">
+                  <c:v>7.13</c:v>
+                </c:pt>
+                <c:pt idx="5">
+                  <c:v>7.49</c:v>
+                </c:pt>
+                <c:pt idx="6">
+                  <c:v>8.1</c:v>
+                </c:pt>
+              </c:numCache>
+            </c:numRef>
+          </c:val>
+          <c:smooth val="0"/>
+        </c:ser>
+        <c:ser>
+          <c:idx val="1"/>
+          <c:order val="1"/>
+          <c:tx>
+            <c:strRef>
+              <c:f>Sheet1!$C$1</c:f>
+              <c:strCache>
+                <c:ptCount val="1"/>
+                <c:pt idx="0">
+                  <c:v>Observed PM-peak speed (target)</c:v>
+                </c:pt>
+              </c:strCache>
+            </c:strRef>
+          </c:tx>
+          <c:spPr>
+            <a:ln w="28575">
+              <a:solidFill>
+                <a:srgbClr val="2E7D4F"/>
+              </a:solidFill>
+              <a:prstDash val="dash"/>
+            </a:ln>
+          </c:spPr>
+          <c:marker>
+            <c:symbol val="none"/>
+            <c:spPr>
+              <a:solidFill>
+                <a:srgbClr val="2E7D4F"/>
+              </a:solidFill>
+              <a:ln>
+                <a:solidFill>
+                  <a:srgbClr val="2E7D4F"/>
+                </a:solidFill>
+              </a:ln>
+            </c:spPr>
+          </c:marker>
+          <c:cat>
+            <c:strRef>
+              <c:f>Sheet1!$A$2:$A$8</c:f>
+              <c:strCache>
+                <c:ptCount val="7"/>
+                <c:pt idx="0">
+                  <c:v>×1.0</c:v>
+                </c:pt>
+                <c:pt idx="1">
+                  <c:v>×1.2</c:v>
+                </c:pt>
+                <c:pt idx="2">
+                  <c:v>×1.4</c:v>
+                </c:pt>
+                <c:pt idx="3">
+                  <c:v>×1.6</c:v>
+                </c:pt>
+                <c:pt idx="4">
+                  <c:v>×1.8</c:v>
+                </c:pt>
+                <c:pt idx="5">
+                  <c:v>×2.0</c:v>
+                </c:pt>
+                <c:pt idx="6">
+                  <c:v>×2.5</c:v>
+                </c:pt>
+              </c:strCache>
+            </c:strRef>
+          </c:cat>
+          <c:val>
+            <c:numRef>
+              <c:f>Sheet1!$C$2:$C$8</c:f>
+              <c:numCache>
+                <c:formatCode>General</c:formatCode>
+                <c:ptCount val="7"/>
+                <c:pt idx="0">
+                  <c:v>10.95</c:v>
+                </c:pt>
+                <c:pt idx="1">
+                  <c:v>10.95</c:v>
+                </c:pt>
+                <c:pt idx="2">
+                  <c:v>10.95</c:v>
+                </c:pt>
+                <c:pt idx="3">
+                  <c:v>10.95</c:v>
+                </c:pt>
+                <c:pt idx="4">
+                  <c:v>10.95</c:v>
+                </c:pt>
+                <c:pt idx="5">
+                  <c:v>10.95</c:v>
+                </c:pt>
+                <c:pt idx="6">
+                  <c:v>10.95</c:v>
+                </c:pt>
+              </c:numCache>
+            </c:numRef>
+          </c:val>
+          <c:smooth val="0"/>
+        </c:ser>
+        <c:marker val="1"/>
+        <c:smooth val="0"/>
+        <c:axId val="2118791784"/>
+        <c:axId val="2140495176"/>
+      </c:lineChart>
+      <c:catAx>
+        <c:axId val="2118791784"/>
+        <c:scaling>
+          <c:orientation val="minMax"/>
+        </c:scaling>
+        <c:delete val="0"/>
+        <c:axPos val="b"/>
+        <c:majorTickMark val="out"/>
+        <c:minorTickMark val="none"/>
+        <c:tickLblPos val="nextTo"/>
+        <c:txPr>
+          <a:bodyPr/>
+          <a:lstStyle/>
+          <a:p>
+            <a:pPr>
+              <a:defRPr sz="1000">
+                <a:latin typeface="Arial"/>
+              </a:defRPr>
+            </a:pPr>
+          </a:p>
+        </c:txPr>
+        <c:crossAx val="2140495176"/>
+        <c:crosses val="autoZero"/>
+        <c:auto val="1"/>
+        <c:lblAlgn val="ctr"/>
+        <c:lblOffset val="100"/>
+        <c:noMultiLvlLbl val="0"/>
+      </c:catAx>
+      <c:valAx>
+        <c:axId val="2140495176"/>
+        <c:scaling>
+          <c:max val="12.0"/>
+          <c:min val="4.0"/>
+        </c:scaling>
+        <c:delete val="0"/>
+        <c:axPos val="l"/>
+        <c:majorGridlines>
+          <c:spPr>
+            <a:ln>
+              <a:solidFill>
+                <a:srgbClr val="D9DFE7"/>
+              </a:solidFill>
+            </a:ln>
+          </c:spPr>
+        </c:majorGridlines>
+        <c:title>
+          <c:tx>
+            <c:rich>
+              <a:bodyPr/>
+              <a:lstStyle/>
+              <a:p>
+                <a:r>
+                  <a:rPr sz="1000" b="0">
+                    <a:latin typeface="Arial"/>
+                  </a:rPr>
+                  <a:t>mph on link 4456494</a:t>
+                </a:r>
+              </a:p>
+            </c:rich>
+          </c:tx>
+          <c:layout/>
+          <c:overlay val="0"/>
+        </c:title>
+        <c:majorTickMark val="out"/>
+        <c:minorTickMark val="none"/>
+        <c:tickLblPos val="nextTo"/>
+        <c:txPr>
+          <a:bodyPr/>
+          <a:lstStyle/>
+          <a:p>
+            <a:pPr>
+              <a:defRPr sz="1000">
+                <a:latin typeface="Arial"/>
+              </a:defRPr>
+            </a:pPr>
+          </a:p>
+        </c:txPr>
+        <c:crossAx val="2118791784"/>
+        <c:crosses val="autoZero"/>
+      </c:valAx>
+    </c:plotArea>
+    <c:legend>
+      <c:legendPos val="b"/>
+      <c:layout/>
+      <c:overlay val="0"/>
+      <c:txPr>
+        <a:bodyPr/>
+        <a:lstStyle/>
+        <a:p>
+          <a:pPr>
+            <a:defRPr sz="1100">
+              <a:latin typeface="Arial"/>
+            </a:defRPr>
+          </a:pPr>
+        </a:p>
+      </c:txPr>
+    </c:legend>
+    <c:plotVisOnly val="1"/>
+    <c:dispBlanksAs val="gap"/>
+    <c:showDLblsOverMax val="0"/>
   </c:chart>
   <c:txPr>
     <a:bodyPr/>
@@ -10670,7 +11176,7 @@
                 <a:cs typeface="Times New Roman"/>
                 <a:ea typeface="Times New Roman"/>
               </a:rPr>
-              <a:t>The simulation testbed fails its own baseline test, so the controller comparison is not run.</a:t>
+              <a:t>The simulation testbed still fails its own baseline test after signal-split calibration (8.1 vs 10.95 mph), so the controller comparison is not run.</a:t>
             </a:r>
           </a:p>
         </p:txBody>
@@ -11180,7 +11686,7 @@
         </p:nvGraphicFramePr>
         <p:xfrm>
           <a:off x="6583680" y="2148840"/>
-          <a:ext cx="5760720" cy="2240280"/>
+          <a:ext cx="5760720" cy="2468880"/>
         </p:xfrm>
         <a:graphic>
           <a:graphicData uri="http://schemas.openxmlformats.org/drawingml/2006/table">
@@ -11189,11 +11695,11 @@
                 <a:tableStyleId>{5C22544A-7EE6-4342-B048-85BDC9FD1C3A}</a:tableStyleId>
               </a:tblPr>
               <a:tblGrid>
-                <a:gridCol w="3291840"/>
-                <a:gridCol w="1188720"/>
+                <a:gridCol w="2971800"/>
                 <a:gridCol w="1280160"/>
+                <a:gridCol w="1508760"/>
               </a:tblGrid>
-              <a:tr h="448056">
+              <a:tr h="411480">
                 <a:tc>
                   <a:txBody>
                     <a:bodyPr wrap="square"/>
@@ -11206,7 +11712,7 @@
                         <a:buNone/>
                       </a:pPr>
                       <a:r>
-                        <a:rPr sz="1400" b="1" i="0">
+                        <a:rPr sz="1300" b="1" i="0">
                           <a:solidFill>
                             <a:srgbClr val="FFFFFF"/>
                           </a:solidFill>
@@ -11236,7 +11742,7 @@
                         <a:buNone/>
                       </a:pPr>
                       <a:r>
-                        <a:rPr sz="1400" b="1" i="0">
+                        <a:rPr sz="1300" b="1" i="0">
                           <a:solidFill>
                             <a:srgbClr val="FFFFFF"/>
                           </a:solidFill>
@@ -11266,7 +11772,7 @@
                         <a:buNone/>
                       </a:pPr>
                       <a:r>
-                        <a:rPr sz="1400" b="1" i="0">
+                        <a:rPr sz="1300" b="1" i="0">
                           <a:solidFill>
                             <a:srgbClr val="FFFFFF"/>
                           </a:solidFill>
@@ -11285,7 +11791,7 @@
                   </a:tcPr>
                 </a:tc>
               </a:tr>
-              <a:tr h="448056">
+              <a:tr h="411480">
                 <a:tc>
                   <a:txBody>
                     <a:bodyPr wrap="square"/>
@@ -11298,7 +11804,7 @@
                         <a:buNone/>
                       </a:pPr>
                       <a:r>
-                        <a:rPr sz="1400" b="0" i="0">
+                        <a:rPr sz="1300" b="0" i="0">
                           <a:solidFill>
                             <a:srgbClr val="1A1A1A"/>
                           </a:solidFill>
@@ -11328,7 +11834,7 @@
                         <a:buNone/>
                       </a:pPr>
                       <a:r>
-                        <a:rPr sz="1400" b="0" i="0">
+                        <a:rPr sz="1300" b="0" i="0">
                           <a:solidFill>
                             <a:srgbClr val="1A1A1A"/>
                           </a:solidFill>
@@ -11358,7 +11864,7 @@
                         <a:buNone/>
                       </a:pPr>
                       <a:r>
-                        <a:rPr sz="1400" b="1" i="0">
+                        <a:rPr sz="1300" b="1" i="0">
                           <a:solidFill>
                             <a:srgbClr val="B02A22"/>
                           </a:solidFill>
@@ -11377,7 +11883,7 @@
                   </a:tcPr>
                 </a:tc>
               </a:tr>
-              <a:tr h="448056">
+              <a:tr h="411480">
                 <a:tc>
                   <a:txBody>
                     <a:bodyPr wrap="square"/>
@@ -11390,7 +11896,7 @@
                         <a:buNone/>
                       </a:pPr>
                       <a:r>
-                        <a:rPr sz="1400" b="0" i="0">
+                        <a:rPr sz="1300" b="0" i="0">
                           <a:solidFill>
                             <a:srgbClr val="1A1A1A"/>
                           </a:solidFill>
@@ -11420,7 +11926,7 @@
                         <a:buNone/>
                       </a:pPr>
                       <a:r>
-                        <a:rPr sz="1400" b="0" i="0">
+                        <a:rPr sz="1300" b="0" i="0">
                           <a:solidFill>
                             <a:srgbClr val="1A1A1A"/>
                           </a:solidFill>
@@ -11450,7 +11956,7 @@
                         <a:buNone/>
                       </a:pPr>
                       <a:r>
-                        <a:rPr sz="1400" b="1" i="0">
+                        <a:rPr sz="1300" b="1" i="0">
                           <a:solidFill>
                             <a:srgbClr val="B02A22"/>
                           </a:solidFill>
@@ -11469,7 +11975,7 @@
                   </a:tcPr>
                 </a:tc>
               </a:tr>
-              <a:tr h="448056">
+              <a:tr h="411480">
                 <a:tc>
                   <a:txBody>
                     <a:bodyPr wrap="square"/>
@@ -11482,7 +11988,7 @@
                         <a:buNone/>
                       </a:pPr>
                       <a:r>
-                        <a:rPr sz="1400" b="0" i="0">
+                        <a:rPr sz="1300" b="0" i="0">
                           <a:solidFill>
                             <a:srgbClr val="1A1A1A"/>
                           </a:solidFill>
@@ -11512,7 +12018,7 @@
                         <a:buNone/>
                       </a:pPr>
                       <a:r>
-                        <a:rPr sz="1400" b="0" i="0">
+                        <a:rPr sz="1300" b="0" i="0">
                           <a:solidFill>
                             <a:srgbClr val="1A1A1A"/>
                           </a:solidFill>
@@ -11542,7 +12048,7 @@
                         <a:buNone/>
                       </a:pPr>
                       <a:r>
-                        <a:rPr sz="1400" b="1" i="0">
+                        <a:rPr sz="1300" b="1" i="0">
                           <a:solidFill>
                             <a:srgbClr val="B02A22"/>
                           </a:solidFill>
@@ -11561,7 +12067,7 @@
                   </a:tcPr>
                 </a:tc>
               </a:tr>
-              <a:tr h="448056">
+              <a:tr h="411480">
                 <a:tc>
                   <a:txBody>
                     <a:bodyPr wrap="square"/>
@@ -11574,7 +12080,7 @@
                         <a:buNone/>
                       </a:pPr>
                       <a:r>
-                        <a:rPr sz="1400" b="0" i="0">
+                        <a:rPr sz="1300" b="0" i="0">
                           <a:solidFill>
                             <a:srgbClr val="1A1A1A"/>
                           </a:solidFill>
@@ -11604,7 +12110,7 @@
                         <a:buNone/>
                       </a:pPr>
                       <a:r>
-                        <a:rPr sz="1400" b="0" i="0">
+                        <a:rPr sz="1300" b="0" i="0">
                           <a:solidFill>
                             <a:srgbClr val="1A1A1A"/>
                           </a:solidFill>
@@ -11634,7 +12140,7 @@
                         <a:buNone/>
                       </a:pPr>
                       <a:r>
-                        <a:rPr sz="1400" b="1" i="0">
+                        <a:rPr sz="1300" b="1" i="0">
                           <a:solidFill>
                             <a:srgbClr val="B02A22"/>
                           </a:solidFill>
@@ -11653,6 +12159,98 @@
                   </a:tcPr>
                 </a:tc>
               </a:tr>
+              <a:tr h="411480">
+                <a:tc>
+                  <a:txBody>
+                    <a:bodyPr wrap="square"/>
+                    <a:lstStyle/>
+                    <a:p>
+                      <a:pPr algn="l" marL="0" indent="0">
+                        <a:spcAft>
+                          <a:spcPts val="0"/>
+                        </a:spcAft>
+                        <a:buNone/>
+                      </a:pPr>
+                      <a:r>
+                        <a:rPr sz="1300" b="0" i="0">
+                          <a:solidFill>
+                            <a:srgbClr val="1A1A1A"/>
+                          </a:solidFill>
+                          <a:latin typeface="Times New Roman"/>
+                          <a:cs typeface="Times New Roman"/>
+                          <a:ea typeface="Times New Roman"/>
+                        </a:rPr>
+                        <a:t>v5: 2025 counts, corridor green ×1.0–2.5</a:t>
+                      </a:r>
+                    </a:p>
+                  </a:txBody>
+                  <a:tcPr anchor="ctr">
+                    <a:solidFill>
+                      <a:srgbClr val="E4ECF7"/>
+                    </a:solidFill>
+                  </a:tcPr>
+                </a:tc>
+                <a:tc>
+                  <a:txBody>
+                    <a:bodyPr wrap="square"/>
+                    <a:lstStyle/>
+                    <a:p>
+                      <a:pPr algn="ctr" marL="0" indent="0">
+                        <a:spcAft>
+                          <a:spcPts val="0"/>
+                        </a:spcAft>
+                        <a:buNone/>
+                      </a:pPr>
+                      <a:r>
+                        <a:rPr sz="1300" b="0" i="0">
+                          <a:solidFill>
+                            <a:srgbClr val="1A1A1A"/>
+                          </a:solidFill>
+                          <a:latin typeface="Times New Roman"/>
+                          <a:cs typeface="Times New Roman"/>
+                          <a:ea typeface="Times New Roman"/>
+                        </a:rPr>
+                        <a:t>0–0.5 % at ×2.0+</a:t>
+                      </a:r>
+                    </a:p>
+                  </a:txBody>
+                  <a:tcPr anchor="ctr">
+                    <a:solidFill>
+                      <a:srgbClr val="E4ECF7"/>
+                    </a:solidFill>
+                  </a:tcPr>
+                </a:tc>
+                <a:tc>
+                  <a:txBody>
+                    <a:bodyPr wrap="square"/>
+                    <a:lstStyle/>
+                    <a:p>
+                      <a:pPr algn="ctr" marL="0" indent="0">
+                        <a:spcAft>
+                          <a:spcPts val="0"/>
+                        </a:spcAft>
+                        <a:buNone/>
+                      </a:pPr>
+                      <a:r>
+                        <a:rPr sz="1300" b="1" i="0">
+                          <a:solidFill>
+                            <a:srgbClr val="B02A22"/>
+                          </a:solidFill>
+                          <a:latin typeface="Times New Roman"/>
+                          <a:cs typeface="Times New Roman"/>
+                          <a:ea typeface="Times New Roman"/>
+                        </a:rPr>
+                        <a:t>8.1 of 10.95 mph</a:t>
+                      </a:r>
+                    </a:p>
+                  </a:txBody>
+                  <a:tcPr anchor="ctr">
+                    <a:solidFill>
+                      <a:srgbClr val="E4ECF7"/>
+                    </a:solidFill>
+                  </a:tcPr>
+                </a:tc>
+              </a:tr>
             </a:tbl>
           </a:graphicData>
         </a:graphic>
@@ -11665,8 +12263,8 @@
         </p:nvSpPr>
         <p:spPr>
           <a:xfrm>
-            <a:off x="6583680" y="4480560"/>
-            <a:ext cx="5760720" cy="2240280"/>
+            <a:off x="6583680" y="4681728"/>
+            <a:ext cx="5760720" cy="2057400"/>
           </a:xfrm>
           <a:prstGeom prst="rect">
             <a:avLst/>
@@ -11679,12 +12277,12 @@
           <a:p>
             <a:pPr algn="l" marL="0" indent="0">
               <a:spcAft>
-                <a:spcPts val="500"/>
-              </a:spcAft>
-              <a:buNone/>
-            </a:pPr>
-            <a:r>
-              <a:rPr sz="1200" b="0" i="0">
+                <a:spcPts val="400"/>
+              </a:spcAft>
+              <a:buNone/>
+            </a:pPr>
+            <a:r>
+              <a:rPr sz="1100" b="0" i="0">
                 <a:solidFill>
                   <a:srgbClr val="555F6B"/>
                 </a:solidFill>
@@ -11698,12 +12296,12 @@
           <a:p>
             <a:pPr algn="l" marL="0" indent="0">
               <a:spcAft>
-                <a:spcPts val="500"/>
-              </a:spcAft>
-              <a:buNone/>
-            </a:pPr>
-            <a:r>
-              <a:rPr sz="1300" b="0" i="0">
+                <a:spcPts val="400"/>
+              </a:spcAft>
+              <a:buNone/>
+            </a:pPr>
+            <a:r>
+              <a:rPr sz="1200" b="0" i="0">
                 <a:solidFill>
                   <a:srgbClr val="1A1A1A"/>
                 </a:solidFill>
@@ -11717,12 +12315,12 @@
           <a:p>
             <a:pPr algn="l" marL="0" indent="0">
               <a:spcAft>
-                <a:spcPts val="500"/>
-              </a:spcAft>
-              <a:buNone/>
-            </a:pPr>
-            <a:r>
-              <a:rPr sz="1300" b="0" i="0">
+                <a:spcPts val="400"/>
+              </a:spcAft>
+              <a:buNone/>
+            </a:pPr>
+            <a:r>
+              <a:rPr sz="1200" b="0" i="0">
                 <a:solidFill>
                   <a:srgbClr val="1A1A1A"/>
                 </a:solidFill>
@@ -11736,12 +12334,12 @@
           <a:p>
             <a:pPr algn="l" marL="0" indent="0">
               <a:spcAft>
-                <a:spcPts val="500"/>
-              </a:spcAft>
-              <a:buNone/>
-            </a:pPr>
-            <a:r>
-              <a:rPr sz="1300" b="1" i="0">
+                <a:spcPts val="400"/>
+              </a:spcAft>
+              <a:buNone/>
+            </a:pPr>
+            <a:r>
+              <a:rPr sz="1200" b="1" i="0">
                 <a:solidFill>
                   <a:srgbClr val="1A1A1A"/>
                 </a:solidFill>
@@ -11749,7 +12347,7 @@
                 <a:cs typeface="Times New Roman"/>
                 <a:ea typeface="Times New Roman"/>
               </a:rPr>
-              <a:t>The test was not relaxed: the comparison is reported as not run, and 10.95 mph is now the calibration target.</a:t>
+              <a:t>v5 (23 Oct, 21 runs): more corridor green raises it to 8.1 mph, still 2.85 mph short of the 1.5 mph tolerance. No timing selected; the comparison stays NOT RUN.</a:t>
             </a:r>
           </a:p>
         </p:txBody>
@@ -11829,7 +12427,7 @@
                 <a:latin typeface="Arial" panose="020B0604020202020204" pitchFamily="34" charset="0"/>
                 <a:cs typeface="Arial" panose="020B0604020202020204" pitchFamily="34" charset="0"/>
               </a:rPr>
-              <a:t>8. OUTCOME: WORKING DASHBOARD (1/4)</a:t>
+              <a:t>8. OUTCOME: WORKING DASHBOARD (1/5)</a:t>
             </a:r>
           </a:p>
         </p:txBody>
@@ -11898,7 +12496,7 @@
                 <a:cs typeface="Arial"/>
                 <a:ea typeface="Arial"/>
               </a:rPr>
-              <a:t>Overview &amp; status</a:t>
+              <a:t>Multi-horizon forecast (proposed model)</a:t>
             </a:r>
             <a:r>
               <a:rPr sz="1200" b="0" i="0">
@@ -11909,14 +12507,25 @@
                 <a:cs typeface="Arial"/>
                 <a:ea typeface="Arial"/>
               </a:rPr>
-              <a:t>   (status page, no mode label)</a:t>
+              <a:t>   Mode shown: </a:t>
+            </a:r>
+            <a:r>
+              <a:rPr sz="1200" b="1" i="0">
+                <a:solidFill>
+                  <a:srgbClr val="C25E00"/>
+                </a:solidFill>
+                <a:latin typeface="Arial"/>
+                <a:cs typeface="Arial"/>
+                <a:ea typeface="Arial"/>
+              </a:rPr>
+              <a:t>REPLAY</a:t>
             </a:r>
           </a:p>
         </p:txBody>
       </p:sp>
       <p:pic>
         <p:nvPicPr>
-          <p:cNvPr id="6" name="Dashboard: Overview &amp; status" descr="overview.png"/>
+          <p:cNvPr id="6" name="Dashboard: Multi-horizon forecast (proposed model)" descr="image.png"/>
           <p:cNvPicPr>
             <a:picLocks noChangeAspect="1"/>
           </p:cNvPicPr>
@@ -11931,7 +12540,7 @@
         <p:spPr>
           <a:xfrm>
             <a:off x="502920" y="1984248"/>
-            <a:ext cx="5715000" cy="4366516"/>
+            <a:ext cx="5715000" cy="3981762"/>
           </a:xfrm>
           <a:prstGeom prst="rect">
             <a:avLst/>
@@ -11978,7 +12587,7 @@
                 <a:cs typeface="Arial"/>
                 <a:ea typeface="Arial"/>
               </a:rPr>
-              <a:t>Data audit &amp; provenance</a:t>
+              <a:t>Traffic map: monitored links</a:t>
             </a:r>
             <a:r>
               <a:rPr sz="1200" b="0" i="0">
@@ -12007,7 +12616,7 @@
       </p:sp>
       <p:pic>
         <p:nvPicPr>
-          <p:cNvPr id="8" name="Dashboard: Data audit &amp; provenance" descr="data_audit.png"/>
+          <p:cNvPr id="8" name="Dashboard: Traffic map: monitored links" descr="image.png"/>
           <p:cNvPicPr>
             <a:picLocks noChangeAspect="1"/>
           </p:cNvPicPr>
@@ -12022,7 +12631,7 @@
         <p:spPr>
           <a:xfrm>
             <a:off x="6583680" y="1984248"/>
-            <a:ext cx="5715000" cy="4366516"/>
+            <a:ext cx="5715000" cy="3185409"/>
           </a:xfrm>
           <a:prstGeom prst="rect">
             <a:avLst/>
@@ -12042,7 +12651,7 @@
         </p:nvSpPr>
         <p:spPr>
           <a:xfrm>
-            <a:off x="502920" y="6423916"/>
+            <a:off x="502920" y="6039162"/>
             <a:ext cx="11795760" cy="457200"/>
           </a:xfrm>
           <a:prstGeom prst="rect">
@@ -12069,7 +12678,7 @@
                 <a:cs typeface="Arial"/>
                 <a:ea typeface="Arial"/>
               </a:rPr>
-              <a:t>Screenshots of the project's Streamlit dashboard (src/smartcity/dashboard/app.py) captured on 21 Oct 2026; every number on them is read from committed result files. Live NYC feeds were not reachable from the capture machine, so no LIVE view is shown.</a:t>
+              <a:t>Captured on 23 Oct 2026 on the training laptop, which holds the trained model and the processed NYC DOT data. The forecast is a REPLAY of the held-out test period (origin 20 Oct 2026, 90 % conformal intervals); no LIVE view is shown.</a:t>
             </a:r>
           </a:p>
         </p:txBody>
@@ -12149,7 +12758,7 @@
                 <a:latin typeface="Arial" panose="020B0604020202020204" pitchFamily="34" charset="0"/>
                 <a:cs typeface="Arial" panose="020B0604020202020204" pitchFamily="34" charset="0"/>
               </a:rPr>
-              <a:t>8. OUTCOME: WORKING DASHBOARD (2/4)</a:t>
+              <a:t>8. OUTCOME: WORKING DASHBOARD (2/5)</a:t>
             </a:r>
           </a:p>
         </p:txBody>
@@ -12218,7 +12827,7 @@
                 <a:cs typeface="Arial"/>
                 <a:ea typeface="Arial"/>
               </a:rPr>
-              <a:t>Experiment results</a:t>
+              <a:t>Overview &amp; status</a:t>
             </a:r>
             <a:r>
               <a:rPr sz="1200" b="0" i="0">
@@ -12229,25 +12838,14 @@
                 <a:cs typeface="Arial"/>
                 <a:ea typeface="Arial"/>
               </a:rPr>
-              <a:t>   Mode shown: </a:t>
-            </a:r>
-            <a:r>
-              <a:rPr sz="1200" b="1" i="0">
-                <a:solidFill>
-                  <a:srgbClr val="C25E00"/>
-                </a:solidFill>
-                <a:latin typeface="Arial"/>
-                <a:cs typeface="Arial"/>
-                <a:ea typeface="Arial"/>
-              </a:rPr>
-              <a:t>REPLAY</a:t>
+              <a:t>   (status page, no mode label)</a:t>
             </a:r>
           </a:p>
         </p:txBody>
       </p:sp>
       <p:pic>
         <p:nvPicPr>
-          <p:cNvPr id="6" name="Dashboard: Experiment results" descr="experiments.png"/>
+          <p:cNvPr id="6" name="Dashboard: Overview &amp; status" descr="overview.png"/>
           <p:cNvPicPr>
             <a:picLocks noChangeAspect="1"/>
           </p:cNvPicPr>
@@ -12309,7 +12907,7 @@
                 <a:cs typeface="Arial"/>
                 <a:ea typeface="Arial"/>
               </a:rPr>
-              <a:t>Uncertainty &amp; reliability</a:t>
+              <a:t>Data audit &amp; provenance</a:t>
             </a:r>
             <a:r>
               <a:rPr sz="1200" b="0" i="0">
@@ -12338,7 +12936,7 @@
       </p:sp>
       <p:pic>
         <p:nvPicPr>
-          <p:cNvPr id="8" name="Dashboard: Uncertainty &amp; reliability" descr="uncertainty.png"/>
+          <p:cNvPr id="8" name="Dashboard: Data audit &amp; provenance" descr="data_audit.png"/>
           <p:cNvPicPr>
             <a:picLocks noChangeAspect="1"/>
           </p:cNvPicPr>
@@ -12480,7 +13078,7 @@
                 <a:latin typeface="Arial" panose="020B0604020202020204" pitchFamily="34" charset="0"/>
                 <a:cs typeface="Arial" panose="020B0604020202020204" pitchFamily="34" charset="0"/>
               </a:rPr>
-              <a:t>8. OUTCOME: WORKING DASHBOARD (3/4)</a:t>
+              <a:t>8. OUTCOME: WORKING DASHBOARD (3/5)</a:t>
             </a:r>
           </a:p>
         </p:txBody>
@@ -12549,7 +13147,7 @@
                 <a:cs typeface="Arial"/>
                 <a:ea typeface="Arial"/>
               </a:rPr>
-              <a:t>Explainability (proposed model)</a:t>
+              <a:t>Experiment results</a:t>
             </a:r>
             <a:r>
               <a:rPr sz="1200" b="0" i="0">
@@ -12578,7 +13176,7 @@
       </p:sp>
       <p:pic>
         <p:nvPicPr>
-          <p:cNvPr id="6" name="Dashboard: Explainability (proposed model)" descr="explainability.png"/>
+          <p:cNvPr id="6" name="Dashboard: Experiment results" descr="experiments.png"/>
           <p:cNvPicPr>
             <a:picLocks noChangeAspect="1"/>
           </p:cNvPicPr>
@@ -12640,7 +13238,7 @@
                 <a:cs typeface="Arial"/>
                 <a:ea typeface="Arial"/>
               </a:rPr>
-              <a:t>Agent trace &amp; advisory</a:t>
+              <a:t>Uncertainty &amp; reliability</a:t>
             </a:r>
             <a:r>
               <a:rPr sz="1200" b="0" i="0">
@@ -12669,7 +13267,7 @@
       </p:sp>
       <p:pic>
         <p:nvPicPr>
-          <p:cNvPr id="8" name="Dashboard: Agent trace &amp; advisory" descr="agent.png"/>
+          <p:cNvPr id="8" name="Dashboard: Uncertainty &amp; reliability" descr="uncertainty.png"/>
           <p:cNvPicPr>
             <a:picLocks noChangeAspect="1"/>
           </p:cNvPicPr>
@@ -12731,7 +13329,7 @@
                 <a:cs typeface="Arial"/>
                 <a:ea typeface="Arial"/>
               </a:rPr>
-              <a:t>Screenshots of the project's Streamlit dashboard (src/smartcity/dashboard/app.py) captured on 21 Oct 2026; every number on them is read from committed result files. Live NYC feeds were not reachable from the capture machine, so no LIVE view is shown.</a:t>
+              <a:t>Screenshots of the project's Streamlit dashboard (src/smartcity/dashboard/app.py) captured on 21 Oct 2026; every number on them is read from committed result files. Live NYC feeds were not reachable from the capture machine, so no LIVE view is shown. The Experiment results page shows the seed-42 runs; the three-seed results are on slide 22.</a:t>
             </a:r>
           </a:p>
         </p:txBody>
@@ -13247,7 +13845,7 @@
                 <a:latin typeface="Arial" panose="020B0604020202020204" pitchFamily="34" charset="0"/>
                 <a:cs typeface="Arial" panose="020B0604020202020204" pitchFamily="34" charset="0"/>
               </a:rPr>
-              <a:t>8. OUTCOME: WORKING DASHBOARD (4/4)</a:t>
+              <a:t>8. OUTCOME: WORKING DASHBOARD (4/5)</a:t>
             </a:r>
           </a:p>
         </p:txBody>
@@ -13276,6 +13874,337 @@
             <a:fld id="{C02A2637-A5A3-49FA-B214-6E67543099EF}" type="slidenum">
               <a:rPr lang="en-US" smtClean="0"/>
               <a:t>20</a:t>
+            </a:fld>
+            <a:endParaRPr lang="en-US"/>
+          </a:p>
+        </p:txBody>
+      </p:sp>
+      <p:sp>
+        <p:nvSpPr>
+          <p:cNvPr id="5" name="TextBox 4"/>
+          <p:cNvSpPr txBox="1"/>
+          <p:nvPr/>
+        </p:nvSpPr>
+        <p:spPr>
+          <a:xfrm>
+            <a:off x="502920" y="1600200"/>
+            <a:ext cx="5715000" cy="329184"/>
+          </a:xfrm>
+          <a:prstGeom prst="rect">
+            <a:avLst/>
+          </a:prstGeom>
+          <a:noFill/>
+        </p:spPr>
+        <p:txBody>
+          <a:bodyPr wrap="square" lIns="18288" rIns="18288" tIns="18288" bIns="18288" anchor="b"/>
+          <a:lstStyle/>
+          <a:p>
+            <a:pPr algn="l" marL="0" indent="0">
+              <a:spcAft>
+                <a:spcPts val="0"/>
+              </a:spcAft>
+              <a:buNone/>
+            </a:pPr>
+            <a:r>
+              <a:rPr sz="1400" b="1" i="0">
+                <a:solidFill>
+                  <a:srgbClr val="1F497D"/>
+                </a:solidFill>
+                <a:latin typeface="Arial"/>
+                <a:cs typeface="Arial"/>
+                <a:ea typeface="Arial"/>
+              </a:rPr>
+              <a:t>Explainability (proposed model)</a:t>
+            </a:r>
+            <a:r>
+              <a:rPr sz="1200" b="0" i="0">
+                <a:solidFill>
+                  <a:srgbClr val="555F6B"/>
+                </a:solidFill>
+                <a:latin typeface="Arial"/>
+                <a:cs typeface="Arial"/>
+                <a:ea typeface="Arial"/>
+              </a:rPr>
+              <a:t>   Mode shown: </a:t>
+            </a:r>
+            <a:r>
+              <a:rPr sz="1200" b="1" i="0">
+                <a:solidFill>
+                  <a:srgbClr val="C25E00"/>
+                </a:solidFill>
+                <a:latin typeface="Arial"/>
+                <a:cs typeface="Arial"/>
+                <a:ea typeface="Arial"/>
+              </a:rPr>
+              <a:t>REPLAY</a:t>
+            </a:r>
+          </a:p>
+        </p:txBody>
+      </p:sp>
+      <p:pic>
+        <p:nvPicPr>
+          <p:cNvPr id="6" name="Dashboard: Explainability (proposed model)" descr="explainability.png"/>
+          <p:cNvPicPr>
+            <a:picLocks noChangeAspect="1"/>
+          </p:cNvPicPr>
+          <p:nvPr/>
+        </p:nvPicPr>
+        <p:blipFill>
+          <a:blip r:embed="rId2"/>
+          <a:stretch>
+            <a:fillRect/>
+          </a:stretch>
+        </p:blipFill>
+        <p:spPr>
+          <a:xfrm>
+            <a:off x="502920" y="1984248"/>
+            <a:ext cx="5715000" cy="4366516"/>
+          </a:xfrm>
+          <a:prstGeom prst="rect">
+            <a:avLst/>
+          </a:prstGeom>
+          <a:ln w="12700">
+            <a:solidFill>
+              <a:srgbClr val="C9D3E0"/>
+            </a:solidFill>
+          </a:ln>
+        </p:spPr>
+      </p:pic>
+      <p:sp>
+        <p:nvSpPr>
+          <p:cNvPr id="7" name="TextBox 6"/>
+          <p:cNvSpPr txBox="1"/>
+          <p:nvPr/>
+        </p:nvSpPr>
+        <p:spPr>
+          <a:xfrm>
+            <a:off x="6583680" y="1600200"/>
+            <a:ext cx="5715000" cy="329184"/>
+          </a:xfrm>
+          <a:prstGeom prst="rect">
+            <a:avLst/>
+          </a:prstGeom>
+          <a:noFill/>
+        </p:spPr>
+        <p:txBody>
+          <a:bodyPr wrap="square" lIns="18288" rIns="18288" tIns="18288" bIns="18288" anchor="b"/>
+          <a:lstStyle/>
+          <a:p>
+            <a:pPr algn="l" marL="0" indent="0">
+              <a:spcAft>
+                <a:spcPts val="0"/>
+              </a:spcAft>
+              <a:buNone/>
+            </a:pPr>
+            <a:r>
+              <a:rPr sz="1400" b="1" i="0">
+                <a:solidFill>
+                  <a:srgbClr val="1F497D"/>
+                </a:solidFill>
+                <a:latin typeface="Arial"/>
+                <a:cs typeface="Arial"/>
+                <a:ea typeface="Arial"/>
+              </a:rPr>
+              <a:t>Agent trace &amp; advisory</a:t>
+            </a:r>
+            <a:r>
+              <a:rPr sz="1200" b="0" i="0">
+                <a:solidFill>
+                  <a:srgbClr val="555F6B"/>
+                </a:solidFill>
+                <a:latin typeface="Arial"/>
+                <a:cs typeface="Arial"/>
+                <a:ea typeface="Arial"/>
+              </a:rPr>
+              <a:t>   Mode shown: </a:t>
+            </a:r>
+            <a:r>
+              <a:rPr sz="1200" b="1" i="0">
+                <a:solidFill>
+                  <a:srgbClr val="C25E00"/>
+                </a:solidFill>
+                <a:latin typeface="Arial"/>
+                <a:cs typeface="Arial"/>
+                <a:ea typeface="Arial"/>
+              </a:rPr>
+              <a:t>REPLAY</a:t>
+            </a:r>
+          </a:p>
+        </p:txBody>
+      </p:sp>
+      <p:pic>
+        <p:nvPicPr>
+          <p:cNvPr id="8" name="Dashboard: Agent trace &amp; advisory" descr="agent.png"/>
+          <p:cNvPicPr>
+            <a:picLocks noChangeAspect="1"/>
+          </p:cNvPicPr>
+          <p:nvPr/>
+        </p:nvPicPr>
+        <p:blipFill>
+          <a:blip r:embed="rId3"/>
+          <a:stretch>
+            <a:fillRect/>
+          </a:stretch>
+        </p:blipFill>
+        <p:spPr>
+          <a:xfrm>
+            <a:off x="6583680" y="1984248"/>
+            <a:ext cx="5715000" cy="4366516"/>
+          </a:xfrm>
+          <a:prstGeom prst="rect">
+            <a:avLst/>
+          </a:prstGeom>
+          <a:ln w="12700">
+            <a:solidFill>
+              <a:srgbClr val="C9D3E0"/>
+            </a:solidFill>
+          </a:ln>
+        </p:spPr>
+      </p:pic>
+      <p:sp>
+        <p:nvSpPr>
+          <p:cNvPr id="9" name="TextBox 8"/>
+          <p:cNvSpPr txBox="1"/>
+          <p:nvPr/>
+        </p:nvSpPr>
+        <p:spPr>
+          <a:xfrm>
+            <a:off x="502920" y="6423916"/>
+            <a:ext cx="11795760" cy="457200"/>
+          </a:xfrm>
+          <a:prstGeom prst="rect">
+            <a:avLst/>
+          </a:prstGeom>
+          <a:noFill/>
+        </p:spPr>
+        <p:txBody>
+          <a:bodyPr wrap="square" lIns="18288" rIns="18288" tIns="18288" bIns="18288" anchor="t"/>
+          <a:lstStyle/>
+          <a:p>
+            <a:pPr algn="l" marL="0" indent="0">
+              <a:spcAft>
+                <a:spcPts val="0"/>
+              </a:spcAft>
+              <a:buNone/>
+            </a:pPr>
+            <a:r>
+              <a:rPr sz="1100" b="0" i="0">
+                <a:solidFill>
+                  <a:srgbClr val="555F6B"/>
+                </a:solidFill>
+                <a:latin typeface="Arial"/>
+                <a:cs typeface="Arial"/>
+                <a:ea typeface="Arial"/>
+              </a:rPr>
+              <a:t>Screenshots of the project's Streamlit dashboard (src/smartcity/dashboard/app.py) captured on 21 Oct 2026; every number on them is read from committed result files. Live NYC feeds were not reachable from the capture machine, so no LIVE view is shown. Agent traces end in review, deferral or rejection; nothing is sent to real signals.</a:t>
+            </a:r>
+          </a:p>
+        </p:txBody>
+      </p:sp>
+    </p:spTree>
+    <p:extLst>
+      <p:ext uri="{BB962C8B-B14F-4D97-AF65-F5344CB8AC3E}">
+        <p14:creationId xmlns:p14="http://schemas.microsoft.com/office/powerpoint/2010/main" val="3319743353"/>
+      </p:ext>
+    </p:extLst>
+  </p:cSld>
+  <p:clrMapOvr>
+    <a:masterClrMapping/>
+  </p:clrMapOvr>
+</p:sld>
+</file>
+
+<file path=ppt/slides/slide21.xml><?xml version="1.0" encoding="utf-8"?>
+<p:sld xmlns:a="http://schemas.openxmlformats.org/drawingml/2006/main" xmlns:r="http://schemas.openxmlformats.org/officeDocument/2006/relationships" xmlns:p="http://schemas.openxmlformats.org/presentationml/2006/main">
+  <p:cSld>
+    <p:spTree>
+      <p:nvGrpSpPr>
+        <p:cNvPr id="1" name="">
+          <a:extLst>
+            <a:ext uri="{FF2B5EF4-FFF2-40B4-BE49-F238E27FC236}">
+              <a16:creationId xmlns:a16="http://schemas.microsoft.com/office/drawing/2014/main" id="{D0E88BB3-2A5B-34AC-B39B-BAE5C65E68D6}"/>
+            </a:ext>
+          </a:extLst>
+        </p:cNvPr>
+        <p:cNvGrpSpPr/>
+        <p:nvPr/>
+      </p:nvGrpSpPr>
+      <p:grpSpPr>
+        <a:xfrm>
+          <a:off x="0" y="0"/>
+          <a:ext cx="0" cy="0"/>
+          <a:chOff x="0" y="0"/>
+          <a:chExt cx="0" cy="0"/>
+        </a:xfrm>
+      </p:grpSpPr>
+      <p:sp>
+        <p:nvSpPr>
+          <p:cNvPr id="2" name="Title 1">
+            <a:extLst>
+              <a:ext uri="{FF2B5EF4-FFF2-40B4-BE49-F238E27FC236}">
+                <a16:creationId xmlns:a16="http://schemas.microsoft.com/office/drawing/2014/main" id="{4BD448EB-8A1A-C9A3-3C48-4830472042E6}"/>
+              </a:ext>
+            </a:extLst>
+          </p:cNvPr>
+          <p:cNvSpPr>
+            <a:spLocks noGrp="1"/>
+          </p:cNvSpPr>
+          <p:nvPr>
+            <p:ph type="title"/>
+          </p:nvPr>
+        </p:nvSpPr>
+        <p:spPr>
+          <a:xfrm>
+            <a:off x="0" y="0"/>
+            <a:ext cx="12801600" cy="1512146"/>
+          </a:xfrm>
+          <a:solidFill>
+            <a:srgbClr val="558ED5"/>
+          </a:solidFill>
+        </p:spPr>
+        <p:txBody>
+          <a:bodyPr>
+            <a:normAutofit/>
+          </a:bodyPr>
+          <a:lstStyle/>
+          <a:p>
+            <a:r>
+              <a:rPr lang="en-US" sz="3600" b="1" dirty="0">
+                <a:solidFill>
+                  <a:schemeClr val="bg1"/>
+                </a:solidFill>
+                <a:latin typeface="Arial" panose="020B0604020202020204" pitchFamily="34" charset="0"/>
+                <a:cs typeface="Arial" panose="020B0604020202020204" pitchFamily="34" charset="0"/>
+              </a:rPr>
+              <a:t>8. OUTCOME: WORKING DASHBOARD (5/5)</a:t>
+            </a:r>
+          </a:p>
+        </p:txBody>
+      </p:sp>
+      <p:sp>
+        <p:nvSpPr>
+          <p:cNvPr id="4" name="Slide Number Placeholder 3">
+            <a:extLst>
+              <a:ext uri="{FF2B5EF4-FFF2-40B4-BE49-F238E27FC236}">
+                <a16:creationId xmlns:a16="http://schemas.microsoft.com/office/drawing/2014/main" id="{3C63C818-3FBA-7FB8-3369-BCE4AC4BD8EF}"/>
+              </a:ext>
+            </a:extLst>
+          </p:cNvPr>
+          <p:cNvSpPr>
+            <a:spLocks noGrp="1"/>
+          </p:cNvSpPr>
+          <p:nvPr>
+            <p:ph type="sldNum" sz="quarter" idx="12"/>
+          </p:nvPr>
+        </p:nvSpPr>
+        <p:spPr/>
+        <p:txBody>
+          <a:bodyPr/>
+          <a:lstStyle/>
+          <a:p>
+            <a:fld id="{C02A2637-A5A3-49FA-B214-6E67543099EF}" type="slidenum">
+              <a:rPr lang="en-US" smtClean="0"/>
+              <a:t>21</a:t>
             </a:fld>
             <a:endParaRPr lang="en-US"/>
           </a:p>
@@ -13381,7 +14310,7 @@
         <p:spPr>
           <a:xfrm>
             <a:off x="502920" y="6423916"/>
-            <a:ext cx="11795760" cy="457200"/>
+            <a:ext cx="5715000" cy="274320"/>
           </a:xfrm>
           <a:prstGeom prst="rect">
             <a:avLst/>
@@ -13399,7 +14328,7 @@
               <a:buNone/>
             </a:pPr>
             <a:r>
-              <a:rPr sz="1100" b="0" i="0">
+              <a:rPr sz="1000" b="0" i="0">
                 <a:solidFill>
                   <a:srgbClr val="555F6B"/>
                 </a:solidFill>
@@ -13407,61 +14336,39 @@
                 <a:cs typeface="Arial"/>
                 <a:ea typeface="Arial"/>
               </a:rPr>
-              <a:t>Screenshots of the project's Streamlit dashboard (src/smartcity/dashboard/app.py) captured on 21 Oct 2026; every number on them is read from committed result files. Live NYC feeds were not reachable from the capture machine, so no LIVE view is shown.</a:t>
-            </a:r>
-          </a:p>
-        </p:txBody>
-      </p:sp>
-      <p:sp>
-        <p:nvSpPr>
-          <p:cNvPr id="8" name="Dashboard notes"/>
-          <p:cNvSpPr/>
+              <a:t>Captured 21 Oct 2026 from committed result files; no LIVE view.</a:t>
+            </a:r>
+          </a:p>
+        </p:txBody>
+      </p:sp>
+      <p:sp>
+        <p:nvSpPr>
+          <p:cNvPr id="8" name="TextBox 7"/>
+          <p:cNvSpPr txBox="1"/>
           <p:nvPr/>
         </p:nvSpPr>
         <p:spPr>
           <a:xfrm>
-            <a:off x="6583680" y="1984248"/>
-            <a:ext cx="5715000" cy="4370832"/>
+            <a:off x="6583680" y="1600200"/>
+            <a:ext cx="5715000" cy="329184"/>
           </a:xfrm>
-          <a:prstGeom prst="roundRect">
-            <a:avLst>
-              <a:gd name="adj" fmla="val 8000"/>
-            </a:avLst>
+          <a:prstGeom prst="rect">
+            <a:avLst/>
           </a:prstGeom>
-          <a:solidFill>
-            <a:srgbClr val="E4ECF7"/>
-          </a:solidFill>
-          <a:ln>
-            <a:noFill/>
-          </a:ln>
-          <a:effectLst/>
+          <a:noFill/>
         </p:spPr>
-        <p:style>
-          <a:lnRef idx="1">
-            <a:schemeClr val="accent1"/>
-          </a:lnRef>
-          <a:fillRef idx="3">
-            <a:schemeClr val="accent1"/>
-          </a:fillRef>
-          <a:effectRef idx="2">
-            <a:schemeClr val="accent1"/>
-          </a:effectRef>
-          <a:fontRef idx="minor">
-            <a:schemeClr val="lt1"/>
-          </a:fontRef>
-        </p:style>
-        <p:txBody>
-          <a:bodyPr rtlCol="0" anchor="t" lIns="164592" rIns="164592" tIns="164592" bIns="164592" wrap="square"/>
+        <p:txBody>
+          <a:bodyPr wrap="square" lIns="18288" rIns="18288" tIns="18288" bIns="18288" anchor="b"/>
           <a:lstStyle/>
           <a:p>
             <a:pPr algn="l" marL="0" indent="0">
               <a:spcAft>
-                <a:spcPts val="800"/>
-              </a:spcAft>
-              <a:buNone/>
-            </a:pPr>
-            <a:r>
-              <a:rPr sz="1700" b="1" i="0">
+                <a:spcPts val="0"/>
+              </a:spcAft>
+              <a:buNone/>
+            </a:pPr>
+            <a:r>
+              <a:rPr sz="1400" b="1" i="0">
                 <a:solidFill>
                   <a:srgbClr val="1F497D"/>
                 </a:solidFill>
@@ -13469,59 +14376,80 @@
                 <a:cs typeface="Arial"/>
                 <a:ea typeface="Arial"/>
               </a:rPr>
-              <a:t>What the dashboard shows, and what it does not</a:t>
-            </a:r>
-          </a:p>
-          <a:p>
-            <a:pPr algn="l" marL="274320" indent="-228600">
-              <a:spcAft>
-                <a:spcPts val="800"/>
-              </a:spcAft>
-              <a:buFont typeface="Arial"/>
-              <a:buChar char="•"/>
-            </a:pPr>
-            <a:r>
-              <a:rPr sz="1400" b="0" i="0">
-                <a:solidFill>
-                  <a:srgbClr val="1A1A1A"/>
+              <a:t>Signal-split calibration, protocol v5</a:t>
+            </a:r>
+            <a:r>
+              <a:rPr sz="1200" b="0" i="0">
+                <a:solidFill>
+                  <a:srgbClr val="555F6B"/>
                 </a:solidFill>
                 <a:latin typeface="Arial"/>
                 <a:cs typeface="Arial"/>
                 <a:ea typeface="Arial"/>
               </a:rPr>
-              <a:t>The SUMO page states the first 45-run comparison is SUPERSEDED and the controller comparison NOT RUN, so it shows no simulated gain.</a:t>
-            </a:r>
-          </a:p>
-          <a:p>
-            <a:pPr algn="l" marL="274320" indent="-228600">
-              <a:spcAft>
-                <a:spcPts val="800"/>
-              </a:spcAft>
-              <a:buFont typeface="Arial"/>
-              <a:buChar char="•"/>
-            </a:pPr>
-            <a:r>
-              <a:rPr sz="1400" b="0" i="0">
-                <a:solidFill>
-                  <a:srgbClr val="1A1A1A"/>
+              <a:t>   Mode: </a:t>
+            </a:r>
+            <a:r>
+              <a:rPr sz="1200" b="1" i="0">
+                <a:solidFill>
+                  <a:srgbClr val="6A3FA0"/>
                 </a:solidFill>
                 <a:latin typeface="Arial"/>
                 <a:cs typeface="Arial"/>
                 <a:ea typeface="Arial"/>
               </a:rPr>
-              <a:t>Agent traces end in PENDING_HUMAN_REVIEW, DEFER or REJECT; approval is for simulation only and nothing is sent to real signals.</a:t>
-            </a:r>
-          </a:p>
+              <a:t>SIMULATION</a:t>
+            </a:r>
+          </a:p>
+        </p:txBody>
+      </p:sp>
+      <p:graphicFrame>
+        <p:nvGraphicFramePr>
+          <p:cNvPr id="9" name="Split calibration"/>
+          <p:cNvGraphicFramePr>
+            <a:graphicFrameLocks noGrp="1"/>
+          </p:cNvGraphicFramePr>
+          <p:nvPr/>
+        </p:nvGraphicFramePr>
+        <p:xfrm>
+          <a:off x="6583680" y="1984248"/>
+          <a:ext cx="5715000" cy="2926080"/>
+        </p:xfrm>
+        <a:graphic>
+          <a:graphicData uri="http://schemas.openxmlformats.org/drawingml/2006/chart">
+            <c:chart xmlns:c="http://schemas.openxmlformats.org/drawingml/2006/chart" r:id="rId3"/>
+          </a:graphicData>
+        </a:graphic>
+      </p:graphicFrame>
+      <p:sp>
+        <p:nvSpPr>
+          <p:cNvPr id="10" name="Calibration notes"/>
+          <p:cNvSpPr txBox="1"/>
+          <p:nvPr/>
+        </p:nvSpPr>
+        <p:spPr>
+          <a:xfrm>
+            <a:off x="6583680" y="4983480"/>
+            <a:ext cx="5715000" cy="1417320"/>
+          </a:xfrm>
+          <a:prstGeom prst="rect">
+            <a:avLst/>
+          </a:prstGeom>
+          <a:noFill/>
+        </p:spPr>
+        <p:txBody>
+          <a:bodyPr wrap="square" lIns="36576" rIns="36576" tIns="36576" bIns="36576" anchor="t"/>
+          <a:lstStyle/>
           <a:p>
             <a:pPr algn="l" marL="274320" indent="-228600">
               <a:spcAft>
-                <a:spcPts val="800"/>
+                <a:spcPts val="300"/>
               </a:spcAft>
               <a:buFont typeface="Arial"/>
               <a:buChar char="•"/>
             </a:pPr>
             <a:r>
-              <a:rPr sz="1400" b="0" i="0">
+              <a:rPr sz="1200" b="0" i="0">
                 <a:solidFill>
                   <a:srgbClr val="1A1A1A"/>
                 </a:solidFill>
@@ -13529,19 +14457,19 @@
                 <a:cs typeface="Arial"/>
                 <a:ea typeface="Arial"/>
               </a:rPr>
-              <a:t>Not captured yet: the Multi-horizon forecast and Traffic map pages need the trained model file and processed data held on the training laptop; they will be captured there for the final version.</a:t>
+              <a:t>Corridor green share scaled ×1.0–2.5 (21 fixed-time runs, seeds 101–103, 2025 counts, 23 Oct 2026).</a:t>
             </a:r>
           </a:p>
           <a:p>
             <a:pPr algn="l" marL="274320" indent="-228600">
               <a:spcAft>
-                <a:spcPts val="800"/>
+                <a:spcPts val="300"/>
               </a:spcAft>
               <a:buFont typeface="Arial"/>
               <a:buChar char="•"/>
             </a:pPr>
             <a:r>
-              <a:rPr sz="1400" b="0" i="0">
+              <a:rPr sz="1200" b="0" i="0">
                 <a:solidFill>
                   <a:srgbClr val="1A1A1A"/>
                 </a:solidFill>
@@ -13549,7 +14477,67 @@
                 <a:cs typeface="Arial"/>
                 <a:ea typeface="Arial"/>
               </a:rPr>
-              <a:t>The Experiment results page shows the seed-42 runs; the three-seed results are on slide 21.</a:t>
+              <a:t>Admissible only at ×2.0 and ×2.5 (no teleports, at most 28 of 5,368 trips unfinished); ×1.0–1.8 leave 98–568 unfinished.</a:t>
+            </a:r>
+          </a:p>
+          <a:p>
+            <a:pPr algn="l" marL="274320" indent="-228600">
+              <a:spcAft>
+                <a:spcPts val="300"/>
+              </a:spcAft>
+              <a:buFont typeface="Arial"/>
+              <a:buChar char="•"/>
+            </a:pPr>
+            <a:r>
+              <a:rPr sz="1200" b="1" i="0">
+                <a:solidFill>
+                  <a:srgbClr val="1A1A1A"/>
+                </a:solidFill>
+                <a:latin typeface="Arial"/>
+                <a:cs typeface="Arial"/>
+                <a:ea typeface="Arial"/>
+              </a:rPr>
+              <a:t>Best admissible 8.10 mph is 2.85 mph below 10.95, beyond the 1.5 mph tolerance: no timing selected, controller comparison NOT RUN, rule not relaxed.</a:t>
+            </a:r>
+          </a:p>
+        </p:txBody>
+      </p:sp>
+      <p:sp>
+        <p:nvSpPr>
+          <p:cNvPr id="11" name="TextBox 10"/>
+          <p:cNvSpPr txBox="1"/>
+          <p:nvPr/>
+        </p:nvSpPr>
+        <p:spPr>
+          <a:xfrm>
+            <a:off x="6583680" y="6423916"/>
+            <a:ext cx="5715000" cy="274320"/>
+          </a:xfrm>
+          <a:prstGeom prst="rect">
+            <a:avLst/>
+          </a:prstGeom>
+          <a:noFill/>
+        </p:spPr>
+        <p:txBody>
+          <a:bodyPr wrap="square" lIns="18288" rIns="18288" tIns="18288" bIns="18288" anchor="t"/>
+          <a:lstStyle/>
+          <a:p>
+            <a:pPr algn="l" marL="0" indent="0">
+              <a:spcAft>
+                <a:spcPts val="0"/>
+              </a:spcAft>
+              <a:buNone/>
+            </a:pPr>
+            <a:r>
+              <a:rPr sz="1000" b="0" i="0">
+                <a:solidFill>
+                  <a:srgbClr val="555F6B"/>
+                </a:solidFill>
+                <a:latin typeface="Arial"/>
+                <a:cs typeface="Arial"/>
+                <a:ea typeface="Arial"/>
+              </a:rPr>
+              <a:t>Run 23 Oct, after the capture; from simulation_split_calibration_v5_*.csv</a:t>
             </a:r>
           </a:p>
         </p:txBody>
@@ -13567,7 +14555,7 @@
 </p:sld>
 </file>
 
-<file path=ppt/slides/slide21.xml><?xml version="1.0" encoding="utf-8"?>
+<file path=ppt/slides/slide22.xml><?xml version="1.0" encoding="utf-8"?>
 <p:sld xmlns:a="http://schemas.openxmlformats.org/drawingml/2006/main" xmlns:r="http://schemas.openxmlformats.org/officeDocument/2006/relationships" xmlns:p="http://schemas.openxmlformats.org/presentationml/2006/main">
   <p:cSld>
     <p:spTree>
@@ -13639,7 +14627,7 @@
           <a:p>
             <a:fld id="{C02A2637-A5A3-49FA-B214-6E67543099EF}" type="slidenum">
               <a:rPr lang="en-US" smtClean="0"/>
-              <a:t>21</a:t>
+              <a:t>22</a:t>
             </a:fld>
             <a:endParaRPr lang="en-US"/>
           </a:p>
@@ -15076,7 +16064,7 @@
                 <a:cs typeface="Arial"/>
                 <a:ea typeface="Arial"/>
               </a:rPr>
-              <a:t>removing the availability-aware gate raises MAE by 0.067 mph (95 % CI 0.048–0.086); removing operational weather features lowers it by 0.046 mph (a negative result). No simulated controller gain is claimed: the SUMO testbed fails its own baseline test (5.8 vs 10.95 mph).</a:t>
+              <a:t>removing the availability-aware gate raises MAE by 0.067 mph (95 % CI 0.048–0.086); removing operational weather features lowers it by 0.046 mph (a negative result). No simulated controller gain is claimed: the SUMO testbed fails its own baseline test (8.1 vs 10.95 mph after signal-split calibration).</a:t>
             </a:r>
           </a:p>
         </p:txBody>
@@ -15094,7 +16082,7 @@
 </p:sld>
 </file>
 
-<file path=ppt/slides/slide22.xml><?xml version="1.0" encoding="utf-8"?>
+<file path=ppt/slides/slide23.xml><?xml version="1.0" encoding="utf-8"?>
 <p:sld xmlns:a="http://schemas.openxmlformats.org/drawingml/2006/main" xmlns:r="http://schemas.openxmlformats.org/officeDocument/2006/relationships" xmlns:p="http://schemas.openxmlformats.org/presentationml/2006/main">
   <p:cSld>
     <p:spTree>
@@ -15166,7 +16154,7 @@
           <a:p>
             <a:fld id="{C02A2637-A5A3-49FA-B214-6E67543099EF}" type="slidenum">
               <a:rPr lang="en-US" smtClean="0"/>
-              <a:t>22</a:t>
+              <a:t>23</a:t>
             </a:fld>
             <a:endParaRPr lang="en-US"/>
           </a:p>
@@ -15517,7 +16505,7 @@
                 <a:cs typeface="Arial"/>
                 <a:ea typeface="Arial"/>
               </a:rPr>
-              <a:t>SUMO controller comparison NOT RUN; the first 45-run comparison is superseded</a:t>
+              <a:t>SUMO controller comparison NOT RUN: signal-split calibration (v5, 23 Oct) reaches 8.1 of 10.95 mph; the first 45-run comparison is superseded</a:t>
             </a:r>
           </a:p>
           <a:p>
@@ -15762,7 +16750,7 @@
                 <a:cs typeface="Arial"/>
                 <a:ea typeface="Arial"/>
               </a:rPr>
-              <a:t>Next: calibrate West St signal timing to 10.95 mph or obtain NYC DOT timing plans, then run the comparison</a:t>
+              <a:t>Next: a new preregistered protocol (wider green range) or NYC DOT timing plans, then the comparison</a:t>
             </a:r>
           </a:p>
           <a:p>
@@ -15820,7 +16808,7 @@
 </p:sld>
 </file>
 
-<file path=ppt/slides/slide23.xml><?xml version="1.0" encoding="utf-8"?>
+<file path=ppt/slides/slide24.xml><?xml version="1.0" encoding="utf-8"?>
 <p:sld xmlns:a="http://schemas.openxmlformats.org/drawingml/2006/main" xmlns:r="http://schemas.openxmlformats.org/officeDocument/2006/relationships" xmlns:p="http://schemas.openxmlformats.org/presentationml/2006/main">
   <p:cSld>
     <p:spTree>
@@ -15920,7 +16908,7 @@
           <a:p>
             <a:fld id="{C02A2637-A5A3-49FA-B214-6E67543099EF}" type="slidenum">
               <a:rPr lang="en-US" smtClean="0"/>
-              <a:t>23</a:t>
+              <a:t>24</a:t>
             </a:fld>
             <a:endParaRPr lang="en-US"/>
           </a:p>
@@ -16188,7 +17176,7 @@
 </p:sld>
 </file>
 
-<file path=ppt/slides/slide24.xml><?xml version="1.0" encoding="utf-8"?>
+<file path=ppt/slides/slide25.xml><?xml version="1.0" encoding="utf-8"?>
 <p:sld xmlns:a="http://schemas.openxmlformats.org/drawingml/2006/main" xmlns:r="http://schemas.openxmlformats.org/officeDocument/2006/relationships" xmlns:p="http://schemas.openxmlformats.org/presentationml/2006/main">
   <p:cSld>
     <p:spTree>
@@ -16260,7 +17248,7 @@
           <a:p>
             <a:fld id="{C02A2637-A5A3-49FA-B214-6E67543099EF}" type="slidenum">
               <a:rPr lang="en-US" smtClean="0"/>
-              <a:t>24</a:t>
+              <a:t>25</a:t>
             </a:fld>
             <a:endParaRPr lang="en-US"/>
           </a:p>

--- a/presentation/Final_Review_S_K_Sricharan_25MML1010.pptx
+++ b/presentation/Final_Review_S_K_Sricharan_25MML1010.pptx
@@ -7886,7 +7886,7 @@
                 <a:cs typeface="Times New Roman"/>
                 <a:ea typeface="Times New Roman"/>
               </a:rPr>
-              <a:t>82 automated tests: unit, leakage, safety, integration, end-to-end (CI run 65, 2026-10-21)</a:t>
+              <a:t>95 automated tests: unit, leakage, safety, integration, end-to-end (CI, 2026-10-25)</a:t>
             </a:r>
           </a:p>
         </p:txBody>
@@ -16750,7 +16750,7 @@
                 <a:cs typeface="Arial"/>
                 <a:ea typeface="Arial"/>
               </a:rPr>
-              <a:t>Next: a new preregistered protocol (wider green range) or NYC DOT timing plans, then the comparison</a:t>
+              <a:t>Next: run preregistered protocol v6 (cycle × green × offsets, 75 runs; prepared, not run), then the comparison</a:t>
             </a:r>
           </a:p>
           <a:p>
@@ -22200,7 +22200,7 @@
                 <a:cs typeface="Arial"/>
                 <a:ea typeface="Arial"/>
               </a:rPr>
-              <a:t>82</a:t>
+              <a:t>95</a:t>
             </a:r>
           </a:p>
           <a:p>

--- a/presentation/Final_Review_S_K_Sricharan_25MML1010.pptx
+++ b/presentation/Final_Review_S_K_Sricharan_25MML1010.pptx
@@ -737,9 +737,9 @@
   <c:chart>
     <c:autoTitleDeleted val="0"/>
     <c:plotArea>
-      <c:lineChart>
-        <c:grouping val="standard"/>
-        <c:varyColors val="0"/>
+      <c:barChart>
+        <c:barDir val="col"/>
+        <c:grouping val="clustered"/>
         <c:ser>
           <c:idx val="0"/>
           <c:order val="0"/>
@@ -749,274 +749,51 @@
               <c:strCache>
                 <c:ptCount val="1"/>
                 <c:pt idx="0">
-                  <c:v>Simulated speed, mean of 3 seeds</c:v>
+                  <c:v>Fixed time (calibrated plan)</c:v>
                 </c:pt>
               </c:strCache>
             </c:strRef>
           </c:tx>
           <c:spPr>
-            <a:ln w="28575">
-              <a:solidFill>
-                <a:srgbClr val="1F497D"/>
-              </a:solidFill>
-            </a:ln>
+            <a:solidFill>
+              <a:srgbClr val="555F6B"/>
+            </a:solidFill>
           </c:spPr>
-          <c:marker>
-            <c:spPr>
-              <a:solidFill>
-                <a:srgbClr val="1F497D"/>
-              </a:solidFill>
-              <a:ln>
-                <a:solidFill>
-                  <a:srgbClr val="1F497D"/>
-                </a:solidFill>
-              </a:ln>
-            </c:spPr>
-          </c:marker>
-          <c:dLbls>
-            <c:dLbl>
-              <c:idx val="0"/>
-              <c:spPr/>
-              <c:txPr>
-                <a:bodyPr/>
-                <a:lstStyle/>
-                <a:p>
-                  <a:pPr>
-                    <a:defRPr sz="1000">
-                      <a:solidFill>
-                        <a:srgbClr val="1F497D"/>
-                      </a:solidFill>
-                      <a:latin typeface="Arial"/>
-                    </a:defRPr>
-                  </a:pPr>
-                </a:p>
-              </c:txPr>
-              <c:dLblPos val="t"/>
-              <c:showLegendKey val="0"/>
-              <c:showVal val="1"/>
-              <c:showCatName val="0"/>
-              <c:showSerName val="0"/>
-              <c:showPercent val="0"/>
-              <c:showBubbleSize val="0"/>
-            </c:dLbl>
-            <c:dLbl>
-              <c:idx val="1"/>
-              <c:spPr/>
-              <c:txPr>
-                <a:bodyPr/>
-                <a:lstStyle/>
-                <a:p>
-                  <a:pPr>
-                    <a:defRPr sz="1000">
-                      <a:solidFill>
-                        <a:srgbClr val="1F497D"/>
-                      </a:solidFill>
-                      <a:latin typeface="Arial"/>
-                    </a:defRPr>
-                  </a:pPr>
-                </a:p>
-              </c:txPr>
-              <c:dLblPos val="t"/>
-              <c:showLegendKey val="0"/>
-              <c:showVal val="1"/>
-              <c:showCatName val="0"/>
-              <c:showSerName val="0"/>
-              <c:showPercent val="0"/>
-              <c:showBubbleSize val="0"/>
-            </c:dLbl>
-            <c:dLbl>
-              <c:idx val="2"/>
-              <c:spPr/>
-              <c:txPr>
-                <a:bodyPr/>
-                <a:lstStyle/>
-                <a:p>
-                  <a:pPr>
-                    <a:defRPr sz="1000">
-                      <a:solidFill>
-                        <a:srgbClr val="1F497D"/>
-                      </a:solidFill>
-                      <a:latin typeface="Arial"/>
-                    </a:defRPr>
-                  </a:pPr>
-                </a:p>
-              </c:txPr>
-              <c:dLblPos val="t"/>
-              <c:showLegendKey val="0"/>
-              <c:showVal val="1"/>
-              <c:showCatName val="0"/>
-              <c:showSerName val="0"/>
-              <c:showPercent val="0"/>
-              <c:showBubbleSize val="0"/>
-            </c:dLbl>
-            <c:dLbl>
-              <c:idx val="3"/>
-              <c:spPr/>
-              <c:txPr>
-                <a:bodyPr/>
-                <a:lstStyle/>
-                <a:p>
-                  <a:pPr>
-                    <a:defRPr sz="1000">
-                      <a:solidFill>
-                        <a:srgbClr val="1F497D"/>
-                      </a:solidFill>
-                      <a:latin typeface="Arial"/>
-                    </a:defRPr>
-                  </a:pPr>
-                </a:p>
-              </c:txPr>
-              <c:dLblPos val="t"/>
-              <c:showLegendKey val="0"/>
-              <c:showVal val="1"/>
-              <c:showCatName val="0"/>
-              <c:showSerName val="0"/>
-              <c:showPercent val="0"/>
-              <c:showBubbleSize val="0"/>
-            </c:dLbl>
-            <c:dLbl>
-              <c:idx val="4"/>
-              <c:spPr/>
-              <c:txPr>
-                <a:bodyPr/>
-                <a:lstStyle/>
-                <a:p>
-                  <a:pPr>
-                    <a:defRPr sz="1000">
-                      <a:solidFill>
-                        <a:srgbClr val="1F497D"/>
-                      </a:solidFill>
-                      <a:latin typeface="Arial"/>
-                    </a:defRPr>
-                  </a:pPr>
-                </a:p>
-              </c:txPr>
-              <c:dLblPos val="t"/>
-              <c:showLegendKey val="0"/>
-              <c:showVal val="1"/>
-              <c:showCatName val="0"/>
-              <c:showSerName val="0"/>
-              <c:showPercent val="0"/>
-              <c:showBubbleSize val="0"/>
-            </c:dLbl>
-            <c:dLbl>
-              <c:idx val="5"/>
-              <c:spPr/>
-              <c:txPr>
-                <a:bodyPr/>
-                <a:lstStyle/>
-                <a:p>
-                  <a:pPr>
-                    <a:defRPr sz="1000">
-                      <a:solidFill>
-                        <a:srgbClr val="1F497D"/>
-                      </a:solidFill>
-                      <a:latin typeface="Arial"/>
-                    </a:defRPr>
-                  </a:pPr>
-                </a:p>
-              </c:txPr>
-              <c:dLblPos val="t"/>
-              <c:showLegendKey val="0"/>
-              <c:showVal val="1"/>
-              <c:showCatName val="0"/>
-              <c:showSerName val="0"/>
-              <c:showPercent val="0"/>
-              <c:showBubbleSize val="0"/>
-            </c:dLbl>
-            <c:dLbl>
-              <c:idx val="6"/>
-              <c:spPr/>
-              <c:txPr>
-                <a:bodyPr/>
-                <a:lstStyle/>
-                <a:p>
-                  <a:pPr>
-                    <a:defRPr sz="1000">
-                      <a:solidFill>
-                        <a:srgbClr val="1F497D"/>
-                      </a:solidFill>
-                      <a:latin typeface="Arial"/>
-                    </a:defRPr>
-                  </a:pPr>
-                </a:p>
-              </c:txPr>
-              <c:dLblPos val="t"/>
-              <c:showLegendKey val="0"/>
-              <c:showVal val="1"/>
-              <c:showCatName val="0"/>
-              <c:showSerName val="0"/>
-              <c:showPercent val="0"/>
-              <c:showBubbleSize val="0"/>
-            </c:dLbl>
-            <c:showLegendKey val="0"/>
-            <c:showVal val="0"/>
-            <c:showCatName val="0"/>
-            <c:showSerName val="0"/>
-            <c:showPercent val="0"/>
-            <c:showBubbleSize val="0"/>
-            <c:showLeaderLines val="1"/>
-          </c:dLbls>
           <c:cat>
             <c:strRef>
-              <c:f>Sheet1!$A$2:$A$8</c:f>
+              <c:f>Sheet1!$A$2:$A$4</c:f>
               <c:strCache>
-                <c:ptCount val="7"/>
+                <c:ptCount val="3"/>
                 <c:pt idx="0">
-                  <c:v>×1.0</c:v>
+                  <c:v>Routine peak</c:v>
                 </c:pt>
                 <c:pt idx="1">
-                  <c:v>×1.2</c:v>
+                  <c:v>Event surge ×1.25</c:v>
                 </c:pt>
                 <c:pt idx="2">
-                  <c:v>×1.4</c:v>
-                </c:pt>
-                <c:pt idx="3">
-                  <c:v>×1.6</c:v>
-                </c:pt>
-                <c:pt idx="4">
-                  <c:v>×1.8</c:v>
-                </c:pt>
-                <c:pt idx="5">
-                  <c:v>×2.0</c:v>
-                </c:pt>
-                <c:pt idx="6">
-                  <c:v>×2.5</c:v>
+                  <c:v>Incident</c:v>
                 </c:pt>
               </c:strCache>
             </c:strRef>
           </c:cat>
           <c:val>
             <c:numRef>
-              <c:f>Sheet1!$B$2:$B$8</c:f>
+              <c:f>Sheet1!$B$2:$B$4</c:f>
               <c:numCache>
                 <c:formatCode>General</c:formatCode>
-                <c:ptCount val="7"/>
+                <c:ptCount val="3"/>
                 <c:pt idx="0">
-                  <c:v>5.82</c:v>
+                  <c:v>271.6</c:v>
                 </c:pt>
                 <c:pt idx="1">
-                  <c:v>6.16</c:v>
+                  <c:v>450.2</c:v>
                 </c:pt>
                 <c:pt idx="2">
-                  <c:v>6.52</c:v>
-                </c:pt>
-                <c:pt idx="3">
-                  <c:v>6.85</c:v>
-                </c:pt>
-                <c:pt idx="4">
-                  <c:v>7.13</c:v>
-                </c:pt>
-                <c:pt idx="5">
-                  <c:v>7.49</c:v>
-                </c:pt>
-                <c:pt idx="6">
-                  <c:v>8.1</c:v>
+                  <c:v>465.9</c:v>
                 </c:pt>
               </c:numCache>
             </c:numRef>
           </c:val>
-          <c:smooth val="0"/>
         </c:ser>
         <c:ser>
           <c:idx val="1"/>
@@ -1027,100 +804,81 @@
               <c:strCache>
                 <c:ptCount val="1"/>
                 <c:pt idx="0">
-                  <c:v>Observed PM-peak speed (target)</c:v>
+                  <c:v>Forecast rule</c:v>
                 </c:pt>
               </c:strCache>
             </c:strRef>
           </c:tx>
           <c:spPr>
-            <a:ln w="28575">
-              <a:solidFill>
-                <a:srgbClr val="2E7D4F"/>
-              </a:solidFill>
-              <a:prstDash val="dash"/>
-            </a:ln>
+            <a:solidFill>
+              <a:srgbClr val="1F497D"/>
+            </a:solidFill>
           </c:spPr>
-          <c:marker>
-            <c:symbol val="none"/>
-            <c:spPr>
-              <a:solidFill>
-                <a:srgbClr val="2E7D4F"/>
-              </a:solidFill>
-              <a:ln>
-                <a:solidFill>
-                  <a:srgbClr val="2E7D4F"/>
-                </a:solidFill>
-              </a:ln>
-            </c:spPr>
-          </c:marker>
           <c:cat>
             <c:strRef>
-              <c:f>Sheet1!$A$2:$A$8</c:f>
+              <c:f>Sheet1!$A$2:$A$4</c:f>
               <c:strCache>
-                <c:ptCount val="7"/>
+                <c:ptCount val="3"/>
                 <c:pt idx="0">
-                  <c:v>×1.0</c:v>
+                  <c:v>Routine peak</c:v>
                 </c:pt>
                 <c:pt idx="1">
-                  <c:v>×1.2</c:v>
+                  <c:v>Event surge ×1.25</c:v>
                 </c:pt>
                 <c:pt idx="2">
-                  <c:v>×1.4</c:v>
-                </c:pt>
-                <c:pt idx="3">
-                  <c:v>×1.6</c:v>
-                </c:pt>
-                <c:pt idx="4">
-                  <c:v>×1.8</c:v>
-                </c:pt>
-                <c:pt idx="5">
-                  <c:v>×2.0</c:v>
-                </c:pt>
-                <c:pt idx="6">
-                  <c:v>×2.5</c:v>
+                  <c:v>Incident</c:v>
                 </c:pt>
               </c:strCache>
             </c:strRef>
           </c:cat>
           <c:val>
             <c:numRef>
-              <c:f>Sheet1!$C$2:$C$8</c:f>
+              <c:f>Sheet1!$C$2:$C$4</c:f>
               <c:numCache>
                 <c:formatCode>General</c:formatCode>
-                <c:ptCount val="7"/>
+                <c:ptCount val="3"/>
                 <c:pt idx="0">
-                  <c:v>10.95</c:v>
+                  <c:v>271.6</c:v>
                 </c:pt>
                 <c:pt idx="1">
-                  <c:v>10.95</c:v>
+                  <c:v>426.0</c:v>
                 </c:pt>
                 <c:pt idx="2">
-                  <c:v>10.95</c:v>
-                </c:pt>
-                <c:pt idx="3">
-                  <c:v>10.95</c:v>
-                </c:pt>
-                <c:pt idx="4">
-                  <c:v>10.95</c:v>
-                </c:pt>
-                <c:pt idx="5">
-                  <c:v>10.95</c:v>
-                </c:pt>
-                <c:pt idx="6">
-                  <c:v>10.95</c:v>
+                  <c:v>443.9</c:v>
                 </c:pt>
               </c:numCache>
             </c:numRef>
           </c:val>
-          <c:smooth val="0"/>
         </c:ser>
-        <c:marker val="1"/>
-        <c:smooth val="0"/>
-        <c:axId val="2118791784"/>
-        <c:axId val="2140495176"/>
-      </c:lineChart>
+        <c:dLbls>
+          <c:numFmt formatCode="0.0" sourceLinked="0"/>
+          <c:txPr>
+            <a:bodyPr/>
+            <a:lstStyle/>
+            <a:p>
+              <a:pPr>
+                <a:defRPr sz="1000">
+                  <a:latin typeface="Arial"/>
+                </a:defRPr>
+              </a:pPr>
+            </a:p>
+          </c:txPr>
+          <c:dLblPos val="outEnd"/>
+          <c:showLegendKey val="0"/>
+          <c:showVal val="1"/>
+          <c:showCatName val="0"/>
+          <c:showSerName val="0"/>
+          <c:showPercent val="0"/>
+          <c:showBubbleSize val="0"/>
+          <c:showLeaderLines val="1"/>
+        </c:dLbls>
+        <c:gapWidth val="70"/>
+        <c:overlap val="-5"/>
+        <c:axId val="-2068027336"/>
+        <c:axId val="-2113994440"/>
+      </c:barChart>
       <c:catAx>
-        <c:axId val="2118791784"/>
+        <c:axId val="-2068027336"/>
         <c:scaling>
           <c:orientation val="minMax"/>
         </c:scaling>
@@ -1140,7 +898,7 @@
             </a:pPr>
           </a:p>
         </c:txPr>
-        <c:crossAx val="2140495176"/>
+        <c:crossAx val="-2113994440"/>
         <c:crosses val="autoZero"/>
         <c:auto val="1"/>
         <c:lblAlgn val="ctr"/>
@@ -1148,10 +906,10 @@
         <c:noMultiLvlLbl val="0"/>
       </c:catAx>
       <c:valAx>
-        <c:axId val="2140495176"/>
+        <c:axId val="-2113994440"/>
         <c:scaling>
-          <c:max val="12.0"/>
-          <c:min val="4.0"/>
+          <c:max val="550.0"/>
+          <c:min val="0.0"/>
         </c:scaling>
         <c:delete val="0"/>
         <c:axPos val="l"/>
@@ -1174,7 +932,7 @@
                   <a:rPr sz="1000" b="0">
                     <a:latin typeface="Arial"/>
                   </a:rPr>
-                  <a:t>mph on link 4456494</a:t>
+                  <a:t>mean time loss (s), 5 seeds</a:t>
                 </a:r>
               </a:p>
             </c:rich>
@@ -1196,13 +954,12 @@
             </a:pPr>
           </a:p>
         </c:txPr>
-        <c:crossAx val="2118791784"/>
+        <c:crossAx val="-2068027336"/>
         <c:crosses val="autoZero"/>
       </c:valAx>
     </c:plotArea>
     <c:legend>
       <c:legendPos val="b"/>
-      <c:layout/>
       <c:overlay val="0"/>
       <c:txPr>
         <a:bodyPr/>
@@ -1216,9 +973,7 @@
         </a:p>
       </c:txPr>
     </c:legend>
-    <c:plotVisOnly val="1"/>
     <c:dispBlanksAs val="gap"/>
-    <c:showDLblsOverMax val="0"/>
   </c:chart>
   <c:txPr>
     <a:bodyPr/>
@@ -7886,7 +7641,7 @@
                 <a:cs typeface="Times New Roman"/>
                 <a:ea typeface="Times New Roman"/>
               </a:rPr>
-              <a:t>95 automated tests: unit, leakage, safety, integration, end-to-end (CI, 2026-10-25)</a:t>
+              <a:t>112 automated tests: unit, leakage, safety, integration, end-to-end (CI, 2026-10-28)</a:t>
             </a:r>
           </a:p>
         </p:txBody>
@@ -8451,7 +8206,7 @@
                 <a:cs typeface="Arial"/>
                 <a:ea typeface="Arial"/>
               </a:rPr>
-              <a:t>18 endpoints for forecasts, explanations, retrieval, advisories, simulations and review; long jobs run in a PostgreSQL-backed worker</a:t>
+              <a:t>20 endpoints for forecasts, live forecasts, explanations, retrieval, advisories, simulations and review; long jobs run in a PostgreSQL-backed worker</a:t>
             </a:r>
           </a:p>
           <a:p>
@@ -8482,7 +8237,7 @@
                 <a:cs typeface="Arial"/>
                 <a:ea typeface="Arial"/>
               </a:rPr>
-              <a:t>11 pages, from data audit and traffic map to forecasts, explanations, agent traces, SUMO results and the model card</a:t>
+              <a:t>12 pages, from data audit, traffic map and live monitoring to forecasts, explanations, agent traces, SUMO results and the model card</a:t>
             </a:r>
           </a:p>
           <a:p>
@@ -11176,7 +10931,7 @@
                 <a:cs typeface="Times New Roman"/>
                 <a:ea typeface="Times New Roman"/>
               </a:rPr>
-              <a:t>The simulation testbed still fails its own baseline test after signal-split calibration (8.1 vs 10.95 mph), so the controller comparison is not run.</a:t>
+              <a:t>On the calibrated SUMO testbed the forecast rule lowered simulated time loss by 5.4 % (surge) and 4.7 % (incident) against fixed time in every seed; routine peak unchanged. Simulated, not a real-world gain.</a:t>
             </a:r>
           </a:p>
         </p:txBody>
@@ -11671,7 +11426,7 @@
                 <a:cs typeface="Times New Roman"/>
                 <a:ea typeface="Times New Roman"/>
               </a:rPr>
-              <a:t>SUMO testbed outcome (simulation only)</a:t>
+              <a:t>SUMO testbed calibration (SIMULATION)</a:t>
             </a:r>
           </a:p>
         </p:txBody>
@@ -11686,7 +11441,7 @@
         </p:nvGraphicFramePr>
         <p:xfrm>
           <a:off x="6583680" y="2148840"/>
-          <a:ext cx="5760720" cy="2468880"/>
+          <a:ext cx="5760720" cy="2286000"/>
         </p:xfrm>
         <a:graphic>
           <a:graphicData uri="http://schemas.openxmlformats.org/drawingml/2006/table">
@@ -11699,7 +11454,7 @@
                 <a:gridCol w="1280160"/>
                 <a:gridCol w="1508760"/>
               </a:tblGrid>
-              <a:tr h="411480">
+              <a:tr h="457200">
                 <a:tc>
                   <a:txBody>
                     <a:bodyPr wrap="square"/>
@@ -11791,7 +11546,7 @@
                   </a:tcPr>
                 </a:tc>
               </a:tr>
-              <a:tr h="411480">
+              <a:tr h="457200">
                 <a:tc>
                   <a:txBody>
                     <a:bodyPr wrap="square"/>
@@ -11872,7 +11627,7 @@
                           <a:cs typeface="Times New Roman"/>
                           <a:ea typeface="Times New Roman"/>
                         </a:rPr>
-                        <a:t>Withdrawn</a:t>
+                        <a:t>Superseded</a:t>
                       </a:r>
                     </a:p>
                   </a:txBody>
@@ -11883,7 +11638,7 @@
                   </a:tcPr>
                 </a:tc>
               </a:tr>
-              <a:tr h="411480">
+              <a:tr h="457200">
                 <a:tc>
                   <a:txBody>
                     <a:bodyPr wrap="square"/>
@@ -11904,7 +11659,7 @@
                           <a:cs typeface="Times New Roman"/>
                           <a:ea typeface="Times New Roman"/>
                         </a:rPr>
-                        <a:t>2014 count, generated signal timing</a:t>
+                        <a:t>2014 / 2025 counts, generated or Webster timing</a:t>
                       </a:r>
                     </a:p>
                   </a:txBody>
@@ -11934,7 +11689,7 @@
                           <a:cs typeface="Times New Roman"/>
                           <a:ea typeface="Times New Roman"/>
                         </a:rPr>
-                        <a:t>17.7 %</a:t>
+                        <a:t>4.3–17.7 %</a:t>
                       </a:r>
                     </a:p>
                   </a:txBody>
@@ -11975,7 +11730,7 @@
                   </a:tcPr>
                 </a:tc>
               </a:tr>
-              <a:tr h="411480">
+              <a:tr h="457200">
                 <a:tc>
                   <a:txBody>
                     <a:bodyPr wrap="square"/>
@@ -11996,191 +11751,7 @@
                           <a:cs typeface="Times New Roman"/>
                           <a:ea typeface="Times New Roman"/>
                         </a:rPr>
-                        <a:t>2014 count, Webster re-timed signals</a:t>
-                      </a:r>
-                    </a:p>
-                  </a:txBody>
-                  <a:tcPr anchor="ctr">
-                    <a:solidFill>
-                      <a:srgbClr val="E4ECF7"/>
-                    </a:solidFill>
-                  </a:tcPr>
-                </a:tc>
-                <a:tc>
-                  <a:txBody>
-                    <a:bodyPr wrap="square"/>
-                    <a:lstStyle/>
-                    <a:p>
-                      <a:pPr algn="ctr" marL="0" indent="0">
-                        <a:spcAft>
-                          <a:spcPts val="0"/>
-                        </a:spcAft>
-                        <a:buNone/>
-                      </a:pPr>
-                      <a:r>
-                        <a:rPr sz="1300" b="0" i="0">
-                          <a:solidFill>
-                            <a:srgbClr val="1A1A1A"/>
-                          </a:solidFill>
-                          <a:latin typeface="Times New Roman"/>
-                          <a:cs typeface="Times New Roman"/>
-                          <a:ea typeface="Times New Roman"/>
-                        </a:rPr>
-                        <a:t>4.3 %</a:t>
-                      </a:r>
-                    </a:p>
-                  </a:txBody>
-                  <a:tcPr anchor="ctr">
-                    <a:solidFill>
-                      <a:srgbClr val="E4ECF7"/>
-                    </a:solidFill>
-                  </a:tcPr>
-                </a:tc>
-                <a:tc>
-                  <a:txBody>
-                    <a:bodyPr wrap="square"/>
-                    <a:lstStyle/>
-                    <a:p>
-                      <a:pPr algn="ctr" marL="0" indent="0">
-                        <a:spcAft>
-                          <a:spcPts val="0"/>
-                        </a:spcAft>
-                        <a:buNone/>
-                      </a:pPr>
-                      <a:r>
-                        <a:rPr sz="1300" b="1" i="0">
-                          <a:solidFill>
-                            <a:srgbClr val="B02A22"/>
-                          </a:solidFill>
-                          <a:latin typeface="Times New Roman"/>
-                          <a:cs typeface="Times New Roman"/>
-                          <a:ea typeface="Times New Roman"/>
-                        </a:rPr>
-                        <a:t>Fails test</a:t>
-                      </a:r>
-                    </a:p>
-                  </a:txBody>
-                  <a:tcPr anchor="ctr">
-                    <a:solidFill>
-                      <a:srgbClr val="E4ECF7"/>
-                    </a:solidFill>
-                  </a:tcPr>
-                </a:tc>
-              </a:tr>
-              <a:tr h="411480">
-                <a:tc>
-                  <a:txBody>
-                    <a:bodyPr wrap="square"/>
-                    <a:lstStyle/>
-                    <a:p>
-                      <a:pPr algn="l" marL="0" indent="0">
-                        <a:spcAft>
-                          <a:spcPts val="0"/>
-                        </a:spcAft>
-                        <a:buNone/>
-                      </a:pPr>
-                      <a:r>
-                        <a:rPr sz="1300" b="0" i="0">
-                          <a:solidFill>
-                            <a:srgbClr val="1A1A1A"/>
-                          </a:solidFill>
-                          <a:latin typeface="Times New Roman"/>
-                          <a:cs typeface="Times New Roman"/>
-                          <a:ea typeface="Times New Roman"/>
-                        </a:rPr>
-                        <a:t>2025 counts, Webster, no turn-lane limits</a:t>
-                      </a:r>
-                    </a:p>
-                  </a:txBody>
-                  <a:tcPr anchor="ctr">
-                    <a:solidFill>
-                      <a:srgbClr val="FFFFFF"/>
-                    </a:solidFill>
-                  </a:tcPr>
-                </a:tc>
-                <a:tc>
-                  <a:txBody>
-                    <a:bodyPr wrap="square"/>
-                    <a:lstStyle/>
-                    <a:p>
-                      <a:pPr algn="ctr" marL="0" indent="0">
-                        <a:spcAft>
-                          <a:spcPts val="0"/>
-                        </a:spcAft>
-                        <a:buNone/>
-                      </a:pPr>
-                      <a:r>
-                        <a:rPr sz="1300" b="0" i="0">
-                          <a:solidFill>
-                            <a:srgbClr val="1A1A1A"/>
-                          </a:solidFill>
-                          <a:latin typeface="Times New Roman"/>
-                          <a:cs typeface="Times New Roman"/>
-                          <a:ea typeface="Times New Roman"/>
-                        </a:rPr>
-                        <a:t>10.1 %</a:t>
-                      </a:r>
-                    </a:p>
-                  </a:txBody>
-                  <a:tcPr anchor="ctr">
-                    <a:solidFill>
-                      <a:srgbClr val="FFFFFF"/>
-                    </a:solidFill>
-                  </a:tcPr>
-                </a:tc>
-                <a:tc>
-                  <a:txBody>
-                    <a:bodyPr wrap="square"/>
-                    <a:lstStyle/>
-                    <a:p>
-                      <a:pPr algn="ctr" marL="0" indent="0">
-                        <a:spcAft>
-                          <a:spcPts val="0"/>
-                        </a:spcAft>
-                        <a:buNone/>
-                      </a:pPr>
-                      <a:r>
-                        <a:rPr sz="1300" b="1" i="0">
-                          <a:solidFill>
-                            <a:srgbClr val="B02A22"/>
-                          </a:solidFill>
-                          <a:latin typeface="Times New Roman"/>
-                          <a:cs typeface="Times New Roman"/>
-                          <a:ea typeface="Times New Roman"/>
-                        </a:rPr>
-                        <a:t>Fails test</a:t>
-                      </a:r>
-                    </a:p>
-                  </a:txBody>
-                  <a:tcPr anchor="ctr">
-                    <a:solidFill>
-                      <a:srgbClr val="FFFFFF"/>
-                    </a:solidFill>
-                  </a:tcPr>
-                </a:tc>
-              </a:tr>
-              <a:tr h="411480">
-                <a:tc>
-                  <a:txBody>
-                    <a:bodyPr wrap="square"/>
-                    <a:lstStyle/>
-                    <a:p>
-                      <a:pPr algn="l" marL="0" indent="0">
-                        <a:spcAft>
-                          <a:spcPts val="0"/>
-                        </a:spcAft>
-                        <a:buNone/>
-                      </a:pPr>
-                      <a:r>
-                        <a:rPr sz="1300" b="0" i="0">
-                          <a:solidFill>
-                            <a:srgbClr val="1A1A1A"/>
-                          </a:solidFill>
-                          <a:latin typeface="Times New Roman"/>
-                          <a:cs typeface="Times New Roman"/>
-                          <a:ea typeface="Times New Roman"/>
-                        </a:rPr>
-                        <a:t>v5: 2025 counts, corridor green ×1.0–2.5</a:t>
+                        <a:t>v5: corridor green ×1.0–2.5</a:t>
                       </a:r>
                     </a:p>
                   </a:txBody>
@@ -12251,6 +11822,98 @@
                   </a:tcPr>
                 </a:tc>
               </a:tr>
+              <a:tr h="457200">
+                <a:tc>
+                  <a:txBody>
+                    <a:bodyPr wrap="square"/>
+                    <a:lstStyle/>
+                    <a:p>
+                      <a:pPr algn="l" marL="0" indent="0">
+                        <a:spcAft>
+                          <a:spcPts val="0"/>
+                        </a:spcAft>
+                        <a:buNone/>
+                      </a:pPr>
+                      <a:r>
+                        <a:rPr sz="1300" b="0" i="0">
+                          <a:solidFill>
+                            <a:srgbClr val="1A1A1A"/>
+                          </a:solidFill>
+                          <a:latin typeface="Times New Roman"/>
+                          <a:cs typeface="Times New Roman"/>
+                          <a:ea typeface="Times New Roman"/>
+                        </a:rPr>
+                        <a:t>v6: 90 s cycle, green ×1.5, 25 mph offsets</a:t>
+                      </a:r>
+                    </a:p>
+                  </a:txBody>
+                  <a:tcPr anchor="ctr">
+                    <a:solidFill>
+                      <a:srgbClr val="FFFFFF"/>
+                    </a:solidFill>
+                  </a:tcPr>
+                </a:tc>
+                <a:tc>
+                  <a:txBody>
+                    <a:bodyPr wrap="square"/>
+                    <a:lstStyle/>
+                    <a:p>
+                      <a:pPr algn="ctr" marL="0" indent="0">
+                        <a:spcAft>
+                          <a:spcPts val="0"/>
+                        </a:spcAft>
+                        <a:buNone/>
+                      </a:pPr>
+                      <a:r>
+                        <a:rPr sz="1300" b="0" i="0">
+                          <a:solidFill>
+                            <a:srgbClr val="1A1A1A"/>
+                          </a:solidFill>
+                          <a:latin typeface="Times New Roman"/>
+                          <a:cs typeface="Times New Roman"/>
+                          <a:ea typeface="Times New Roman"/>
+                        </a:rPr>
+                        <a:t>0 %</a:t>
+                      </a:r>
+                    </a:p>
+                  </a:txBody>
+                  <a:tcPr anchor="ctr">
+                    <a:solidFill>
+                      <a:srgbClr val="FFFFFF"/>
+                    </a:solidFill>
+                  </a:tcPr>
+                </a:tc>
+                <a:tc>
+                  <a:txBody>
+                    <a:bodyPr wrap="square"/>
+                    <a:lstStyle/>
+                    <a:p>
+                      <a:pPr algn="ctr" marL="0" indent="0">
+                        <a:spcAft>
+                          <a:spcPts val="0"/>
+                        </a:spcAft>
+                        <a:buNone/>
+                      </a:pPr>
+                      <a:r>
+                        <a:rPr sz="1300" b="1" i="0">
+                          <a:solidFill>
+                            <a:srgbClr val="2E7D4F"/>
+                          </a:solidFill>
+                          <a:latin typeface="Times New Roman"/>
+                          <a:cs typeface="Times New Roman"/>
+                          <a:ea typeface="Times New Roman"/>
+                        </a:rPr>
+                        <a:t>10.08 mph: passes</a:t>
+                      </a:r>
+                    </a:p>
+                  </a:txBody>
+                  <a:tcPr anchor="ctr">
+                    <a:solidFill>
+                      <a:srgbClr val="FFFFFF"/>
+                    </a:solidFill>
+                  </a:tcPr>
+                </a:tc>
+              </a:tr>
             </a:tbl>
           </a:graphicData>
         </a:graphic>
@@ -12263,8 +11926,8 @@
         </p:nvSpPr>
         <p:spPr>
           <a:xfrm>
-            <a:off x="6583680" y="4681728"/>
-            <a:ext cx="5760720" cy="2057400"/>
+            <a:off x="6583680" y="4526280"/>
+            <a:ext cx="5760720" cy="2194560"/>
           </a:xfrm>
           <a:prstGeom prst="rect">
             <a:avLst/>
@@ -12328,7 +11991,7 @@
                 <a:cs typeface="Times New Roman"/>
                 <a:ea typeface="Times New Roman"/>
               </a:rPr>
-              <a:t>With real 2025 counts (2,510 NB / 2,444 SB veh/h) the modelled link runs at 5.8 mph; the real street runs at 10.95 mph in the PM peak.</a:t>
+              <a:t>Target: the real PM-peak speed of 10.95 mph (±1.5) with 2025 counts. Splits alone peaked at 8.88 mph; southbound offsets closed the gap; 120 s cells overshot (13–22 mph).</a:t>
             </a:r>
           </a:p>
           <a:p>
@@ -12347,7 +12010,7 @@
                 <a:cs typeface="Times New Roman"/>
                 <a:ea typeface="Times New Roman"/>
               </a:rPr>
-              <a:t>v5 (23 Oct, 21 runs): more corridor green raises it to 8.1 mph, still 2.85 mph short of the 1.5 mph tolerance. No timing selected; the comparison stays NOT RUN.</a:t>
+              <a:t>v6 (26 Oct, 75 runs) selects 90 s / ×1.5 / 25 mph: 10.08 mph, 0 unfinished. A calibrated scenario testbed, not NYC DOT timing; only side-street demand 0.0 is admissible.</a:t>
             </a:r>
           </a:p>
         </p:txBody>
@@ -12998,7 +12661,7 @@
                 <a:cs typeface="Arial"/>
                 <a:ea typeface="Arial"/>
               </a:rPr>
-              <a:t>Screenshots of the project's Streamlit dashboard (src/smartcity/dashboard/app.py) captured on 21 Oct 2026; every number on them is read from committed result files. Live NYC feeds were not reachable from the capture machine, so no LIVE view is shown.</a:t>
+              <a:t>Screenshots of the project's Streamlit dashboard (src/smartcity/dashboard/app.py) captured on 28 Oct 2026; every number on them is read from committed result files. LIVE mode is built but not yet run, so no LIVE view is shown.</a:t>
             </a:r>
           </a:p>
         </p:txBody>
@@ -13329,7 +12992,7 @@
                 <a:cs typeface="Arial"/>
                 <a:ea typeface="Arial"/>
               </a:rPr>
-              <a:t>Screenshots of the project's Streamlit dashboard (src/smartcity/dashboard/app.py) captured on 21 Oct 2026; every number on them is read from committed result files. Live NYC feeds were not reachable from the capture machine, so no LIVE view is shown. The Experiment results page shows the seed-42 runs; the three-seed results are on slide 22.</a:t>
+              <a:t>Screenshots of the project's Streamlit dashboard (src/smartcity/dashboard/app.py) captured on 28 Oct 2026; every number on them is read from committed result files. LIVE mode is built but not yet run, so no LIVE view is shown. The Experiment results page shows the seed-42 runs; the three-seed results are on slide 22.</a:t>
             </a:r>
           </a:p>
         </p:txBody>
@@ -14096,7 +13759,7 @@
                 <a:cs typeface="Arial"/>
                 <a:ea typeface="Arial"/>
               </a:rPr>
-              <a:t>Screenshots of the project's Streamlit dashboard (src/smartcity/dashboard/app.py) captured on 21 Oct 2026; every number on them is read from committed result files. Live NYC feeds were not reachable from the capture machine, so no LIVE view is shown. Agent traces end in review, deferral or rejection; nothing is sent to real signals.</a:t>
+              <a:t>Screenshots of the project's Streamlit dashboard (src/smartcity/dashboard/app.py) captured on 28 Oct 2026; every number on them is read from committed result files. LIVE mode is built but not yet run, so no LIVE view is shown. Agent traces end in review, deferral or rejection; nothing is sent to real signals.</a:t>
             </a:r>
           </a:p>
         </p:txBody>
@@ -14336,7 +13999,7 @@
                 <a:cs typeface="Arial"/>
                 <a:ea typeface="Arial"/>
               </a:rPr>
-              <a:t>Captured 21 Oct 2026 from committed result files; no LIVE view.</a:t>
+              <a:t>Captured 28 Oct 2026 from committed result files.</a:t>
             </a:r>
           </a:p>
         </p:txBody>
@@ -14376,7 +14039,7 @@
                 <a:cs typeface="Arial"/>
                 <a:ea typeface="Arial"/>
               </a:rPr>
-              <a:t>Signal-split calibration, protocol v5</a:t>
+              <a:t>Corrected controller comparison</a:t>
             </a:r>
             <a:r>
               <a:rPr sz="1200" b="0" i="0">
@@ -14405,7 +14068,7 @@
       </p:sp>
       <p:graphicFrame>
         <p:nvGraphicFramePr>
-          <p:cNvPr id="9" name="Split calibration"/>
+          <p:cNvPr id="9" name="Controller comparison"/>
           <p:cNvGraphicFramePr>
             <a:graphicFrameLocks noGrp="1"/>
           </p:cNvGraphicFramePr>
@@ -14423,7 +14086,7 @@
       </p:graphicFrame>
       <p:sp>
         <p:nvSpPr>
-          <p:cNvPr id="10" name="Calibration notes"/>
+          <p:cNvPr id="10" name="Comparison notes"/>
           <p:cNvSpPr txBox="1"/>
           <p:nvPr/>
         </p:nvSpPr>
@@ -14457,7 +14120,7 @@
                 <a:cs typeface="Arial"/>
                 <a:ea typeface="Arial"/>
               </a:rPr>
-              <a:t>Corridor green share scaled ×1.0–2.5 (21 fixed-time runs, seeds 101–103, 2025 counts, 23 Oct 2026).</a:t>
+              <a:t>45 runs on the v6 calibrated plan, 5 matched seeds, 0 teleports (28 Oct 2026).</a:t>
             </a:r>
           </a:p>
           <a:p>
@@ -14477,7 +14140,7 @@
                 <a:cs typeface="Arial"/>
                 <a:ea typeface="Arial"/>
               </a:rPr>
-              <a:t>Admissible only at ×2.0 and ×2.5 (no teleports, at most 28 of 5,368 trips unfinished); ×1.0–1.8 leave 98–568 unfinished.</a:t>
+              <a:t>Surge −5.4 %, incident −4.7 % time loss; 190–194 more of 6,712 trips finish; same direction in every seed. Routine peak: identical.</a:t>
             </a:r>
           </a:p>
           <a:p>
@@ -14497,7 +14160,7 @@
                 <a:cs typeface="Arial"/>
                 <a:ea typeface="Arial"/>
               </a:rPr>
-              <a:t>Best admissible 8.10 mph is 2.85 mph below 10.95, beyond the 1.5 mph tolerance: no timing selected, controller comparison NOT RUN, rule not relaxed.</a:t>
+              <a:t>Simulated on a calibrated scenario testbed, not a real-world gain. The actuated controller is an uncalibrated reference and is not ranked.</a:t>
             </a:r>
           </a:p>
         </p:txBody>
@@ -14537,7 +14200,7 @@
                 <a:cs typeface="Arial"/>
                 <a:ea typeface="Arial"/>
               </a:rPr>
-              <a:t>Run 23 Oct, after the capture; from simulation_split_calibration_v5_*.csv</a:t>
+              <a:t>Source: reports/experiments/simulation_metrics.csv (claims C44–C46)</a:t>
             </a:r>
           </a:p>
         </p:txBody>
@@ -15832,7 +15495,7 @@
                 <a:cs typeface="Arial"/>
                 <a:ea typeface="Arial"/>
               </a:rPr>
-              <a:t>24 / 24</a:t>
+              <a:t>36 / 36</a:t>
             </a:r>
           </a:p>
           <a:p>
@@ -15851,7 +15514,7 @@
                 <a:cs typeface="Arial"/>
                 <a:ea typeface="Arial"/>
               </a:rPr>
-              <a:t>local-LLM responses schema-valid over two workflow passes (qwen2.5 7B)</a:t>
+              <a:t>local-LLM responses schema-valid over three workflow passes (qwen2.5 7B)</a:t>
             </a:r>
           </a:p>
         </p:txBody>
@@ -16064,7 +15727,7 @@
                 <a:cs typeface="Arial"/>
                 <a:ea typeface="Arial"/>
               </a:rPr>
-              <a:t>removing the availability-aware gate raises MAE by 0.067 mph (95 % CI 0.048–0.086); removing operational weather features lowers it by 0.046 mph (a negative result). No simulated controller gain is claimed: the SUMO testbed fails its own baseline test (8.1 vs 10.95 mph after signal-split calibration).</a:t>
+              <a:t>removing the availability-aware gate raises MAE by 0.067 mph (95 % CI 0.048–0.086); removing operational weather features lowers it by 0.046 mph (a negative result). Simulated SUMO testbed: forecast rule −5.4 % / −4.7 % time loss (surge / incident) in all 5 seeds.</a:t>
             </a:r>
           </a:p>
         </p:txBody>
@@ -16280,7 +15943,7 @@
                 <a:cs typeface="Arial"/>
                 <a:ea typeface="Arial"/>
               </a:rPr>
-              <a:t>Real-data pipeline on NYC DOT speeds, 1 Jan – 20 Oct 2026, with provenance hashes</a:t>
+              <a:t>Real-data pipeline on NYC DOT speeds (1 Jan – 20 Oct 2026), provenance hashed</a:t>
             </a:r>
           </a:p>
           <a:p>
@@ -16320,7 +15983,7 @@
                 <a:cs typeface="Arial"/>
                 <a:ea typeface="Arial"/>
               </a:rPr>
-              <a:t>Conformal intervals, reliability gate and grouped SHAP on the trained model</a:t>
+              <a:t>Conformal intervals, reliability gate, grouped SHAP</a:t>
             </a:r>
           </a:p>
           <a:p>
@@ -16340,7 +16003,7 @@
                 <a:cs typeface="Arial"/>
                 <a:ea typeface="Arial"/>
               </a:rPr>
-              <a:t>FAISS retrieval over 15 approved documents; local LLM with schema validation</a:t>
+              <a:t>FAISS retrieval (15 documents); local LLM with schema checks</a:t>
             </a:r>
           </a:p>
           <a:p>
@@ -16361,6 +16024,26 @@
                 <a:ea typeface="Arial"/>
               </a:rPr>
               <a:t>LangGraph workflow with 13 deterministic safety checks</a:t>
+            </a:r>
+          </a:p>
+          <a:p>
+            <a:pPr algn="l" marL="274320" indent="-228600">
+              <a:spcAft>
+                <a:spcPts val="700"/>
+              </a:spcAft>
+              <a:buFont typeface="Arial"/>
+              <a:buChar char="•"/>
+            </a:pPr>
+            <a:r>
+              <a:rPr sz="1400" b="0" i="0">
+                <a:solidFill>
+                  <a:srgbClr val="1A1A1A"/>
+                </a:solidFill>
+                <a:latin typeface="Arial"/>
+                <a:cs typeface="Arial"/>
+                <a:ea typeface="Arial"/>
+              </a:rPr>
+              <a:t>Calibrated SUMO testbed; 45-run controller comparison</a:t>
             </a:r>
           </a:p>
           <a:p>
@@ -16505,7 +16188,7 @@
                 <a:cs typeface="Arial"/>
                 <a:ea typeface="Arial"/>
               </a:rPr>
-              <a:t>SUMO controller comparison NOT RUN: signal-split calibration (v5, 23 Oct) reaches 8.1 of 10.95 mph; the first 45-run comparison is superseded</a:t>
+              <a:t>SUMO gains are simulated on a calibrated scenario testbed, not NYC DOT timing; the first 45-run comparison is superseded</a:t>
             </a:r>
           </a:p>
           <a:p>
@@ -16525,7 +16208,27 @@
                 <a:cs typeface="Arial"/>
                 <a:ea typeface="Arial"/>
               </a:rPr>
-              <a:t>No real advisory has reached the simulation gate (the LLM chose monitor-only in both passes)</a:t>
+              <a:t>LIVE observational mode is built but not yet run on the public feed</a:t>
+            </a:r>
+          </a:p>
+          <a:p>
+            <a:pPr algn="l" marL="274320" indent="-228600">
+              <a:spcAft>
+                <a:spcPts val="700"/>
+              </a:spcAft>
+              <a:buFont typeface="Arial"/>
+              <a:buChar char="•"/>
+            </a:pPr>
+            <a:r>
+              <a:rPr sz="1400" b="0" i="0">
+                <a:solidFill>
+                  <a:srgbClr val="1A1A1A"/>
+                </a:solidFill>
+                <a:latin typeface="Arial"/>
+                <a:cs typeface="Arial"/>
+                <a:ea typeface="Arial"/>
+              </a:rPr>
+              <a:t>No real advisory has reached the simulation gate (the LLM chose monitor-only in all three passes)</a:t>
             </a:r>
           </a:p>
           <a:p>
@@ -16750,7 +16453,7 @@
                 <a:cs typeface="Arial"/>
                 <a:ea typeface="Arial"/>
               </a:rPr>
-              <a:t>Next: run preregistered protocol v6 (cycle × green × offsets, 75 runs; prepared, not run), then the comparison</a:t>
+              <a:t>Next: run LIVE mode on the public feed and score its saved forecasts</a:t>
             </a:r>
           </a:p>
           <a:p>
@@ -17365,7 +17068,7 @@
                 <a:cs typeface="Times New Roman"/>
                 <a:ea typeface="Times New Roman"/>
               </a:rPr>
-              <a:t>Traffic control rooms can see congestion as it happens, but rarely receive forecasts that are explained, honest about their uncertainty and tested before an action is suggested. This project builds a decision-support prototype on public New York City data. A context-gated GATv2–Transformer forecasts link speeds 15, 30 and 60 minutes ahead on a graph of 16 Manhattan DOT speed links (January–October 2026), fusing weather, 311 and calendar context through an availability-aware gate. Split-conformal intervals quantify uncertainty, grouped SHAP explains the trained model, and a LangGraph workflow uses a local LLM (qwen2.5 7B) with FAISS retrieval to draft signal advisories that deterministic safety rules and a SUMO simulation must pass before human review. On a 45-day test period the model reaches 4.77, 5.33 and 6.15 mph MAE, 7–16 % below persistence; intervals reach 90 % coverage overall, and retrieval removed every fabricated citation. An audit of the simulation testbed showed it cannot yet support a controller comparison, which is therefore reported as not run.</a:t>
+              <a:t>Traffic control rooms can see congestion as it happens, but rarely receive forecasts that are explained, honest about their uncertainty and tested before an action is suggested. This project builds a decision-support prototype on public New York City data. A context-gated GATv2–Transformer forecasts link speeds 15, 30 and 60 minutes ahead on a graph of 16 Manhattan DOT speed links (January–October 2026), fusing weather, 311 and calendar context through an availability-aware gate. Split-conformal intervals quantify uncertainty, grouped SHAP explains the trained model, and a LangGraph workflow uses a local LLM (qwen2.5 7B) with FAISS retrieval to draft signal advisories that deterministic safety rules and a SUMO simulation must pass before human review. On a 45-day test period the model reaches 4.77, 5.33 and 6.15 mph MAE, 7–16 % below persistence; intervals reach 90 % coverage overall, and retrieval removed every fabricated citation. On a calibrated SUMO testbed (10.08 vs 10.95 mph observed) a forecast-driven rule cut simulated time loss by 5.4 % and 4.7 % in surge and incident scenarios, a simulated result only.</a:t>
             </a:r>
           </a:p>
         </p:txBody>
@@ -22200,7 +21903,7 @@
                 <a:cs typeface="Arial"/>
                 <a:ea typeface="Arial"/>
               </a:rPr>
-              <a:t>95</a:t>
+              <a:t>112</a:t>
             </a:r>
           </a:p>
           <a:p>

--- a/presentation/Final_Review_S_K_Sricharan_25MML1010.pptx
+++ b/presentation/Final_Review_S_K_Sricharan_25MML1010.pptx
@@ -30,6 +30,7 @@
     <p:sldId id="342" r:id="rId29"/>
     <p:sldId id="344" r:id="rId31"/>
     <p:sldId id="327" r:id="rId16"/>
+    <p:sldId id="345" r:id="rId32"/>
     <p:sldId id="343" r:id="rId30"/>
     <p:sldId id="338" r:id="rId25"/>
     <p:sldId id="321" r:id="rId17"/>
@@ -12341,7 +12342,7 @@
                 <a:cs typeface="Arial"/>
                 <a:ea typeface="Arial"/>
               </a:rPr>
-              <a:t>Captured on 23 Oct 2026 on the training laptop, which holds the trained model and the processed NYC DOT data. The forecast is a REPLAY of the held-out test period (origin 20 Oct 2026, 90 % conformal intervals); no LIVE view is shown.</a:t>
+              <a:t>Captured on 23 Oct 2026 on the training laptop, which holds the trained model and the processed NYC DOT data. The forecast is a REPLAY of the held-out test period (origin 20 Oct 2026, 90 % conformal intervals); the LIVE page is on slide 23.</a:t>
             </a:r>
           </a:p>
         </p:txBody>
@@ -12661,7 +12662,7 @@
                 <a:cs typeface="Arial"/>
                 <a:ea typeface="Arial"/>
               </a:rPr>
-              <a:t>Screenshots of the project's Streamlit dashboard (src/smartcity/dashboard/app.py) captured on 28 Oct 2026; every number on them is read from committed result files. LIVE mode is built but not yet run, so no LIVE view is shown.</a:t>
+              <a:t>Screenshots of the project's Streamlit dashboard (src/smartcity/dashboard/app.py) captured on 28 Oct 2026; every number on them is read from committed result files. The LIVE page, run on 30 Oct 2026, is on slide 23.</a:t>
             </a:r>
           </a:p>
         </p:txBody>
@@ -12992,7 +12993,7 @@
                 <a:cs typeface="Arial"/>
                 <a:ea typeface="Arial"/>
               </a:rPr>
-              <a:t>Screenshots of the project's Streamlit dashboard (src/smartcity/dashboard/app.py) captured on 28 Oct 2026; every number on them is read from committed result files. LIVE mode is built but not yet run, so no LIVE view is shown. The Experiment results page shows the seed-42 runs; the three-seed results are on slide 22.</a:t>
+              <a:t>Screenshots of the project's Streamlit dashboard (src/smartcity/dashboard/app.py) captured on 28 Oct 2026; every number on them is read from committed result files. The LIVE page, run on 30 Oct 2026, is on slide 23. The Experiment results page shows the seed-42 runs; the three-seed results are on slide 22.</a:t>
             </a:r>
           </a:p>
         </p:txBody>
@@ -13759,7 +13760,7 @@
                 <a:cs typeface="Arial"/>
                 <a:ea typeface="Arial"/>
               </a:rPr>
-              <a:t>Screenshots of the project's Streamlit dashboard (src/smartcity/dashboard/app.py) captured on 28 Oct 2026; every number on them is read from committed result files. LIVE mode is built but not yet run, so no LIVE view is shown. Agent traces end in review, deferral or rejection; nothing is sent to real signals.</a:t>
+              <a:t>Screenshots of the project's Streamlit dashboard (src/smartcity/dashboard/app.py) captured on 28 Oct 2026; every number on them is read from committed result files. The LIVE page, run on 30 Oct 2026, is on slide 23. Agent traces end in review, deferral or rejection; nothing is sent to real signals.</a:t>
             </a:r>
           </a:p>
         </p:txBody>
@@ -15795,7 +15796,7 @@
                 <a:latin typeface="Arial" panose="020B0604020202020204" pitchFamily="34" charset="0"/>
                 <a:cs typeface="Arial" panose="020B0604020202020204" pitchFamily="34" charset="0"/>
               </a:rPr>
-              <a:t>9. RESULTS &amp; OUTCOMES (CONTD.)</a:t>
+              <a:t>9. RESULTS &amp; OUTCOMES: LIVE CHECK</a:t>
             </a:r>
           </a:p>
         </p:txBody>
@@ -15818,6 +15819,1246 @@
             <a:fld id="{C02A2637-A5A3-49FA-B214-6E67543099EF}" type="slidenum">
               <a:rPr lang="en-US" smtClean="0"/>
               <a:t>23</a:t>
+            </a:fld>
+            <a:endParaRPr lang="en-US"/>
+          </a:p>
+        </p:txBody>
+      </p:sp>
+      <p:sp>
+        <p:nvSpPr>
+          <p:cNvPr id="5" name="TextBox 4"/>
+          <p:cNvSpPr txBox="1"/>
+          <p:nvPr/>
+        </p:nvSpPr>
+        <p:spPr>
+          <a:xfrm>
+            <a:off x="502920" y="1554480"/>
+            <a:ext cx="5715000" cy="329184"/>
+          </a:xfrm>
+          <a:prstGeom prst="rect">
+            <a:avLst/>
+          </a:prstGeom>
+          <a:noFill/>
+        </p:spPr>
+        <p:txBody>
+          <a:bodyPr wrap="square" lIns="18288" rIns="18288" tIns="18288" bIns="18288" anchor="b"/>
+          <a:lstStyle/>
+          <a:p>
+            <a:pPr algn="l" marL="0" indent="0">
+              <a:spcAft>
+                <a:spcPts val="0"/>
+              </a:spcAft>
+              <a:buNone/>
+            </a:pPr>
+            <a:r>
+              <a:rPr sz="1400" b="1" i="0">
+                <a:solidFill>
+                  <a:srgbClr val="1F497D"/>
+                </a:solidFill>
+                <a:latin typeface="Arial"/>
+                <a:cs typeface="Arial"/>
+                <a:ea typeface="Arial"/>
+              </a:rPr>
+              <a:t>Live monitoring</a:t>
+            </a:r>
+            <a:r>
+              <a:rPr sz="1200" b="0" i="0">
+                <a:solidFill>
+                  <a:srgbClr val="555F6B"/>
+                </a:solidFill>
+                <a:latin typeface="Arial"/>
+                <a:cs typeface="Arial"/>
+                <a:ea typeface="Arial"/>
+              </a:rPr>
+              <a:t>   Mode shown: </a:t>
+            </a:r>
+            <a:r>
+              <a:rPr sz="1200" b="1" i="0">
+                <a:solidFill>
+                  <a:srgbClr val="2E7D4F"/>
+                </a:solidFill>
+                <a:latin typeface="Arial"/>
+                <a:cs typeface="Arial"/>
+                <a:ea typeface="Arial"/>
+              </a:rPr>
+              <a:t>LIVE</a:t>
+            </a:r>
+          </a:p>
+        </p:txBody>
+      </p:sp>
+      <p:pic>
+        <p:nvPicPr>
+          <p:cNvPr id="6" name="Dashboard: Live monitoring" descr="image.png"/>
+          <p:cNvPicPr>
+            <a:picLocks noChangeAspect="1"/>
+          </p:cNvPicPr>
+          <p:nvPr/>
+        </p:nvPicPr>
+        <p:blipFill>
+          <a:blip r:embed="rId2"/>
+          <a:stretch>
+            <a:fillRect/>
+          </a:stretch>
+        </p:blipFill>
+        <p:spPr>
+          <a:xfrm>
+            <a:off x="502920" y="1938528"/>
+            <a:ext cx="5715000" cy="2227881"/>
+          </a:xfrm>
+          <a:prstGeom prst="rect">
+            <a:avLst/>
+          </a:prstGeom>
+          <a:ln w="12700">
+            <a:solidFill>
+              <a:srgbClr val="C9D3E0"/>
+            </a:solidFill>
+          </a:ln>
+        </p:spPr>
+      </p:pic>
+      <p:sp>
+        <p:nvSpPr>
+          <p:cNvPr id="7" name="TextBox 6"/>
+          <p:cNvSpPr txBox="1"/>
+          <p:nvPr/>
+        </p:nvSpPr>
+        <p:spPr>
+          <a:xfrm>
+            <a:off x="502920" y="4212129"/>
+            <a:ext cx="5715000" cy="329184"/>
+          </a:xfrm>
+          <a:prstGeom prst="rect">
+            <a:avLst/>
+          </a:prstGeom>
+          <a:noFill/>
+        </p:spPr>
+        <p:txBody>
+          <a:bodyPr wrap="square" lIns="18288" rIns="18288" tIns="18288" bIns="18288" anchor="b"/>
+          <a:lstStyle/>
+          <a:p>
+            <a:pPr algn="l" marL="0" indent="0">
+              <a:spcAft>
+                <a:spcPts val="0"/>
+              </a:spcAft>
+              <a:buNone/>
+            </a:pPr>
+            <a:r>
+              <a:rPr sz="1400" b="1" i="0">
+                <a:solidFill>
+                  <a:srgbClr val="1F497D"/>
+                </a:solidFill>
+                <a:latin typeface="Arial"/>
+                <a:cs typeface="Arial"/>
+                <a:ea typeface="Arial"/>
+              </a:rPr>
+              <a:t>Forecasts vs later observations</a:t>
+            </a:r>
+            <a:r>
+              <a:rPr sz="1200" b="0" i="0">
+                <a:solidFill>
+                  <a:srgbClr val="555F6B"/>
+                </a:solidFill>
+                <a:latin typeface="Arial"/>
+                <a:cs typeface="Arial"/>
+                <a:ea typeface="Arial"/>
+              </a:rPr>
+              <a:t>   Mode shown: </a:t>
+            </a:r>
+            <a:r>
+              <a:rPr sz="1200" b="1" i="0">
+                <a:solidFill>
+                  <a:srgbClr val="2E7D4F"/>
+                </a:solidFill>
+                <a:latin typeface="Arial"/>
+                <a:cs typeface="Arial"/>
+                <a:ea typeface="Arial"/>
+              </a:rPr>
+              <a:t>LIVE</a:t>
+            </a:r>
+          </a:p>
+        </p:txBody>
+      </p:sp>
+      <p:pic>
+        <p:nvPicPr>
+          <p:cNvPr id="8" name="Dashboard: Forecasts vs later observations" descr="image.png"/>
+          <p:cNvPicPr>
+            <a:picLocks noChangeAspect="1"/>
+          </p:cNvPicPr>
+          <p:nvPr/>
+        </p:nvPicPr>
+        <p:blipFill>
+          <a:blip r:embed="rId3"/>
+          <a:stretch>
+            <a:fillRect/>
+          </a:stretch>
+        </p:blipFill>
+        <p:spPr>
+          <a:xfrm>
+            <a:off x="502920" y="4596177"/>
+            <a:ext cx="5715000" cy="1775847"/>
+          </a:xfrm>
+          <a:prstGeom prst="rect">
+            <a:avLst/>
+          </a:prstGeom>
+          <a:ln w="12700">
+            <a:solidFill>
+              <a:srgbClr val="C9D3E0"/>
+            </a:solidFill>
+          </a:ln>
+        </p:spPr>
+      </p:pic>
+      <p:sp>
+        <p:nvSpPr>
+          <p:cNvPr id="9" name="TextBox 8"/>
+          <p:cNvSpPr txBox="1"/>
+          <p:nvPr/>
+        </p:nvSpPr>
+        <p:spPr>
+          <a:xfrm>
+            <a:off x="6583680" y="1554480"/>
+            <a:ext cx="5715000" cy="329184"/>
+          </a:xfrm>
+          <a:prstGeom prst="rect">
+            <a:avLst/>
+          </a:prstGeom>
+          <a:noFill/>
+        </p:spPr>
+        <p:txBody>
+          <a:bodyPr wrap="square" lIns="18288" rIns="18288" tIns="18288" bIns="18288" anchor="b"/>
+          <a:lstStyle/>
+          <a:p>
+            <a:pPr algn="l" marL="0" indent="0">
+              <a:spcAft>
+                <a:spcPts val="0"/>
+              </a:spcAft>
+              <a:buNone/>
+            </a:pPr>
+            <a:r>
+              <a:rPr sz="1400" b="1" i="0">
+                <a:solidFill>
+                  <a:srgbClr val="1F497D"/>
+                </a:solidFill>
+                <a:latin typeface="Arial"/>
+                <a:cs typeface="Arial"/>
+                <a:ea typeface="Arial"/>
+              </a:rPr>
+              <a:t>Scored LIVE forecasts, 30 Oct 2026</a:t>
+            </a:r>
+            <a:r>
+              <a:rPr sz="1200" b="0" i="0">
+                <a:solidFill>
+                  <a:srgbClr val="555F6B"/>
+                </a:solidFill>
+                <a:latin typeface="Arial"/>
+                <a:cs typeface="Arial"/>
+                <a:ea typeface="Arial"/>
+              </a:rPr>
+              <a:t>   Mode: </a:t>
+            </a:r>
+            <a:r>
+              <a:rPr sz="1200" b="1" i="0">
+                <a:solidFill>
+                  <a:srgbClr val="2E7D4F"/>
+                </a:solidFill>
+                <a:latin typeface="Arial"/>
+                <a:cs typeface="Arial"/>
+                <a:ea typeface="Arial"/>
+              </a:rPr>
+              <a:t>LIVE</a:t>
+            </a:r>
+          </a:p>
+        </p:txBody>
+      </p:sp>
+      <p:graphicFrame>
+        <p:nvGraphicFramePr>
+          <p:cNvPr id="10" name="LIVE scores"/>
+          <p:cNvGraphicFramePr>
+            <a:graphicFrameLocks noGrp="1"/>
+          </p:cNvGraphicFramePr>
+          <p:nvPr/>
+        </p:nvGraphicFramePr>
+        <p:xfrm>
+          <a:off x="6583680" y="1938528"/>
+          <a:ext cx="5715000" cy="1737360"/>
+        </p:xfrm>
+        <a:graphic>
+          <a:graphicData uri="http://schemas.openxmlformats.org/drawingml/2006/table">
+            <a:tbl>
+              <a:tblPr firstRow="1" bandRow="1">
+                <a:tableStyleId>{5C22544A-7EE6-4342-B048-85BDC9FD1C3A}</a:tableStyleId>
+              </a:tblPr>
+              <a:tblGrid>
+                <a:gridCol w="1463040"/>
+                <a:gridCol w="1097280"/>
+                <a:gridCol w="1097280"/>
+                <a:gridCol w="1097280"/>
+                <a:gridCol w="960120"/>
+              </a:tblGrid>
+              <a:tr h="347472">
+                <a:tc>
+                  <a:txBody>
+                    <a:bodyPr wrap="square"/>
+                    <a:lstStyle/>
+                    <a:p>
+                      <a:pPr algn="l" marL="0" indent="0">
+                        <a:spcAft>
+                          <a:spcPts val="0"/>
+                        </a:spcAft>
+                        <a:buNone/>
+                      </a:pPr>
+                      <a:r>
+                        <a:rPr sz="1200" b="1" i="0">
+                          <a:solidFill>
+                            <a:srgbClr val="FFFFFF"/>
+                          </a:solidFill>
+                          <a:latin typeface="Arial"/>
+                          <a:cs typeface="Arial"/>
+                          <a:ea typeface="Arial"/>
+                        </a:rPr>
+                        <a:t>Horizon</a:t>
+                      </a:r>
+                    </a:p>
+                  </a:txBody>
+                  <a:tcPr anchor="ctr">
+                    <a:solidFill>
+                      <a:srgbClr val="1F497D"/>
+                    </a:solidFill>
+                  </a:tcPr>
+                </a:tc>
+                <a:tc>
+                  <a:txBody>
+                    <a:bodyPr wrap="square"/>
+                    <a:lstStyle/>
+                    <a:p>
+                      <a:pPr algn="ctr" marL="0" indent="0">
+                        <a:spcAft>
+                          <a:spcPts val="0"/>
+                        </a:spcAft>
+                        <a:buNone/>
+                      </a:pPr>
+                      <a:r>
+                        <a:rPr sz="1200" b="1" i="0">
+                          <a:solidFill>
+                            <a:srgbClr val="FFFFFF"/>
+                          </a:solidFill>
+                          <a:latin typeface="Arial"/>
+                          <a:cs typeface="Arial"/>
+                          <a:ea typeface="Arial"/>
+                        </a:rPr>
+                        <a:t>MAE (mph)</a:t>
+                      </a:r>
+                    </a:p>
+                  </a:txBody>
+                  <a:tcPr anchor="ctr">
+                    <a:solidFill>
+                      <a:srgbClr val="1F497D"/>
+                    </a:solidFill>
+                  </a:tcPr>
+                </a:tc>
+                <a:tc>
+                  <a:txBody>
+                    <a:bodyPr wrap="square"/>
+                    <a:lstStyle/>
+                    <a:p>
+                      <a:pPr algn="ctr" marL="0" indent="0">
+                        <a:spcAft>
+                          <a:spcPts val="0"/>
+                        </a:spcAft>
+                        <a:buNone/>
+                      </a:pPr>
+                      <a:r>
+                        <a:rPr sz="1200" b="1" i="0">
+                          <a:solidFill>
+                            <a:srgbClr val="FFFFFF"/>
+                          </a:solidFill>
+                          <a:latin typeface="Arial"/>
+                          <a:cs typeface="Arial"/>
+                          <a:ea typeface="Arial"/>
+                        </a:rPr>
+                        <a:t>Persistence</a:t>
+                      </a:r>
+                    </a:p>
+                  </a:txBody>
+                  <a:tcPr anchor="ctr">
+                    <a:solidFill>
+                      <a:srgbClr val="1F497D"/>
+                    </a:solidFill>
+                  </a:tcPr>
+                </a:tc>
+                <a:tc>
+                  <a:txBody>
+                    <a:bodyPr wrap="square"/>
+                    <a:lstStyle/>
+                    <a:p>
+                      <a:pPr algn="ctr" marL="0" indent="0">
+                        <a:spcAft>
+                          <a:spcPts val="0"/>
+                        </a:spcAft>
+                        <a:buNone/>
+                      </a:pPr>
+                      <a:r>
+                        <a:rPr sz="1200" b="1" i="0">
+                          <a:solidFill>
+                            <a:srgbClr val="FFFFFF"/>
+                          </a:solidFill>
+                          <a:latin typeface="Arial"/>
+                          <a:cs typeface="Arial"/>
+                          <a:ea typeface="Arial"/>
+                        </a:rPr>
+                        <a:t>90 % coverage</a:t>
+                      </a:r>
+                    </a:p>
+                  </a:txBody>
+                  <a:tcPr anchor="ctr">
+                    <a:solidFill>
+                      <a:srgbClr val="1F497D"/>
+                    </a:solidFill>
+                  </a:tcPr>
+                </a:tc>
+                <a:tc>
+                  <a:txBody>
+                    <a:bodyPr wrap="square"/>
+                    <a:lstStyle/>
+                    <a:p>
+                      <a:pPr algn="ctr" marL="0" indent="0">
+                        <a:spcAft>
+                          <a:spcPts val="0"/>
+                        </a:spcAft>
+                        <a:buNone/>
+                      </a:pPr>
+                      <a:r>
+                        <a:rPr sz="1200" b="1" i="0">
+                          <a:solidFill>
+                            <a:srgbClr val="FFFFFF"/>
+                          </a:solidFill>
+                          <a:latin typeface="Arial"/>
+                          <a:cs typeface="Arial"/>
+                          <a:ea typeface="Arial"/>
+                        </a:rPr>
+                        <a:t>Width (mph)</a:t>
+                      </a:r>
+                    </a:p>
+                  </a:txBody>
+                  <a:tcPr anchor="ctr">
+                    <a:solidFill>
+                      <a:srgbClr val="1F497D"/>
+                    </a:solidFill>
+                  </a:tcPr>
+                </a:tc>
+              </a:tr>
+              <a:tr h="347472">
+                <a:tc>
+                  <a:txBody>
+                    <a:bodyPr wrap="square"/>
+                    <a:lstStyle/>
+                    <a:p>
+                      <a:pPr algn="l" marL="0" indent="0">
+                        <a:spcAft>
+                          <a:spcPts val="0"/>
+                        </a:spcAft>
+                        <a:buNone/>
+                      </a:pPr>
+                      <a:r>
+                        <a:rPr sz="1200" b="0" i="0">
+                          <a:solidFill>
+                            <a:srgbClr val="1A1A1A"/>
+                          </a:solidFill>
+                          <a:latin typeface="Arial"/>
+                          <a:cs typeface="Arial"/>
+                          <a:ea typeface="Arial"/>
+                        </a:rPr>
+                        <a:t>15 min</a:t>
+                      </a:r>
+                    </a:p>
+                  </a:txBody>
+                  <a:tcPr anchor="ctr">
+                    <a:solidFill>
+                      <a:srgbClr val="E4ECF7"/>
+                    </a:solidFill>
+                  </a:tcPr>
+                </a:tc>
+                <a:tc>
+                  <a:txBody>
+                    <a:bodyPr wrap="square"/>
+                    <a:lstStyle/>
+                    <a:p>
+                      <a:pPr algn="ctr" marL="0" indent="0">
+                        <a:spcAft>
+                          <a:spcPts val="0"/>
+                        </a:spcAft>
+                        <a:buNone/>
+                      </a:pPr>
+                      <a:r>
+                        <a:rPr sz="1200" b="0" i="0">
+                          <a:solidFill>
+                            <a:srgbClr val="1A1A1A"/>
+                          </a:solidFill>
+                          <a:latin typeface="Arial"/>
+                          <a:cs typeface="Arial"/>
+                          <a:ea typeface="Arial"/>
+                        </a:rPr>
+                        <a:t>3.62</a:t>
+                      </a:r>
+                    </a:p>
+                  </a:txBody>
+                  <a:tcPr anchor="ctr">
+                    <a:solidFill>
+                      <a:srgbClr val="E4ECF7"/>
+                    </a:solidFill>
+                  </a:tcPr>
+                </a:tc>
+                <a:tc>
+                  <a:txBody>
+                    <a:bodyPr wrap="square"/>
+                    <a:lstStyle/>
+                    <a:p>
+                      <a:pPr algn="ctr" marL="0" indent="0">
+                        <a:spcAft>
+                          <a:spcPts val="0"/>
+                        </a:spcAft>
+                        <a:buNone/>
+                      </a:pPr>
+                      <a:r>
+                        <a:rPr sz="1200" b="0" i="0">
+                          <a:solidFill>
+                            <a:srgbClr val="1A1A1A"/>
+                          </a:solidFill>
+                          <a:latin typeface="Arial"/>
+                          <a:cs typeface="Arial"/>
+                          <a:ea typeface="Arial"/>
+                        </a:rPr>
+                        <a:t>4.25</a:t>
+                      </a:r>
+                    </a:p>
+                  </a:txBody>
+                  <a:tcPr anchor="ctr">
+                    <a:solidFill>
+                      <a:srgbClr val="E4ECF7"/>
+                    </a:solidFill>
+                  </a:tcPr>
+                </a:tc>
+                <a:tc>
+                  <a:txBody>
+                    <a:bodyPr wrap="square"/>
+                    <a:lstStyle/>
+                    <a:p>
+                      <a:pPr algn="ctr" marL="0" indent="0">
+                        <a:spcAft>
+                          <a:spcPts val="0"/>
+                        </a:spcAft>
+                        <a:buNone/>
+                      </a:pPr>
+                      <a:r>
+                        <a:rPr sz="1200" b="0" i="0">
+                          <a:solidFill>
+                            <a:srgbClr val="1A1A1A"/>
+                          </a:solidFill>
+                          <a:latin typeface="Arial"/>
+                          <a:cs typeface="Arial"/>
+                          <a:ea typeface="Arial"/>
+                        </a:rPr>
+                        <a:t>0.90</a:t>
+                      </a:r>
+                    </a:p>
+                  </a:txBody>
+                  <a:tcPr anchor="ctr">
+                    <a:solidFill>
+                      <a:srgbClr val="E4ECF7"/>
+                    </a:solidFill>
+                  </a:tcPr>
+                </a:tc>
+                <a:tc>
+                  <a:txBody>
+                    <a:bodyPr wrap="square"/>
+                    <a:lstStyle/>
+                    <a:p>
+                      <a:pPr algn="ctr" marL="0" indent="0">
+                        <a:spcAft>
+                          <a:spcPts val="0"/>
+                        </a:spcAft>
+                        <a:buNone/>
+                      </a:pPr>
+                      <a:r>
+                        <a:rPr sz="1200" b="0" i="0">
+                          <a:solidFill>
+                            <a:srgbClr val="1A1A1A"/>
+                          </a:solidFill>
+                          <a:latin typeface="Arial"/>
+                          <a:cs typeface="Arial"/>
+                          <a:ea typeface="Arial"/>
+                        </a:rPr>
+                        <a:t>21.9</a:t>
+                      </a:r>
+                    </a:p>
+                  </a:txBody>
+                  <a:tcPr anchor="ctr">
+                    <a:solidFill>
+                      <a:srgbClr val="E4ECF7"/>
+                    </a:solidFill>
+                  </a:tcPr>
+                </a:tc>
+              </a:tr>
+              <a:tr h="347472">
+                <a:tc>
+                  <a:txBody>
+                    <a:bodyPr wrap="square"/>
+                    <a:lstStyle/>
+                    <a:p>
+                      <a:pPr algn="l" marL="0" indent="0">
+                        <a:spcAft>
+                          <a:spcPts val="0"/>
+                        </a:spcAft>
+                        <a:buNone/>
+                      </a:pPr>
+                      <a:r>
+                        <a:rPr sz="1200" b="0" i="0">
+                          <a:solidFill>
+                            <a:srgbClr val="1A1A1A"/>
+                          </a:solidFill>
+                          <a:latin typeface="Arial"/>
+                          <a:cs typeface="Arial"/>
+                          <a:ea typeface="Arial"/>
+                        </a:rPr>
+                        <a:t>30 min</a:t>
+                      </a:r>
+                    </a:p>
+                  </a:txBody>
+                  <a:tcPr anchor="ctr">
+                    <a:solidFill>
+                      <a:srgbClr val="FFFFFF"/>
+                    </a:solidFill>
+                  </a:tcPr>
+                </a:tc>
+                <a:tc>
+                  <a:txBody>
+                    <a:bodyPr wrap="square"/>
+                    <a:lstStyle/>
+                    <a:p>
+                      <a:pPr algn="ctr" marL="0" indent="0">
+                        <a:spcAft>
+                          <a:spcPts val="0"/>
+                        </a:spcAft>
+                        <a:buNone/>
+                      </a:pPr>
+                      <a:r>
+                        <a:rPr sz="1200" b="0" i="0">
+                          <a:solidFill>
+                            <a:srgbClr val="1A1A1A"/>
+                          </a:solidFill>
+                          <a:latin typeface="Arial"/>
+                          <a:cs typeface="Arial"/>
+                          <a:ea typeface="Arial"/>
+                        </a:rPr>
+                        <a:t>5.50</a:t>
+                      </a:r>
+                    </a:p>
+                  </a:txBody>
+                  <a:tcPr anchor="ctr">
+                    <a:solidFill>
+                      <a:srgbClr val="FFFFFF"/>
+                    </a:solidFill>
+                  </a:tcPr>
+                </a:tc>
+                <a:tc>
+                  <a:txBody>
+                    <a:bodyPr wrap="square"/>
+                    <a:lstStyle/>
+                    <a:p>
+                      <a:pPr algn="ctr" marL="0" indent="0">
+                        <a:spcAft>
+                          <a:spcPts val="0"/>
+                        </a:spcAft>
+                        <a:buNone/>
+                      </a:pPr>
+                      <a:r>
+                        <a:rPr sz="1200" b="0" i="0">
+                          <a:solidFill>
+                            <a:srgbClr val="1A1A1A"/>
+                          </a:solidFill>
+                          <a:latin typeface="Arial"/>
+                          <a:cs typeface="Arial"/>
+                          <a:ea typeface="Arial"/>
+                        </a:rPr>
+                        <a:t>6.17</a:t>
+                      </a:r>
+                    </a:p>
+                  </a:txBody>
+                  <a:tcPr anchor="ctr">
+                    <a:solidFill>
+                      <a:srgbClr val="FFFFFF"/>
+                    </a:solidFill>
+                  </a:tcPr>
+                </a:tc>
+                <a:tc>
+                  <a:txBody>
+                    <a:bodyPr wrap="square"/>
+                    <a:lstStyle/>
+                    <a:p>
+                      <a:pPr algn="ctr" marL="0" indent="0">
+                        <a:spcAft>
+                          <a:spcPts val="0"/>
+                        </a:spcAft>
+                        <a:buNone/>
+                      </a:pPr>
+                      <a:r>
+                        <a:rPr sz="1200" b="0" i="0">
+                          <a:solidFill>
+                            <a:srgbClr val="1A1A1A"/>
+                          </a:solidFill>
+                          <a:latin typeface="Arial"/>
+                          <a:cs typeface="Arial"/>
+                          <a:ea typeface="Arial"/>
+                        </a:rPr>
+                        <a:t>0.87</a:t>
+                      </a:r>
+                    </a:p>
+                  </a:txBody>
+                  <a:tcPr anchor="ctr">
+                    <a:solidFill>
+                      <a:srgbClr val="FFFFFF"/>
+                    </a:solidFill>
+                  </a:tcPr>
+                </a:tc>
+                <a:tc>
+                  <a:txBody>
+                    <a:bodyPr wrap="square"/>
+                    <a:lstStyle/>
+                    <a:p>
+                      <a:pPr algn="ctr" marL="0" indent="0">
+                        <a:spcAft>
+                          <a:spcPts val="0"/>
+                        </a:spcAft>
+                        <a:buNone/>
+                      </a:pPr>
+                      <a:r>
+                        <a:rPr sz="1200" b="0" i="0">
+                          <a:solidFill>
+                            <a:srgbClr val="1A1A1A"/>
+                          </a:solidFill>
+                          <a:latin typeface="Arial"/>
+                          <a:cs typeface="Arial"/>
+                          <a:ea typeface="Arial"/>
+                        </a:rPr>
+                        <a:t>24.9</a:t>
+                      </a:r>
+                    </a:p>
+                  </a:txBody>
+                  <a:tcPr anchor="ctr">
+                    <a:solidFill>
+                      <a:srgbClr val="FFFFFF"/>
+                    </a:solidFill>
+                  </a:tcPr>
+                </a:tc>
+              </a:tr>
+              <a:tr h="347472">
+                <a:tc>
+                  <a:txBody>
+                    <a:bodyPr wrap="square"/>
+                    <a:lstStyle/>
+                    <a:p>
+                      <a:pPr algn="l" marL="0" indent="0">
+                        <a:spcAft>
+                          <a:spcPts val="0"/>
+                        </a:spcAft>
+                        <a:buNone/>
+                      </a:pPr>
+                      <a:r>
+                        <a:rPr sz="1200" b="0" i="0">
+                          <a:solidFill>
+                            <a:srgbClr val="1A1A1A"/>
+                          </a:solidFill>
+                          <a:latin typeface="Arial"/>
+                          <a:cs typeface="Arial"/>
+                          <a:ea typeface="Arial"/>
+                        </a:rPr>
+                        <a:t>60 min</a:t>
+                      </a:r>
+                    </a:p>
+                  </a:txBody>
+                  <a:tcPr anchor="ctr">
+                    <a:solidFill>
+                      <a:srgbClr val="E4ECF7"/>
+                    </a:solidFill>
+                  </a:tcPr>
+                </a:tc>
+                <a:tc>
+                  <a:txBody>
+                    <a:bodyPr wrap="square"/>
+                    <a:lstStyle/>
+                    <a:p>
+                      <a:pPr algn="ctr" marL="0" indent="0">
+                        <a:spcAft>
+                          <a:spcPts val="0"/>
+                        </a:spcAft>
+                        <a:buNone/>
+                      </a:pPr>
+                      <a:r>
+                        <a:rPr sz="1200" b="0" i="0">
+                          <a:solidFill>
+                            <a:srgbClr val="1A1A1A"/>
+                          </a:solidFill>
+                          <a:latin typeface="Arial"/>
+                          <a:cs typeface="Arial"/>
+                          <a:ea typeface="Arial"/>
+                        </a:rPr>
+                        <a:t>5.25</a:t>
+                      </a:r>
+                    </a:p>
+                  </a:txBody>
+                  <a:tcPr anchor="ctr">
+                    <a:solidFill>
+                      <a:srgbClr val="E4ECF7"/>
+                    </a:solidFill>
+                  </a:tcPr>
+                </a:tc>
+                <a:tc>
+                  <a:txBody>
+                    <a:bodyPr wrap="square"/>
+                    <a:lstStyle/>
+                    <a:p>
+                      <a:pPr algn="ctr" marL="0" indent="0">
+                        <a:spcAft>
+                          <a:spcPts val="0"/>
+                        </a:spcAft>
+                        <a:buNone/>
+                      </a:pPr>
+                      <a:r>
+                        <a:rPr sz="1200" b="0" i="0">
+                          <a:solidFill>
+                            <a:srgbClr val="1A1A1A"/>
+                          </a:solidFill>
+                          <a:latin typeface="Arial"/>
+                          <a:cs typeface="Arial"/>
+                          <a:ea typeface="Arial"/>
+                        </a:rPr>
+                        <a:t>5.59</a:t>
+                      </a:r>
+                    </a:p>
+                  </a:txBody>
+                  <a:tcPr anchor="ctr">
+                    <a:solidFill>
+                      <a:srgbClr val="E4ECF7"/>
+                    </a:solidFill>
+                  </a:tcPr>
+                </a:tc>
+                <a:tc>
+                  <a:txBody>
+                    <a:bodyPr wrap="square"/>
+                    <a:lstStyle/>
+                    <a:p>
+                      <a:pPr algn="ctr" marL="0" indent="0">
+                        <a:spcAft>
+                          <a:spcPts val="0"/>
+                        </a:spcAft>
+                        <a:buNone/>
+                      </a:pPr>
+                      <a:r>
+                        <a:rPr sz="1200" b="0" i="0">
+                          <a:solidFill>
+                            <a:srgbClr val="1A1A1A"/>
+                          </a:solidFill>
+                          <a:latin typeface="Arial"/>
+                          <a:cs typeface="Arial"/>
+                          <a:ea typeface="Arial"/>
+                        </a:rPr>
+                        <a:t>0.92</a:t>
+                      </a:r>
+                    </a:p>
+                  </a:txBody>
+                  <a:tcPr anchor="ctr">
+                    <a:solidFill>
+                      <a:srgbClr val="E4ECF7"/>
+                    </a:solidFill>
+                  </a:tcPr>
+                </a:tc>
+                <a:tc>
+                  <a:txBody>
+                    <a:bodyPr wrap="square"/>
+                    <a:lstStyle/>
+                    <a:p>
+                      <a:pPr algn="ctr" marL="0" indent="0">
+                        <a:spcAft>
+                          <a:spcPts val="0"/>
+                        </a:spcAft>
+                        <a:buNone/>
+                      </a:pPr>
+                      <a:r>
+                        <a:rPr sz="1200" b="0" i="0">
+                          <a:solidFill>
+                            <a:srgbClr val="1A1A1A"/>
+                          </a:solidFill>
+                          <a:latin typeface="Arial"/>
+                          <a:cs typeface="Arial"/>
+                          <a:ea typeface="Arial"/>
+                        </a:rPr>
+                        <a:t>27.3</a:t>
+                      </a:r>
+                    </a:p>
+                  </a:txBody>
+                  <a:tcPr anchor="ctr">
+                    <a:solidFill>
+                      <a:srgbClr val="E4ECF7"/>
+                    </a:solidFill>
+                  </a:tcPr>
+                </a:tc>
+              </a:tr>
+              <a:tr h="347472">
+                <a:tc>
+                  <a:txBody>
+                    <a:bodyPr wrap="square"/>
+                    <a:lstStyle/>
+                    <a:p>
+                      <a:pPr algn="l" marL="0" indent="0">
+                        <a:spcAft>
+                          <a:spcPts val="0"/>
+                        </a:spcAft>
+                        <a:buNone/>
+                      </a:pPr>
+                      <a:r>
+                        <a:rPr sz="1200" b="0" i="0">
+                          <a:solidFill>
+                            <a:srgbClr val="1A1A1A"/>
+                          </a:solidFill>
+                          <a:latin typeface="Arial"/>
+                          <a:cs typeface="Arial"/>
+                          <a:ea typeface="Arial"/>
+                        </a:rPr>
+                        <a:t>Eligible links</a:t>
+                      </a:r>
+                    </a:p>
+                  </a:txBody>
+                  <a:tcPr anchor="ctr">
+                    <a:solidFill>
+                      <a:srgbClr val="FFFFFF"/>
+                    </a:solidFill>
+                  </a:tcPr>
+                </a:tc>
+                <a:tc gridSpan="4">
+                  <a:txBody>
+                    <a:bodyPr wrap="square"/>
+                    <a:lstStyle/>
+                    <a:p>
+                      <a:pPr algn="ctr" marL="0" indent="0">
+                        <a:spcAft>
+                          <a:spcPts val="0"/>
+                        </a:spcAft>
+                        <a:buNone/>
+                      </a:pPr>
+                      <a:r>
+                        <a:rPr sz="1200" b="0" i="0">
+                          <a:solidFill>
+                            <a:srgbClr val="1A1A1A"/>
+                          </a:solidFill>
+                          <a:latin typeface="Arial"/>
+                          <a:cs typeface="Arial"/>
+                          <a:ea typeface="Arial"/>
+                        </a:rPr>
+                        <a:t>3.96 / 5.14 / 4.65</a:t>
+                      </a:r>
+                    </a:p>
+                  </a:txBody>
+                  <a:tcPr anchor="ctr">
+                    <a:solidFill>
+                      <a:srgbClr val="FFFFFF"/>
+                    </a:solidFill>
+                  </a:tcPr>
+                </a:tc>
+                <a:tc hMerge="1">
+                  <a:txBody>
+                    <a:bodyPr/>
+                    <a:lstStyle/>
+                    <a:p/>
+                  </a:txBody>
+                  <a:tcPr/>
+                </a:tc>
+                <a:tc hMerge="1">
+                  <a:txBody>
+                    <a:bodyPr/>
+                    <a:lstStyle/>
+                    <a:p/>
+                  </a:txBody>
+                  <a:tcPr/>
+                </a:tc>
+                <a:tc hMerge="1">
+                  <a:txBody>
+                    <a:bodyPr/>
+                    <a:lstStyle/>
+                    <a:p/>
+                  </a:txBody>
+                  <a:tcPr/>
+                </a:tc>
+              </a:tr>
+            </a:tbl>
+          </a:graphicData>
+        </a:graphic>
+      </p:graphicFrame>
+      <p:sp>
+        <p:nvSpPr>
+          <p:cNvPr id="11" name="LIVE facts"/>
+          <p:cNvSpPr txBox="1"/>
+          <p:nvPr/>
+        </p:nvSpPr>
+        <p:spPr>
+          <a:xfrm>
+            <a:off x="6583680" y="3931920"/>
+            <a:ext cx="5715000" cy="1051560"/>
+          </a:xfrm>
+          <a:prstGeom prst="rect">
+            <a:avLst/>
+          </a:prstGeom>
+          <a:noFill/>
+        </p:spPr>
+        <p:txBody>
+          <a:bodyPr wrap="square" lIns="36576" rIns="36576" tIns="36576" bIns="36576" anchor="t"/>
+          <a:lstStyle/>
+          <a:p>
+            <a:pPr algn="l" marL="274320" indent="-228600">
+              <a:spcAft>
+                <a:spcPts val="300"/>
+              </a:spcAft>
+              <a:buFont typeface="Arial"/>
+              <a:buChar char="•"/>
+            </a:pPr>
+            <a:r>
+              <a:rPr sz="1200" b="0" i="0">
+                <a:solidFill>
+                  <a:srgbClr val="1A1A1A"/>
+                </a:solidFill>
+                <a:latin typeface="Arial"/>
+                <a:cs typeface="Arial"/>
+                <a:ea typeface="Arial"/>
+              </a:rPr>
+              <a:t>117 forecasts scored (39 per horizon), 0 pending, 0 late; lower MAE than persistence at all three horizons. Eligible-links row: n = 30 per horizon.</a:t>
+            </a:r>
+          </a:p>
+          <a:p>
+            <a:pPr algn="l" marL="274320" indent="-228600">
+              <a:spcAft>
+                <a:spcPts val="300"/>
+              </a:spcAft>
+              <a:buFont typeface="Arial"/>
+              <a:buChar char="•"/>
+            </a:pPr>
+            <a:r>
+              <a:rPr sz="1200" b="0" i="0">
+                <a:solidFill>
+                  <a:srgbClr val="1A1A1A"/>
+                </a:solidFill>
+                <a:latin typeface="Arial"/>
+                <a:cs typeface="Arial"/>
+                <a:ea typeface="Arial"/>
+              </a:rPr>
+              <a:t>3 origins: 13:40, 14:55, 16:05 UTC; data age at issue 148 / 89 / 104 min (mean 114); 13 of 16 links each, 3 withheld for missing recent records.</a:t>
+            </a:r>
+          </a:p>
+        </p:txBody>
+      </p:sp>
+      <p:sp>
+        <p:nvSpPr>
+          <p:cNvPr id="12" name="LIVE caveats"/>
+          <p:cNvSpPr txBox="1"/>
+          <p:nvPr/>
+        </p:nvSpPr>
+        <p:spPr>
+          <a:xfrm>
+            <a:off x="6583680" y="5029200"/>
+            <a:ext cx="5715000" cy="1371600"/>
+          </a:xfrm>
+          <a:prstGeom prst="rect">
+            <a:avLst/>
+          </a:prstGeom>
+          <a:noFill/>
+        </p:spPr>
+        <p:txBody>
+          <a:bodyPr wrap="square" lIns="36576" rIns="36576" tIns="36576" bIns="36576" anchor="t"/>
+          <a:lstStyle/>
+          <a:p>
+            <a:pPr algn="l" marL="274320" indent="-228600">
+              <a:spcAft>
+                <a:spcPts val="300"/>
+              </a:spcAft>
+              <a:buFont typeface="Arial"/>
+              <a:buChar char="•"/>
+            </a:pPr>
+            <a:r>
+              <a:rPr sz="1200" b="1" i="0">
+                <a:solidFill>
+                  <a:srgbClr val="1A1A1A"/>
+                </a:solidFill>
+                <a:latin typeface="Arial"/>
+                <a:cs typeface="Arial"/>
+                <a:ea typeface="Arial"/>
+              </a:rPr>
+              <a:t>A forecast at the feed's own latency of bins it had not yet published, with its data age; not a real-time forecast.</a:t>
+            </a:r>
+          </a:p>
+          <a:p>
+            <a:pPr algn="l" marL="274320" indent="-228600">
+              <a:spcAft>
+                <a:spcPts val="300"/>
+              </a:spcAft>
+              <a:buFont typeface="Arial"/>
+              <a:buChar char="•"/>
+            </a:pPr>
+            <a:r>
+              <a:rPr sz="1200" b="1" i="0">
+                <a:solidFill>
+                  <a:srgbClr val="1A1A1A"/>
+                </a:solidFill>
+                <a:latin typeface="Arial"/>
+                <a:cs typeface="Arial"/>
+                <a:ea typeface="Arial"/>
+              </a:rPr>
+              <a:t>One afternoon, three origins, not a second test set.</a:t>
+            </a:r>
+          </a:p>
+          <a:p>
+            <a:pPr algn="l" marL="274320" indent="-228600">
+              <a:spcAft>
+                <a:spcPts val="300"/>
+              </a:spcAft>
+              <a:buFont typeface="Arial"/>
+              <a:buChar char="•"/>
+            </a:pPr>
+            <a:r>
+              <a:rPr sz="1200" b="1" i="0">
+                <a:solidFill>
+                  <a:srgbClr val="1A1A1A"/>
+                </a:solidFill>
+                <a:latin typeface="Arial"/>
+                <a:cs typeface="Arial"/>
+                <a:ea typeface="Arial"/>
+              </a:rPr>
+              <a:t>The wall-clock protocol stays NOT RUN: on 28 and 29 Oct the feed ran 1.7–4.3 h behind and every link was withheld.</a:t>
+            </a:r>
+          </a:p>
+        </p:txBody>
+      </p:sp>
+      <p:sp>
+        <p:nvSpPr>
+          <p:cNvPr id="13" name="TextBox 12"/>
+          <p:cNvSpPr txBox="1"/>
+          <p:nvPr/>
+        </p:nvSpPr>
+        <p:spPr>
+          <a:xfrm>
+            <a:off x="6583680" y="6419088"/>
+            <a:ext cx="5715000" cy="274320"/>
+          </a:xfrm>
+          <a:prstGeom prst="rect">
+            <a:avLst/>
+          </a:prstGeom>
+          <a:noFill/>
+        </p:spPr>
+        <p:txBody>
+          <a:bodyPr wrap="square" lIns="18288" rIns="18288" tIns="18288" bIns="18288" anchor="t"/>
+          <a:lstStyle/>
+          <a:p>
+            <a:pPr algn="l" marL="0" indent="0">
+              <a:spcAft>
+                <a:spcPts val="0"/>
+              </a:spcAft>
+              <a:buNone/>
+            </a:pPr>
+            <a:r>
+              <a:rPr sz="1000" b="0" i="0">
+                <a:solidFill>
+                  <a:srgbClr val="555F6B"/>
+                </a:solidFill>
+                <a:latin typeface="Arial"/>
+                <a:cs typeface="Arial"/>
+                <a:ea typeface="Arial"/>
+              </a:rPr>
+              <a:t>Source: reports/experiments/live_metrics.csv, artifacts/live/scored.csv (claims C50–C52)</a:t>
+            </a:r>
+          </a:p>
+        </p:txBody>
+      </p:sp>
+    </p:spTree>
+    <p:extLst>
+      <p:ext uri="{BB962C8B-B14F-4D97-AF65-F5344CB8AC3E}">
+        <p14:creationId xmlns:p14="http://schemas.microsoft.com/office/powerpoint/2010/main" val="3187296211"/>
+      </p:ext>
+    </p:extLst>
+  </p:cSld>
+  <p:clrMapOvr>
+    <a:masterClrMapping/>
+  </p:clrMapOvr>
+</p:sld>
+</file>
+
+<file path=ppt/slides/slide24.xml><?xml version="1.0" encoding="utf-8"?>
+<p:sld xmlns:a="http://schemas.openxmlformats.org/drawingml/2006/main" xmlns:r="http://schemas.openxmlformats.org/officeDocument/2006/relationships" xmlns:p="http://schemas.openxmlformats.org/presentationml/2006/main">
+  <p:cSld>
+    <p:spTree>
+      <p:nvGrpSpPr>
+        <p:cNvPr id="1" name=""/>
+        <p:cNvGrpSpPr/>
+        <p:nvPr/>
+      </p:nvGrpSpPr>
+      <p:grpSpPr>
+        <a:xfrm>
+          <a:off x="0" y="0"/>
+          <a:ext cx="0" cy="0"/>
+          <a:chOff x="0" y="0"/>
+          <a:chExt cx="0" cy="0"/>
+        </a:xfrm>
+      </p:grpSpPr>
+      <p:sp>
+        <p:nvSpPr>
+          <p:cNvPr id="2" name="Title 1"/>
+          <p:cNvSpPr>
+            <a:spLocks noGrp="1"/>
+          </p:cNvSpPr>
+          <p:nvPr>
+            <p:ph type="title"/>
+          </p:nvPr>
+        </p:nvSpPr>
+        <p:spPr>
+          <a:xfrm>
+            <a:off x="0" y="0"/>
+            <a:ext cx="12801600" cy="1512146"/>
+          </a:xfrm>
+          <a:solidFill>
+            <a:srgbClr val="558ED5"/>
+          </a:solidFill>
+        </p:spPr>
+        <p:txBody>
+          <a:bodyPr>
+            <a:normAutofit/>
+          </a:bodyPr>
+          <a:lstStyle/>
+          <a:p>
+            <a:r>
+              <a:rPr lang="en-US" sz="3600" b="1" dirty="0">
+                <a:solidFill>
+                  <a:schemeClr val="bg1"/>
+                </a:solidFill>
+                <a:latin typeface="Arial" panose="020B0604020202020204" pitchFamily="34" charset="0"/>
+                <a:cs typeface="Arial" panose="020B0604020202020204" pitchFamily="34" charset="0"/>
+              </a:rPr>
+              <a:t>9. RESULTS &amp; OUTCOMES (CONTD.)</a:t>
+            </a:r>
+          </a:p>
+        </p:txBody>
+      </p:sp>
+      <p:sp>
+        <p:nvSpPr>
+          <p:cNvPr id="4" name="Slide Number Placeholder 3"/>
+          <p:cNvSpPr>
+            <a:spLocks noGrp="1"/>
+          </p:cNvSpPr>
+          <p:nvPr>
+            <p:ph type="sldNum" sz="quarter" idx="12"/>
+          </p:nvPr>
+        </p:nvSpPr>
+        <p:spPr/>
+        <p:txBody>
+          <a:bodyPr/>
+          <a:lstStyle/>
+          <a:p>
+            <a:fld id="{C02A2637-A5A3-49FA-B214-6E67543099EF}" type="slidenum">
+              <a:rPr lang="en-US" smtClean="0"/>
+              <a:t>24</a:t>
             </a:fld>
             <a:endParaRPr lang="en-US"/>
           </a:p>
@@ -16208,7 +17449,7 @@
                 <a:cs typeface="Arial"/>
                 <a:ea typeface="Arial"/>
               </a:rPr>
-              <a:t>LIVE observational mode is built but not yet run on the public feed</a:t>
+              <a:t>LIVE: one afternoon at the feed's ~2 h latency; the wall-clock protocol stayed NOT RUN (feed 1.7–4.3 h behind)</a:t>
             </a:r>
           </a:p>
           <a:p>
@@ -16453,7 +17694,7 @@
                 <a:cs typeface="Arial"/>
                 <a:ea typeface="Arial"/>
               </a:rPr>
-              <a:t>Next: run LIVE mode on the public feed and score its saved forecasts</a:t>
+              <a:t>Next: repeat the LIVE run over more days; wall-clock forecasts need a fresher feed</a:t>
             </a:r>
           </a:p>
           <a:p>
@@ -16511,7 +17752,7 @@
 </p:sld>
 </file>
 
-<file path=ppt/slides/slide24.xml><?xml version="1.0" encoding="utf-8"?>
+<file path=ppt/slides/slide25.xml><?xml version="1.0" encoding="utf-8"?>
 <p:sld xmlns:a="http://schemas.openxmlformats.org/drawingml/2006/main" xmlns:r="http://schemas.openxmlformats.org/officeDocument/2006/relationships" xmlns:p="http://schemas.openxmlformats.org/presentationml/2006/main">
   <p:cSld>
     <p:spTree>
@@ -16611,7 +17852,7 @@
           <a:p>
             <a:fld id="{C02A2637-A5A3-49FA-B214-6E67543099EF}" type="slidenum">
               <a:rPr lang="en-US" smtClean="0"/>
-              <a:t>24</a:t>
+              <a:t>25</a:t>
             </a:fld>
             <a:endParaRPr lang="en-US"/>
           </a:p>
@@ -16879,7 +18120,7 @@
 </p:sld>
 </file>
 
-<file path=ppt/slides/slide25.xml><?xml version="1.0" encoding="utf-8"?>
+<file path=ppt/slides/slide26.xml><?xml version="1.0" encoding="utf-8"?>
 <p:sld xmlns:a="http://schemas.openxmlformats.org/drawingml/2006/main" xmlns:r="http://schemas.openxmlformats.org/officeDocument/2006/relationships" xmlns:p="http://schemas.openxmlformats.org/presentationml/2006/main">
   <p:cSld>
     <p:spTree>
@@ -16951,7 +18192,7 @@
           <a:p>
             <a:fld id="{C02A2637-A5A3-49FA-B214-6E67543099EF}" type="slidenum">
               <a:rPr lang="en-US" smtClean="0"/>
-              <a:t>25</a:t>
+              <a:t>26</a:t>
             </a:fld>
             <a:endParaRPr lang="en-US"/>
           </a:p>
